--- a/Zygo Software개발.pptx
+++ b/Zygo Software개발.pptx
@@ -74,6 +74,7 @@
     <p:sldId id="321" r:id="rId68"/>
     <p:sldId id="323" r:id="rId69"/>
     <p:sldId id="324" r:id="rId70"/>
+    <p:sldId id="325" r:id="rId71"/>
   </p:sldIdLst>
   <p:sldSz cx="12192000" cy="6858000"/>
   <p:notesSz cx="6797675" cy="9874250"/>
@@ -311,7 +312,7 @@
           <a:p>
             <a:fld id="{5E2EC1FB-DDCB-48DE-AA18-776941098B20}" type="datetimeFigureOut">
               <a:rPr lang="ko-KR" altLang="en-US" smtClean="0"/>
-              <a:t>2026-03-09</a:t>
+              <a:t>2026-03-10</a:t>
             </a:fld>
             <a:endParaRPr lang="ko-KR" altLang="en-US"/>
           </a:p>
@@ -481,7 +482,7 @@
           <a:p>
             <a:fld id="{5E2EC1FB-DDCB-48DE-AA18-776941098B20}" type="datetimeFigureOut">
               <a:rPr lang="ko-KR" altLang="en-US" smtClean="0"/>
-              <a:t>2026-03-09</a:t>
+              <a:t>2026-03-10</a:t>
             </a:fld>
             <a:endParaRPr lang="ko-KR" altLang="en-US"/>
           </a:p>
@@ -661,7 +662,7 @@
           <a:p>
             <a:fld id="{5E2EC1FB-DDCB-48DE-AA18-776941098B20}" type="datetimeFigureOut">
               <a:rPr lang="ko-KR" altLang="en-US" smtClean="0"/>
-              <a:t>2026-03-09</a:t>
+              <a:t>2026-03-10</a:t>
             </a:fld>
             <a:endParaRPr lang="ko-KR" altLang="en-US"/>
           </a:p>
@@ -831,7 +832,7 @@
           <a:p>
             <a:fld id="{5E2EC1FB-DDCB-48DE-AA18-776941098B20}" type="datetimeFigureOut">
               <a:rPr lang="ko-KR" altLang="en-US" smtClean="0"/>
-              <a:t>2026-03-09</a:t>
+              <a:t>2026-03-10</a:t>
             </a:fld>
             <a:endParaRPr lang="ko-KR" altLang="en-US"/>
           </a:p>
@@ -1077,7 +1078,7 @@
           <a:p>
             <a:fld id="{5E2EC1FB-DDCB-48DE-AA18-776941098B20}" type="datetimeFigureOut">
               <a:rPr lang="ko-KR" altLang="en-US" smtClean="0"/>
-              <a:t>2026-03-09</a:t>
+              <a:t>2026-03-10</a:t>
             </a:fld>
             <a:endParaRPr lang="ko-KR" altLang="en-US"/>
           </a:p>
@@ -1309,7 +1310,7 @@
           <a:p>
             <a:fld id="{5E2EC1FB-DDCB-48DE-AA18-776941098B20}" type="datetimeFigureOut">
               <a:rPr lang="ko-KR" altLang="en-US" smtClean="0"/>
-              <a:t>2026-03-09</a:t>
+              <a:t>2026-03-10</a:t>
             </a:fld>
             <a:endParaRPr lang="ko-KR" altLang="en-US"/>
           </a:p>
@@ -1676,7 +1677,7 @@
           <a:p>
             <a:fld id="{5E2EC1FB-DDCB-48DE-AA18-776941098B20}" type="datetimeFigureOut">
               <a:rPr lang="ko-KR" altLang="en-US" smtClean="0"/>
-              <a:t>2026-03-09</a:t>
+              <a:t>2026-03-10</a:t>
             </a:fld>
             <a:endParaRPr lang="ko-KR" altLang="en-US"/>
           </a:p>
@@ -1794,7 +1795,7 @@
           <a:p>
             <a:fld id="{5E2EC1FB-DDCB-48DE-AA18-776941098B20}" type="datetimeFigureOut">
               <a:rPr lang="ko-KR" altLang="en-US" smtClean="0"/>
-              <a:t>2026-03-09</a:t>
+              <a:t>2026-03-10</a:t>
             </a:fld>
             <a:endParaRPr lang="ko-KR" altLang="en-US"/>
           </a:p>
@@ -1889,7 +1890,7 @@
           <a:p>
             <a:fld id="{5E2EC1FB-DDCB-48DE-AA18-776941098B20}" type="datetimeFigureOut">
               <a:rPr lang="ko-KR" altLang="en-US" smtClean="0"/>
-              <a:t>2026-03-09</a:t>
+              <a:t>2026-03-10</a:t>
             </a:fld>
             <a:endParaRPr lang="ko-KR" altLang="en-US"/>
           </a:p>
@@ -2166,7 +2167,7 @@
           <a:p>
             <a:fld id="{5E2EC1FB-DDCB-48DE-AA18-776941098B20}" type="datetimeFigureOut">
               <a:rPr lang="ko-KR" altLang="en-US" smtClean="0"/>
-              <a:t>2026-03-09</a:t>
+              <a:t>2026-03-10</a:t>
             </a:fld>
             <a:endParaRPr lang="ko-KR" altLang="en-US"/>
           </a:p>
@@ -2419,7 +2420,7 @@
           <a:p>
             <a:fld id="{5E2EC1FB-DDCB-48DE-AA18-776941098B20}" type="datetimeFigureOut">
               <a:rPr lang="ko-KR" altLang="en-US" smtClean="0"/>
-              <a:t>2026-03-09</a:t>
+              <a:t>2026-03-10</a:t>
             </a:fld>
             <a:endParaRPr lang="ko-KR" altLang="en-US"/>
           </a:p>
@@ -2632,7 +2633,7 @@
           <a:p>
             <a:fld id="{5E2EC1FB-DDCB-48DE-AA18-776941098B20}" type="datetimeFigureOut">
               <a:rPr lang="ko-KR" altLang="en-US" smtClean="0"/>
-              <a:t>2026-03-09</a:t>
+              <a:t>2026-03-10</a:t>
             </a:fld>
             <a:endParaRPr lang="ko-KR" altLang="en-US"/>
           </a:p>
@@ -25428,6 +25429,748 @@
 </p:sld>
 </file>
 
+<file path=ppt/slides/slide70.xml><?xml version="1.0" encoding="utf-8"?>
+<p:sld xmlns:a="http://schemas.openxmlformats.org/drawingml/2006/main" xmlns:r="http://schemas.openxmlformats.org/officeDocument/2006/relationships" xmlns:p="http://schemas.openxmlformats.org/presentationml/2006/main">
+  <p:cSld>
+    <p:spTree>
+      <p:nvGrpSpPr>
+        <p:cNvPr id="1" name=""/>
+        <p:cNvGrpSpPr/>
+        <p:nvPr/>
+      </p:nvGrpSpPr>
+      <p:grpSpPr>
+        <a:xfrm>
+          <a:off x="0" y="0"/>
+          <a:ext cx="0" cy="0"/>
+          <a:chOff x="0" y="0"/>
+          <a:chExt cx="0" cy="0"/>
+        </a:xfrm>
+      </p:grpSpPr>
+      <p:sp>
+        <p:nvSpPr>
+          <p:cNvPr id="2" name="제목 1"/>
+          <p:cNvSpPr>
+            <a:spLocks noGrp="1"/>
+          </p:cNvSpPr>
+          <p:nvPr>
+            <p:ph type="title"/>
+          </p:nvPr>
+        </p:nvSpPr>
+        <p:spPr/>
+        <p:txBody>
+          <a:bodyPr/>
+          <a:lstStyle/>
+          <a:p>
+            <a:r>
+              <a:rPr lang="en-US" altLang="ko-KR" dirty="0" smtClean="0"/>
+              <a:t>OpenGL Event </a:t>
+            </a:r>
+            <a:r>
+              <a:rPr lang="ko-KR" altLang="en-US" dirty="0" smtClean="0"/>
+              <a:t>처리</a:t>
+            </a:r>
+            <a:endParaRPr lang="ko-KR" altLang="en-US" dirty="0"/>
+          </a:p>
+        </p:txBody>
+      </p:sp>
+      <p:sp>
+        <p:nvSpPr>
+          <p:cNvPr id="3" name="내용 개체 틀 2"/>
+          <p:cNvSpPr>
+            <a:spLocks noGrp="1"/>
+          </p:cNvSpPr>
+          <p:nvPr>
+            <p:ph idx="1"/>
+          </p:nvPr>
+        </p:nvSpPr>
+        <p:spPr/>
+        <p:txBody>
+          <a:bodyPr>
+            <a:normAutofit fontScale="77500" lnSpcReduction="20000"/>
+          </a:bodyPr>
+          <a:lstStyle/>
+          <a:p>
+            <a:r>
+              <a:rPr lang="en-US" altLang="ko-KR" dirty="0" err="1"/>
+              <a:t>m_pView</a:t>
+            </a:r>
+            <a:r>
+              <a:rPr lang="en-US" altLang="ko-KR" dirty="0"/>
+              <a:t> = new </a:t>
+            </a:r>
+            <a:r>
+              <a:rPr lang="en-US" altLang="ko-KR" dirty="0" err="1"/>
+              <a:t>COpenGLViewEx</a:t>
+            </a:r>
+            <a:r>
+              <a:rPr lang="en-US" altLang="ko-KR" dirty="0"/>
+              <a:t>();</a:t>
+            </a:r>
+            <a:endParaRPr lang="en-US" altLang="ko-KR" dirty="0" smtClean="0"/>
+          </a:p>
+          <a:p>
+            <a:pPr lvl="1"/>
+            <a:r>
+              <a:rPr lang="en-US" altLang="ko-KR" dirty="0" smtClean="0"/>
+              <a:t>void </a:t>
+            </a:r>
+            <a:r>
+              <a:rPr lang="en-US" altLang="ko-KR" dirty="0" err="1"/>
+              <a:t>COpenGLView</a:t>
+            </a:r>
+            <a:r>
+              <a:rPr lang="en-US" altLang="ko-KR" dirty="0"/>
+              <a:t>::</a:t>
+            </a:r>
+            <a:r>
+              <a:rPr lang="en-US" altLang="ko-KR" dirty="0" err="1"/>
+              <a:t>GLRenderScene</a:t>
+            </a:r>
+            <a:r>
+              <a:rPr lang="en-US" altLang="ko-KR" dirty="0"/>
+              <a:t>(</a:t>
+            </a:r>
+            <a:r>
+              <a:rPr lang="en-US" altLang="ko-KR" i="1" dirty="0"/>
+              <a:t>UINT</a:t>
+            </a:r>
+            <a:r>
+              <a:rPr lang="en-US" altLang="ko-KR" dirty="0"/>
+              <a:t> </a:t>
+            </a:r>
+            <a:r>
+              <a:rPr lang="en-US" altLang="ko-KR" dirty="0" err="1" smtClean="0"/>
+              <a:t>nAction</a:t>
+            </a:r>
+            <a:r>
+              <a:rPr lang="en-US" altLang="ko-KR" dirty="0" smtClean="0"/>
+              <a:t>=0, </a:t>
+            </a:r>
+            <a:r>
+              <a:rPr lang="en-US" altLang="ko-KR" dirty="0" err="1"/>
+              <a:t>int</a:t>
+            </a:r>
+            <a:r>
+              <a:rPr lang="en-US" altLang="ko-KR" dirty="0"/>
+              <a:t> </a:t>
+            </a:r>
+            <a:r>
+              <a:rPr lang="en-US" altLang="ko-KR" dirty="0" err="1" smtClean="0"/>
+              <a:t>nKey</a:t>
+            </a:r>
+            <a:r>
+              <a:rPr lang="en-US" altLang="ko-KR" dirty="0" smtClean="0"/>
+              <a:t>=0)</a:t>
+            </a:r>
+            <a:endParaRPr lang="en-US" altLang="ko-KR" b="1" dirty="0" smtClean="0"/>
+          </a:p>
+          <a:p>
+            <a:pPr lvl="2"/>
+            <a:r>
+              <a:rPr lang="en-US" altLang="ko-KR" b="1" dirty="0" err="1" smtClean="0"/>
+              <a:t>m_pParentWnd</a:t>
+            </a:r>
+            <a:r>
+              <a:rPr lang="en-US" altLang="ko-KR" b="1" dirty="0" smtClean="0"/>
+              <a:t>-</a:t>
+            </a:r>
+            <a:r>
+              <a:rPr lang="en-US" altLang="ko-KR" b="1" dirty="0"/>
+              <a:t>&gt;</a:t>
+            </a:r>
+            <a:r>
+              <a:rPr lang="en-US" altLang="ko-KR" b="1" i="1" dirty="0" err="1"/>
+              <a:t>SendMessage</a:t>
+            </a:r>
+            <a:r>
+              <a:rPr lang="en-US" altLang="ko-KR" b="1" dirty="0"/>
+              <a:t>(</a:t>
+            </a:r>
+            <a:r>
+              <a:rPr lang="en-US" altLang="ko-KR" b="1" dirty="0">
+                <a:solidFill>
+                  <a:srgbClr val="00B0F0"/>
+                </a:solidFill>
+              </a:rPr>
+              <a:t>WM_USER_RENDER</a:t>
+            </a:r>
+            <a:r>
+              <a:rPr lang="en-US" altLang="ko-KR" b="1" dirty="0"/>
+              <a:t>, </a:t>
+            </a:r>
+            <a:r>
+              <a:rPr lang="en-US" altLang="ko-KR" b="1" dirty="0" err="1"/>
+              <a:t>m_nHandleID</a:t>
+            </a:r>
+            <a:r>
+              <a:rPr lang="en-US" altLang="ko-KR" b="1" dirty="0"/>
+              <a:t>, </a:t>
+            </a:r>
+            <a:r>
+              <a:rPr lang="en-US" altLang="ko-KR" b="1" dirty="0" err="1"/>
+              <a:t>nAction</a:t>
+            </a:r>
+            <a:r>
+              <a:rPr lang="en-US" altLang="ko-KR" b="1" dirty="0" smtClean="0"/>
+              <a:t>);</a:t>
+            </a:r>
+          </a:p>
+          <a:p>
+            <a:pPr lvl="3"/>
+            <a:r>
+              <a:rPr lang="en-US" altLang="ko-KR" b="1" dirty="0" err="1"/>
+              <a:t>m_nHandleID</a:t>
+            </a:r>
+            <a:r>
+              <a:rPr lang="en-US" altLang="ko-KR" b="1" dirty="0"/>
+              <a:t> </a:t>
+            </a:r>
+            <a:r>
+              <a:rPr lang="en-US" altLang="ko-KR" b="1" dirty="0" smtClean="0"/>
+              <a:t>: </a:t>
+            </a:r>
+            <a:r>
+              <a:rPr lang="en-US" altLang="ko-KR" dirty="0" smtClean="0"/>
+              <a:t>IDC_STATIC_VIEW</a:t>
+            </a:r>
+          </a:p>
+          <a:p>
+            <a:pPr lvl="3"/>
+            <a:r>
+              <a:rPr lang="en-US" altLang="ko-KR" b="1" dirty="0" err="1" smtClean="0"/>
+              <a:t>nAction</a:t>
+            </a:r>
+            <a:r>
+              <a:rPr lang="en-US" altLang="ko-KR" b="1" dirty="0" smtClean="0"/>
+              <a:t> : </a:t>
+            </a:r>
+          </a:p>
+          <a:p>
+            <a:pPr lvl="4"/>
+            <a:r>
+              <a:rPr lang="en-US" altLang="ko-KR" dirty="0" smtClean="0"/>
+              <a:t>WM_MOUSEWHEEL, WM_PAINT, WM_FIT_TO_SCREEN, </a:t>
+            </a:r>
+          </a:p>
+          <a:p>
+            <a:pPr lvl="4"/>
+            <a:r>
+              <a:rPr lang="en-US" altLang="ko-KR" dirty="0"/>
+              <a:t>WM_LBUTTONDOWN, </a:t>
+            </a:r>
+            <a:r>
+              <a:rPr lang="en-US" altLang="ko-KR" dirty="0" smtClean="0"/>
+              <a:t>WM_MOUSEMOVE, WM_LBUTTONUP,</a:t>
+            </a:r>
+          </a:p>
+          <a:p>
+            <a:pPr lvl="4"/>
+            <a:r>
+              <a:rPr lang="en-US" altLang="ko-KR" dirty="0" smtClean="0"/>
+              <a:t>WM_MBUTTONDOWN, WM_MBUTTONUP, </a:t>
+            </a:r>
+          </a:p>
+          <a:p>
+            <a:pPr lvl="4"/>
+            <a:r>
+              <a:rPr lang="en-US" altLang="ko-KR" dirty="0" smtClean="0"/>
+              <a:t>WM_RBUTTONDOWN</a:t>
+            </a:r>
+            <a:r>
+              <a:rPr lang="en-US" altLang="ko-KR" dirty="0"/>
+              <a:t>, </a:t>
+            </a:r>
+            <a:r>
+              <a:rPr lang="en-US" altLang="ko-KR" dirty="0" smtClean="0"/>
+              <a:t>WM_RBUTTONUP</a:t>
+            </a:r>
+            <a:endParaRPr lang="en-US" altLang="ko-KR" i="1" dirty="0" smtClean="0"/>
+          </a:p>
+          <a:p>
+            <a:pPr lvl="2"/>
+            <a:r>
+              <a:rPr lang="en-US" altLang="ko-KR" i="1" dirty="0" smtClean="0"/>
+              <a:t>LRESULT</a:t>
+            </a:r>
+            <a:r>
+              <a:rPr lang="en-US" altLang="ko-KR" dirty="0" smtClean="0"/>
+              <a:t> </a:t>
+            </a:r>
+            <a:r>
+              <a:rPr lang="en-US" altLang="ko-KR" dirty="0"/>
+              <a:t>CDlg3DViewer::</a:t>
+            </a:r>
+            <a:r>
+              <a:rPr lang="en-US" altLang="ko-KR" dirty="0" err="1"/>
+              <a:t>OnGLRender</a:t>
+            </a:r>
+            <a:r>
+              <a:rPr lang="en-US" altLang="ko-KR" dirty="0"/>
+              <a:t>(</a:t>
+            </a:r>
+            <a:r>
+              <a:rPr lang="en-US" altLang="ko-KR" i="1" dirty="0"/>
+              <a:t>WPARAM</a:t>
+            </a:r>
+            <a:r>
+              <a:rPr lang="en-US" altLang="ko-KR" dirty="0"/>
+              <a:t> </a:t>
+            </a:r>
+            <a:r>
+              <a:rPr lang="en-US" altLang="ko-KR" dirty="0" err="1"/>
+              <a:t>wParam</a:t>
+            </a:r>
+            <a:r>
+              <a:rPr lang="en-US" altLang="ko-KR" dirty="0"/>
+              <a:t>, </a:t>
+            </a:r>
+            <a:r>
+              <a:rPr lang="en-US" altLang="ko-KR" i="1" dirty="0"/>
+              <a:t>LPARAM</a:t>
+            </a:r>
+            <a:r>
+              <a:rPr lang="en-US" altLang="ko-KR" dirty="0"/>
+              <a:t> </a:t>
+            </a:r>
+            <a:r>
+              <a:rPr lang="en-US" altLang="ko-KR" dirty="0" err="1"/>
+              <a:t>lParam</a:t>
+            </a:r>
+            <a:r>
+              <a:rPr lang="en-US" altLang="ko-KR" dirty="0" smtClean="0"/>
+              <a:t>)</a:t>
+            </a:r>
+          </a:p>
+          <a:p>
+            <a:pPr lvl="3"/>
+            <a:r>
+              <a:rPr lang="en-US" altLang="ko-KR" sz="1400" dirty="0"/>
+              <a:t>if (</a:t>
+            </a:r>
+            <a:r>
+              <a:rPr lang="en-US" altLang="ko-KR" sz="1400" dirty="0" err="1"/>
+              <a:t>lParam</a:t>
+            </a:r>
+            <a:r>
+              <a:rPr lang="en-US" altLang="ko-KR" sz="1400" dirty="0"/>
+              <a:t> == </a:t>
+            </a:r>
+            <a:r>
+              <a:rPr lang="en-US" altLang="ko-KR" sz="1400" i="1" dirty="0"/>
+              <a:t>WM_LBUTTONDOWN</a:t>
+            </a:r>
+            <a:r>
+              <a:rPr lang="en-US" altLang="ko-KR" sz="1400" dirty="0" smtClean="0"/>
+              <a:t>)	</a:t>
+            </a:r>
+            <a:r>
+              <a:rPr lang="en-US" altLang="ko-KR" sz="1400" dirty="0"/>
+              <a:t> _</a:t>
+            </a:r>
+            <a:r>
+              <a:rPr lang="en-US" altLang="ko-KR" sz="1400" dirty="0" err="1"/>
+              <a:t>mouseDownPoint</a:t>
+            </a:r>
+            <a:r>
+              <a:rPr lang="en-US" altLang="ko-KR" sz="1400" dirty="0"/>
+              <a:t> = </a:t>
+            </a:r>
+            <a:r>
+              <a:rPr lang="en-US" altLang="ko-KR" sz="1400" dirty="0" err="1"/>
+              <a:t>m_pView</a:t>
+            </a:r>
+            <a:r>
+              <a:rPr lang="en-US" altLang="ko-KR" sz="1400" dirty="0"/>
+              <a:t>-&gt;</a:t>
+            </a:r>
+            <a:r>
+              <a:rPr lang="en-US" altLang="ko-KR" sz="1400" dirty="0" err="1"/>
+              <a:t>m_ptCurPos</a:t>
+            </a:r>
+            <a:r>
+              <a:rPr lang="en-US" altLang="ko-KR" sz="1400" dirty="0" smtClean="0"/>
+              <a:t>;</a:t>
+            </a:r>
+          </a:p>
+          <a:p>
+            <a:pPr lvl="3"/>
+            <a:r>
+              <a:rPr lang="en-US" altLang="ko-KR" sz="1400" dirty="0"/>
+              <a:t>else if (</a:t>
+            </a:r>
+            <a:r>
+              <a:rPr lang="en-US" altLang="ko-KR" sz="1400" dirty="0" err="1"/>
+              <a:t>lParam</a:t>
+            </a:r>
+            <a:r>
+              <a:rPr lang="en-US" altLang="ko-KR" sz="1400" dirty="0"/>
+              <a:t> == </a:t>
+            </a:r>
+            <a:r>
+              <a:rPr lang="en-US" altLang="ko-KR" sz="1400" i="1" dirty="0"/>
+              <a:t>WM_LBUTTONUP</a:t>
+            </a:r>
+            <a:r>
+              <a:rPr lang="en-US" altLang="ko-KR" sz="1400" dirty="0" smtClean="0"/>
+              <a:t>)</a:t>
+            </a:r>
+            <a:r>
+              <a:rPr lang="en-US" altLang="ko-KR" sz="1400" dirty="0"/>
+              <a:t> </a:t>
+            </a:r>
+            <a:r>
+              <a:rPr lang="en-US" altLang="ko-KR" sz="1400" dirty="0" smtClean="0"/>
+              <a:t>_</a:t>
+            </a:r>
+            <a:r>
+              <a:rPr lang="en-US" altLang="ko-KR" sz="1400" dirty="0" err="1"/>
+              <a:t>mouseDownPoint</a:t>
+            </a:r>
+            <a:r>
+              <a:rPr lang="en-US" altLang="ko-KR" sz="1400" dirty="0"/>
+              <a:t> = </a:t>
+            </a:r>
+            <a:r>
+              <a:rPr lang="en-US" altLang="ko-KR" sz="1400" i="1" dirty="0" err="1"/>
+              <a:t>CPoint</a:t>
+            </a:r>
+            <a:r>
+              <a:rPr lang="en-US" altLang="ko-KR" sz="1400" dirty="0"/>
+              <a:t>(0, 0</a:t>
+            </a:r>
+            <a:r>
+              <a:rPr lang="en-US" altLang="ko-KR" sz="1400" dirty="0" smtClean="0"/>
+              <a:t>);</a:t>
+            </a:r>
+          </a:p>
+          <a:p>
+            <a:pPr lvl="3"/>
+            <a:r>
+              <a:rPr lang="en-US" altLang="ko-KR" sz="1400" dirty="0"/>
+              <a:t>else if (</a:t>
+            </a:r>
+            <a:r>
+              <a:rPr lang="en-US" altLang="ko-KR" sz="1400" dirty="0" err="1"/>
+              <a:t>lParam</a:t>
+            </a:r>
+            <a:r>
+              <a:rPr lang="en-US" altLang="ko-KR" sz="1400" dirty="0"/>
+              <a:t> == </a:t>
+            </a:r>
+            <a:r>
+              <a:rPr lang="en-US" altLang="ko-KR" sz="1400" i="1" dirty="0"/>
+              <a:t>WM_RBUTTONDOWN</a:t>
+            </a:r>
+            <a:r>
+              <a:rPr lang="en-US" altLang="ko-KR" sz="1400" dirty="0" smtClean="0"/>
+              <a:t>) </a:t>
+            </a:r>
+            <a:r>
+              <a:rPr lang="en-US" altLang="ko-KR" sz="1400" dirty="0"/>
+              <a:t>_</a:t>
+            </a:r>
+            <a:r>
+              <a:rPr lang="en-US" altLang="ko-KR" sz="1400" dirty="0" err="1"/>
+              <a:t>mouseDownPoint</a:t>
+            </a:r>
+            <a:r>
+              <a:rPr lang="en-US" altLang="ko-KR" sz="1400" dirty="0"/>
+              <a:t> = </a:t>
+            </a:r>
+            <a:r>
+              <a:rPr lang="en-US" altLang="ko-KR" sz="1400" dirty="0" err="1"/>
+              <a:t>m_pView</a:t>
+            </a:r>
+            <a:r>
+              <a:rPr lang="en-US" altLang="ko-KR" sz="1400" dirty="0"/>
+              <a:t>-&gt;</a:t>
+            </a:r>
+            <a:r>
+              <a:rPr lang="en-US" altLang="ko-KR" sz="1400" dirty="0" err="1"/>
+              <a:t>m_ptCurPos</a:t>
+            </a:r>
+            <a:r>
+              <a:rPr lang="en-US" altLang="ko-KR" sz="1400" dirty="0" smtClean="0"/>
+              <a:t>;</a:t>
+            </a:r>
+          </a:p>
+          <a:p>
+            <a:pPr lvl="3"/>
+            <a:r>
+              <a:rPr lang="en-US" altLang="ko-KR" sz="1400" dirty="0"/>
+              <a:t>else if (</a:t>
+            </a:r>
+            <a:r>
+              <a:rPr lang="en-US" altLang="ko-KR" sz="1400" dirty="0" err="1"/>
+              <a:t>lParam</a:t>
+            </a:r>
+            <a:r>
+              <a:rPr lang="en-US" altLang="ko-KR" sz="1400" dirty="0"/>
+              <a:t> == </a:t>
+            </a:r>
+            <a:r>
+              <a:rPr lang="en-US" altLang="ko-KR" sz="1400" i="1" dirty="0"/>
+              <a:t>WM_RBUTTONUP</a:t>
+            </a:r>
+            <a:r>
+              <a:rPr lang="en-US" altLang="ko-KR" sz="1400" dirty="0" smtClean="0"/>
+              <a:t>) </a:t>
+            </a:r>
+            <a:r>
+              <a:rPr lang="en-US" altLang="ko-KR" sz="1400" dirty="0"/>
+              <a:t>_</a:t>
+            </a:r>
+            <a:r>
+              <a:rPr lang="en-US" altLang="ko-KR" sz="1400" dirty="0" err="1"/>
+              <a:t>mouseDownPoint</a:t>
+            </a:r>
+            <a:r>
+              <a:rPr lang="en-US" altLang="ko-KR" sz="1400" dirty="0"/>
+              <a:t> = </a:t>
+            </a:r>
+            <a:r>
+              <a:rPr lang="en-US" altLang="ko-KR" sz="1400" i="1" dirty="0" err="1"/>
+              <a:t>CPoint</a:t>
+            </a:r>
+            <a:r>
+              <a:rPr lang="en-US" altLang="ko-KR" sz="1400" dirty="0"/>
+              <a:t>(0, 0</a:t>
+            </a:r>
+            <a:r>
+              <a:rPr lang="en-US" altLang="ko-KR" sz="1400" dirty="0" smtClean="0"/>
+              <a:t>);</a:t>
+            </a:r>
+          </a:p>
+          <a:p>
+            <a:pPr lvl="3"/>
+            <a:r>
+              <a:rPr lang="en-US" altLang="ko-KR" sz="1400" dirty="0"/>
+              <a:t>else if (</a:t>
+            </a:r>
+            <a:r>
+              <a:rPr lang="en-US" altLang="ko-KR" sz="1400" dirty="0" err="1"/>
+              <a:t>lParam</a:t>
+            </a:r>
+            <a:r>
+              <a:rPr lang="en-US" altLang="ko-KR" sz="1400" dirty="0"/>
+              <a:t> == </a:t>
+            </a:r>
+            <a:r>
+              <a:rPr lang="en-US" altLang="ko-KR" sz="1400" i="1" dirty="0"/>
+              <a:t>WM_MOUSEHWHEEL</a:t>
+            </a:r>
+            <a:r>
+              <a:rPr lang="en-US" altLang="ko-KR" sz="1400" dirty="0" smtClean="0"/>
+              <a:t>) </a:t>
+            </a:r>
+            <a:r>
+              <a:rPr lang="en-US" altLang="ko-KR" sz="1400" dirty="0" err="1"/>
+              <a:t>m_pView</a:t>
+            </a:r>
+            <a:r>
+              <a:rPr lang="en-US" altLang="ko-KR" sz="1400" dirty="0"/>
+              <a:t>-&gt;</a:t>
+            </a:r>
+            <a:r>
+              <a:rPr lang="en-US" altLang="ko-KR" sz="1400" dirty="0" err="1"/>
+              <a:t>ZoomIn</a:t>
+            </a:r>
+            <a:r>
+              <a:rPr lang="en-US" altLang="ko-KR" sz="1400" dirty="0"/>
+              <a:t>(1.1</a:t>
+            </a:r>
+            <a:r>
+              <a:rPr lang="en-US" altLang="ko-KR" sz="1400" dirty="0" smtClean="0"/>
+              <a:t>); </a:t>
+            </a:r>
+            <a:r>
+              <a:rPr lang="en-US" altLang="ko-KR" sz="1400" dirty="0" err="1"/>
+              <a:t>m_pView</a:t>
+            </a:r>
+            <a:r>
+              <a:rPr lang="en-US" altLang="ko-KR" sz="1400" dirty="0"/>
+              <a:t>-&gt;</a:t>
+            </a:r>
+            <a:r>
+              <a:rPr lang="en-US" altLang="ko-KR" sz="1400" dirty="0" err="1"/>
+              <a:t>ZoomOut</a:t>
+            </a:r>
+            <a:r>
+              <a:rPr lang="en-US" altLang="ko-KR" sz="1400" dirty="0"/>
+              <a:t>(1.1</a:t>
+            </a:r>
+            <a:r>
+              <a:rPr lang="en-US" altLang="ko-KR" sz="1400" dirty="0" smtClean="0"/>
+              <a:t>);</a:t>
+            </a:r>
+          </a:p>
+          <a:p>
+            <a:pPr lvl="3"/>
+            <a:r>
+              <a:rPr lang="en-US" altLang="ko-KR" sz="1400" dirty="0"/>
+              <a:t>else if (</a:t>
+            </a:r>
+            <a:r>
+              <a:rPr lang="en-US" altLang="ko-KR" sz="1400" dirty="0" err="1"/>
+              <a:t>lParam</a:t>
+            </a:r>
+            <a:r>
+              <a:rPr lang="en-US" altLang="ko-KR" sz="1400" dirty="0"/>
+              <a:t> == </a:t>
+            </a:r>
+            <a:r>
+              <a:rPr lang="en-US" altLang="ko-KR" sz="1400" i="1" dirty="0"/>
+              <a:t>WM_MOUSEMOVE</a:t>
+            </a:r>
+            <a:r>
+              <a:rPr lang="en-US" altLang="ko-KR" sz="1400" dirty="0" smtClean="0"/>
+              <a:t>) </a:t>
+            </a:r>
+          </a:p>
+          <a:p>
+            <a:pPr lvl="4"/>
+            <a:r>
+              <a:rPr lang="en-US" altLang="ko-KR" sz="1400" dirty="0"/>
+              <a:t>if (_</a:t>
+            </a:r>
+            <a:r>
+              <a:rPr lang="en-US" altLang="ko-KR" sz="1400" dirty="0" err="1"/>
+              <a:t>mouseButton</a:t>
+            </a:r>
+            <a:r>
+              <a:rPr lang="en-US" altLang="ko-KR" sz="1400" dirty="0"/>
+              <a:t> == 1</a:t>
+            </a:r>
+            <a:r>
+              <a:rPr lang="en-US" altLang="ko-KR" sz="1400" dirty="0" smtClean="0"/>
+              <a:t>) Rotate		// </a:t>
+            </a:r>
+            <a:r>
+              <a:rPr lang="en-US" altLang="ko-KR" sz="1400" dirty="0" err="1"/>
+              <a:t>lParam</a:t>
+            </a:r>
+            <a:r>
+              <a:rPr lang="en-US" altLang="ko-KR" sz="1400" dirty="0"/>
+              <a:t> == </a:t>
+            </a:r>
+            <a:r>
+              <a:rPr lang="en-US" altLang="ko-KR" sz="1400" i="1" dirty="0"/>
+              <a:t>WM_LBUTTONDOWN</a:t>
+            </a:r>
+            <a:endParaRPr lang="en-US" altLang="ko-KR" sz="1400" dirty="0" smtClean="0"/>
+          </a:p>
+          <a:p>
+            <a:pPr lvl="4"/>
+            <a:r>
+              <a:rPr lang="en-US" altLang="ko-KR" sz="1400" dirty="0" smtClean="0"/>
+              <a:t>else </a:t>
+            </a:r>
+            <a:r>
+              <a:rPr lang="en-US" altLang="ko-KR" sz="1400" dirty="0"/>
+              <a:t>if (_</a:t>
+            </a:r>
+            <a:r>
+              <a:rPr lang="en-US" altLang="ko-KR" sz="1400" dirty="0" err="1"/>
+              <a:t>mouseButton</a:t>
+            </a:r>
+            <a:r>
+              <a:rPr lang="en-US" altLang="ko-KR" sz="1400" dirty="0"/>
+              <a:t> == 2</a:t>
+            </a:r>
+            <a:r>
+              <a:rPr lang="en-US" altLang="ko-KR" sz="1400" dirty="0" smtClean="0"/>
+              <a:t>) </a:t>
+            </a:r>
+            <a:r>
+              <a:rPr lang="en-US" altLang="ko-KR" sz="1400" dirty="0" err="1" smtClean="0"/>
+              <a:t>Transiant</a:t>
+            </a:r>
+            <a:r>
+              <a:rPr lang="en-US" altLang="ko-KR" sz="1400" dirty="0" smtClean="0"/>
+              <a:t>	// </a:t>
+            </a:r>
+            <a:r>
+              <a:rPr lang="en-US" altLang="ko-KR" sz="1400" dirty="0" err="1"/>
+              <a:t>lParam</a:t>
+            </a:r>
+            <a:r>
+              <a:rPr lang="en-US" altLang="ko-KR" sz="1400" dirty="0"/>
+              <a:t> == </a:t>
+            </a:r>
+            <a:r>
+              <a:rPr lang="en-US" altLang="ko-KR" sz="1400" i="1" dirty="0"/>
+              <a:t>WM_RBUTTONDOWN</a:t>
+            </a:r>
+            <a:endParaRPr lang="en-US" altLang="ko-KR" sz="1400" dirty="0" smtClean="0"/>
+          </a:p>
+          <a:p>
+            <a:pPr lvl="4"/>
+            <a:r>
+              <a:rPr lang="en-US" altLang="ko-KR" sz="1400" dirty="0"/>
+              <a:t>else if (_</a:t>
+            </a:r>
+            <a:r>
+              <a:rPr lang="en-US" altLang="ko-KR" sz="1400" dirty="0" err="1"/>
+              <a:t>mouseButton</a:t>
+            </a:r>
+            <a:r>
+              <a:rPr lang="en-US" altLang="ko-KR" sz="1400" dirty="0"/>
+              <a:t> == 3</a:t>
+            </a:r>
+            <a:r>
+              <a:rPr lang="en-US" altLang="ko-KR" sz="1400" dirty="0" smtClean="0"/>
+              <a:t>) ?</a:t>
+            </a:r>
+          </a:p>
+          <a:p>
+            <a:pPr lvl="4"/>
+            <a:r>
+              <a:rPr lang="en-US" altLang="ko-KR" sz="1400" dirty="0"/>
+              <a:t>_</a:t>
+            </a:r>
+            <a:r>
+              <a:rPr lang="en-US" altLang="ko-KR" sz="1400" dirty="0" err="1"/>
+              <a:t>mouseDownPoint</a:t>
+            </a:r>
+            <a:r>
+              <a:rPr lang="en-US" altLang="ko-KR" sz="1400" dirty="0"/>
+              <a:t> = </a:t>
+            </a:r>
+            <a:r>
+              <a:rPr lang="en-US" altLang="ko-KR" sz="1400" dirty="0" err="1"/>
+              <a:t>m_pView</a:t>
+            </a:r>
+            <a:r>
+              <a:rPr lang="en-US" altLang="ko-KR" sz="1400" dirty="0"/>
+              <a:t>-&gt;</a:t>
+            </a:r>
+            <a:r>
+              <a:rPr lang="en-US" altLang="ko-KR" sz="1400" dirty="0" err="1"/>
+              <a:t>m_ptCurPos</a:t>
+            </a:r>
+            <a:r>
+              <a:rPr lang="en-US" altLang="ko-KR" sz="1400" dirty="0"/>
+              <a:t>;</a:t>
+            </a:r>
+          </a:p>
+          <a:p>
+            <a:endParaRPr lang="ko-KR" altLang="en-US" dirty="0"/>
+          </a:p>
+        </p:txBody>
+      </p:sp>
+    </p:spTree>
+    <p:extLst>
+      <p:ext uri="{BB962C8B-B14F-4D97-AF65-F5344CB8AC3E}">
+        <p14:creationId xmlns:p14="http://schemas.microsoft.com/office/powerpoint/2010/main" val="2485708467"/>
+      </p:ext>
+    </p:extLst>
+  </p:cSld>
+  <p:clrMapOvr>
+    <a:masterClrMapping/>
+  </p:clrMapOvr>
+</p:sld>
+</file>
+
 <file path=ppt/slides/slide8.xml><?xml version="1.0" encoding="utf-8"?>
 <p:sld xmlns:a="http://schemas.openxmlformats.org/drawingml/2006/main" xmlns:r="http://schemas.openxmlformats.org/officeDocument/2006/relationships" xmlns:p="http://schemas.openxmlformats.org/presentationml/2006/main">
   <p:cSld>

--- a/Zygo Software개발.pptx
+++ b/Zygo Software개발.pptx
@@ -70,11 +70,22 @@
     <p:sldId id="318" r:id="rId64"/>
     <p:sldId id="320" r:id="rId65"/>
     <p:sldId id="319" r:id="rId66"/>
-    <p:sldId id="322" r:id="rId67"/>
-    <p:sldId id="321" r:id="rId68"/>
-    <p:sldId id="323" r:id="rId69"/>
-    <p:sldId id="324" r:id="rId70"/>
-    <p:sldId id="325" r:id="rId71"/>
+    <p:sldId id="329" r:id="rId67"/>
+    <p:sldId id="322" r:id="rId68"/>
+    <p:sldId id="330" r:id="rId69"/>
+    <p:sldId id="331" r:id="rId70"/>
+    <p:sldId id="332" r:id="rId71"/>
+    <p:sldId id="333" r:id="rId72"/>
+    <p:sldId id="334" r:id="rId73"/>
+    <p:sldId id="335" r:id="rId74"/>
+    <p:sldId id="336" r:id="rId75"/>
+    <p:sldId id="323" r:id="rId76"/>
+    <p:sldId id="321" r:id="rId77"/>
+    <p:sldId id="324" r:id="rId78"/>
+    <p:sldId id="325" r:id="rId79"/>
+    <p:sldId id="326" r:id="rId80"/>
+    <p:sldId id="327" r:id="rId81"/>
+    <p:sldId id="328" r:id="rId82"/>
   </p:sldIdLst>
   <p:sldSz cx="12192000" cy="6858000"/>
   <p:notesSz cx="6797675" cy="9874250"/>
@@ -312,7 +323,7 @@
           <a:p>
             <a:fld id="{5E2EC1FB-DDCB-48DE-AA18-776941098B20}" type="datetimeFigureOut">
               <a:rPr lang="ko-KR" altLang="en-US" smtClean="0"/>
-              <a:t>2026-03-10</a:t>
+              <a:t>2026-03-13</a:t>
             </a:fld>
             <a:endParaRPr lang="ko-KR" altLang="en-US"/>
           </a:p>
@@ -482,7 +493,7 @@
           <a:p>
             <a:fld id="{5E2EC1FB-DDCB-48DE-AA18-776941098B20}" type="datetimeFigureOut">
               <a:rPr lang="ko-KR" altLang="en-US" smtClean="0"/>
-              <a:t>2026-03-10</a:t>
+              <a:t>2026-03-13</a:t>
             </a:fld>
             <a:endParaRPr lang="ko-KR" altLang="en-US"/>
           </a:p>
@@ -662,7 +673,7 @@
           <a:p>
             <a:fld id="{5E2EC1FB-DDCB-48DE-AA18-776941098B20}" type="datetimeFigureOut">
               <a:rPr lang="ko-KR" altLang="en-US" smtClean="0"/>
-              <a:t>2026-03-10</a:t>
+              <a:t>2026-03-13</a:t>
             </a:fld>
             <a:endParaRPr lang="ko-KR" altLang="en-US"/>
           </a:p>
@@ -832,7 +843,7 @@
           <a:p>
             <a:fld id="{5E2EC1FB-DDCB-48DE-AA18-776941098B20}" type="datetimeFigureOut">
               <a:rPr lang="ko-KR" altLang="en-US" smtClean="0"/>
-              <a:t>2026-03-10</a:t>
+              <a:t>2026-03-13</a:t>
             </a:fld>
             <a:endParaRPr lang="ko-KR" altLang="en-US"/>
           </a:p>
@@ -1078,7 +1089,7 @@
           <a:p>
             <a:fld id="{5E2EC1FB-DDCB-48DE-AA18-776941098B20}" type="datetimeFigureOut">
               <a:rPr lang="ko-KR" altLang="en-US" smtClean="0"/>
-              <a:t>2026-03-10</a:t>
+              <a:t>2026-03-13</a:t>
             </a:fld>
             <a:endParaRPr lang="ko-KR" altLang="en-US"/>
           </a:p>
@@ -1310,7 +1321,7 @@
           <a:p>
             <a:fld id="{5E2EC1FB-DDCB-48DE-AA18-776941098B20}" type="datetimeFigureOut">
               <a:rPr lang="ko-KR" altLang="en-US" smtClean="0"/>
-              <a:t>2026-03-10</a:t>
+              <a:t>2026-03-13</a:t>
             </a:fld>
             <a:endParaRPr lang="ko-KR" altLang="en-US"/>
           </a:p>
@@ -1677,7 +1688,7 @@
           <a:p>
             <a:fld id="{5E2EC1FB-DDCB-48DE-AA18-776941098B20}" type="datetimeFigureOut">
               <a:rPr lang="ko-KR" altLang="en-US" smtClean="0"/>
-              <a:t>2026-03-10</a:t>
+              <a:t>2026-03-13</a:t>
             </a:fld>
             <a:endParaRPr lang="ko-KR" altLang="en-US"/>
           </a:p>
@@ -1795,7 +1806,7 @@
           <a:p>
             <a:fld id="{5E2EC1FB-DDCB-48DE-AA18-776941098B20}" type="datetimeFigureOut">
               <a:rPr lang="ko-KR" altLang="en-US" smtClean="0"/>
-              <a:t>2026-03-10</a:t>
+              <a:t>2026-03-13</a:t>
             </a:fld>
             <a:endParaRPr lang="ko-KR" altLang="en-US"/>
           </a:p>
@@ -1890,7 +1901,7 @@
           <a:p>
             <a:fld id="{5E2EC1FB-DDCB-48DE-AA18-776941098B20}" type="datetimeFigureOut">
               <a:rPr lang="ko-KR" altLang="en-US" smtClean="0"/>
-              <a:t>2026-03-10</a:t>
+              <a:t>2026-03-13</a:t>
             </a:fld>
             <a:endParaRPr lang="ko-KR" altLang="en-US"/>
           </a:p>
@@ -2167,7 +2178,7 @@
           <a:p>
             <a:fld id="{5E2EC1FB-DDCB-48DE-AA18-776941098B20}" type="datetimeFigureOut">
               <a:rPr lang="ko-KR" altLang="en-US" smtClean="0"/>
-              <a:t>2026-03-10</a:t>
+              <a:t>2026-03-13</a:t>
             </a:fld>
             <a:endParaRPr lang="ko-KR" altLang="en-US"/>
           </a:p>
@@ -2420,7 +2431,7 @@
           <a:p>
             <a:fld id="{5E2EC1FB-DDCB-48DE-AA18-776941098B20}" type="datetimeFigureOut">
               <a:rPr lang="ko-KR" altLang="en-US" smtClean="0"/>
-              <a:t>2026-03-10</a:t>
+              <a:t>2026-03-13</a:t>
             </a:fld>
             <a:endParaRPr lang="ko-KR" altLang="en-US"/>
           </a:p>
@@ -2633,7 +2644,7 @@
           <a:p>
             <a:fld id="{5E2EC1FB-DDCB-48DE-AA18-776941098B20}" type="datetimeFigureOut">
               <a:rPr lang="ko-KR" altLang="en-US" smtClean="0"/>
-              <a:t>2026-03-10</a:t>
+              <a:t>2026-03-13</a:t>
             </a:fld>
             <a:endParaRPr lang="ko-KR" altLang="en-US"/>
           </a:p>
@@ -23560,6 +23571,339 @@
           <a:p>
             <a:r>
               <a:rPr lang="en-US" altLang="ko-KR" dirty="0" smtClean="0"/>
+              <a:t>example</a:t>
+            </a:r>
+            <a:endParaRPr lang="ko-KR" altLang="en-US" dirty="0"/>
+          </a:p>
+        </p:txBody>
+      </p:sp>
+      <p:sp>
+        <p:nvSpPr>
+          <p:cNvPr id="3" name="내용 개체 틀 2"/>
+          <p:cNvSpPr>
+            <a:spLocks noGrp="1"/>
+          </p:cNvSpPr>
+          <p:nvPr>
+            <p:ph idx="1"/>
+          </p:nvPr>
+        </p:nvSpPr>
+        <p:spPr/>
+        <p:txBody>
+          <a:bodyPr>
+            <a:normAutofit fontScale="25000" lnSpcReduction="20000"/>
+          </a:bodyPr>
+          <a:lstStyle/>
+          <a:p>
+            <a:r>
+              <a:rPr lang="en-US" altLang="ko-KR" dirty="0" err="1"/>
+              <a:t>Zygo</a:t>
+            </a:r>
+            <a:r>
+              <a:rPr lang="en-US" altLang="ko-KR" dirty="0"/>
+              <a:t> XYZ Data File - Format 1</a:t>
+            </a:r>
+          </a:p>
+          <a:p>
+            <a:r>
+              <a:rPr lang="en-US" altLang="ko-KR" dirty="0"/>
+              <a:t>0 8 0 0 "                             </a:t>
+            </a:r>
+            <a:r>
+              <a:rPr lang="en-US" altLang="ko-KR" dirty="0" smtClean="0"/>
+              <a:t>“ // </a:t>
+            </a:r>
+            <a:r>
+              <a:rPr lang="en-US" altLang="ko-KR" dirty="0"/>
+              <a:t>Minor-Version</a:t>
+            </a:r>
+            <a:r>
+              <a:rPr lang="en-US" altLang="ko-KR" dirty="0" smtClean="0"/>
+              <a:t>, Major-Version, </a:t>
+            </a:r>
+            <a:r>
+              <a:rPr lang="en-US" altLang="ko-KR" dirty="0"/>
+              <a:t>Bug-Version</a:t>
+            </a:r>
+            <a:r>
+              <a:rPr lang="en-US" altLang="ko-KR" dirty="0" smtClean="0"/>
+              <a:t>, Type</a:t>
+            </a:r>
+            <a:endParaRPr lang="en-US" altLang="ko-KR" dirty="0"/>
+          </a:p>
+          <a:p>
+            <a:r>
+              <a:rPr lang="en-US" altLang="ko-KR" dirty="0"/>
+              <a:t>0 0 0 0 0 0</a:t>
+            </a:r>
+          </a:p>
+          <a:p>
+            <a:r>
+              <a:rPr lang="en-US" altLang="ko-KR" b="1" dirty="0"/>
+              <a:t>0 0 1600 </a:t>
+            </a:r>
+            <a:r>
+              <a:rPr lang="en-US" altLang="ko-KR" b="1" dirty="0" smtClean="0"/>
+              <a:t>1200 // Start-Index-Column, Start-Index-Row, Total-Columns, Total-Rows</a:t>
+            </a:r>
+            <a:endParaRPr lang="en-US" altLang="ko-KR" b="1" dirty="0"/>
+          </a:p>
+          <a:p>
+            <a:r>
+              <a:rPr lang="en-US" altLang="ko-KR" dirty="0"/>
+              <a:t>"                                                                                 "</a:t>
+            </a:r>
+          </a:p>
+          <a:p>
+            <a:r>
+              <a:rPr lang="en-US" altLang="ko-KR" dirty="0"/>
+              <a:t>"                                       "</a:t>
+            </a:r>
+          </a:p>
+          <a:p>
+            <a:r>
+              <a:rPr lang="en-US" altLang="ko-KR" dirty="0"/>
+              <a:t>"                                       "</a:t>
+            </a:r>
+          </a:p>
+          <a:p>
+            <a:r>
+              <a:rPr lang="en-US" altLang="ko-KR" dirty="0"/>
+              <a:t>0 </a:t>
+            </a:r>
+            <a:r>
+              <a:rPr lang="en-US" altLang="ko-KR" b="1" dirty="0"/>
+              <a:t>0.5</a:t>
+            </a:r>
+            <a:r>
+              <a:rPr lang="en-US" altLang="ko-KR" dirty="0"/>
+              <a:t> </a:t>
+            </a:r>
+            <a:r>
+              <a:rPr lang="en-US" altLang="ko-KR" b="1" dirty="0"/>
+              <a:t>5.89549e-07</a:t>
+            </a:r>
+            <a:r>
+              <a:rPr lang="en-US" altLang="ko-KR" dirty="0"/>
+              <a:t> 0.55 1 0 </a:t>
+            </a:r>
+            <a:r>
+              <a:rPr lang="en-US" altLang="ko-KR" b="1" dirty="0"/>
+              <a:t>9.02568e-08</a:t>
+            </a:r>
+            <a:r>
+              <a:rPr lang="en-US" altLang="ko-KR" dirty="0"/>
+              <a:t> </a:t>
+            </a:r>
+            <a:r>
+              <a:rPr lang="en-US" altLang="ko-KR" dirty="0" smtClean="0"/>
+              <a:t>1763688307 // Group-Number, </a:t>
+            </a:r>
+            <a:r>
+              <a:rPr lang="en-US" altLang="ko-KR" b="1" dirty="0" smtClean="0"/>
+              <a:t>Scale</a:t>
+            </a:r>
+            <a:r>
+              <a:rPr lang="en-US" altLang="ko-KR" dirty="0" smtClean="0"/>
+              <a:t>-Factor, </a:t>
+            </a:r>
+            <a:r>
+              <a:rPr lang="en-US" altLang="ko-KR" b="1" dirty="0" smtClean="0"/>
+              <a:t>Wave-Length-Horizontal[M]</a:t>
+            </a:r>
+            <a:r>
+              <a:rPr lang="en-US" altLang="ko-KR" dirty="0" smtClean="0"/>
+              <a:t>, Aperture-Number, , , </a:t>
+            </a:r>
+            <a:r>
+              <a:rPr lang="en-US" altLang="ko-KR" b="1" dirty="0" smtClean="0"/>
+              <a:t>Resolution</a:t>
+            </a:r>
+            <a:r>
+              <a:rPr lang="en-US" altLang="ko-KR" dirty="0" smtClean="0"/>
+              <a:t>(</a:t>
+            </a:r>
+            <a:r>
+              <a:rPr lang="en-US" altLang="ko-KR" b="1" dirty="0" smtClean="0"/>
+              <a:t>Wave-Length-Vertical[M])</a:t>
+            </a:r>
+            <a:r>
+              <a:rPr lang="en-US" altLang="ko-KR" dirty="0" smtClean="0"/>
+              <a:t>, </a:t>
+            </a:r>
+            <a:r>
+              <a:rPr lang="en-US" altLang="ko-KR" dirty="0" smtClean="0"/>
+              <a:t>Time-Stamp   </a:t>
+            </a:r>
+            <a:endParaRPr lang="en-US" altLang="ko-KR" dirty="0"/>
+          </a:p>
+          <a:p>
+            <a:r>
+              <a:rPr lang="en-US" altLang="ko-KR" b="1" dirty="0"/>
+              <a:t>1600 1200</a:t>
+            </a:r>
+            <a:r>
+              <a:rPr lang="en-US" altLang="ko-KR" dirty="0"/>
+              <a:t> 0 0 87200 0 "           </a:t>
+            </a:r>
+            <a:r>
+              <a:rPr lang="en-US" altLang="ko-KR" dirty="0" smtClean="0"/>
+              <a:t>“ // </a:t>
+            </a:r>
+            <a:r>
+              <a:rPr lang="en-US" altLang="ko-KR" b="1" dirty="0" err="1" smtClean="0"/>
+              <a:t>Camer</a:t>
+            </a:r>
+            <a:r>
+              <a:rPr lang="en-US" altLang="ko-KR" b="1" dirty="0" smtClean="0"/>
+              <a:t>-Width, Camera-Height</a:t>
+            </a:r>
+            <a:r>
+              <a:rPr lang="en-US" altLang="ko-KR" dirty="0" smtClean="0"/>
+              <a:t>,  ,  , System-Serial-Number, </a:t>
+            </a:r>
+            <a:endParaRPr lang="en-US" altLang="ko-KR" dirty="0"/>
+          </a:p>
+          <a:p>
+            <a:r>
+              <a:rPr lang="en-US" altLang="ko-KR" dirty="0"/>
+              <a:t>0 0 0 0 0 0 0 73.93 0 </a:t>
+            </a:r>
+            <a:r>
+              <a:rPr lang="en-US" altLang="ko-KR" dirty="0" smtClean="0"/>
+              <a:t>0 // , , , , , , , Light-Level-Percent, , </a:t>
+            </a:r>
+            <a:endParaRPr lang="en-US" altLang="ko-KR" dirty="0"/>
+          </a:p>
+          <a:p>
+            <a:r>
+              <a:rPr lang="en-US" altLang="ko-KR" dirty="0"/>
+              <a:t>1 1 0 0 0 0 0 0 0</a:t>
+            </a:r>
+          </a:p>
+          <a:p>
+            <a:r>
+              <a:rPr lang="en-US" altLang="ko-KR" dirty="0"/>
+              <a:t>0 "                           "</a:t>
+            </a:r>
+          </a:p>
+          <a:p>
+            <a:r>
+              <a:rPr lang="en-US" altLang="ko-KR" dirty="0"/>
+              <a:t>1 0</a:t>
+            </a:r>
+          </a:p>
+          <a:p>
+            <a:r>
+              <a:rPr lang="en-US" altLang="ko-KR" dirty="0"/>
+              <a:t>#</a:t>
+            </a:r>
+          </a:p>
+          <a:p>
+            <a:r>
+              <a:rPr lang="en-US" altLang="ko-KR" dirty="0"/>
+              <a:t>0 0 16.41225</a:t>
+            </a:r>
+          </a:p>
+          <a:p>
+            <a:r>
+              <a:rPr lang="en-US" altLang="ko-KR" dirty="0"/>
+              <a:t>1 0 16.345756</a:t>
+            </a:r>
+          </a:p>
+          <a:p>
+            <a:r>
+              <a:rPr lang="en-US" altLang="ko-KR" dirty="0"/>
+              <a:t>2 0 16.308048</a:t>
+            </a:r>
+          </a:p>
+          <a:p>
+            <a:r>
+              <a:rPr lang="en-US" altLang="ko-KR" dirty="0" smtClean="0"/>
+              <a:t>.</a:t>
+            </a:r>
+          </a:p>
+          <a:p>
+            <a:r>
+              <a:rPr lang="en-US" altLang="ko-KR" dirty="0" smtClean="0"/>
+              <a:t>.</a:t>
+            </a:r>
+          </a:p>
+          <a:p>
+            <a:r>
+              <a:rPr lang="en-US" altLang="ko-KR" dirty="0" smtClean="0"/>
+              <a:t>.</a:t>
+            </a:r>
+          </a:p>
+          <a:p>
+            <a:r>
+              <a:rPr lang="en-US" altLang="ko-KR" dirty="0"/>
+              <a:t>1598 1199 15.255566</a:t>
+            </a:r>
+          </a:p>
+          <a:p>
+            <a:r>
+              <a:rPr lang="en-US" altLang="ko-KR" dirty="0"/>
+              <a:t>1599 1199 15.255357</a:t>
+            </a:r>
+          </a:p>
+          <a:p>
+            <a:r>
+              <a:rPr lang="en-US" altLang="ko-KR" dirty="0"/>
+              <a:t>#</a:t>
+            </a:r>
+          </a:p>
+          <a:p>
+            <a:endParaRPr lang="ko-KR" altLang="en-US" dirty="0"/>
+          </a:p>
+        </p:txBody>
+      </p:sp>
+    </p:spTree>
+    <p:extLst>
+      <p:ext uri="{BB962C8B-B14F-4D97-AF65-F5344CB8AC3E}">
+        <p14:creationId xmlns:p14="http://schemas.microsoft.com/office/powerpoint/2010/main" val="1636808518"/>
+      </p:ext>
+    </p:extLst>
+  </p:cSld>
+  <p:clrMapOvr>
+    <a:masterClrMapping/>
+  </p:clrMapOvr>
+</p:sld>
+</file>
+
+<file path=ppt/slides/slide67.xml><?xml version="1.0" encoding="utf-8"?>
+<p:sld xmlns:a="http://schemas.openxmlformats.org/drawingml/2006/main" xmlns:r="http://schemas.openxmlformats.org/officeDocument/2006/relationships" xmlns:p="http://schemas.openxmlformats.org/presentationml/2006/main">
+  <p:cSld>
+    <p:spTree>
+      <p:nvGrpSpPr>
+        <p:cNvPr id="1" name=""/>
+        <p:cNvGrpSpPr/>
+        <p:nvPr/>
+      </p:nvGrpSpPr>
+      <p:grpSpPr>
+        <a:xfrm>
+          <a:off x="0" y="0"/>
+          <a:ext cx="0" cy="0"/>
+          <a:chOff x="0" y="0"/>
+          <a:chExt cx="0" cy="0"/>
+        </a:xfrm>
+      </p:grpSpPr>
+      <p:sp>
+        <p:nvSpPr>
+          <p:cNvPr id="2" name="제목 1"/>
+          <p:cNvSpPr>
+            <a:spLocks noGrp="1"/>
+          </p:cNvSpPr>
+          <p:nvPr>
+            <p:ph type="title"/>
+          </p:nvPr>
+        </p:nvSpPr>
+        <p:spPr/>
+        <p:txBody>
+          <a:bodyPr/>
+          <a:lstStyle/>
+          <a:p>
+            <a:r>
+              <a:rPr lang="en-US" altLang="ko-KR" dirty="0" smtClean="0"/>
               <a:t>ASCII</a:t>
             </a:r>
             <a:r>
@@ -23641,7 +23985,2787 @@
 </p:sld>
 </file>
 
-<file path=ppt/slides/slide67.xml><?xml version="1.0" encoding="utf-8"?>
+<file path=ppt/slides/slide68.xml><?xml version="1.0" encoding="utf-8"?>
+<p:sld xmlns:a="http://schemas.openxmlformats.org/drawingml/2006/main" xmlns:r="http://schemas.openxmlformats.org/officeDocument/2006/relationships" xmlns:p="http://schemas.openxmlformats.org/presentationml/2006/main">
+  <p:cSld>
+    <p:spTree>
+      <p:nvGrpSpPr>
+        <p:cNvPr id="1" name=""/>
+        <p:cNvGrpSpPr/>
+        <p:nvPr/>
+      </p:nvGrpSpPr>
+      <p:grpSpPr>
+        <a:xfrm>
+          <a:off x="0" y="0"/>
+          <a:ext cx="0" cy="0"/>
+          <a:chOff x="0" y="0"/>
+          <a:chExt cx="0" cy="0"/>
+        </a:xfrm>
+      </p:grpSpPr>
+      <p:sp>
+        <p:nvSpPr>
+          <p:cNvPr id="2" name="제목 1"/>
+          <p:cNvSpPr>
+            <a:spLocks noGrp="1"/>
+          </p:cNvSpPr>
+          <p:nvPr>
+            <p:ph type="title"/>
+          </p:nvPr>
+        </p:nvSpPr>
+        <p:spPr/>
+        <p:txBody>
+          <a:bodyPr/>
+          <a:lstStyle/>
+          <a:p>
+            <a:r>
+              <a:rPr lang="en-US" altLang="ko-KR" dirty="0" err="1" smtClean="0"/>
+              <a:t>Datx</a:t>
+            </a:r>
+            <a:r>
+              <a:rPr lang="en-US" altLang="ko-KR" dirty="0" smtClean="0"/>
+              <a:t> File</a:t>
+            </a:r>
+            <a:r>
+              <a:rPr lang="ko-KR" altLang="en-US" dirty="0" smtClean="0"/>
+              <a:t>이란</a:t>
+            </a:r>
+            <a:r>
+              <a:rPr lang="en-US" altLang="ko-KR" dirty="0" smtClean="0"/>
+              <a:t>?</a:t>
+            </a:r>
+            <a:endParaRPr lang="ko-KR" altLang="en-US" dirty="0"/>
+          </a:p>
+        </p:txBody>
+      </p:sp>
+      <p:sp>
+        <p:nvSpPr>
+          <p:cNvPr id="3" name="내용 개체 틀 2"/>
+          <p:cNvSpPr>
+            <a:spLocks noGrp="1"/>
+          </p:cNvSpPr>
+          <p:nvPr>
+            <p:ph idx="1"/>
+          </p:nvPr>
+        </p:nvSpPr>
+        <p:spPr/>
+        <p:txBody>
+          <a:bodyPr/>
+          <a:lstStyle/>
+          <a:p>
+            <a:r>
+              <a:rPr lang="en-US" altLang="ko-KR" dirty="0"/>
+              <a:t>.DATX </a:t>
+            </a:r>
+            <a:r>
+              <a:rPr lang="ko-KR" altLang="en-US" dirty="0"/>
+              <a:t>파일은 </a:t>
+            </a:r>
+            <a:r>
+              <a:rPr lang="ko-KR" altLang="en-US" dirty="0" smtClean="0"/>
+              <a:t>주로 과학</a:t>
+            </a:r>
+            <a:r>
+              <a:rPr lang="en-US" altLang="ko-KR" dirty="0"/>
+              <a:t>, </a:t>
+            </a:r>
+            <a:r>
+              <a:rPr lang="ko-KR" altLang="en-US" dirty="0"/>
+              <a:t>공학 또는 측정 데이터 수집에 사용되는 </a:t>
+            </a:r>
+            <a:r>
+              <a:rPr lang="ko-KR" altLang="en-US" b="1" dirty="0">
+                <a:solidFill>
+                  <a:srgbClr val="FF0000"/>
+                </a:solidFill>
+              </a:rPr>
+              <a:t>바이너리 데이터 저장 </a:t>
+            </a:r>
+            <a:r>
+              <a:rPr lang="ko-KR" altLang="en-US" b="1" dirty="0" smtClean="0">
+                <a:solidFill>
+                  <a:srgbClr val="FF0000"/>
+                </a:solidFill>
+              </a:rPr>
+              <a:t>파일</a:t>
+            </a:r>
+            <a:endParaRPr lang="en-US" altLang="ko-KR" b="1" dirty="0" smtClean="0">
+              <a:solidFill>
+                <a:srgbClr val="FF0000"/>
+              </a:solidFill>
+            </a:endParaRPr>
+          </a:p>
+          <a:p>
+            <a:r>
+              <a:rPr lang="ko-KR" altLang="en-US" dirty="0" smtClean="0"/>
+              <a:t>특히</a:t>
+            </a:r>
+            <a:r>
+              <a:rPr lang="ko-KR" altLang="en-US" dirty="0"/>
+              <a:t> </a:t>
+            </a:r>
+            <a:r>
+              <a:rPr lang="en-US" altLang="ko-KR" dirty="0" err="1">
+                <a:hlinkClick r:id="rId2"/>
+              </a:rPr>
+              <a:t>DSPCon</a:t>
+            </a:r>
+            <a:r>
+              <a:rPr lang="ko-KR" altLang="en-US" dirty="0"/>
+              <a:t> 과 </a:t>
+            </a:r>
+            <a:r>
+              <a:rPr lang="en-US" altLang="ko-KR" dirty="0" err="1">
+                <a:hlinkClick r:id="rId3"/>
+              </a:rPr>
+              <a:t>activPAL</a:t>
+            </a:r>
+            <a:r>
+              <a:rPr lang="ko-KR" altLang="en-US" dirty="0"/>
+              <a:t> 에서 많이 사용됩니다</a:t>
+            </a:r>
+            <a:r>
+              <a:rPr lang="en-US" altLang="ko-KR" dirty="0"/>
+              <a:t>. </a:t>
+            </a:r>
+            <a:endParaRPr lang="en-US" altLang="ko-KR" dirty="0" smtClean="0"/>
+          </a:p>
+          <a:p>
+            <a:r>
+              <a:rPr lang="ko-KR" altLang="en-US" dirty="0" smtClean="0"/>
+              <a:t>이러한 </a:t>
+            </a:r>
+            <a:r>
+              <a:rPr lang="ko-KR" altLang="en-US" dirty="0"/>
+              <a:t>파일에는 </a:t>
+            </a:r>
+            <a:r>
+              <a:rPr lang="ko-KR" altLang="en-US" b="1" dirty="0"/>
+              <a:t>채널 이름 </a:t>
+            </a:r>
+            <a:r>
+              <a:rPr lang="ko-KR" altLang="en-US" dirty="0"/>
+              <a:t>및 </a:t>
+            </a:r>
+            <a:r>
+              <a:rPr lang="ko-KR" altLang="en-US" b="1" dirty="0"/>
+              <a:t>단위</a:t>
+            </a:r>
+            <a:r>
+              <a:rPr lang="ko-KR" altLang="en-US" dirty="0"/>
+              <a:t>와 같은 메타데이터를 포함하는 </a:t>
+            </a:r>
+            <a:r>
+              <a:rPr lang="ko-KR" altLang="en-US" b="1" dirty="0"/>
+              <a:t>대규모 자체 문서화 데이터 세트</a:t>
+            </a:r>
+            <a:r>
+              <a:rPr lang="ko-KR" altLang="en-US" dirty="0"/>
+              <a:t>가 포함되는 경우가 많습니다</a:t>
+            </a:r>
+            <a:r>
+              <a:rPr lang="en-US" altLang="ko-KR" dirty="0"/>
+              <a:t>. </a:t>
+            </a:r>
+            <a:endParaRPr lang="en-US" altLang="ko-KR" dirty="0" smtClean="0"/>
+          </a:p>
+          <a:p>
+            <a:r>
+              <a:rPr lang="ko-KR" altLang="en-US" dirty="0" smtClean="0"/>
+              <a:t>일반적인 </a:t>
+            </a:r>
+            <a:r>
+              <a:rPr lang="ko-KR" altLang="en-US" dirty="0"/>
+              <a:t>사용 사례로는 </a:t>
+            </a:r>
+            <a:r>
+              <a:rPr lang="en-US" altLang="ko-KR" dirty="0" err="1">
+                <a:hlinkClick r:id="rId4"/>
+              </a:rPr>
+              <a:t>Zygo</a:t>
+            </a:r>
+            <a:r>
+              <a:rPr lang="en-US" altLang="ko-KR" dirty="0">
+                <a:hlinkClick r:id="rId4"/>
+              </a:rPr>
+              <a:t> </a:t>
+            </a:r>
+            <a:r>
+              <a:rPr lang="ko-KR" altLang="en-US" dirty="0">
+                <a:hlinkClick r:id="rId4"/>
+              </a:rPr>
+              <a:t>계측 </a:t>
+            </a:r>
+            <a:r>
+              <a:rPr lang="en-US" altLang="ko-KR" dirty="0">
+                <a:hlinkClick r:id="rId4"/>
+              </a:rPr>
+              <a:t>3D </a:t>
+            </a:r>
+            <a:r>
+              <a:rPr lang="ko-KR" altLang="en-US" dirty="0">
+                <a:hlinkClick r:id="rId4"/>
+              </a:rPr>
+              <a:t>데이터</a:t>
+            </a:r>
+            <a:r>
+              <a:rPr lang="ko-KR" altLang="en-US" dirty="0"/>
+              <a:t> </a:t>
+            </a:r>
+            <a:r>
+              <a:rPr lang="en-US" altLang="ko-KR" dirty="0"/>
+              <a:t>, </a:t>
+            </a:r>
+            <a:r>
+              <a:rPr lang="en-US" altLang="ko-KR" dirty="0" err="1">
+                <a:hlinkClick r:id="rId5"/>
+              </a:rPr>
+              <a:t>DewesoftX</a:t>
+            </a:r>
+            <a:r>
+              <a:rPr lang="en-US" altLang="ko-KR" dirty="0">
+                <a:hlinkClick r:id="rId5"/>
+              </a:rPr>
+              <a:t> </a:t>
+            </a:r>
+            <a:r>
+              <a:rPr lang="ko-KR" altLang="en-US" dirty="0">
+                <a:hlinkClick r:id="rId5"/>
+              </a:rPr>
+              <a:t>분석</a:t>
+            </a:r>
+            <a:r>
+              <a:rPr lang="ko-KR" altLang="en-US" dirty="0"/>
+              <a:t> 및 </a:t>
+            </a:r>
+            <a:r>
+              <a:rPr lang="en-US" altLang="ko-KR" dirty="0" err="1">
+                <a:hlinkClick r:id="rId6"/>
+              </a:rPr>
+              <a:t>Biotage</a:t>
+            </a:r>
+            <a:r>
+              <a:rPr lang="en-US" altLang="ko-KR" dirty="0">
+                <a:hlinkClick r:id="rId6"/>
+              </a:rPr>
+              <a:t> </a:t>
+            </a:r>
+            <a:r>
+              <a:rPr lang="en-US" altLang="ko-KR" dirty="0" err="1">
+                <a:hlinkClick r:id="rId6"/>
+              </a:rPr>
+              <a:t>Isolera</a:t>
+            </a:r>
+            <a:r>
+              <a:rPr lang="en-US" altLang="ko-KR" dirty="0">
+                <a:hlinkClick r:id="rId6"/>
+              </a:rPr>
+              <a:t> </a:t>
+            </a:r>
+            <a:r>
+              <a:rPr lang="ko-KR" altLang="en-US" dirty="0">
+                <a:hlinkClick r:id="rId6"/>
+              </a:rPr>
+              <a:t>화학 로그 등이</a:t>
+            </a:r>
+            <a:r>
+              <a:rPr lang="ko-KR" altLang="en-US" dirty="0"/>
+              <a:t> 있습니다 </a:t>
+            </a:r>
+            <a:r>
+              <a:rPr lang="en-US" altLang="ko-KR" dirty="0"/>
+              <a:t>. </a:t>
+            </a:r>
+            <a:endParaRPr lang="ko-KR" altLang="en-US" dirty="0"/>
+          </a:p>
+        </p:txBody>
+      </p:sp>
+    </p:spTree>
+    <p:extLst>
+      <p:ext uri="{BB962C8B-B14F-4D97-AF65-F5344CB8AC3E}">
+        <p14:creationId xmlns:p14="http://schemas.microsoft.com/office/powerpoint/2010/main" val="859824200"/>
+      </p:ext>
+    </p:extLst>
+  </p:cSld>
+  <p:clrMapOvr>
+    <a:masterClrMapping/>
+  </p:clrMapOvr>
+</p:sld>
+</file>
+
+<file path=ppt/slides/slide69.xml><?xml version="1.0" encoding="utf-8"?>
+<p:sld xmlns:a="http://schemas.openxmlformats.org/drawingml/2006/main" xmlns:r="http://schemas.openxmlformats.org/officeDocument/2006/relationships" xmlns:p="http://schemas.openxmlformats.org/presentationml/2006/main">
+  <p:cSld>
+    <p:spTree>
+      <p:nvGrpSpPr>
+        <p:cNvPr id="1" name=""/>
+        <p:cNvGrpSpPr/>
+        <p:nvPr/>
+      </p:nvGrpSpPr>
+      <p:grpSpPr>
+        <a:xfrm>
+          <a:off x="0" y="0"/>
+          <a:ext cx="0" cy="0"/>
+          <a:chOff x="0" y="0"/>
+          <a:chExt cx="0" cy="0"/>
+        </a:xfrm>
+      </p:grpSpPr>
+      <p:sp>
+        <p:nvSpPr>
+          <p:cNvPr id="2" name="제목 1"/>
+          <p:cNvSpPr>
+            <a:spLocks noGrp="1"/>
+          </p:cNvSpPr>
+          <p:nvPr>
+            <p:ph type="title"/>
+          </p:nvPr>
+        </p:nvSpPr>
+        <p:spPr/>
+        <p:txBody>
+          <a:bodyPr/>
+          <a:lstStyle/>
+          <a:p>
+            <a:r>
+              <a:rPr lang="en-US" altLang="ko-KR" dirty="0" err="1" smtClean="0"/>
+              <a:t>Datx</a:t>
+            </a:r>
+            <a:r>
+              <a:rPr lang="en-US" altLang="ko-KR" dirty="0" smtClean="0"/>
+              <a:t> </a:t>
+            </a:r>
+            <a:r>
+              <a:rPr lang="ko-KR" altLang="en-US" dirty="0" smtClean="0"/>
+              <a:t>파일</a:t>
+            </a:r>
+            <a:endParaRPr lang="ko-KR" altLang="en-US" dirty="0"/>
+          </a:p>
+        </p:txBody>
+      </p:sp>
+      <p:sp>
+        <p:nvSpPr>
+          <p:cNvPr id="3" name="내용 개체 틀 2"/>
+          <p:cNvSpPr>
+            <a:spLocks noGrp="1"/>
+          </p:cNvSpPr>
+          <p:nvPr>
+            <p:ph idx="1"/>
+          </p:nvPr>
+        </p:nvSpPr>
+        <p:spPr/>
+        <p:txBody>
+          <a:bodyPr/>
+          <a:lstStyle/>
+          <a:p>
+            <a:r>
+              <a:rPr lang="ko-KR" altLang="en-US" b="1" dirty="0"/>
+              <a:t>목적</a:t>
+            </a:r>
+            <a:r>
+              <a:rPr lang="en-US" altLang="ko-KR" b="1" dirty="0"/>
+              <a:t>:</a:t>
+            </a:r>
+            <a:r>
+              <a:rPr lang="ko-KR" altLang="en-US" dirty="0"/>
+              <a:t> </a:t>
+            </a:r>
+            <a:endParaRPr lang="en-US" altLang="ko-KR" dirty="0" smtClean="0"/>
+          </a:p>
+          <a:p>
+            <a:pPr lvl="1"/>
+            <a:r>
+              <a:rPr lang="ko-KR" altLang="en-US" dirty="0" smtClean="0"/>
+              <a:t>이 </a:t>
+            </a:r>
+            <a:r>
+              <a:rPr lang="ko-KR" altLang="en-US" dirty="0"/>
+              <a:t>파일들은 후처리 및 분석을 위한 가공되지 않은 원본 데이터를 </a:t>
+            </a:r>
+            <a:r>
+              <a:rPr lang="ko-KR" altLang="en-US" dirty="0" smtClean="0"/>
+              <a:t>저장</a:t>
+            </a:r>
+            <a:endParaRPr lang="en-US" altLang="ko-KR" dirty="0" smtClean="0"/>
+          </a:p>
+          <a:p>
+            <a:r>
+              <a:rPr lang="ko-KR" altLang="en-US" b="1" dirty="0"/>
+              <a:t>호환성</a:t>
+            </a:r>
+            <a:r>
+              <a:rPr lang="en-US" altLang="ko-KR" b="1" dirty="0" smtClean="0"/>
+              <a:t>:</a:t>
+            </a:r>
+          </a:p>
+          <a:p>
+            <a:pPr lvl="1"/>
+            <a:r>
+              <a:rPr lang="ko-KR" altLang="en-US" dirty="0" smtClean="0"/>
+              <a:t>특정 소프트웨어에서만 지원</a:t>
+            </a:r>
+            <a:endParaRPr lang="en-US" altLang="ko-KR" dirty="0" smtClean="0"/>
+          </a:p>
+          <a:p>
+            <a:pPr lvl="2"/>
+            <a:r>
+              <a:rPr lang="en-US" altLang="ko-KR" b="1" dirty="0" err="1"/>
+              <a:t>Zygo</a:t>
+            </a:r>
+            <a:r>
+              <a:rPr lang="en-US" altLang="ko-KR" b="1" dirty="0"/>
+              <a:t> </a:t>
+            </a:r>
+            <a:r>
+              <a:rPr lang="en-US" altLang="ko-KR" b="1" dirty="0" err="1"/>
+              <a:t>Mx</a:t>
+            </a:r>
+            <a:r>
+              <a:rPr lang="en-US" altLang="ko-KR" dirty="0"/>
+              <a:t>, APEX, MATLAB(h5read</a:t>
+            </a:r>
+            <a:r>
+              <a:rPr lang="ko-KR" altLang="en-US" dirty="0"/>
+              <a:t>를 통해</a:t>
+            </a:r>
+            <a:r>
+              <a:rPr lang="en-US" altLang="ko-KR" dirty="0"/>
+              <a:t>), </a:t>
+            </a:r>
+            <a:r>
+              <a:rPr lang="en-US" altLang="ko-KR" dirty="0" err="1" smtClean="0"/>
+              <a:t>PALanalysis</a:t>
+            </a:r>
+            <a:r>
+              <a:rPr lang="en-US" altLang="ko-KR" dirty="0" smtClean="0"/>
+              <a:t>, …</a:t>
+            </a:r>
+          </a:p>
+          <a:p>
+            <a:r>
+              <a:rPr lang="ko-KR" altLang="en-US" b="1" dirty="0"/>
+              <a:t>구조</a:t>
+            </a:r>
+            <a:r>
+              <a:rPr lang="en-US" altLang="ko-KR" b="1" dirty="0" smtClean="0"/>
+              <a:t>:</a:t>
+            </a:r>
+          </a:p>
+          <a:p>
+            <a:pPr lvl="1"/>
+            <a:r>
+              <a:rPr lang="en-US" altLang="ko-KR" b="1" dirty="0">
+                <a:solidFill>
+                  <a:srgbClr val="FF0000"/>
+                </a:solidFill>
+              </a:rPr>
+              <a:t>HDF5 </a:t>
+            </a:r>
+            <a:r>
+              <a:rPr lang="ko-KR" altLang="en-US" b="1" dirty="0"/>
+              <a:t>기반</a:t>
+            </a:r>
+            <a:r>
+              <a:rPr lang="ko-KR" altLang="en-US" dirty="0"/>
+              <a:t>이거나 독자적인 바이너리 형식</a:t>
+            </a:r>
+          </a:p>
+        </p:txBody>
+      </p:sp>
+    </p:spTree>
+    <p:extLst>
+      <p:ext uri="{BB962C8B-B14F-4D97-AF65-F5344CB8AC3E}">
+        <p14:creationId xmlns:p14="http://schemas.microsoft.com/office/powerpoint/2010/main" val="2473843947"/>
+      </p:ext>
+    </p:extLst>
+  </p:cSld>
+  <p:clrMapOvr>
+    <a:masterClrMapping/>
+  </p:clrMapOvr>
+</p:sld>
+</file>
+
+<file path=ppt/slides/slide7.xml><?xml version="1.0" encoding="utf-8"?>
+<p:sld xmlns:a="http://schemas.openxmlformats.org/drawingml/2006/main" xmlns:r="http://schemas.openxmlformats.org/officeDocument/2006/relationships" xmlns:p="http://schemas.openxmlformats.org/presentationml/2006/main">
+  <p:cSld>
+    <p:spTree>
+      <p:nvGrpSpPr>
+        <p:cNvPr id="1" name=""/>
+        <p:cNvGrpSpPr/>
+        <p:nvPr/>
+      </p:nvGrpSpPr>
+      <p:grpSpPr>
+        <a:xfrm>
+          <a:off x="0" y="0"/>
+          <a:ext cx="0" cy="0"/>
+          <a:chOff x="0" y="0"/>
+          <a:chExt cx="0" cy="0"/>
+        </a:xfrm>
+      </p:grpSpPr>
+      <p:sp>
+        <p:nvSpPr>
+          <p:cNvPr id="2" name="제목 1"/>
+          <p:cNvSpPr>
+            <a:spLocks noGrp="1"/>
+          </p:cNvSpPr>
+          <p:nvPr>
+            <p:ph type="title"/>
+          </p:nvPr>
+        </p:nvSpPr>
+        <p:spPr/>
+        <p:txBody>
+          <a:bodyPr/>
+          <a:lstStyle/>
+          <a:p>
+            <a:r>
+              <a:rPr lang="en-US" altLang="ko-KR" b="1" dirty="0" err="1"/>
+              <a:t>MxClient</a:t>
+            </a:r>
+            <a:r>
+              <a:rPr lang="en-US" altLang="ko-KR" b="1" dirty="0"/>
+              <a:t> Class (Class : </a:t>
+            </a:r>
+            <a:r>
+              <a:rPr lang="en-US" altLang="ko-KR" b="1" dirty="0" smtClean="0"/>
+              <a:t>1)</a:t>
+            </a:r>
+            <a:endParaRPr lang="ko-KR" altLang="en-US" dirty="0"/>
+          </a:p>
+        </p:txBody>
+      </p:sp>
+      <p:sp>
+        <p:nvSpPr>
+          <p:cNvPr id="3" name="내용 개체 틀 2"/>
+          <p:cNvSpPr>
+            <a:spLocks noGrp="1"/>
+          </p:cNvSpPr>
+          <p:nvPr>
+            <p:ph idx="1"/>
+          </p:nvPr>
+        </p:nvSpPr>
+        <p:spPr/>
+        <p:txBody>
+          <a:bodyPr>
+            <a:normAutofit fontScale="77500" lnSpcReduction="20000"/>
+          </a:bodyPr>
+          <a:lstStyle/>
+          <a:p>
+            <a:r>
+              <a:rPr lang="en-US" altLang="ko-KR" b="1" dirty="0"/>
+              <a:t>Service Class Members	 (Group : </a:t>
+            </a:r>
+            <a:r>
+              <a:rPr lang="en-US" altLang="ko-KR" b="1" dirty="0" smtClean="0"/>
+              <a:t>4)</a:t>
+            </a:r>
+            <a:endParaRPr lang="ko-KR" altLang="en-US" dirty="0"/>
+          </a:p>
+          <a:p>
+            <a:pPr lvl="1"/>
+            <a:r>
+              <a:rPr lang="en-US" altLang="ko-KR" dirty="0"/>
+              <a:t>public </a:t>
+            </a:r>
+            <a:r>
+              <a:rPr lang="en-US" altLang="ko-KR" dirty="0" err="1"/>
+              <a:t>MxService</a:t>
+            </a:r>
+            <a:r>
+              <a:rPr lang="en-US" altLang="ko-KR" dirty="0"/>
+              <a:t> </a:t>
+            </a:r>
+            <a:r>
+              <a:rPr lang="en-US" altLang="ko-KR" dirty="0" err="1"/>
+              <a:t>Mx</a:t>
+            </a:r>
+            <a:r>
+              <a:rPr lang="en-US" altLang="ko-KR" dirty="0"/>
+              <a:t>;	 (Item : 1)</a:t>
+            </a:r>
+            <a:endParaRPr lang="en-US" altLang="ko-KR" dirty="0" smtClean="0"/>
+          </a:p>
+          <a:p>
+            <a:pPr lvl="2"/>
+            <a:r>
+              <a:rPr lang="en-US" altLang="ko-KR" dirty="0"/>
+              <a:t>The </a:t>
+            </a:r>
+            <a:r>
+              <a:rPr lang="en-US" altLang="ko-KR" dirty="0" err="1"/>
+              <a:t>MxService</a:t>
+            </a:r>
+            <a:r>
+              <a:rPr lang="en-US" altLang="ko-KR" dirty="0"/>
+              <a:t> instance associated with this client</a:t>
+            </a:r>
+            <a:endParaRPr lang="en-US" altLang="ko-KR" dirty="0" smtClean="0"/>
+          </a:p>
+          <a:p>
+            <a:pPr lvl="1"/>
+            <a:r>
+              <a:rPr lang="en-US" altLang="ko-KR" dirty="0"/>
+              <a:t>public </a:t>
+            </a:r>
+            <a:r>
+              <a:rPr lang="en-US" altLang="ko-KR" dirty="0" err="1"/>
+              <a:t>InstrumentService</a:t>
+            </a:r>
+            <a:r>
+              <a:rPr lang="en-US" altLang="ko-KR" dirty="0"/>
+              <a:t> Instrument</a:t>
+            </a:r>
+            <a:r>
+              <a:rPr lang="en-US" altLang="ko-KR" dirty="0" smtClean="0"/>
+              <a:t>;	(</a:t>
+            </a:r>
+            <a:r>
+              <a:rPr lang="en-US" altLang="ko-KR" dirty="0"/>
+              <a:t>Item : </a:t>
+            </a:r>
+            <a:r>
+              <a:rPr lang="en-US" altLang="ko-KR" dirty="0" smtClean="0"/>
+              <a:t>2)</a:t>
+            </a:r>
+          </a:p>
+          <a:p>
+            <a:pPr lvl="2"/>
+            <a:r>
+              <a:rPr lang="en-US" altLang="ko-KR" dirty="0"/>
+              <a:t>The </a:t>
+            </a:r>
+            <a:r>
+              <a:rPr lang="en-US" altLang="ko-KR" dirty="0" err="1"/>
+              <a:t>InstrumentService</a:t>
+            </a:r>
+            <a:r>
+              <a:rPr lang="en-US" altLang="ko-KR" dirty="0"/>
+              <a:t> instance associated with this client</a:t>
+            </a:r>
+            <a:endParaRPr lang="en-US" altLang="ko-KR" dirty="0" smtClean="0"/>
+          </a:p>
+          <a:p>
+            <a:pPr lvl="1"/>
+            <a:r>
+              <a:rPr lang="en-US" altLang="ko-KR" dirty="0"/>
+              <a:t>public </a:t>
+            </a:r>
+            <a:r>
+              <a:rPr lang="en-US" altLang="ko-KR" dirty="0" err="1"/>
+              <a:t>MasksService</a:t>
+            </a:r>
+            <a:r>
+              <a:rPr lang="en-US" altLang="ko-KR" dirty="0"/>
+              <a:t> Masks;	</a:t>
+            </a:r>
+            <a:r>
+              <a:rPr lang="en-US" altLang="ko-KR" dirty="0" smtClean="0"/>
+              <a:t>(</a:t>
+            </a:r>
+            <a:r>
+              <a:rPr lang="en-US" altLang="ko-KR" dirty="0"/>
+              <a:t>Item : </a:t>
+            </a:r>
+            <a:r>
+              <a:rPr lang="en-US" altLang="ko-KR" dirty="0" smtClean="0"/>
+              <a:t>3)</a:t>
+            </a:r>
+          </a:p>
+          <a:p>
+            <a:pPr lvl="2"/>
+            <a:r>
+              <a:rPr lang="en-US" altLang="ko-KR" dirty="0"/>
+              <a:t>The </a:t>
+            </a:r>
+            <a:r>
+              <a:rPr lang="en-US" altLang="ko-KR" dirty="0" err="1"/>
+              <a:t>MasksService</a:t>
+            </a:r>
+            <a:r>
+              <a:rPr lang="en-US" altLang="ko-KR" dirty="0"/>
+              <a:t> instance associated with this client</a:t>
+            </a:r>
+            <a:endParaRPr lang="en-US" altLang="ko-KR" dirty="0" smtClean="0"/>
+          </a:p>
+          <a:p>
+            <a:pPr lvl="1"/>
+            <a:r>
+              <a:rPr lang="en-US" altLang="ko-KR" dirty="0"/>
+              <a:t>public </a:t>
+            </a:r>
+            <a:r>
+              <a:rPr lang="en-US" altLang="ko-KR" dirty="0" err="1"/>
+              <a:t>MotionService</a:t>
+            </a:r>
+            <a:r>
+              <a:rPr lang="en-US" altLang="ko-KR" dirty="0"/>
+              <a:t> Motion; </a:t>
+            </a:r>
+            <a:r>
+              <a:rPr lang="en-US" altLang="ko-KR" dirty="0" smtClean="0"/>
+              <a:t>	(</a:t>
+            </a:r>
+            <a:r>
+              <a:rPr lang="en-US" altLang="ko-KR" dirty="0"/>
+              <a:t>Item : </a:t>
+            </a:r>
+            <a:r>
+              <a:rPr lang="en-US" altLang="ko-KR" dirty="0" smtClean="0"/>
+              <a:t>4)</a:t>
+            </a:r>
+          </a:p>
+          <a:p>
+            <a:pPr lvl="2"/>
+            <a:r>
+              <a:rPr lang="en-US" altLang="ko-KR" dirty="0"/>
+              <a:t>The </a:t>
+            </a:r>
+            <a:r>
+              <a:rPr lang="en-US" altLang="ko-KR" dirty="0" err="1"/>
+              <a:t>MotionService</a:t>
+            </a:r>
+            <a:r>
+              <a:rPr lang="en-US" altLang="ko-KR" dirty="0"/>
+              <a:t> instance associated with this client</a:t>
+            </a:r>
+            <a:endParaRPr lang="en-US" altLang="ko-KR" dirty="0" smtClean="0"/>
+          </a:p>
+          <a:p>
+            <a:pPr lvl="1"/>
+            <a:r>
+              <a:rPr lang="en-US" altLang="ko-KR" dirty="0"/>
+              <a:t>public </a:t>
+            </a:r>
+            <a:r>
+              <a:rPr lang="en-US" altLang="ko-KR" dirty="0" err="1"/>
+              <a:t>PatternService</a:t>
+            </a:r>
+            <a:r>
+              <a:rPr lang="en-US" altLang="ko-KR" dirty="0"/>
+              <a:t> Pattern; </a:t>
+            </a:r>
+            <a:r>
+              <a:rPr lang="en-US" altLang="ko-KR" dirty="0" smtClean="0"/>
+              <a:t>	(</a:t>
+            </a:r>
+            <a:r>
+              <a:rPr lang="en-US" altLang="ko-KR" dirty="0"/>
+              <a:t>Item : </a:t>
+            </a:r>
+            <a:r>
+              <a:rPr lang="en-US" altLang="ko-KR" dirty="0" smtClean="0"/>
+              <a:t>5)</a:t>
+            </a:r>
+          </a:p>
+          <a:p>
+            <a:pPr lvl="2"/>
+            <a:r>
+              <a:rPr lang="en-US" altLang="ko-KR" dirty="0"/>
+              <a:t>The </a:t>
+            </a:r>
+            <a:r>
+              <a:rPr lang="en-US" altLang="ko-KR" dirty="0" err="1"/>
+              <a:t>PatternService</a:t>
+            </a:r>
+            <a:r>
+              <a:rPr lang="en-US" altLang="ko-KR" dirty="0"/>
+              <a:t> instance associated with this client</a:t>
+            </a:r>
+            <a:endParaRPr lang="en-US" altLang="ko-KR" dirty="0" smtClean="0"/>
+          </a:p>
+          <a:p>
+            <a:pPr lvl="1"/>
+            <a:r>
+              <a:rPr lang="en-US" altLang="ko-KR" dirty="0"/>
+              <a:t>public </a:t>
+            </a:r>
+            <a:r>
+              <a:rPr lang="en-US" altLang="ko-KR" dirty="0" err="1"/>
+              <a:t>RecipeService</a:t>
+            </a:r>
+            <a:r>
+              <a:rPr lang="en-US" altLang="ko-KR" dirty="0"/>
+              <a:t> Recipe; </a:t>
+            </a:r>
+            <a:r>
+              <a:rPr lang="en-US" altLang="ko-KR" dirty="0" smtClean="0"/>
+              <a:t>	(</a:t>
+            </a:r>
+            <a:r>
+              <a:rPr lang="en-US" altLang="ko-KR" dirty="0"/>
+              <a:t>Item : </a:t>
+            </a:r>
+            <a:r>
+              <a:rPr lang="en-US" altLang="ko-KR" dirty="0" smtClean="0"/>
+              <a:t>6)</a:t>
+            </a:r>
+          </a:p>
+          <a:p>
+            <a:pPr lvl="2"/>
+            <a:r>
+              <a:rPr lang="en-US" altLang="ko-KR" dirty="0"/>
+              <a:t>The </a:t>
+            </a:r>
+            <a:r>
+              <a:rPr lang="en-US" altLang="ko-KR" dirty="0" err="1"/>
+              <a:t>RecipeService</a:t>
+            </a:r>
+            <a:r>
+              <a:rPr lang="en-US" altLang="ko-KR" dirty="0"/>
+              <a:t> instance associated with this </a:t>
+            </a:r>
+            <a:r>
+              <a:rPr lang="en-US" altLang="ko-KR" dirty="0" smtClean="0"/>
+              <a:t>client</a:t>
+            </a:r>
+          </a:p>
+          <a:p>
+            <a:pPr lvl="1"/>
+            <a:r>
+              <a:rPr lang="en-US" altLang="ko-KR" dirty="0"/>
+              <a:t>public </a:t>
+            </a:r>
+            <a:r>
+              <a:rPr lang="en-US" altLang="ko-KR" dirty="0" err="1"/>
+              <a:t>SystemCommandsService</a:t>
+            </a:r>
+            <a:r>
+              <a:rPr lang="en-US" altLang="ko-KR" dirty="0"/>
+              <a:t> </a:t>
+            </a:r>
+            <a:r>
+              <a:rPr lang="en-US" altLang="ko-KR" dirty="0" err="1"/>
+              <a:t>SystemCommands</a:t>
+            </a:r>
+            <a:r>
+              <a:rPr lang="en-US" altLang="ko-KR" dirty="0"/>
+              <a:t>; </a:t>
+            </a:r>
+            <a:r>
+              <a:rPr lang="en-US" altLang="ko-KR" dirty="0" smtClean="0"/>
+              <a:t>	(</a:t>
+            </a:r>
+            <a:r>
+              <a:rPr lang="en-US" altLang="ko-KR" dirty="0"/>
+              <a:t>Item : </a:t>
+            </a:r>
+            <a:r>
+              <a:rPr lang="en-US" altLang="ko-KR" dirty="0" smtClean="0"/>
+              <a:t>7)</a:t>
+            </a:r>
+          </a:p>
+          <a:p>
+            <a:pPr lvl="2"/>
+            <a:r>
+              <a:rPr lang="en-US" altLang="ko-KR" dirty="0"/>
+              <a:t>The </a:t>
+            </a:r>
+            <a:r>
+              <a:rPr lang="en-US" altLang="ko-KR" dirty="0" err="1"/>
+              <a:t>SystemCommandsService</a:t>
+            </a:r>
+            <a:r>
+              <a:rPr lang="en-US" altLang="ko-KR" dirty="0"/>
+              <a:t> instance associated with this </a:t>
+            </a:r>
+            <a:r>
+              <a:rPr lang="en-US" altLang="ko-KR" dirty="0" smtClean="0"/>
+              <a:t>client</a:t>
+            </a:r>
+          </a:p>
+          <a:p>
+            <a:pPr lvl="1"/>
+            <a:r>
+              <a:rPr lang="en-US" altLang="ko-KR" dirty="0"/>
+              <a:t>public </a:t>
+            </a:r>
+            <a:r>
+              <a:rPr lang="en-US" altLang="ko-KR" dirty="0" err="1"/>
+              <a:t>UserInterfaceService</a:t>
+            </a:r>
+            <a:r>
+              <a:rPr lang="en-US" altLang="ko-KR" dirty="0"/>
+              <a:t> </a:t>
+            </a:r>
+            <a:r>
+              <a:rPr lang="en-US" altLang="ko-KR" dirty="0" err="1"/>
+              <a:t>UserInterface</a:t>
+            </a:r>
+            <a:r>
+              <a:rPr lang="en-US" altLang="ko-KR" dirty="0"/>
+              <a:t>; </a:t>
+            </a:r>
+            <a:r>
+              <a:rPr lang="en-US" altLang="ko-KR" dirty="0" smtClean="0"/>
+              <a:t>	(</a:t>
+            </a:r>
+            <a:r>
+              <a:rPr lang="en-US" altLang="ko-KR" dirty="0"/>
+              <a:t>Item : </a:t>
+            </a:r>
+            <a:r>
+              <a:rPr lang="en-US" altLang="ko-KR" dirty="0" smtClean="0"/>
+              <a:t>8)</a:t>
+            </a:r>
+          </a:p>
+          <a:p>
+            <a:pPr lvl="2"/>
+            <a:r>
+              <a:rPr lang="en-US" altLang="ko-KR" dirty="0"/>
+              <a:t>The </a:t>
+            </a:r>
+            <a:r>
+              <a:rPr lang="en-US" altLang="ko-KR" dirty="0" err="1"/>
+              <a:t>UserInterfaceService</a:t>
+            </a:r>
+            <a:r>
+              <a:rPr lang="en-US" altLang="ko-KR" dirty="0"/>
+              <a:t> instance associated with this client</a:t>
+            </a:r>
+            <a:endParaRPr lang="ko-KR" altLang="en-US" dirty="0"/>
+          </a:p>
+        </p:txBody>
+      </p:sp>
+      <p:sp>
+        <p:nvSpPr>
+          <p:cNvPr id="5" name="실행 단추: 돌아가기 4">
+            <a:hlinkClick r:id="rId2" action="ppaction://hlinksldjump" highlightClick="1"/>
+          </p:cNvPr>
+          <p:cNvSpPr/>
+          <p:nvPr/>
+        </p:nvSpPr>
+        <p:spPr>
+          <a:xfrm>
+            <a:off x="10310192" y="5272502"/>
+            <a:ext cx="1043608" cy="904461"/>
+          </a:xfrm>
+          <a:prstGeom prst="actionButtonReturn">
+            <a:avLst/>
+          </a:prstGeom>
+          <a:noFill/>
+          <a:ln w="19050">
+            <a:solidFill>
+              <a:schemeClr val="tx1"/>
+            </a:solidFill>
+          </a:ln>
+        </p:spPr>
+        <p:style>
+          <a:lnRef idx="2">
+            <a:schemeClr val="accent1">
+              <a:shade val="50000"/>
+            </a:schemeClr>
+          </a:lnRef>
+          <a:fillRef idx="1">
+            <a:schemeClr val="accent1"/>
+          </a:fillRef>
+          <a:effectRef idx="0">
+            <a:schemeClr val="accent1"/>
+          </a:effectRef>
+          <a:fontRef idx="minor">
+            <a:schemeClr val="lt1"/>
+          </a:fontRef>
+        </p:style>
+        <p:txBody>
+          <a:bodyPr rtlCol="0" anchor="ctr"/>
+          <a:lstStyle/>
+          <a:p>
+            <a:pPr algn="ctr"/>
+            <a:endParaRPr lang="ko-KR" altLang="en-US"/>
+          </a:p>
+        </p:txBody>
+      </p:sp>
+    </p:spTree>
+    <p:extLst>
+      <p:ext uri="{BB962C8B-B14F-4D97-AF65-F5344CB8AC3E}">
+        <p14:creationId xmlns:p14="http://schemas.microsoft.com/office/powerpoint/2010/main" val="1847982588"/>
+      </p:ext>
+    </p:extLst>
+  </p:cSld>
+  <p:clrMapOvr>
+    <a:masterClrMapping/>
+  </p:clrMapOvr>
+  <p:timing>
+    <p:tnLst>
+      <p:par>
+        <p:cTn id="1" dur="indefinite" restart="never" nodeType="tmRoot"/>
+      </p:par>
+    </p:tnLst>
+  </p:timing>
+</p:sld>
+</file>
+
+<file path=ppt/slides/slide70.xml><?xml version="1.0" encoding="utf-8"?>
+<p:sld xmlns:a="http://schemas.openxmlformats.org/drawingml/2006/main" xmlns:r="http://schemas.openxmlformats.org/officeDocument/2006/relationships" xmlns:p="http://schemas.openxmlformats.org/presentationml/2006/main">
+  <p:cSld>
+    <p:spTree>
+      <p:nvGrpSpPr>
+        <p:cNvPr id="1" name=""/>
+        <p:cNvGrpSpPr/>
+        <p:nvPr/>
+      </p:nvGrpSpPr>
+      <p:grpSpPr>
+        <a:xfrm>
+          <a:off x="0" y="0"/>
+          <a:ext cx="0" cy="0"/>
+          <a:chOff x="0" y="0"/>
+          <a:chExt cx="0" cy="0"/>
+        </a:xfrm>
+      </p:grpSpPr>
+      <p:sp>
+        <p:nvSpPr>
+          <p:cNvPr id="2" name="제목 1"/>
+          <p:cNvSpPr>
+            <a:spLocks noGrp="1"/>
+          </p:cNvSpPr>
+          <p:nvPr>
+            <p:ph type="title"/>
+          </p:nvPr>
+        </p:nvSpPr>
+        <p:spPr/>
+        <p:txBody>
+          <a:bodyPr/>
+          <a:lstStyle/>
+          <a:p>
+            <a:r>
+              <a:rPr lang="en-US" altLang="ko-KR" dirty="0" smtClean="0"/>
+              <a:t>HDF5 (</a:t>
+            </a:r>
+            <a:r>
+              <a:rPr lang="en-US" altLang="ko-KR" dirty="0"/>
+              <a:t> Hierarchical Data </a:t>
+            </a:r>
+            <a:r>
+              <a:rPr lang="en-US" altLang="ko-KR" dirty="0" smtClean="0"/>
+              <a:t>Format)</a:t>
+            </a:r>
+            <a:endParaRPr lang="ko-KR" altLang="en-US" dirty="0"/>
+          </a:p>
+        </p:txBody>
+      </p:sp>
+      <p:sp>
+        <p:nvSpPr>
+          <p:cNvPr id="3" name="내용 개체 틀 2"/>
+          <p:cNvSpPr>
+            <a:spLocks noGrp="1"/>
+          </p:cNvSpPr>
+          <p:nvPr>
+            <p:ph idx="1"/>
+          </p:nvPr>
+        </p:nvSpPr>
+        <p:spPr/>
+        <p:txBody>
+          <a:bodyPr/>
+          <a:lstStyle/>
+          <a:p>
+            <a:r>
+              <a:rPr lang="ko-KR" altLang="en-US" dirty="0"/>
+              <a:t>그룹</a:t>
+            </a:r>
+            <a:r>
+              <a:rPr lang="en-US" altLang="ko-KR" dirty="0"/>
+              <a:t>(</a:t>
+            </a:r>
+            <a:r>
+              <a:rPr lang="en-US" altLang="ko-KR" b="1" dirty="0"/>
+              <a:t>Group</a:t>
+            </a:r>
+            <a:r>
+              <a:rPr lang="en-US" altLang="ko-KR" dirty="0"/>
+              <a:t>), </a:t>
+            </a:r>
+            <a:r>
+              <a:rPr lang="ko-KR" altLang="en-US" dirty="0" err="1"/>
+              <a:t>데이터셋</a:t>
+            </a:r>
+            <a:r>
+              <a:rPr lang="en-US" altLang="ko-KR" dirty="0"/>
+              <a:t>(</a:t>
+            </a:r>
+            <a:r>
+              <a:rPr lang="en-US" altLang="ko-KR" b="1" dirty="0"/>
+              <a:t>Dataset</a:t>
+            </a:r>
+            <a:r>
+              <a:rPr lang="en-US" altLang="ko-KR" dirty="0"/>
+              <a:t>), </a:t>
+            </a:r>
+            <a:r>
+              <a:rPr lang="ko-KR" altLang="en-US" dirty="0"/>
+              <a:t>속성</a:t>
+            </a:r>
+            <a:r>
+              <a:rPr lang="en-US" altLang="ko-KR" dirty="0"/>
+              <a:t>(</a:t>
+            </a:r>
+            <a:r>
+              <a:rPr lang="en-US" altLang="ko-KR" b="1" dirty="0"/>
+              <a:t>attribute</a:t>
+            </a:r>
+            <a:r>
+              <a:rPr lang="en-US" altLang="ko-KR" dirty="0" smtClean="0"/>
+              <a:t>)</a:t>
+            </a:r>
+          </a:p>
+          <a:p>
+            <a:pPr lvl="1"/>
+            <a:r>
+              <a:rPr lang="ko-KR" altLang="en-US" dirty="0"/>
+              <a:t>그룹</a:t>
+            </a:r>
+            <a:r>
+              <a:rPr lang="en-US" altLang="ko-KR" dirty="0"/>
+              <a:t>=</a:t>
+            </a:r>
+            <a:r>
+              <a:rPr lang="ko-KR" altLang="en-US" dirty="0" err="1"/>
+              <a:t>디렉토리</a:t>
+            </a:r>
+            <a:r>
+              <a:rPr lang="en-US" altLang="ko-KR" dirty="0"/>
+              <a:t>, </a:t>
+            </a:r>
+            <a:r>
+              <a:rPr lang="ko-KR" altLang="en-US" dirty="0" err="1"/>
+              <a:t>데이터셋</a:t>
+            </a:r>
+            <a:r>
+              <a:rPr lang="en-US" altLang="ko-KR" dirty="0"/>
+              <a:t>=</a:t>
+            </a:r>
+            <a:r>
+              <a:rPr lang="ko-KR" altLang="en-US" dirty="0" smtClean="0"/>
+              <a:t>파일</a:t>
+            </a:r>
+            <a:endParaRPr lang="en-US" altLang="ko-KR" dirty="0" smtClean="0"/>
+          </a:p>
+          <a:p>
+            <a:pPr lvl="1"/>
+            <a:r>
+              <a:rPr lang="ko-KR" altLang="en-US" dirty="0"/>
+              <a:t>속성은 사용자가 </a:t>
+            </a:r>
+            <a:r>
+              <a:rPr lang="ko-KR" altLang="en-US" dirty="0" smtClean="0"/>
+              <a:t>정의하는 일종의 메타데이터</a:t>
+            </a:r>
+            <a:endParaRPr lang="en-US" altLang="ko-KR" dirty="0" smtClean="0"/>
+          </a:p>
+          <a:p>
+            <a:pPr lvl="2"/>
+            <a:r>
+              <a:rPr lang="ko-KR" altLang="en-US" dirty="0" smtClean="0"/>
+              <a:t>그룹이나 </a:t>
+            </a:r>
+            <a:r>
+              <a:rPr lang="ko-KR" altLang="en-US" dirty="0" err="1"/>
+              <a:t>데이터셋을</a:t>
+            </a:r>
+            <a:r>
+              <a:rPr lang="ko-KR" altLang="en-US" dirty="0"/>
+              <a:t> 부연 </a:t>
+            </a:r>
+            <a:r>
+              <a:rPr lang="ko-KR" altLang="en-US" dirty="0" smtClean="0"/>
+              <a:t>설명함</a:t>
+            </a:r>
+            <a:endParaRPr lang="en-US" altLang="ko-KR" dirty="0" smtClean="0"/>
+          </a:p>
+          <a:p>
+            <a:r>
+              <a:rPr lang="ko-KR" altLang="en-US" dirty="0"/>
+              <a:t>운영체계와 </a:t>
+            </a:r>
+            <a:r>
+              <a:rPr lang="ko-KR" altLang="en-US" dirty="0" smtClean="0"/>
+              <a:t>무관</a:t>
+            </a:r>
+            <a:endParaRPr lang="en-US" altLang="ko-KR" dirty="0" smtClean="0"/>
+          </a:p>
+          <a:p>
+            <a:r>
+              <a:rPr lang="ko-KR" altLang="en-US" dirty="0" smtClean="0"/>
+              <a:t>대용량 </a:t>
+            </a:r>
+            <a:r>
+              <a:rPr lang="ko-KR" altLang="en-US" dirty="0"/>
+              <a:t>데이터를 빠르게 읽고 쓸 수 있다</a:t>
+            </a:r>
+            <a:r>
+              <a:rPr lang="en-US" altLang="ko-KR" dirty="0"/>
+              <a:t>.</a:t>
+            </a:r>
+            <a:endParaRPr lang="ko-KR" altLang="en-US" dirty="0"/>
+          </a:p>
+        </p:txBody>
+      </p:sp>
+    </p:spTree>
+    <p:extLst>
+      <p:ext uri="{BB962C8B-B14F-4D97-AF65-F5344CB8AC3E}">
+        <p14:creationId xmlns:p14="http://schemas.microsoft.com/office/powerpoint/2010/main" val="597132348"/>
+      </p:ext>
+    </p:extLst>
+  </p:cSld>
+  <p:clrMapOvr>
+    <a:masterClrMapping/>
+  </p:clrMapOvr>
+</p:sld>
+</file>
+
+<file path=ppt/slides/slide71.xml><?xml version="1.0" encoding="utf-8"?>
+<p:sld xmlns:a="http://schemas.openxmlformats.org/drawingml/2006/main" xmlns:r="http://schemas.openxmlformats.org/officeDocument/2006/relationships" xmlns:p="http://schemas.openxmlformats.org/presentationml/2006/main">
+  <p:cSld>
+    <p:spTree>
+      <p:nvGrpSpPr>
+        <p:cNvPr id="1" name=""/>
+        <p:cNvGrpSpPr/>
+        <p:nvPr/>
+      </p:nvGrpSpPr>
+      <p:grpSpPr>
+        <a:xfrm>
+          <a:off x="0" y="0"/>
+          <a:ext cx="0" cy="0"/>
+          <a:chOff x="0" y="0"/>
+          <a:chExt cx="0" cy="0"/>
+        </a:xfrm>
+      </p:grpSpPr>
+      <p:sp>
+        <p:nvSpPr>
+          <p:cNvPr id="2" name="제목 1"/>
+          <p:cNvSpPr>
+            <a:spLocks noGrp="1"/>
+          </p:cNvSpPr>
+          <p:nvPr>
+            <p:ph type="title"/>
+          </p:nvPr>
+        </p:nvSpPr>
+        <p:spPr/>
+        <p:txBody>
+          <a:bodyPr/>
+          <a:lstStyle/>
+          <a:p>
+            <a:r>
+              <a:rPr lang="en-US" altLang="ko-KR" dirty="0" smtClean="0"/>
+              <a:t>HDF5 </a:t>
+            </a:r>
+            <a:r>
+              <a:rPr lang="ko-KR" altLang="en-US" dirty="0" smtClean="0"/>
+              <a:t>간단한 예</a:t>
+            </a:r>
+            <a:endParaRPr lang="ko-KR" altLang="en-US" dirty="0"/>
+          </a:p>
+        </p:txBody>
+      </p:sp>
+      <p:sp>
+        <p:nvSpPr>
+          <p:cNvPr id="4" name="TextBox 3"/>
+          <p:cNvSpPr txBox="1"/>
+          <p:nvPr/>
+        </p:nvSpPr>
+        <p:spPr>
+          <a:xfrm>
+            <a:off x="838199" y="1825625"/>
+            <a:ext cx="5827295" cy="4185761"/>
+          </a:xfrm>
+          <a:prstGeom prst="rect">
+            <a:avLst/>
+          </a:prstGeom>
+          <a:noFill/>
+        </p:spPr>
+        <p:txBody>
+          <a:bodyPr wrap="square" rtlCol="0">
+            <a:spAutoFit/>
+          </a:bodyPr>
+          <a:lstStyle/>
+          <a:p>
+            <a:r>
+              <a:rPr lang="en-US" altLang="ko-KR" sz="1400" dirty="0"/>
+              <a:t># </a:t>
+            </a:r>
+            <a:r>
+              <a:rPr lang="en-US" altLang="ko-KR" sz="1400" dirty="0" smtClean="0"/>
+              <a:t>write</a:t>
+            </a:r>
+          </a:p>
+          <a:p>
+            <a:endParaRPr lang="en-US" altLang="ko-KR" sz="1400" dirty="0" smtClean="0"/>
+          </a:p>
+          <a:p>
+            <a:r>
+              <a:rPr lang="en-US" altLang="ko-KR" sz="1400" dirty="0"/>
+              <a:t>f = h5py.File('weather.hdf5','w')  # 'a'</a:t>
+            </a:r>
+          </a:p>
+          <a:p>
+            <a:r>
+              <a:rPr lang="en-US" altLang="ko-KR" sz="1400" dirty="0" err="1"/>
+              <a:t>f.attrs</a:t>
+            </a:r>
+            <a:r>
+              <a:rPr lang="en-US" altLang="ko-KR" sz="1400" dirty="0"/>
+              <a:t>['</a:t>
+            </a:r>
+            <a:r>
+              <a:rPr lang="en-US" altLang="ko-KR" sz="1400" dirty="0" err="1"/>
+              <a:t>descr</a:t>
+            </a:r>
+            <a:r>
+              <a:rPr lang="en-US" altLang="ko-KR" sz="1400" dirty="0"/>
+              <a:t>'] = 'Temperature and wind data at HK mall'</a:t>
+            </a:r>
+          </a:p>
+          <a:p>
+            <a:endParaRPr lang="en-US" altLang="ko-KR" sz="1400" dirty="0"/>
+          </a:p>
+          <a:p>
+            <a:r>
+              <a:rPr lang="en-US" altLang="ko-KR" sz="1400" dirty="0"/>
+              <a:t>f['/15/temperature'] = temperature15</a:t>
+            </a:r>
+          </a:p>
+          <a:p>
+            <a:r>
+              <a:rPr lang="en-US" altLang="ko-KR" sz="1400" dirty="0"/>
+              <a:t>f['/15/temperature'].</a:t>
+            </a:r>
+            <a:r>
+              <a:rPr lang="en-US" altLang="ko-KR" sz="1400" dirty="0" err="1"/>
+              <a:t>attrs</a:t>
+            </a:r>
+            <a:r>
+              <a:rPr lang="en-US" altLang="ko-KR" sz="1400" dirty="0"/>
+              <a:t>['</a:t>
+            </a:r>
+            <a:r>
+              <a:rPr lang="en-US" altLang="ko-KR" sz="1400" dirty="0" err="1"/>
+              <a:t>dt</a:t>
+            </a:r>
+            <a:r>
+              <a:rPr lang="en-US" altLang="ko-KR" sz="1400" dirty="0"/>
+              <a:t>'] = 10.0</a:t>
+            </a:r>
+          </a:p>
+          <a:p>
+            <a:r>
+              <a:rPr lang="en-US" altLang="ko-KR" sz="1400" dirty="0"/>
+              <a:t>f['/15/temperature'].</a:t>
+            </a:r>
+            <a:r>
+              <a:rPr lang="en-US" altLang="ko-KR" sz="1400" dirty="0" err="1"/>
+              <a:t>attrs</a:t>
+            </a:r>
+            <a:r>
+              <a:rPr lang="en-US" altLang="ko-KR" sz="1400" dirty="0"/>
+              <a:t>['</a:t>
+            </a:r>
+            <a:r>
+              <a:rPr lang="en-US" altLang="ko-KR" sz="1400" dirty="0" err="1"/>
+              <a:t>start_time</a:t>
+            </a:r>
+            <a:r>
+              <a:rPr lang="en-US" altLang="ko-KR" sz="1400" dirty="0"/>
+              <a:t>'] = 1375204299</a:t>
+            </a:r>
+          </a:p>
+          <a:p>
+            <a:r>
+              <a:rPr lang="en-US" altLang="ko-KR" sz="1400" dirty="0"/>
+              <a:t>f['/15/wind'] = wind15</a:t>
+            </a:r>
+          </a:p>
+          <a:p>
+            <a:r>
+              <a:rPr lang="en-US" altLang="ko-KR" sz="1400" dirty="0"/>
+              <a:t>f['/15/wind'].</a:t>
+            </a:r>
+            <a:r>
+              <a:rPr lang="en-US" altLang="ko-KR" sz="1400" dirty="0" err="1"/>
+              <a:t>attrs</a:t>
+            </a:r>
+            <a:r>
+              <a:rPr lang="en-US" altLang="ko-KR" sz="1400" dirty="0"/>
+              <a:t>['</a:t>
+            </a:r>
+            <a:r>
+              <a:rPr lang="en-US" altLang="ko-KR" sz="1400" dirty="0" err="1"/>
+              <a:t>dt</a:t>
+            </a:r>
+            <a:r>
+              <a:rPr lang="en-US" altLang="ko-KR" sz="1400" dirty="0"/>
+              <a:t>'] = 5.0</a:t>
+            </a:r>
+          </a:p>
+          <a:p>
+            <a:endParaRPr lang="en-US" altLang="ko-KR" sz="1400" dirty="0"/>
+          </a:p>
+          <a:p>
+            <a:r>
+              <a:rPr lang="en-US" altLang="ko-KR" sz="1400" dirty="0"/>
+              <a:t>f['/20/temperature'] = temperature20</a:t>
+            </a:r>
+          </a:p>
+          <a:p>
+            <a:r>
+              <a:rPr lang="en-US" altLang="ko-KR" sz="1400" dirty="0"/>
+              <a:t>f['/20/temperature'].</a:t>
+            </a:r>
+            <a:r>
+              <a:rPr lang="en-US" altLang="ko-KR" sz="1400" dirty="0" err="1"/>
+              <a:t>attrs</a:t>
+            </a:r>
+            <a:r>
+              <a:rPr lang="en-US" altLang="ko-KR" sz="1400" dirty="0"/>
+              <a:t>['</a:t>
+            </a:r>
+            <a:r>
+              <a:rPr lang="en-US" altLang="ko-KR" sz="1400" dirty="0" err="1"/>
+              <a:t>dt</a:t>
+            </a:r>
+            <a:r>
+              <a:rPr lang="en-US" altLang="ko-KR" sz="1400" dirty="0"/>
+              <a:t>'] = 10.0</a:t>
+            </a:r>
+          </a:p>
+          <a:p>
+            <a:r>
+              <a:rPr lang="en-US" altLang="ko-KR" sz="1400" dirty="0"/>
+              <a:t>f['/20/temperature'].</a:t>
+            </a:r>
+            <a:r>
+              <a:rPr lang="en-US" altLang="ko-KR" sz="1400" dirty="0" err="1"/>
+              <a:t>attrs</a:t>
+            </a:r>
+            <a:r>
+              <a:rPr lang="en-US" altLang="ko-KR" sz="1400" dirty="0"/>
+              <a:t>['</a:t>
+            </a:r>
+            <a:r>
+              <a:rPr lang="en-US" altLang="ko-KR" sz="1400" dirty="0" err="1"/>
+              <a:t>start_time</a:t>
+            </a:r>
+            <a:r>
+              <a:rPr lang="en-US" altLang="ko-KR" sz="1400" dirty="0"/>
+              <a:t>'] = 1375204299</a:t>
+            </a:r>
+          </a:p>
+          <a:p>
+            <a:r>
+              <a:rPr lang="en-US" altLang="ko-KR" sz="1400" dirty="0"/>
+              <a:t>f['/20/wind'] = wind20</a:t>
+            </a:r>
+          </a:p>
+          <a:p>
+            <a:r>
+              <a:rPr lang="en-US" altLang="ko-KR" sz="1400" dirty="0"/>
+              <a:t>f['/20/wind'].</a:t>
+            </a:r>
+            <a:r>
+              <a:rPr lang="en-US" altLang="ko-KR" sz="1400" dirty="0" err="1"/>
+              <a:t>attrs</a:t>
+            </a:r>
+            <a:r>
+              <a:rPr lang="en-US" altLang="ko-KR" sz="1400" dirty="0"/>
+              <a:t>['</a:t>
+            </a:r>
+            <a:r>
+              <a:rPr lang="en-US" altLang="ko-KR" sz="1400" dirty="0" err="1"/>
+              <a:t>dt</a:t>
+            </a:r>
+            <a:r>
+              <a:rPr lang="en-US" altLang="ko-KR" sz="1400" dirty="0"/>
+              <a:t>'] = 5.0</a:t>
+            </a:r>
+          </a:p>
+          <a:p>
+            <a:endParaRPr lang="en-US" altLang="ko-KR" sz="1400" dirty="0"/>
+          </a:p>
+          <a:p>
+            <a:r>
+              <a:rPr lang="en-US" altLang="ko-KR" sz="1400" dirty="0" err="1"/>
+              <a:t>f.close</a:t>
+            </a:r>
+            <a:r>
+              <a:rPr lang="en-US" altLang="ko-KR" sz="1400" dirty="0"/>
+              <a:t>()</a:t>
+            </a:r>
+            <a:br>
+              <a:rPr lang="en-US" altLang="ko-KR" sz="1400" dirty="0"/>
+            </a:br>
+            <a:endParaRPr lang="ko-KR" altLang="en-US" sz="1400" dirty="0"/>
+          </a:p>
+        </p:txBody>
+      </p:sp>
+      <p:sp>
+        <p:nvSpPr>
+          <p:cNvPr id="5" name="TextBox 4"/>
+          <p:cNvSpPr txBox="1"/>
+          <p:nvPr/>
+        </p:nvSpPr>
+        <p:spPr>
+          <a:xfrm>
+            <a:off x="6789821" y="1825625"/>
+            <a:ext cx="4042610" cy="1600438"/>
+          </a:xfrm>
+          <a:prstGeom prst="rect">
+            <a:avLst/>
+          </a:prstGeom>
+          <a:noFill/>
+        </p:spPr>
+        <p:txBody>
+          <a:bodyPr wrap="square" rtlCol="0">
+            <a:spAutoFit/>
+          </a:bodyPr>
+          <a:lstStyle/>
+          <a:p>
+            <a:r>
+              <a:rPr lang="en-US" altLang="ko-KR" sz="1400" dirty="0"/>
+              <a:t># read</a:t>
+            </a:r>
+            <a:endParaRPr lang="en-US" altLang="ko-KR" sz="1400" dirty="0" smtClean="0"/>
+          </a:p>
+          <a:p>
+            <a:endParaRPr lang="en-US" altLang="ko-KR" sz="1400" dirty="0" smtClean="0"/>
+          </a:p>
+          <a:p>
+            <a:r>
+              <a:rPr lang="en-US" altLang="ko-KR" sz="1400" dirty="0"/>
+              <a:t>f = h5py.File('weather.hdf5','r')</a:t>
+            </a:r>
+          </a:p>
+          <a:p>
+            <a:r>
+              <a:rPr lang="en-US" altLang="ko-KR" sz="1400" dirty="0"/>
+              <a:t>temp = f['15/temperature'][:]</a:t>
+            </a:r>
+          </a:p>
+          <a:p>
+            <a:r>
+              <a:rPr lang="en-US" altLang="ko-KR" sz="1400" dirty="0" err="1"/>
+              <a:t>dt</a:t>
+            </a:r>
+            <a:r>
+              <a:rPr lang="en-US" altLang="ko-KR" sz="1400" dirty="0"/>
+              <a:t> = f['15/temperature'].</a:t>
+            </a:r>
+            <a:r>
+              <a:rPr lang="en-US" altLang="ko-KR" sz="1400" dirty="0" err="1"/>
+              <a:t>attrs</a:t>
+            </a:r>
+            <a:r>
+              <a:rPr lang="en-US" altLang="ko-KR" sz="1400" dirty="0"/>
+              <a:t>['</a:t>
+            </a:r>
+            <a:r>
+              <a:rPr lang="en-US" altLang="ko-KR" sz="1400" dirty="0" err="1"/>
+              <a:t>dt</a:t>
+            </a:r>
+            <a:r>
+              <a:rPr lang="en-US" altLang="ko-KR" sz="1400" dirty="0"/>
+              <a:t>']</a:t>
+            </a:r>
+          </a:p>
+          <a:p>
+            <a:r>
+              <a:rPr lang="en-US" altLang="ko-KR" sz="1400" dirty="0" err="1"/>
+              <a:t>f.close</a:t>
+            </a:r>
+            <a:r>
+              <a:rPr lang="en-US" altLang="ko-KR" sz="1400" dirty="0"/>
+              <a:t>()</a:t>
+            </a:r>
+            <a:br>
+              <a:rPr lang="en-US" altLang="ko-KR" sz="1400" dirty="0"/>
+            </a:br>
+            <a:endParaRPr lang="ko-KR" altLang="en-US" sz="1400" dirty="0"/>
+          </a:p>
+        </p:txBody>
+      </p:sp>
+    </p:spTree>
+    <p:extLst>
+      <p:ext uri="{BB962C8B-B14F-4D97-AF65-F5344CB8AC3E}">
+        <p14:creationId xmlns:p14="http://schemas.microsoft.com/office/powerpoint/2010/main" val="1131186754"/>
+      </p:ext>
+    </p:extLst>
+  </p:cSld>
+  <p:clrMapOvr>
+    <a:masterClrMapping/>
+  </p:clrMapOvr>
+</p:sld>
+</file>
+
+<file path=ppt/slides/slide72.xml><?xml version="1.0" encoding="utf-8"?>
+<p:sld xmlns:a="http://schemas.openxmlformats.org/drawingml/2006/main" xmlns:r="http://schemas.openxmlformats.org/officeDocument/2006/relationships" xmlns:p="http://schemas.openxmlformats.org/presentationml/2006/main">
+  <p:cSld>
+    <p:spTree>
+      <p:nvGrpSpPr>
+        <p:cNvPr id="1" name=""/>
+        <p:cNvGrpSpPr/>
+        <p:nvPr/>
+      </p:nvGrpSpPr>
+      <p:grpSpPr>
+        <a:xfrm>
+          <a:off x="0" y="0"/>
+          <a:ext cx="0" cy="0"/>
+          <a:chOff x="0" y="0"/>
+          <a:chExt cx="0" cy="0"/>
+        </a:xfrm>
+      </p:grpSpPr>
+      <p:sp>
+        <p:nvSpPr>
+          <p:cNvPr id="2" name="제목 1"/>
+          <p:cNvSpPr>
+            <a:spLocks noGrp="1"/>
+          </p:cNvSpPr>
+          <p:nvPr>
+            <p:ph type="title"/>
+          </p:nvPr>
+        </p:nvSpPr>
+        <p:spPr/>
+        <p:txBody>
+          <a:bodyPr/>
+          <a:lstStyle/>
+          <a:p>
+            <a:r>
+              <a:rPr lang="en-US" altLang="ko-KR" dirty="0" err="1" smtClean="0"/>
+              <a:t>Zygo</a:t>
+            </a:r>
+            <a:r>
+              <a:rPr lang="en-US" altLang="ko-KR" dirty="0" smtClean="0"/>
+              <a:t> </a:t>
+            </a:r>
+            <a:r>
+              <a:rPr lang="en-US" altLang="ko-KR" dirty="0" err="1" smtClean="0"/>
+              <a:t>datx</a:t>
+            </a:r>
+            <a:r>
+              <a:rPr lang="en-US" altLang="ko-KR" dirty="0" smtClean="0"/>
+              <a:t> format</a:t>
+            </a:r>
+            <a:endParaRPr lang="ko-KR" altLang="en-US" dirty="0"/>
+          </a:p>
+        </p:txBody>
+      </p:sp>
+      <p:sp>
+        <p:nvSpPr>
+          <p:cNvPr id="4" name="내용 개체 틀 2"/>
+          <p:cNvSpPr txBox="1">
+            <a:spLocks/>
+          </p:cNvSpPr>
+          <p:nvPr/>
+        </p:nvSpPr>
+        <p:spPr>
+          <a:xfrm>
+            <a:off x="4720389" y="1825625"/>
+            <a:ext cx="3757863" cy="4351338"/>
+          </a:xfrm>
+          <a:prstGeom prst="rect">
+            <a:avLst/>
+          </a:prstGeom>
+        </p:spPr>
+        <p:txBody>
+          <a:bodyPr vert="horz" lIns="91440" tIns="45720" rIns="91440" bIns="45720" rtlCol="0">
+            <a:normAutofit/>
+          </a:bodyPr>
+          <a:lstStyle>
+            <a:lvl1pPr marL="228600" indent="-228600" algn="l" defTabSz="914400" rtl="0" eaLnBrk="1" latinLnBrk="1" hangingPunct="1">
+              <a:lnSpc>
+                <a:spcPct val="90000"/>
+              </a:lnSpc>
+              <a:spcBef>
+                <a:spcPts val="1000"/>
+              </a:spcBef>
+              <a:buFont typeface="Arial" panose="020B0604020202020204" pitchFamily="34" charset="0"/>
+              <a:buChar char="•"/>
+              <a:defRPr sz="2800" kern="1200">
+                <a:solidFill>
+                  <a:schemeClr val="tx1"/>
+                </a:solidFill>
+                <a:latin typeface="+mn-lt"/>
+                <a:ea typeface="+mn-ea"/>
+                <a:cs typeface="+mn-cs"/>
+              </a:defRPr>
+            </a:lvl1pPr>
+            <a:lvl2pPr marL="685800" indent="-228600" algn="l" defTabSz="914400" rtl="0" eaLnBrk="1" latinLnBrk="1" hangingPunct="1">
+              <a:lnSpc>
+                <a:spcPct val="90000"/>
+              </a:lnSpc>
+              <a:spcBef>
+                <a:spcPts val="500"/>
+              </a:spcBef>
+              <a:buFont typeface="Arial" panose="020B0604020202020204" pitchFamily="34" charset="0"/>
+              <a:buChar char="•"/>
+              <a:defRPr sz="2400" kern="1200">
+                <a:solidFill>
+                  <a:schemeClr val="tx1"/>
+                </a:solidFill>
+                <a:latin typeface="+mn-lt"/>
+                <a:ea typeface="+mn-ea"/>
+                <a:cs typeface="+mn-cs"/>
+              </a:defRPr>
+            </a:lvl2pPr>
+            <a:lvl3pPr marL="1143000" indent="-228600" algn="l" defTabSz="914400" rtl="0" eaLnBrk="1" latinLnBrk="1" hangingPunct="1">
+              <a:lnSpc>
+                <a:spcPct val="90000"/>
+              </a:lnSpc>
+              <a:spcBef>
+                <a:spcPts val="500"/>
+              </a:spcBef>
+              <a:buFont typeface="Arial" panose="020B0604020202020204" pitchFamily="34" charset="0"/>
+              <a:buChar char="•"/>
+              <a:defRPr sz="2000" kern="1200">
+                <a:solidFill>
+                  <a:schemeClr val="tx1"/>
+                </a:solidFill>
+                <a:latin typeface="+mn-lt"/>
+                <a:ea typeface="+mn-ea"/>
+                <a:cs typeface="+mn-cs"/>
+              </a:defRPr>
+            </a:lvl3pPr>
+            <a:lvl4pPr marL="1600200" indent="-228600" algn="l" defTabSz="914400" rtl="0" eaLnBrk="1" latinLnBrk="1" hangingPunct="1">
+              <a:lnSpc>
+                <a:spcPct val="90000"/>
+              </a:lnSpc>
+              <a:spcBef>
+                <a:spcPts val="500"/>
+              </a:spcBef>
+              <a:buFont typeface="Arial" panose="020B0604020202020204" pitchFamily="34" charset="0"/>
+              <a:buChar char="•"/>
+              <a:defRPr sz="1800" kern="1200">
+                <a:solidFill>
+                  <a:schemeClr val="tx1"/>
+                </a:solidFill>
+                <a:latin typeface="+mn-lt"/>
+                <a:ea typeface="+mn-ea"/>
+                <a:cs typeface="+mn-cs"/>
+              </a:defRPr>
+            </a:lvl4pPr>
+            <a:lvl5pPr marL="2057400" indent="-228600" algn="l" defTabSz="914400" rtl="0" eaLnBrk="1" latinLnBrk="1" hangingPunct="1">
+              <a:lnSpc>
+                <a:spcPct val="90000"/>
+              </a:lnSpc>
+              <a:spcBef>
+                <a:spcPts val="500"/>
+              </a:spcBef>
+              <a:buFont typeface="Arial" panose="020B0604020202020204" pitchFamily="34" charset="0"/>
+              <a:buChar char="•"/>
+              <a:defRPr sz="1800" kern="1200">
+                <a:solidFill>
+                  <a:schemeClr val="tx1"/>
+                </a:solidFill>
+                <a:latin typeface="+mn-lt"/>
+                <a:ea typeface="+mn-ea"/>
+                <a:cs typeface="+mn-cs"/>
+              </a:defRPr>
+            </a:lvl5pPr>
+            <a:lvl6pPr marL="2514600" indent="-228600" algn="l" defTabSz="914400" rtl="0" eaLnBrk="1" latinLnBrk="1" hangingPunct="1">
+              <a:lnSpc>
+                <a:spcPct val="90000"/>
+              </a:lnSpc>
+              <a:spcBef>
+                <a:spcPts val="500"/>
+              </a:spcBef>
+              <a:buFont typeface="Arial" panose="020B0604020202020204" pitchFamily="34" charset="0"/>
+              <a:buChar char="•"/>
+              <a:defRPr sz="1800" kern="1200">
+                <a:solidFill>
+                  <a:schemeClr val="tx1"/>
+                </a:solidFill>
+                <a:latin typeface="+mn-lt"/>
+                <a:ea typeface="+mn-ea"/>
+                <a:cs typeface="+mn-cs"/>
+              </a:defRPr>
+            </a:lvl6pPr>
+            <a:lvl7pPr marL="2971800" indent="-228600" algn="l" defTabSz="914400" rtl="0" eaLnBrk="1" latinLnBrk="1" hangingPunct="1">
+              <a:lnSpc>
+                <a:spcPct val="90000"/>
+              </a:lnSpc>
+              <a:spcBef>
+                <a:spcPts val="500"/>
+              </a:spcBef>
+              <a:buFont typeface="Arial" panose="020B0604020202020204" pitchFamily="34" charset="0"/>
+              <a:buChar char="•"/>
+              <a:defRPr sz="1800" kern="1200">
+                <a:solidFill>
+                  <a:schemeClr val="tx1"/>
+                </a:solidFill>
+                <a:latin typeface="+mn-lt"/>
+                <a:ea typeface="+mn-ea"/>
+                <a:cs typeface="+mn-cs"/>
+              </a:defRPr>
+            </a:lvl7pPr>
+            <a:lvl8pPr marL="3429000" indent="-228600" algn="l" defTabSz="914400" rtl="0" eaLnBrk="1" latinLnBrk="1" hangingPunct="1">
+              <a:lnSpc>
+                <a:spcPct val="90000"/>
+              </a:lnSpc>
+              <a:spcBef>
+                <a:spcPts val="500"/>
+              </a:spcBef>
+              <a:buFont typeface="Arial" panose="020B0604020202020204" pitchFamily="34" charset="0"/>
+              <a:buChar char="•"/>
+              <a:defRPr sz="1800" kern="1200">
+                <a:solidFill>
+                  <a:schemeClr val="tx1"/>
+                </a:solidFill>
+                <a:latin typeface="+mn-lt"/>
+                <a:ea typeface="+mn-ea"/>
+                <a:cs typeface="+mn-cs"/>
+              </a:defRPr>
+            </a:lvl8pPr>
+            <a:lvl9pPr marL="3886200" indent="-228600" algn="l" defTabSz="914400" rtl="0" eaLnBrk="1" latinLnBrk="1" hangingPunct="1">
+              <a:lnSpc>
+                <a:spcPct val="90000"/>
+              </a:lnSpc>
+              <a:spcBef>
+                <a:spcPts val="500"/>
+              </a:spcBef>
+              <a:buFont typeface="Arial" panose="020B0604020202020204" pitchFamily="34" charset="0"/>
+              <a:buChar char="•"/>
+              <a:defRPr sz="1800" kern="1200">
+                <a:solidFill>
+                  <a:schemeClr val="tx1"/>
+                </a:solidFill>
+                <a:latin typeface="+mn-lt"/>
+                <a:ea typeface="+mn-ea"/>
+                <a:cs typeface="+mn-cs"/>
+              </a:defRPr>
+            </a:lvl9pPr>
+          </a:lstStyle>
+          <a:p>
+            <a:endParaRPr lang="en-US" altLang="ko-KR" b="1" dirty="0" smtClean="0"/>
+          </a:p>
+          <a:p>
+            <a:pPr lvl="1"/>
+            <a:endParaRPr lang="en-US" altLang="ko-KR" dirty="0" smtClean="0"/>
+          </a:p>
+        </p:txBody>
+      </p:sp>
+      <p:sp>
+        <p:nvSpPr>
+          <p:cNvPr id="3" name="내용 개체 틀 2"/>
+          <p:cNvSpPr>
+            <a:spLocks noGrp="1"/>
+          </p:cNvSpPr>
+          <p:nvPr>
+            <p:ph idx="1"/>
+          </p:nvPr>
+        </p:nvSpPr>
+        <p:spPr>
+          <a:xfrm>
+            <a:off x="838199" y="1825625"/>
+            <a:ext cx="6360043" cy="4351338"/>
+          </a:xfrm>
+        </p:spPr>
+        <p:txBody>
+          <a:bodyPr>
+            <a:normAutofit fontScale="40000" lnSpcReduction="20000"/>
+          </a:bodyPr>
+          <a:lstStyle/>
+          <a:p>
+            <a:r>
+              <a:rPr lang="en-US" altLang="ko-KR" b="1" dirty="0" smtClean="0"/>
+              <a:t>Group</a:t>
+            </a:r>
+            <a:r>
+              <a:rPr lang="en-US" altLang="ko-KR" dirty="0" smtClean="0"/>
+              <a:t> “/”</a:t>
+            </a:r>
+          </a:p>
+          <a:p>
+            <a:pPr lvl="1"/>
+            <a:r>
+              <a:rPr lang="en-US" altLang="ko-KR" b="1" dirty="0" smtClean="0"/>
+              <a:t>Group</a:t>
+            </a:r>
+            <a:r>
+              <a:rPr lang="en-US" altLang="ko-KR" dirty="0" smtClean="0"/>
+              <a:t> “Attributes”</a:t>
+            </a:r>
+          </a:p>
+          <a:p>
+            <a:pPr lvl="2"/>
+            <a:r>
+              <a:rPr lang="en-US" altLang="ko-KR" b="1" dirty="0" smtClean="0"/>
+              <a:t>ATTRIBUTE</a:t>
+            </a:r>
+          </a:p>
+          <a:p>
+            <a:pPr lvl="3"/>
+            <a:r>
+              <a:rPr lang="en-US" altLang="ko-KR" dirty="0" smtClean="0"/>
+              <a:t>DATATYPE</a:t>
+            </a:r>
+          </a:p>
+          <a:p>
+            <a:pPr lvl="3"/>
+            <a:r>
+              <a:rPr lang="en-US" altLang="ko-KR" dirty="0" smtClean="0"/>
+              <a:t>DATASPACE</a:t>
+            </a:r>
+          </a:p>
+          <a:p>
+            <a:pPr lvl="3"/>
+            <a:r>
+              <a:rPr lang="en-US" altLang="ko-KR" dirty="0" smtClean="0"/>
+              <a:t>DATA</a:t>
+            </a:r>
+          </a:p>
+          <a:p>
+            <a:pPr lvl="2"/>
+            <a:r>
+              <a:rPr lang="en-US" altLang="ko-KR" b="1" dirty="0" smtClean="0"/>
+              <a:t>Group</a:t>
+            </a:r>
+            <a:r>
+              <a:rPr lang="en-US" altLang="ko-KR" dirty="0" smtClean="0"/>
+              <a:t> “System”</a:t>
+            </a:r>
+          </a:p>
+          <a:p>
+            <a:pPr lvl="2"/>
+            <a:r>
+              <a:rPr lang="en-US" altLang="ko-KR" b="1" dirty="0" smtClean="0"/>
+              <a:t>Group</a:t>
+            </a:r>
+            <a:r>
+              <a:rPr lang="en-US" altLang="ko-KR" dirty="0"/>
+              <a:t> “</a:t>
+            </a:r>
+            <a:r>
+              <a:rPr lang="en-US" altLang="ko-KR" sz="1000" dirty="0"/>
+              <a:t>FF8DF542-85D8-439E-B5A7-E21AFAEABA8E</a:t>
+            </a:r>
+            <a:r>
+              <a:rPr lang="en-US" altLang="ko-KR" dirty="0"/>
+              <a:t>”</a:t>
+            </a:r>
+            <a:endParaRPr lang="en-US" altLang="ko-KR" dirty="0" smtClean="0"/>
+          </a:p>
+          <a:p>
+            <a:pPr lvl="3"/>
+            <a:r>
+              <a:rPr lang="en-US" altLang="ko-KR" b="1" dirty="0"/>
+              <a:t>ATTRIBUTE </a:t>
+            </a:r>
+            <a:r>
+              <a:rPr lang="en-US" altLang="ko-KR" sz="1300" dirty="0"/>
+              <a:t>"Data </a:t>
+            </a:r>
+            <a:r>
+              <a:rPr lang="en-US" altLang="ko-KR" sz="1300" dirty="0" err="1"/>
+              <a:t>Context.Data</a:t>
+            </a:r>
+            <a:r>
+              <a:rPr lang="en-US" altLang="ko-KR" sz="1300" dirty="0"/>
+              <a:t> </a:t>
+            </a:r>
+            <a:r>
+              <a:rPr lang="en-US" altLang="ko-KR" sz="1300" dirty="0" err="1"/>
+              <a:t>Attributes.AGC</a:t>
+            </a:r>
+            <a:r>
+              <a:rPr lang="en-US" altLang="ko-KR" sz="1300" dirty="0"/>
+              <a:t>"</a:t>
+            </a:r>
+          </a:p>
+          <a:p>
+            <a:pPr lvl="4"/>
+            <a:r>
+              <a:rPr lang="en-US" altLang="ko-KR" dirty="0"/>
+              <a:t>DATATYPE</a:t>
+            </a:r>
+          </a:p>
+          <a:p>
+            <a:pPr lvl="4"/>
+            <a:r>
+              <a:rPr lang="en-US" altLang="ko-KR" dirty="0" smtClean="0"/>
+              <a:t>DATASPACE</a:t>
+            </a:r>
+          </a:p>
+          <a:p>
+            <a:pPr lvl="4"/>
+            <a:r>
+              <a:rPr lang="en-US" altLang="ko-KR" dirty="0" smtClean="0"/>
+              <a:t>DATA</a:t>
+            </a:r>
+          </a:p>
+          <a:p>
+            <a:pPr lvl="3"/>
+            <a:r>
+              <a:rPr lang="en-US" altLang="ko-KR" b="1" dirty="0" smtClean="0"/>
+              <a:t>ATTRIBUTE</a:t>
+            </a:r>
+            <a:r>
+              <a:rPr lang="en-US" altLang="ko-KR" dirty="0" smtClean="0"/>
+              <a:t> </a:t>
+            </a:r>
+            <a:r>
+              <a:rPr lang="en-US" altLang="ko-KR" sz="1300" dirty="0"/>
+              <a:t>"Data </a:t>
+            </a:r>
+            <a:r>
+              <a:rPr lang="en-US" altLang="ko-KR" sz="1300" dirty="0" err="1"/>
+              <a:t>Context.Data</a:t>
+            </a:r>
+            <a:r>
+              <a:rPr lang="en-US" altLang="ko-KR" sz="1300" dirty="0"/>
+              <a:t> </a:t>
+            </a:r>
+            <a:r>
+              <a:rPr lang="en-US" altLang="ko-KR" sz="1300" dirty="0" err="1"/>
+              <a:t>Attributes.Acquisition</a:t>
+            </a:r>
+            <a:r>
+              <a:rPr lang="en-US" altLang="ko-KR" sz="1300" dirty="0"/>
+              <a:t> </a:t>
+            </a:r>
+            <a:r>
+              <a:rPr lang="en-US" altLang="ko-KR" sz="1300" dirty="0" smtClean="0"/>
+              <a:t>Mode“</a:t>
+            </a:r>
+          </a:p>
+          <a:p>
+            <a:pPr lvl="4"/>
+            <a:r>
+              <a:rPr lang="en-US" altLang="ko-KR" sz="1300" dirty="0" smtClean="0"/>
+              <a:t>.</a:t>
+            </a:r>
+          </a:p>
+          <a:p>
+            <a:pPr lvl="4"/>
+            <a:r>
+              <a:rPr lang="en-US" altLang="ko-KR" sz="1300" dirty="0" smtClean="0"/>
+              <a:t>.</a:t>
+            </a:r>
+          </a:p>
+          <a:p>
+            <a:pPr lvl="4"/>
+            <a:r>
+              <a:rPr lang="en-US" altLang="ko-KR" sz="1300" dirty="0"/>
+              <a:t>.</a:t>
+            </a:r>
+          </a:p>
+          <a:p>
+            <a:pPr lvl="1"/>
+            <a:r>
+              <a:rPr lang="en-US" altLang="ko-KR" b="1" dirty="0" smtClean="0"/>
+              <a:t>Group</a:t>
+            </a:r>
+            <a:r>
+              <a:rPr lang="en-US" altLang="ko-KR" dirty="0" smtClean="0"/>
+              <a:t> “Data”</a:t>
+            </a:r>
+          </a:p>
+          <a:p>
+            <a:pPr lvl="2"/>
+            <a:r>
+              <a:rPr lang="en-US" altLang="ko-KR" dirty="0"/>
+              <a:t>Group “Saturation </a:t>
+            </a:r>
+            <a:r>
+              <a:rPr lang="en-US" altLang="ko-KR" dirty="0" smtClean="0"/>
+              <a:t>Counts”</a:t>
+            </a:r>
+          </a:p>
+          <a:p>
+            <a:pPr lvl="3"/>
+            <a:r>
+              <a:rPr lang="en-US" altLang="ko-KR" dirty="0" err="1" smtClean="0"/>
+              <a:t>DataSet</a:t>
+            </a:r>
+            <a:r>
+              <a:rPr lang="en-US" altLang="ko-KR" dirty="0"/>
+              <a:t> “{A68D60A4-2556-47E4-B387-6FBAFEE37201</a:t>
+            </a:r>
+            <a:r>
+              <a:rPr lang="en-US" altLang="ko-KR" dirty="0" smtClean="0"/>
+              <a:t>}”</a:t>
+            </a:r>
+          </a:p>
+          <a:p>
+            <a:pPr lvl="4"/>
+            <a:r>
+              <a:rPr lang="it-IT" altLang="ko-KR" dirty="0"/>
+              <a:t>DATATYPE  H5T_STD_I32LE</a:t>
+            </a:r>
+          </a:p>
+          <a:p>
+            <a:pPr lvl="4"/>
+            <a:r>
+              <a:rPr lang="it-IT" altLang="ko-KR" dirty="0" smtClean="0"/>
+              <a:t>DATASPACE  </a:t>
+            </a:r>
+            <a:r>
+              <a:rPr lang="it-IT" altLang="ko-KR" dirty="0"/>
+              <a:t>SIMPLE { ( 1200, 1600 ) / ( 1200, 1600 ) }</a:t>
+            </a:r>
+          </a:p>
+          <a:p>
+            <a:pPr lvl="4"/>
+            <a:r>
+              <a:rPr lang="it-IT" altLang="ko-KR" dirty="0" smtClean="0"/>
+              <a:t>DATA </a:t>
+            </a:r>
+            <a:r>
+              <a:rPr lang="it-IT" altLang="ko-KR" dirty="0"/>
+              <a:t>{</a:t>
+            </a:r>
+          </a:p>
+          <a:p>
+            <a:pPr lvl="4"/>
+            <a:r>
+              <a:rPr lang="it-IT" altLang="ko-KR" dirty="0" smtClean="0"/>
+              <a:t>(</a:t>
+            </a:r>
+            <a:r>
+              <a:rPr lang="it-IT" altLang="ko-KR" dirty="0"/>
+              <a:t>0,0): 0, 0, 0, 0, 0, 0, 0, 0, 0, 0, 0, 0, 0, 0, 0, 0, 0, 0, 0,</a:t>
+            </a:r>
+          </a:p>
+          <a:p>
+            <a:pPr lvl="4"/>
+            <a:r>
+              <a:rPr lang="it-IT" altLang="ko-KR" dirty="0" smtClean="0"/>
+              <a:t>(</a:t>
+            </a:r>
+            <a:r>
+              <a:rPr lang="it-IT" altLang="ko-KR" dirty="0"/>
+              <a:t>0,19): 0, 0, 0, 0, 0, 0, 0, 0, 0, 0, 0, 0, 0, 0, 0, 0, 0, 0, 0</a:t>
+            </a:r>
+            <a:r>
+              <a:rPr lang="it-IT" altLang="ko-KR" dirty="0" smtClean="0"/>
+              <a:t>,</a:t>
+            </a:r>
+          </a:p>
+          <a:p>
+            <a:pPr lvl="4"/>
+            <a:r>
+              <a:rPr lang="it-IT" altLang="ko-KR" dirty="0" smtClean="0"/>
+              <a:t>.</a:t>
+            </a:r>
+          </a:p>
+          <a:p>
+            <a:pPr lvl="4"/>
+            <a:r>
+              <a:rPr lang="it-IT" altLang="ko-KR" dirty="0" smtClean="0"/>
+              <a:t>.</a:t>
+            </a:r>
+          </a:p>
+          <a:p>
+            <a:pPr lvl="4"/>
+            <a:r>
+              <a:rPr lang="it-IT" altLang="ko-KR" dirty="0"/>
+              <a:t>.</a:t>
+            </a:r>
+            <a:endParaRPr lang="it-IT" altLang="ko-KR" dirty="0" smtClean="0"/>
+          </a:p>
+          <a:p>
+            <a:pPr lvl="4"/>
+            <a:r>
+              <a:rPr lang="en-US" altLang="ko-KR" dirty="0" smtClean="0"/>
+              <a:t>(</a:t>
+            </a:r>
+            <a:r>
+              <a:rPr lang="en-US" altLang="ko-KR" dirty="0"/>
+              <a:t>0,1583): 0, 0, 0, 0, 0, 0, 0, 0, 0, 0, 0, 0, 0, 0, 0, 0, 0,</a:t>
+            </a:r>
+          </a:p>
+          <a:p>
+            <a:pPr lvl="4"/>
+            <a:r>
+              <a:rPr lang="en-US" altLang="ko-KR" dirty="0" smtClean="0"/>
+              <a:t>(</a:t>
+            </a:r>
+            <a:r>
+              <a:rPr lang="en-US" altLang="ko-KR" dirty="0"/>
+              <a:t>1,0): 0, 0, 0, 0, 0, 0, 0, 0, 0, 0, 0, 0, 0, 0, 0, 0, 0, 0, 0,</a:t>
+            </a:r>
+          </a:p>
+          <a:p>
+            <a:pPr lvl="1"/>
+            <a:endParaRPr lang="en-US" altLang="ko-KR" b="1" dirty="0"/>
+          </a:p>
+          <a:p>
+            <a:pPr lvl="1"/>
+            <a:endParaRPr lang="en-US" altLang="ko-KR" dirty="0" smtClean="0"/>
+          </a:p>
+        </p:txBody>
+      </p:sp>
+      <p:pic>
+        <p:nvPicPr>
+          <p:cNvPr id="6" name="그림 5"/>
+          <p:cNvPicPr>
+            <a:picLocks noChangeAspect="1"/>
+          </p:cNvPicPr>
+          <p:nvPr/>
+        </p:nvPicPr>
+        <p:blipFill>
+          <a:blip r:embed="rId2"/>
+          <a:stretch>
+            <a:fillRect/>
+          </a:stretch>
+        </p:blipFill>
+        <p:spPr>
+          <a:xfrm>
+            <a:off x="6821830" y="1825624"/>
+            <a:ext cx="4915061" cy="3628877"/>
+          </a:xfrm>
+          <a:prstGeom prst="rect">
+            <a:avLst/>
+          </a:prstGeom>
+        </p:spPr>
+      </p:pic>
+      <p:pic>
+        <p:nvPicPr>
+          <p:cNvPr id="7" name="그림 6"/>
+          <p:cNvPicPr>
+            <a:picLocks noChangeAspect="1"/>
+          </p:cNvPicPr>
+          <p:nvPr/>
+        </p:nvPicPr>
+        <p:blipFill>
+          <a:blip r:embed="rId3"/>
+          <a:stretch>
+            <a:fillRect/>
+          </a:stretch>
+        </p:blipFill>
+        <p:spPr>
+          <a:xfrm>
+            <a:off x="8733106" y="365124"/>
+            <a:ext cx="2211604" cy="1811698"/>
+          </a:xfrm>
+          <a:prstGeom prst="rect">
+            <a:avLst/>
+          </a:prstGeom>
+        </p:spPr>
+      </p:pic>
+    </p:spTree>
+    <p:extLst>
+      <p:ext uri="{BB962C8B-B14F-4D97-AF65-F5344CB8AC3E}">
+        <p14:creationId xmlns:p14="http://schemas.microsoft.com/office/powerpoint/2010/main" val="864974727"/>
+      </p:ext>
+    </p:extLst>
+  </p:cSld>
+  <p:clrMapOvr>
+    <a:masterClrMapping/>
+  </p:clrMapOvr>
+</p:sld>
+</file>
+
+<file path=ppt/slides/slide73.xml><?xml version="1.0" encoding="utf-8"?>
+<p:sld xmlns:a="http://schemas.openxmlformats.org/drawingml/2006/main" xmlns:r="http://schemas.openxmlformats.org/officeDocument/2006/relationships" xmlns:p="http://schemas.openxmlformats.org/presentationml/2006/main">
+  <p:cSld>
+    <p:spTree>
+      <p:nvGrpSpPr>
+        <p:cNvPr id="1" name=""/>
+        <p:cNvGrpSpPr/>
+        <p:nvPr/>
+      </p:nvGrpSpPr>
+      <p:grpSpPr>
+        <a:xfrm>
+          <a:off x="0" y="0"/>
+          <a:ext cx="0" cy="0"/>
+          <a:chOff x="0" y="0"/>
+          <a:chExt cx="0" cy="0"/>
+        </a:xfrm>
+      </p:grpSpPr>
+      <p:sp>
+        <p:nvSpPr>
+          <p:cNvPr id="2" name="제목 1"/>
+          <p:cNvSpPr>
+            <a:spLocks noGrp="1"/>
+          </p:cNvSpPr>
+          <p:nvPr>
+            <p:ph type="title"/>
+          </p:nvPr>
+        </p:nvSpPr>
+        <p:spPr/>
+        <p:txBody>
+          <a:bodyPr/>
+          <a:lstStyle/>
+          <a:p>
+            <a:r>
+              <a:rPr lang="en-US" altLang="ko-KR" dirty="0"/>
+              <a:t>Reading </a:t>
+            </a:r>
+            <a:r>
+              <a:rPr lang="en-US" altLang="ko-KR" dirty="0" err="1"/>
+              <a:t>Zygo</a:t>
+            </a:r>
+            <a:r>
+              <a:rPr lang="en-US" altLang="ko-KR" dirty="0"/>
+              <a:t> DATX with C++ </a:t>
+            </a:r>
+            <a:r>
+              <a:rPr lang="en-US" altLang="ko-KR" dirty="0" smtClean="0"/>
+              <a:t>&amp; HDF5</a:t>
+            </a:r>
+            <a:endParaRPr lang="ko-KR" altLang="en-US" dirty="0"/>
+          </a:p>
+        </p:txBody>
+      </p:sp>
+      <p:sp>
+        <p:nvSpPr>
+          <p:cNvPr id="3" name="내용 개체 틀 2"/>
+          <p:cNvSpPr>
+            <a:spLocks noGrp="1"/>
+          </p:cNvSpPr>
+          <p:nvPr>
+            <p:ph idx="1"/>
+          </p:nvPr>
+        </p:nvSpPr>
+        <p:spPr/>
+        <p:txBody>
+          <a:bodyPr/>
+          <a:lstStyle/>
+          <a:p>
+            <a:r>
+              <a:rPr lang="en-US" altLang="ko-KR" b="1" dirty="0"/>
+              <a:t>Library </a:t>
+            </a:r>
+            <a:r>
+              <a:rPr lang="en-US" altLang="ko-KR" b="1" dirty="0" smtClean="0"/>
+              <a:t>Installation</a:t>
+            </a:r>
+          </a:p>
+          <a:p>
+            <a:pPr lvl="1"/>
+            <a:r>
+              <a:rPr lang="en-US" altLang="ko-KR" dirty="0"/>
+              <a:t>#include "H5Cpp.h</a:t>
+            </a:r>
+            <a:r>
+              <a:rPr lang="en-US" altLang="ko-KR" dirty="0" smtClean="0"/>
+              <a:t>"</a:t>
+            </a:r>
+            <a:endParaRPr lang="en-US" altLang="ko-KR" b="1" dirty="0" smtClean="0"/>
+          </a:p>
+          <a:p>
+            <a:r>
+              <a:rPr lang="en-US" altLang="ko-KR" b="1" dirty="0"/>
+              <a:t>Open the </a:t>
+            </a:r>
+            <a:r>
+              <a:rPr lang="en-US" altLang="ko-KR" b="1" dirty="0" smtClean="0"/>
+              <a:t>File</a:t>
+            </a:r>
+          </a:p>
+          <a:p>
+            <a:pPr lvl="1"/>
+            <a:r>
+              <a:rPr lang="en-US" altLang="ko-KR" dirty="0"/>
+              <a:t>H5::H5File file(filename, H5F_ACC_RDONLY);</a:t>
+            </a:r>
+            <a:endParaRPr lang="en-US" altLang="ko-KR" b="1" dirty="0" smtClean="0"/>
+          </a:p>
+          <a:p>
+            <a:r>
+              <a:rPr lang="en-US" altLang="ko-KR" b="1" dirty="0"/>
+              <a:t>Access </a:t>
+            </a:r>
+            <a:r>
+              <a:rPr lang="en-US" altLang="ko-KR" b="1" dirty="0" smtClean="0"/>
+              <a:t>Data</a:t>
+            </a:r>
+          </a:p>
+          <a:p>
+            <a:pPr lvl="1"/>
+            <a:r>
+              <a:rPr lang="it-IT" altLang="ko-KR" sz="1600" i="1" dirty="0"/>
+              <a:t>DataSet</a:t>
+            </a:r>
+            <a:r>
+              <a:rPr lang="it-IT" altLang="ko-KR" sz="1600" dirty="0"/>
+              <a:t> dataset = file.</a:t>
+            </a:r>
+            <a:r>
+              <a:rPr lang="it-IT" altLang="ko-KR" sz="1600" i="1" dirty="0"/>
+              <a:t>openDataSet</a:t>
+            </a:r>
+            <a:r>
+              <a:rPr lang="it-IT" altLang="ko-KR" sz="1600" dirty="0"/>
+              <a:t>("/Data/Surface/{2F2A75F4-7E35-47B1-B59C-B7A71E3A7613}");</a:t>
+            </a:r>
+            <a:endParaRPr lang="en-US" altLang="ko-KR" sz="1600" b="1" dirty="0" smtClean="0"/>
+          </a:p>
+          <a:p>
+            <a:r>
+              <a:rPr lang="en-US" altLang="ko-KR" b="1" dirty="0"/>
+              <a:t>Read </a:t>
+            </a:r>
+            <a:r>
+              <a:rPr lang="en-US" altLang="ko-KR" b="1" dirty="0" smtClean="0"/>
+              <a:t>Data</a:t>
+            </a:r>
+          </a:p>
+          <a:p>
+            <a:pPr lvl="1"/>
+            <a:r>
+              <a:rPr lang="en-US" altLang="ko-KR" dirty="0" err="1"/>
+              <a:t>dataset.</a:t>
+            </a:r>
+            <a:r>
+              <a:rPr lang="en-US" altLang="ko-KR" i="1" dirty="0" err="1"/>
+              <a:t>read</a:t>
+            </a:r>
+            <a:r>
+              <a:rPr lang="en-US" altLang="ko-KR" dirty="0"/>
+              <a:t>(</a:t>
+            </a:r>
+            <a:r>
+              <a:rPr lang="en-US" altLang="ko-KR" dirty="0" err="1"/>
+              <a:t>data_out</a:t>
+            </a:r>
+            <a:r>
+              <a:rPr lang="en-US" altLang="ko-KR" dirty="0"/>
+              <a:t>, </a:t>
+            </a:r>
+            <a:r>
+              <a:rPr lang="en-US" altLang="ko-KR" i="1" dirty="0" err="1"/>
+              <a:t>PredType</a:t>
+            </a:r>
+            <a:r>
+              <a:rPr lang="en-US" altLang="ko-KR" dirty="0"/>
+              <a:t>::</a:t>
+            </a:r>
+            <a:r>
+              <a:rPr lang="en-US" altLang="ko-KR" i="1" dirty="0"/>
+              <a:t>NATIVE_FLOAT</a:t>
+            </a:r>
+            <a:r>
+              <a:rPr lang="en-US" altLang="ko-KR" dirty="0"/>
+              <a:t>);</a:t>
+            </a:r>
+            <a:endParaRPr lang="ko-KR" altLang="en-US" dirty="0"/>
+          </a:p>
+        </p:txBody>
+      </p:sp>
+    </p:spTree>
+    <p:extLst>
+      <p:ext uri="{BB962C8B-B14F-4D97-AF65-F5344CB8AC3E}">
+        <p14:creationId xmlns:p14="http://schemas.microsoft.com/office/powerpoint/2010/main" val="3624487718"/>
+      </p:ext>
+    </p:extLst>
+  </p:cSld>
+  <p:clrMapOvr>
+    <a:masterClrMapping/>
+  </p:clrMapOvr>
+</p:sld>
+</file>
+
+<file path=ppt/slides/slide74.xml><?xml version="1.0" encoding="utf-8"?>
+<p:sld xmlns:a="http://schemas.openxmlformats.org/drawingml/2006/main" xmlns:r="http://schemas.openxmlformats.org/officeDocument/2006/relationships" xmlns:p="http://schemas.openxmlformats.org/presentationml/2006/main">
+  <p:cSld>
+    <p:spTree>
+      <p:nvGrpSpPr>
+        <p:cNvPr id="1" name=""/>
+        <p:cNvGrpSpPr/>
+        <p:nvPr/>
+      </p:nvGrpSpPr>
+      <p:grpSpPr>
+        <a:xfrm>
+          <a:off x="0" y="0"/>
+          <a:ext cx="0" cy="0"/>
+          <a:chOff x="0" y="0"/>
+          <a:chExt cx="0" cy="0"/>
+        </a:xfrm>
+      </p:grpSpPr>
+      <p:sp>
+        <p:nvSpPr>
+          <p:cNvPr id="2" name="제목 1"/>
+          <p:cNvSpPr>
+            <a:spLocks noGrp="1"/>
+          </p:cNvSpPr>
+          <p:nvPr>
+            <p:ph type="title"/>
+          </p:nvPr>
+        </p:nvSpPr>
+        <p:spPr/>
+        <p:txBody>
+          <a:bodyPr/>
+          <a:lstStyle/>
+          <a:p>
+            <a:r>
+              <a:rPr lang="ko-KR" altLang="en-US" dirty="0" smtClean="0"/>
+              <a:t>포함 </a:t>
+            </a:r>
+            <a:r>
+              <a:rPr lang="en-US" altLang="ko-KR" dirty="0" smtClean="0"/>
+              <a:t>DLL</a:t>
+            </a:r>
+            <a:endParaRPr lang="ko-KR" altLang="en-US" dirty="0"/>
+          </a:p>
+        </p:txBody>
+      </p:sp>
+      <p:pic>
+        <p:nvPicPr>
+          <p:cNvPr id="4" name="내용 개체 틀 3"/>
+          <p:cNvPicPr>
+            <a:picLocks noGrp="1" noChangeAspect="1"/>
+          </p:cNvPicPr>
+          <p:nvPr>
+            <p:ph idx="1"/>
+          </p:nvPr>
+        </p:nvPicPr>
+        <p:blipFill>
+          <a:blip r:embed="rId2"/>
+          <a:stretch>
+            <a:fillRect/>
+          </a:stretch>
+        </p:blipFill>
+        <p:spPr>
+          <a:xfrm>
+            <a:off x="838200" y="1959033"/>
+            <a:ext cx="3934374" cy="1448002"/>
+          </a:xfrm>
+          <a:prstGeom prst="rect">
+            <a:avLst/>
+          </a:prstGeom>
+        </p:spPr>
+      </p:pic>
+      <p:pic>
+        <p:nvPicPr>
+          <p:cNvPr id="5" name="그림 4"/>
+          <p:cNvPicPr>
+            <a:picLocks noChangeAspect="1"/>
+          </p:cNvPicPr>
+          <p:nvPr/>
+        </p:nvPicPr>
+        <p:blipFill>
+          <a:blip r:embed="rId3"/>
+          <a:stretch>
+            <a:fillRect/>
+          </a:stretch>
+        </p:blipFill>
+        <p:spPr>
+          <a:xfrm>
+            <a:off x="838200" y="3638074"/>
+            <a:ext cx="3924300" cy="1447800"/>
+          </a:xfrm>
+          <a:prstGeom prst="rect">
+            <a:avLst/>
+          </a:prstGeom>
+        </p:spPr>
+      </p:pic>
+      <p:sp>
+        <p:nvSpPr>
+          <p:cNvPr id="6" name="TextBox 5"/>
+          <p:cNvSpPr txBox="1"/>
+          <p:nvPr/>
+        </p:nvSpPr>
+        <p:spPr>
+          <a:xfrm>
+            <a:off x="5105400" y="1706621"/>
+            <a:ext cx="4648200" cy="4801314"/>
+          </a:xfrm>
+          <a:prstGeom prst="rect">
+            <a:avLst/>
+          </a:prstGeom>
+          <a:noFill/>
+        </p:spPr>
+        <p:txBody>
+          <a:bodyPr wrap="square" rtlCol="0">
+            <a:spAutoFit/>
+          </a:bodyPr>
+          <a:lstStyle/>
+          <a:p>
+            <a:r>
+              <a:rPr lang="en-US" altLang="ko-KR" dirty="0"/>
+              <a:t>dynlibadd_D.lib</a:t>
+            </a:r>
+          </a:p>
+          <a:p>
+            <a:r>
+              <a:rPr lang="en-US" altLang="ko-KR" dirty="0"/>
+              <a:t>dynlibcopy_D.lib</a:t>
+            </a:r>
+          </a:p>
+          <a:p>
+            <a:r>
+              <a:rPr lang="en-US" altLang="ko-KR" dirty="0"/>
+              <a:t>dynlibdiff_D.lib</a:t>
+            </a:r>
+          </a:p>
+          <a:p>
+            <a:r>
+              <a:rPr lang="en-US" altLang="ko-KR" dirty="0"/>
+              <a:t>dynlibdump_D.lib</a:t>
+            </a:r>
+          </a:p>
+          <a:p>
+            <a:r>
+              <a:rPr lang="en-US" altLang="ko-KR" dirty="0"/>
+              <a:t>dynlibls_D.lib</a:t>
+            </a:r>
+          </a:p>
+          <a:p>
+            <a:r>
+              <a:rPr lang="en-US" altLang="ko-KR" dirty="0"/>
+              <a:t>dynlibvers_D.lib</a:t>
+            </a:r>
+          </a:p>
+          <a:p>
+            <a:r>
+              <a:rPr lang="en-US" altLang="ko-KR" dirty="0"/>
+              <a:t>filter_plugin1_dsets_D.lib</a:t>
+            </a:r>
+          </a:p>
+          <a:p>
+            <a:r>
+              <a:rPr lang="en-US" altLang="ko-KR" dirty="0"/>
+              <a:t>filter_plugin2_dsets_D.lib</a:t>
+            </a:r>
+          </a:p>
+          <a:p>
+            <a:r>
+              <a:rPr lang="en-US" altLang="ko-KR" dirty="0"/>
+              <a:t>filter_plugin3_dsets_D.lib</a:t>
+            </a:r>
+          </a:p>
+          <a:p>
+            <a:r>
+              <a:rPr lang="en-US" altLang="ko-KR" dirty="0"/>
+              <a:t>filter_plugin4_groups_D.lib</a:t>
+            </a:r>
+          </a:p>
+          <a:p>
+            <a:r>
+              <a:rPr lang="en-US" altLang="ko-KR" dirty="0"/>
+              <a:t>libhdf5_cpp_D.lib</a:t>
+            </a:r>
+          </a:p>
+          <a:p>
+            <a:r>
+              <a:rPr lang="en-US" altLang="ko-KR" dirty="0"/>
+              <a:t>libhdf5_D.lib</a:t>
+            </a:r>
+          </a:p>
+          <a:p>
+            <a:r>
+              <a:rPr lang="en-US" altLang="ko-KR" dirty="0"/>
+              <a:t>libhdf5_hl_cpp_D.lib</a:t>
+            </a:r>
+          </a:p>
+          <a:p>
+            <a:r>
+              <a:rPr lang="en-US" altLang="ko-KR" dirty="0"/>
+              <a:t>libhdf5_hl_D.lib</a:t>
+            </a:r>
+          </a:p>
+          <a:p>
+            <a:r>
+              <a:rPr lang="en-US" altLang="ko-KR" dirty="0"/>
+              <a:t>libhdf5_test_D.lib</a:t>
+            </a:r>
+          </a:p>
+          <a:p>
+            <a:r>
+              <a:rPr lang="en-US" altLang="ko-KR" dirty="0"/>
+              <a:t>libhdf5_tools_D.lib</a:t>
+            </a:r>
+          </a:p>
+          <a:p>
+            <a:r>
+              <a:rPr lang="en-US" altLang="ko-KR" dirty="0"/>
+              <a:t>null_vol_connector_D.lib</a:t>
+            </a:r>
+            <a:endParaRPr lang="ko-KR" altLang="en-US" dirty="0"/>
+          </a:p>
+        </p:txBody>
+      </p:sp>
+    </p:spTree>
+    <p:extLst>
+      <p:ext uri="{BB962C8B-B14F-4D97-AF65-F5344CB8AC3E}">
+        <p14:creationId xmlns:p14="http://schemas.microsoft.com/office/powerpoint/2010/main" val="4197307507"/>
+      </p:ext>
+    </p:extLst>
+  </p:cSld>
+  <p:clrMapOvr>
+    <a:masterClrMapping/>
+  </p:clrMapOvr>
+</p:sld>
+</file>
+
+<file path=ppt/slides/slide75.xml><?xml version="1.0" encoding="utf-8"?>
+<p:sld xmlns:a="http://schemas.openxmlformats.org/drawingml/2006/main" xmlns:r="http://schemas.openxmlformats.org/officeDocument/2006/relationships" xmlns:p="http://schemas.openxmlformats.org/presentationml/2006/main">
+  <p:cSld>
+    <p:spTree>
+      <p:nvGrpSpPr>
+        <p:cNvPr id="1" name=""/>
+        <p:cNvGrpSpPr/>
+        <p:nvPr/>
+      </p:nvGrpSpPr>
+      <p:grpSpPr>
+        <a:xfrm>
+          <a:off x="0" y="0"/>
+          <a:ext cx="0" cy="0"/>
+          <a:chOff x="0" y="0"/>
+          <a:chExt cx="0" cy="0"/>
+        </a:xfrm>
+      </p:grpSpPr>
+      <p:sp>
+        <p:nvSpPr>
+          <p:cNvPr id="2" name="제목 1"/>
+          <p:cNvSpPr>
+            <a:spLocks noGrp="1"/>
+          </p:cNvSpPr>
+          <p:nvPr>
+            <p:ph type="ctrTitle"/>
+          </p:nvPr>
+        </p:nvSpPr>
+        <p:spPr/>
+        <p:txBody>
+          <a:bodyPr/>
+          <a:lstStyle/>
+          <a:p>
+            <a:r>
+              <a:rPr lang="en-US" altLang="ko-KR" dirty="0" smtClean="0"/>
+              <a:t>SSR 3D Viewer</a:t>
+            </a:r>
+            <a:endParaRPr lang="ko-KR" altLang="en-US" dirty="0"/>
+          </a:p>
+        </p:txBody>
+      </p:sp>
+      <p:sp>
+        <p:nvSpPr>
+          <p:cNvPr id="3" name="부제목 2"/>
+          <p:cNvSpPr>
+            <a:spLocks noGrp="1"/>
+          </p:cNvSpPr>
+          <p:nvPr>
+            <p:ph type="subTitle" idx="1"/>
+          </p:nvPr>
+        </p:nvSpPr>
+        <p:spPr/>
+        <p:txBody>
+          <a:bodyPr/>
+          <a:lstStyle/>
+          <a:p>
+            <a:r>
+              <a:rPr lang="en-US" altLang="ko-KR" dirty="0" smtClean="0"/>
+              <a:t>2026.03.06</a:t>
+            </a:r>
+          </a:p>
+          <a:p>
+            <a:endParaRPr lang="en-US" altLang="ko-KR" dirty="0"/>
+          </a:p>
+          <a:p>
+            <a:r>
+              <a:rPr lang="ko-KR" altLang="en-US" dirty="0" smtClean="0"/>
+              <a:t>신  용  대</a:t>
+            </a:r>
+            <a:endParaRPr lang="en-US" altLang="ko-KR" dirty="0" smtClean="0"/>
+          </a:p>
+        </p:txBody>
+      </p:sp>
+    </p:spTree>
+    <p:extLst>
+      <p:ext uri="{BB962C8B-B14F-4D97-AF65-F5344CB8AC3E}">
+        <p14:creationId xmlns:p14="http://schemas.microsoft.com/office/powerpoint/2010/main" val="2608368481"/>
+      </p:ext>
+    </p:extLst>
+  </p:cSld>
+  <p:clrMapOvr>
+    <a:masterClrMapping/>
+  </p:clrMapOvr>
+</p:sld>
+</file>
+
+<file path=ppt/slides/slide76.xml><?xml version="1.0" encoding="utf-8"?>
 <p:sld xmlns:a="http://schemas.openxmlformats.org/drawingml/2006/main" xmlns:r="http://schemas.openxmlformats.org/officeDocument/2006/relationships" xmlns:p="http://schemas.openxmlformats.org/presentationml/2006/main">
   <p:cSld>
     <p:spTree>
@@ -23756,7 +26880,7 @@
 </p:sld>
 </file>
 
-<file path=ppt/slides/slide68.xml><?xml version="1.0" encoding="utf-8"?>
+<file path=ppt/slides/slide77.xml><?xml version="1.0" encoding="utf-8"?>
 <p:sld xmlns:a="http://schemas.openxmlformats.org/drawingml/2006/main" xmlns:r="http://schemas.openxmlformats.org/officeDocument/2006/relationships" xmlns:p="http://schemas.openxmlformats.org/presentationml/2006/main">
   <p:cSld>
     <p:spTree>
@@ -23780,7 +26904,7 @@
             <a:spLocks noGrp="1"/>
           </p:cNvSpPr>
           <p:nvPr>
-            <p:ph type="ctrTitle"/>
+            <p:ph type="title"/>
           </p:nvPr>
         </p:nvSpPr>
         <p:spPr/>
@@ -23790,7 +26914,11 @@
           <a:p>
             <a:r>
               <a:rPr lang="en-US" altLang="ko-KR" dirty="0" smtClean="0"/>
-              <a:t>SSR 3D Viewer</a:t>
+              <a:t>3D Rendering </a:t>
+            </a:r>
+            <a:r>
+              <a:rPr lang="ko-KR" altLang="en-US" dirty="0" smtClean="0"/>
+              <a:t>순서</a:t>
             </a:r>
             <a:endParaRPr lang="ko-KR" altLang="en-US" dirty="0"/>
           </a:p>
@@ -23798,40 +26926,1031 @@
       </p:sp>
       <p:sp>
         <p:nvSpPr>
-          <p:cNvPr id="3" name="부제목 2"/>
+          <p:cNvPr id="3" name="내용 개체 틀 2"/>
           <p:cNvSpPr>
             <a:spLocks noGrp="1"/>
           </p:cNvSpPr>
           <p:nvPr>
-            <p:ph type="subTitle" idx="1"/>
+            <p:ph idx="1"/>
           </p:nvPr>
         </p:nvSpPr>
         <p:spPr/>
         <p:txBody>
-          <a:bodyPr/>
-          <a:lstStyle/>
-          <a:p>
-            <a:r>
-              <a:rPr lang="en-US" altLang="ko-KR" dirty="0" smtClean="0"/>
-              <a:t>2026.03.06</a:t>
-            </a:r>
-          </a:p>
-          <a:p>
-            <a:endParaRPr lang="en-US" altLang="ko-KR" dirty="0"/>
-          </a:p>
-          <a:p>
-            <a:r>
-              <a:rPr lang="ko-KR" altLang="en-US" dirty="0" smtClean="0"/>
-              <a:t>신  용  대</a:t>
+          <a:bodyPr>
+            <a:normAutofit fontScale="25000" lnSpcReduction="20000"/>
+          </a:bodyPr>
+          <a:lstStyle/>
+          <a:p>
+            <a:pPr lvl="1"/>
+            <a:r>
+              <a:rPr lang="en-US" altLang="ko-KR" dirty="0" err="1"/>
+              <a:t>ExtractInfo</a:t>
+            </a:r>
+            <a:r>
+              <a:rPr lang="en-US" altLang="ko-KR" dirty="0"/>
+              <a:t>(</a:t>
+            </a:r>
+            <a:r>
+              <a:rPr lang="en-US" altLang="ko-KR" dirty="0" err="1"/>
+              <a:t>sPath</a:t>
+            </a:r>
+            <a:r>
+              <a:rPr lang="en-US" altLang="ko-KR" dirty="0"/>
+              <a:t>)</a:t>
             </a:r>
             <a:endParaRPr lang="en-US" altLang="ko-KR" dirty="0" smtClean="0"/>
+          </a:p>
+          <a:p>
+            <a:pPr lvl="1"/>
+            <a:r>
+              <a:rPr lang="en-US" altLang="ko-KR" dirty="0" smtClean="0"/>
+              <a:t>Display3D()</a:t>
+            </a:r>
+          </a:p>
+          <a:p>
+            <a:pPr lvl="2"/>
+            <a:r>
+              <a:rPr lang="en-US" altLang="ko-KR" i="1" dirty="0"/>
+              <a:t>cv</a:t>
+            </a:r>
+            <a:r>
+              <a:rPr lang="en-US" altLang="ko-KR" dirty="0"/>
+              <a:t>::</a:t>
+            </a:r>
+            <a:r>
+              <a:rPr lang="en-US" altLang="ko-KR" i="1" dirty="0"/>
+              <a:t>Mat</a:t>
+            </a:r>
+            <a:r>
+              <a:rPr lang="en-US" altLang="ko-KR" dirty="0"/>
+              <a:t> </a:t>
+            </a:r>
+            <a:r>
+              <a:rPr lang="en-US" altLang="ko-KR" dirty="0" err="1"/>
+              <a:t>dst</a:t>
+            </a:r>
+            <a:r>
+              <a:rPr lang="en-US" altLang="ko-KR" dirty="0"/>
+              <a:t> = </a:t>
+            </a:r>
+            <a:r>
+              <a:rPr lang="en-US" altLang="ko-KR" dirty="0" err="1"/>
+              <a:t>m_cMatching.ApplyConvertImageAuto</a:t>
+            </a:r>
+            <a:r>
+              <a:rPr lang="en-US" altLang="ko-KR" dirty="0"/>
+              <a:t>(</a:t>
+            </a:r>
+            <a:r>
+              <a:rPr lang="en-US" altLang="ko-KR" dirty="0" err="1"/>
+              <a:t>matModelIMG</a:t>
+            </a:r>
+            <a:r>
+              <a:rPr lang="en-US" altLang="ko-KR" dirty="0" smtClean="0"/>
+              <a:t>);</a:t>
+            </a:r>
+          </a:p>
+          <a:p>
+            <a:pPr lvl="2"/>
+            <a:r>
+              <a:rPr lang="en-US" altLang="ko-KR" dirty="0" err="1"/>
+              <a:t>m_cMatching.GetMinMax</a:t>
+            </a:r>
+            <a:r>
+              <a:rPr lang="en-US" altLang="ko-KR" dirty="0"/>
+              <a:t>(</a:t>
+            </a:r>
+            <a:r>
+              <a:rPr lang="en-US" altLang="ko-KR" dirty="0" err="1"/>
+              <a:t>m_fMin</a:t>
+            </a:r>
+            <a:r>
+              <a:rPr lang="en-US" altLang="ko-KR" dirty="0"/>
+              <a:t>, </a:t>
+            </a:r>
+            <a:r>
+              <a:rPr lang="en-US" altLang="ko-KR" dirty="0" err="1"/>
+              <a:t>m_fMax</a:t>
+            </a:r>
+            <a:r>
+              <a:rPr lang="en-US" altLang="ko-KR" dirty="0" smtClean="0"/>
+              <a:t>);</a:t>
+            </a:r>
+          </a:p>
+          <a:p>
+            <a:pPr lvl="2"/>
+            <a:r>
+              <a:rPr lang="en-US" altLang="ko-KR" i="1" dirty="0" err="1"/>
+              <a:t>applyColorMap</a:t>
+            </a:r>
+            <a:r>
+              <a:rPr lang="en-US" altLang="ko-KR" dirty="0"/>
+              <a:t>(</a:t>
+            </a:r>
+            <a:r>
+              <a:rPr lang="en-US" altLang="ko-KR" dirty="0" err="1"/>
+              <a:t>dst</a:t>
+            </a:r>
+            <a:r>
+              <a:rPr lang="en-US" altLang="ko-KR" dirty="0"/>
+              <a:t>, dst2, </a:t>
+            </a:r>
+            <a:r>
+              <a:rPr lang="en-US" altLang="ko-KR" i="1" dirty="0"/>
+              <a:t>cv</a:t>
+            </a:r>
+            <a:r>
+              <a:rPr lang="en-US" altLang="ko-KR" dirty="0"/>
+              <a:t>::</a:t>
+            </a:r>
+            <a:r>
+              <a:rPr lang="en-US" altLang="ko-KR" i="1" dirty="0"/>
+              <a:t>COLORMAP_RAINBOW</a:t>
+            </a:r>
+            <a:r>
+              <a:rPr lang="en-US" altLang="ko-KR" dirty="0" smtClean="0"/>
+              <a:t>);</a:t>
+            </a:r>
+          </a:p>
+          <a:p>
+            <a:pPr lvl="2"/>
+            <a:r>
+              <a:rPr lang="en-US" altLang="ko-KR" dirty="0" err="1"/>
+              <a:t>m_DefectColor</a:t>
+            </a:r>
+            <a:r>
+              <a:rPr lang="en-US" altLang="ko-KR" dirty="0"/>
+              <a:t> = dst2</a:t>
+            </a:r>
+            <a:r>
+              <a:rPr lang="en-US" altLang="ko-KR" dirty="0" smtClean="0"/>
+              <a:t>;</a:t>
+            </a:r>
+          </a:p>
+          <a:p>
+            <a:pPr lvl="2"/>
+            <a:r>
+              <a:rPr lang="en-US" altLang="ko-KR" i="1" dirty="0"/>
+              <a:t>cv</a:t>
+            </a:r>
+            <a:r>
+              <a:rPr lang="en-US" altLang="ko-KR" dirty="0"/>
+              <a:t>::</a:t>
+            </a:r>
+            <a:r>
+              <a:rPr lang="en-US" altLang="ko-KR" i="1" dirty="0"/>
+              <a:t>resize</a:t>
+            </a:r>
+            <a:r>
+              <a:rPr lang="en-US" altLang="ko-KR" dirty="0"/>
+              <a:t>(dst2, </a:t>
+            </a:r>
+            <a:r>
+              <a:rPr lang="en-US" altLang="ko-KR" dirty="0" err="1"/>
+              <a:t>m_Image</a:t>
+            </a:r>
+            <a:r>
+              <a:rPr lang="en-US" altLang="ko-KR" dirty="0"/>
+              <a:t>, </a:t>
+            </a:r>
+            <a:r>
+              <a:rPr lang="en-US" altLang="ko-KR" i="1" dirty="0"/>
+              <a:t>cv</a:t>
+            </a:r>
+            <a:r>
+              <a:rPr lang="en-US" altLang="ko-KR" dirty="0"/>
+              <a:t>::</a:t>
+            </a:r>
+            <a:r>
+              <a:rPr lang="en-US" altLang="ko-KR" i="1" dirty="0"/>
+              <a:t>Size</a:t>
+            </a:r>
+            <a:r>
+              <a:rPr lang="en-US" altLang="ko-KR" dirty="0"/>
+              <a:t>(</a:t>
+            </a:r>
+            <a:r>
+              <a:rPr lang="en-US" altLang="ko-KR" dirty="0" err="1"/>
+              <a:t>rectResult.</a:t>
+            </a:r>
+            <a:r>
+              <a:rPr lang="en-US" altLang="ko-KR" i="1" dirty="0" err="1"/>
+              <a:t>Width</a:t>
+            </a:r>
+            <a:r>
+              <a:rPr lang="en-US" altLang="ko-KR" dirty="0"/>
+              <a:t>(), </a:t>
+            </a:r>
+            <a:r>
+              <a:rPr lang="en-US" altLang="ko-KR" dirty="0" err="1"/>
+              <a:t>rectResult.</a:t>
+            </a:r>
+            <a:r>
+              <a:rPr lang="en-US" altLang="ko-KR" i="1" dirty="0" err="1"/>
+              <a:t>Height</a:t>
+            </a:r>
+            <a:r>
+              <a:rPr lang="en-US" altLang="ko-KR" dirty="0"/>
+              <a:t>()));</a:t>
+            </a:r>
+          </a:p>
+          <a:p>
+            <a:pPr lvl="2"/>
+            <a:r>
+              <a:rPr lang="en-US" altLang="ko-KR" dirty="0" err="1"/>
+              <a:t>DrawMat</a:t>
+            </a:r>
+            <a:r>
+              <a:rPr lang="en-US" altLang="ko-KR" dirty="0"/>
+              <a:t>(</a:t>
+            </a:r>
+            <a:r>
+              <a:rPr lang="en-US" altLang="ko-KR" dirty="0" err="1"/>
+              <a:t>pDCResult</a:t>
+            </a:r>
+            <a:r>
+              <a:rPr lang="en-US" altLang="ko-KR" dirty="0"/>
+              <a:t>-&gt;</a:t>
+            </a:r>
+            <a:r>
+              <a:rPr lang="en-US" altLang="ko-KR" i="1" dirty="0" err="1"/>
+              <a:t>m_hDC</a:t>
+            </a:r>
+            <a:r>
+              <a:rPr lang="en-US" altLang="ko-KR" dirty="0"/>
+              <a:t>, </a:t>
+            </a:r>
+            <a:r>
+              <a:rPr lang="en-US" altLang="ko-KR" dirty="0" err="1"/>
+              <a:t>m_Image</a:t>
+            </a:r>
+            <a:r>
+              <a:rPr lang="en-US" altLang="ko-KR" dirty="0" smtClean="0"/>
+              <a:t>);</a:t>
+            </a:r>
+          </a:p>
+          <a:p>
+            <a:pPr lvl="3"/>
+            <a:r>
+              <a:rPr lang="en-US" altLang="ko-KR" dirty="0"/>
+              <a:t>::</a:t>
+            </a:r>
+            <a:r>
+              <a:rPr lang="en-US" altLang="ko-KR" i="1" dirty="0" err="1"/>
+              <a:t>SetDIBitsToDevice</a:t>
+            </a:r>
+            <a:r>
+              <a:rPr lang="en-US" altLang="ko-KR" dirty="0"/>
+              <a:t>(</a:t>
+            </a:r>
+            <a:r>
+              <a:rPr lang="en-US" altLang="ko-KR" dirty="0" err="1"/>
+              <a:t>hDC</a:t>
+            </a:r>
+            <a:r>
+              <a:rPr lang="en-US" altLang="ko-KR" dirty="0" smtClean="0"/>
+              <a:t>, .., </a:t>
+            </a:r>
+            <a:r>
+              <a:rPr lang="en-US" altLang="ko-KR" dirty="0" err="1"/>
+              <a:t>img.</a:t>
+            </a:r>
+            <a:r>
+              <a:rPr lang="en-US" altLang="ko-KR" i="1" dirty="0" err="1"/>
+              <a:t>data</a:t>
+            </a:r>
+            <a:r>
+              <a:rPr lang="en-US" altLang="ko-KR" dirty="0" smtClean="0"/>
+              <a:t>, ..);</a:t>
+            </a:r>
+          </a:p>
+          <a:p>
+            <a:pPr lvl="2"/>
+            <a:r>
+              <a:rPr lang="en-US" altLang="ko-KR" dirty="0" smtClean="0"/>
+              <a:t>OnUpdate3DModel(</a:t>
+            </a:r>
+            <a:r>
+              <a:rPr lang="en-US" altLang="ko-KR" i="1" dirty="0" smtClean="0"/>
+              <a:t>WPARAM</a:t>
+            </a:r>
+            <a:r>
+              <a:rPr lang="en-US" altLang="ko-KR" dirty="0" smtClean="0"/>
+              <a:t> </a:t>
+            </a:r>
+            <a:r>
+              <a:rPr lang="en-US" altLang="ko-KR" dirty="0" err="1"/>
+              <a:t>wParam</a:t>
+            </a:r>
+            <a:r>
+              <a:rPr lang="en-US" altLang="ko-KR" dirty="0"/>
+              <a:t>, </a:t>
+            </a:r>
+            <a:r>
+              <a:rPr lang="en-US" altLang="ko-KR" i="1" dirty="0"/>
+              <a:t>LPARAM</a:t>
+            </a:r>
+            <a:r>
+              <a:rPr lang="en-US" altLang="ko-KR" dirty="0"/>
+              <a:t> </a:t>
+            </a:r>
+            <a:r>
+              <a:rPr lang="en-US" altLang="ko-KR" dirty="0" err="1"/>
+              <a:t>lParam</a:t>
+            </a:r>
+            <a:r>
+              <a:rPr lang="en-US" altLang="ko-KR" dirty="0" smtClean="0"/>
+              <a:t>)</a:t>
+            </a:r>
+          </a:p>
+          <a:p>
+            <a:pPr lvl="3"/>
+            <a:r>
+              <a:rPr lang="en-US" altLang="ko-KR" dirty="0" err="1"/>
+              <a:t>m_Model.m_ZMap</a:t>
+            </a:r>
+            <a:r>
+              <a:rPr lang="en-US" altLang="ko-KR" dirty="0"/>
+              <a:t> = </a:t>
+            </a:r>
+            <a:r>
+              <a:rPr lang="en-US" altLang="ko-KR" dirty="0" err="1"/>
+              <a:t>m_matrixZ.</a:t>
+            </a:r>
+            <a:r>
+              <a:rPr lang="en-US" altLang="ko-KR" i="1" dirty="0" err="1"/>
+              <a:t>clone</a:t>
+            </a:r>
+            <a:r>
+              <a:rPr lang="en-US" altLang="ko-KR" dirty="0"/>
+              <a:t>();</a:t>
+            </a:r>
+            <a:endParaRPr lang="en-US" altLang="ko-KR" dirty="0" smtClean="0"/>
+          </a:p>
+          <a:p>
+            <a:pPr lvl="3"/>
+            <a:r>
+              <a:rPr lang="en-US" altLang="ko-KR" dirty="0" err="1"/>
+              <a:t>m_Model.MakeModel</a:t>
+            </a:r>
+            <a:r>
+              <a:rPr lang="en-US" altLang="ko-KR" dirty="0" smtClean="0"/>
+              <a:t>();</a:t>
+            </a:r>
+          </a:p>
+          <a:p>
+            <a:pPr lvl="4"/>
+            <a:r>
+              <a:rPr lang="es-ES" altLang="ko-KR" dirty="0"/>
+              <a:t>for (y = 0; y &lt; m_ZMap.</a:t>
+            </a:r>
+            <a:r>
+              <a:rPr lang="es-ES" altLang="ko-KR" i="1" dirty="0"/>
+              <a:t>rows</a:t>
+            </a:r>
+            <a:r>
+              <a:rPr lang="es-ES" altLang="ko-KR" dirty="0"/>
+              <a:t> - 1; y</a:t>
+            </a:r>
+            <a:r>
+              <a:rPr lang="es-ES" altLang="ko-KR" dirty="0" smtClean="0"/>
+              <a:t>++)</a:t>
+            </a:r>
+          </a:p>
+          <a:p>
+            <a:pPr lvl="5"/>
+            <a:r>
+              <a:rPr lang="en-US" altLang="ko-KR" dirty="0"/>
+              <a:t>for (x = 0; x &lt; </a:t>
+            </a:r>
+            <a:r>
+              <a:rPr lang="en-US" altLang="ko-KR" dirty="0" err="1"/>
+              <a:t>m_ZMap.</a:t>
+            </a:r>
+            <a:r>
+              <a:rPr lang="en-US" altLang="ko-KR" i="1" dirty="0" err="1"/>
+              <a:t>cols</a:t>
+            </a:r>
+            <a:r>
+              <a:rPr lang="en-US" altLang="ko-KR" dirty="0"/>
+              <a:t> - 1; x</a:t>
+            </a:r>
+            <a:r>
+              <a:rPr lang="en-US" altLang="ko-KR" dirty="0" smtClean="0"/>
+              <a:t>++)	</a:t>
+            </a:r>
+            <a:r>
+              <a:rPr lang="en-US" altLang="ko-KR" b="1" dirty="0" err="1">
+                <a:solidFill>
+                  <a:srgbClr val="0070C0"/>
+                </a:solidFill>
+              </a:rPr>
+              <a:t>m_triangles.</a:t>
+            </a:r>
+            <a:r>
+              <a:rPr lang="en-US" altLang="ko-KR" b="1" i="1" dirty="0" err="1">
+                <a:solidFill>
+                  <a:srgbClr val="0070C0"/>
+                </a:solidFill>
+              </a:rPr>
+              <a:t>push_back</a:t>
+            </a:r>
+            <a:r>
+              <a:rPr lang="en-US" altLang="ko-KR" b="1" dirty="0">
+                <a:solidFill>
+                  <a:srgbClr val="0070C0"/>
+                </a:solidFill>
+              </a:rPr>
+              <a:t>(tri</a:t>
+            </a:r>
+            <a:r>
+              <a:rPr lang="en-US" altLang="ko-KR" b="1" dirty="0" smtClean="0">
+                <a:solidFill>
+                  <a:srgbClr val="0070C0"/>
+                </a:solidFill>
+              </a:rPr>
+              <a:t>);</a:t>
+            </a:r>
+            <a:endParaRPr lang="en-US" altLang="ko-KR" dirty="0" smtClean="0"/>
+          </a:p>
+          <a:p>
+            <a:pPr lvl="4"/>
+            <a:r>
+              <a:rPr lang="en-US" altLang="ko-KR" dirty="0" err="1"/>
+              <a:t>LoadTexture</a:t>
+            </a:r>
+            <a:r>
+              <a:rPr lang="en-US" altLang="ko-KR" dirty="0"/>
+              <a:t>(</a:t>
+            </a:r>
+            <a:r>
+              <a:rPr lang="en-US" altLang="ko-KR" dirty="0" err="1"/>
+              <a:t>m_ColorImg</a:t>
+            </a:r>
+            <a:r>
+              <a:rPr lang="en-US" altLang="ko-KR" dirty="0" smtClean="0"/>
+              <a:t>);</a:t>
+            </a:r>
+          </a:p>
+          <a:p>
+            <a:pPr lvl="5"/>
+            <a:r>
+              <a:rPr lang="en-US" altLang="ko-KR" dirty="0" err="1"/>
+              <a:t>m_bTextureLoaded</a:t>
+            </a:r>
+            <a:r>
+              <a:rPr lang="en-US" altLang="ko-KR" dirty="0"/>
+              <a:t> = 1</a:t>
+            </a:r>
+            <a:r>
+              <a:rPr lang="en-US" altLang="ko-KR" dirty="0" smtClean="0"/>
+              <a:t>;</a:t>
+            </a:r>
+          </a:p>
+          <a:p>
+            <a:pPr lvl="3"/>
+            <a:r>
+              <a:rPr lang="en-US" altLang="ko-KR" dirty="0" err="1"/>
+              <a:t>yScale</a:t>
+            </a:r>
+            <a:r>
+              <a:rPr lang="en-US" altLang="ko-KR" dirty="0"/>
+              <a:t> = 1000.0 / (double)S3DData-&gt;</a:t>
+            </a:r>
+            <a:r>
+              <a:rPr lang="en-US" altLang="ko-KR" dirty="0" err="1"/>
+              <a:t>m_matDepthMap.</a:t>
+            </a:r>
+            <a:r>
+              <a:rPr lang="en-US" altLang="ko-KR" i="1" dirty="0" err="1"/>
+              <a:t>rows</a:t>
+            </a:r>
+            <a:r>
+              <a:rPr lang="en-US" altLang="ko-KR" dirty="0" smtClean="0"/>
+              <a:t>;</a:t>
+            </a:r>
+          </a:p>
+          <a:p>
+            <a:pPr lvl="3"/>
+            <a:r>
+              <a:rPr lang="en-US" altLang="ko-KR" dirty="0" err="1"/>
+              <a:t>xScale</a:t>
+            </a:r>
+            <a:r>
+              <a:rPr lang="en-US" altLang="ko-KR" dirty="0"/>
+              <a:t> = 1000.0 / (double)S3DData-&gt;</a:t>
+            </a:r>
+            <a:r>
+              <a:rPr lang="en-US" altLang="ko-KR" dirty="0" err="1"/>
+              <a:t>m_matDepthMap.</a:t>
+            </a:r>
+            <a:r>
+              <a:rPr lang="en-US" altLang="ko-KR" i="1" dirty="0" err="1"/>
+              <a:t>cols</a:t>
+            </a:r>
+            <a:r>
+              <a:rPr lang="en-US" altLang="ko-KR" dirty="0"/>
+              <a:t>;</a:t>
+            </a:r>
+            <a:endParaRPr lang="en-US" altLang="ko-KR" dirty="0" smtClean="0"/>
+          </a:p>
+          <a:p>
+            <a:pPr lvl="3"/>
+            <a:r>
+              <a:rPr lang="en-US" altLang="ko-KR" dirty="0" err="1" smtClean="0"/>
+              <a:t>m_Model.ApplyScaleAndOffset</a:t>
+            </a:r>
+            <a:r>
+              <a:rPr lang="en-US" altLang="ko-KR" dirty="0" smtClean="0"/>
+              <a:t>(0</a:t>
+            </a:r>
+            <a:r>
+              <a:rPr lang="en-US" altLang="ko-KR" dirty="0"/>
+              <a:t>, 0, 0, </a:t>
+            </a:r>
+            <a:r>
+              <a:rPr lang="en-US" altLang="ko-KR" dirty="0" err="1"/>
+              <a:t>xScale</a:t>
+            </a:r>
+            <a:r>
+              <a:rPr lang="en-US" altLang="ko-KR" dirty="0"/>
+              <a:t>, </a:t>
+            </a:r>
+            <a:r>
+              <a:rPr lang="en-US" altLang="ko-KR" dirty="0" err="1"/>
+              <a:t>yScale</a:t>
+            </a:r>
+            <a:r>
+              <a:rPr lang="en-US" altLang="ko-KR" dirty="0"/>
+              <a:t>, 5000</a:t>
+            </a:r>
+            <a:r>
+              <a:rPr lang="en-US" altLang="ko-KR" dirty="0" smtClean="0"/>
+              <a:t>);</a:t>
+            </a:r>
+          </a:p>
+          <a:p>
+            <a:pPr lvl="3"/>
+            <a:r>
+              <a:rPr lang="en-US" altLang="ko-KR" dirty="0" smtClean="0"/>
+              <a:t>((</a:t>
+            </a:r>
+            <a:r>
+              <a:rPr lang="en-US" altLang="ko-KR" dirty="0" err="1"/>
+              <a:t>COpenGLViewEx</a:t>
+            </a:r>
+            <a:r>
+              <a:rPr lang="en-US" altLang="ko-KR" dirty="0" smtClean="0"/>
+              <a:t>*)</a:t>
+            </a:r>
+            <a:r>
+              <a:rPr lang="en-US" altLang="ko-KR" dirty="0" err="1" smtClean="0"/>
+              <a:t>m_pView</a:t>
+            </a:r>
+            <a:r>
+              <a:rPr lang="en-US" altLang="ko-KR" dirty="0" smtClean="0"/>
+              <a:t>)-&gt;</a:t>
+            </a:r>
+            <a:r>
+              <a:rPr lang="en-US" altLang="ko-KR" dirty="0"/>
+              <a:t>Refresh</a:t>
+            </a:r>
+            <a:r>
+              <a:rPr lang="en-US" altLang="ko-KR" dirty="0" smtClean="0"/>
+              <a:t>();</a:t>
+            </a:r>
+          </a:p>
+          <a:p>
+            <a:pPr lvl="4"/>
+            <a:r>
+              <a:rPr lang="en-US" altLang="ko-KR" b="1" dirty="0" err="1">
+                <a:solidFill>
+                  <a:srgbClr val="0070C0"/>
+                </a:solidFill>
+              </a:rPr>
+              <a:t>GLRenderScene</a:t>
+            </a:r>
+            <a:r>
+              <a:rPr lang="en-US" altLang="ko-KR" b="1" dirty="0"/>
+              <a:t>(WM_FIT_TO_SCREEN</a:t>
+            </a:r>
+            <a:r>
+              <a:rPr lang="en-US" altLang="ko-KR" b="1" dirty="0" smtClean="0"/>
+              <a:t>);</a:t>
+            </a:r>
+          </a:p>
+          <a:p>
+            <a:pPr lvl="5"/>
+            <a:r>
+              <a:rPr lang="en-US" altLang="ko-KR" b="1" dirty="0" err="1"/>
+              <a:t>m_pParentWnd</a:t>
+            </a:r>
+            <a:r>
+              <a:rPr lang="en-US" altLang="ko-KR" b="1" dirty="0"/>
+              <a:t>-&gt;</a:t>
+            </a:r>
+            <a:r>
+              <a:rPr lang="en-US" altLang="ko-KR" b="1" i="1" dirty="0" err="1"/>
+              <a:t>SendMessage</a:t>
+            </a:r>
+            <a:r>
+              <a:rPr lang="en-US" altLang="ko-KR" b="1" dirty="0"/>
+              <a:t>(</a:t>
+            </a:r>
+            <a:r>
+              <a:rPr lang="en-US" altLang="ko-KR" b="1" dirty="0">
+                <a:solidFill>
+                  <a:srgbClr val="00B0F0"/>
+                </a:solidFill>
+              </a:rPr>
+              <a:t>WM_USER_RENDER</a:t>
+            </a:r>
+            <a:r>
+              <a:rPr lang="en-US" altLang="ko-KR" b="1" dirty="0"/>
+              <a:t>, </a:t>
+            </a:r>
+            <a:r>
+              <a:rPr lang="en-US" altLang="ko-KR" b="1" dirty="0" err="1"/>
+              <a:t>m_nHandleID</a:t>
+            </a:r>
+            <a:r>
+              <a:rPr lang="en-US" altLang="ko-KR" b="1" dirty="0"/>
+              <a:t>, </a:t>
+            </a:r>
+            <a:r>
+              <a:rPr lang="en-US" altLang="ko-KR" b="1" dirty="0" err="1"/>
+              <a:t>nAction</a:t>
+            </a:r>
+            <a:r>
+              <a:rPr lang="en-US" altLang="ko-KR" b="1" dirty="0" smtClean="0"/>
+              <a:t>);</a:t>
+            </a:r>
+          </a:p>
+          <a:p>
+            <a:pPr lvl="3"/>
+            <a:r>
+              <a:rPr lang="en-US" altLang="ko-KR" b="1" dirty="0" err="1">
+                <a:solidFill>
+                  <a:srgbClr val="00B0F0"/>
+                </a:solidFill>
+              </a:rPr>
+              <a:t>OnGLRender</a:t>
+            </a:r>
+            <a:r>
+              <a:rPr lang="en-US" altLang="ko-KR" b="1" dirty="0"/>
+              <a:t>(</a:t>
+            </a:r>
+            <a:r>
+              <a:rPr lang="en-US" altLang="ko-KR" b="1" i="1" dirty="0"/>
+              <a:t>WPARAM</a:t>
+            </a:r>
+            <a:r>
+              <a:rPr lang="en-US" altLang="ko-KR" b="1" dirty="0"/>
+              <a:t> </a:t>
+            </a:r>
+            <a:r>
+              <a:rPr lang="en-US" altLang="ko-KR" b="1" dirty="0" err="1"/>
+              <a:t>wParam</a:t>
+            </a:r>
+            <a:r>
+              <a:rPr lang="en-US" altLang="ko-KR" b="1" dirty="0"/>
+              <a:t>, </a:t>
+            </a:r>
+            <a:r>
+              <a:rPr lang="en-US" altLang="ko-KR" b="1" i="1" dirty="0"/>
+              <a:t>LPARAM</a:t>
+            </a:r>
+            <a:r>
+              <a:rPr lang="en-US" altLang="ko-KR" b="1" dirty="0"/>
+              <a:t> </a:t>
+            </a:r>
+            <a:r>
+              <a:rPr lang="en-US" altLang="ko-KR" b="1" dirty="0" err="1"/>
+              <a:t>lParam</a:t>
+            </a:r>
+            <a:r>
+              <a:rPr lang="en-US" altLang="ko-KR" b="1" dirty="0" smtClean="0"/>
+              <a:t>)</a:t>
+            </a:r>
+          </a:p>
+          <a:p>
+            <a:pPr lvl="4"/>
+            <a:r>
+              <a:rPr lang="en-US" altLang="ko-KR" i="1" dirty="0" err="1"/>
+              <a:t>glRotated</a:t>
+            </a:r>
+            <a:r>
+              <a:rPr lang="en-US" altLang="ko-KR" dirty="0"/>
+              <a:t>(_</a:t>
+            </a:r>
+            <a:r>
+              <a:rPr lang="en-US" altLang="ko-KR" dirty="0" err="1"/>
+              <a:t>angleVer</a:t>
+            </a:r>
+            <a:r>
+              <a:rPr lang="en-US" altLang="ko-KR" dirty="0"/>
+              <a:t>, 1, 0, 0); </a:t>
+            </a:r>
+            <a:r>
+              <a:rPr lang="en-US" altLang="ko-KR" i="1" dirty="0" err="1" smtClean="0"/>
+              <a:t>glRotated</a:t>
+            </a:r>
+            <a:r>
+              <a:rPr lang="en-US" altLang="ko-KR" dirty="0"/>
+              <a:t>(_</a:t>
+            </a:r>
+            <a:r>
+              <a:rPr lang="en-US" altLang="ko-KR" dirty="0" err="1"/>
+              <a:t>angleHor</a:t>
+            </a:r>
+            <a:r>
+              <a:rPr lang="en-US" altLang="ko-KR" dirty="0"/>
+              <a:t>, 0, 0, 1); </a:t>
+            </a:r>
+            <a:r>
+              <a:rPr lang="en-US" altLang="ko-KR" dirty="0" smtClean="0"/>
+              <a:t> </a:t>
+            </a:r>
+            <a:r>
+              <a:rPr lang="en-US" altLang="ko-KR" i="1" dirty="0" err="1" smtClean="0"/>
+              <a:t>glTranslatef</a:t>
+            </a:r>
+            <a:r>
+              <a:rPr lang="en-US" altLang="ko-KR" dirty="0"/>
+              <a:t>(-600, -200, 100</a:t>
+            </a:r>
+            <a:r>
+              <a:rPr lang="en-US" altLang="ko-KR" dirty="0" smtClean="0"/>
+              <a:t>);</a:t>
+            </a:r>
+          </a:p>
+          <a:p>
+            <a:pPr lvl="4"/>
+            <a:r>
+              <a:rPr lang="en-US" altLang="ko-KR" dirty="0" err="1"/>
+              <a:t>m_draw.DrawAxisXYZ</a:t>
+            </a:r>
+            <a:r>
+              <a:rPr lang="en-US" altLang="ko-KR" dirty="0"/>
+              <a:t>(0, 0, 0, 150, 5</a:t>
+            </a:r>
+            <a:r>
+              <a:rPr lang="en-US" altLang="ko-KR" dirty="0" smtClean="0"/>
+              <a:t>);</a:t>
+            </a:r>
+          </a:p>
+          <a:p>
+            <a:pPr lvl="4"/>
+            <a:r>
+              <a:rPr lang="en-US" altLang="ko-KR" dirty="0" err="1" smtClean="0"/>
+              <a:t>m_draw.DrawGrid</a:t>
+            </a:r>
+            <a:r>
+              <a:rPr lang="en-US" altLang="ko-KR" dirty="0" smtClean="0"/>
+              <a:t>(10</a:t>
+            </a:r>
+            <a:r>
+              <a:rPr lang="en-US" altLang="ko-KR" dirty="0"/>
+              <a:t>, 10, 100, 100, 0, 0, 5, 5, CdPoint3D(0, 0, 0), G_GRID_TEXT, RGB_RED</a:t>
+            </a:r>
+            <a:r>
+              <a:rPr lang="en-US" altLang="ko-KR" dirty="0" smtClean="0"/>
+              <a:t>);</a:t>
+            </a:r>
+          </a:p>
+          <a:p>
+            <a:pPr lvl="4"/>
+            <a:r>
+              <a:rPr lang="en-US" altLang="ko-KR" dirty="0"/>
+              <a:t>if (</a:t>
+            </a:r>
+            <a:r>
+              <a:rPr lang="en-US" altLang="ko-KR" dirty="0" err="1"/>
+              <a:t>m_Model.m_bMeshCreated</a:t>
+            </a:r>
+            <a:r>
+              <a:rPr lang="en-US" altLang="ko-KR" dirty="0" smtClean="0"/>
+              <a:t>) </a:t>
+            </a:r>
+            <a:r>
+              <a:rPr lang="en-US" altLang="ko-KR" dirty="0" err="1"/>
+              <a:t>m_Model.Draw</a:t>
+            </a:r>
+            <a:r>
+              <a:rPr lang="en-US" altLang="ko-KR" dirty="0"/>
+              <a:t>(TEX_LUT</a:t>
+            </a:r>
+            <a:r>
+              <a:rPr lang="en-US" altLang="ko-KR" dirty="0" smtClean="0"/>
+              <a:t>);</a:t>
+            </a:r>
+          </a:p>
+          <a:p>
+            <a:pPr lvl="5"/>
+            <a:r>
+              <a:rPr lang="en-US" altLang="ko-KR" dirty="0" err="1"/>
+              <a:t>int</a:t>
+            </a:r>
+            <a:r>
+              <a:rPr lang="en-US" altLang="ko-KR" dirty="0"/>
+              <a:t> </a:t>
+            </a:r>
+            <a:r>
+              <a:rPr lang="en-US" altLang="ko-KR" dirty="0" err="1"/>
+              <a:t>nSize</a:t>
+            </a:r>
+            <a:r>
+              <a:rPr lang="en-US" altLang="ko-KR" dirty="0"/>
+              <a:t> = </a:t>
+            </a:r>
+            <a:r>
+              <a:rPr lang="en-US" altLang="ko-KR" dirty="0" err="1"/>
+              <a:t>m_triangles.</a:t>
+            </a:r>
+            <a:r>
+              <a:rPr lang="en-US" altLang="ko-KR" i="1" dirty="0" err="1"/>
+              <a:t>size</a:t>
+            </a:r>
+            <a:r>
+              <a:rPr lang="en-US" altLang="ko-KR" dirty="0" smtClean="0"/>
+              <a:t>();</a:t>
+            </a:r>
+          </a:p>
+          <a:p>
+            <a:pPr lvl="5"/>
+            <a:r>
+              <a:rPr lang="en-US" altLang="ko-KR" i="1" dirty="0" err="1"/>
+              <a:t>glBindTexture</a:t>
+            </a:r>
+            <a:r>
+              <a:rPr lang="en-US" altLang="ko-KR" dirty="0"/>
+              <a:t>(</a:t>
+            </a:r>
+            <a:r>
+              <a:rPr lang="en-US" altLang="ko-KR" i="1" dirty="0"/>
+              <a:t>GL_TEXTURE_2D</a:t>
+            </a:r>
+            <a:r>
+              <a:rPr lang="en-US" altLang="ko-KR" dirty="0"/>
+              <a:t>, </a:t>
+            </a:r>
+            <a:r>
+              <a:rPr lang="en-US" altLang="ko-KR" dirty="0" err="1"/>
+              <a:t>m_Texture</a:t>
+            </a:r>
+            <a:r>
+              <a:rPr lang="en-US" altLang="ko-KR" dirty="0" smtClean="0"/>
+              <a:t>);</a:t>
+            </a:r>
+          </a:p>
+          <a:p>
+            <a:pPr lvl="5"/>
+            <a:r>
+              <a:rPr lang="nn-NO" altLang="ko-KR" dirty="0"/>
+              <a:t>for (int i = 0; i &lt; nSize; i</a:t>
+            </a:r>
+            <a:r>
+              <a:rPr lang="nn-NO" altLang="ko-KR" dirty="0" smtClean="0"/>
+              <a:t>++)</a:t>
+            </a:r>
+          </a:p>
+          <a:p>
+            <a:pPr lvl="6"/>
+            <a:r>
+              <a:rPr lang="en-US" altLang="ko-KR" b="1" dirty="0" err="1">
+                <a:solidFill>
+                  <a:srgbClr val="0070C0"/>
+                </a:solidFill>
+              </a:rPr>
+              <a:t>stTagTriangles</a:t>
+            </a:r>
+            <a:r>
+              <a:rPr lang="en-US" altLang="ko-KR" b="1" dirty="0">
+                <a:solidFill>
+                  <a:srgbClr val="0070C0"/>
+                </a:solidFill>
+              </a:rPr>
+              <a:t> tri = </a:t>
+            </a:r>
+            <a:r>
+              <a:rPr lang="en-US" altLang="ko-KR" b="1" dirty="0" err="1">
+                <a:solidFill>
+                  <a:srgbClr val="0070C0"/>
+                </a:solidFill>
+              </a:rPr>
+              <a:t>m_triangles</a:t>
+            </a:r>
+            <a:r>
+              <a:rPr lang="en-US" altLang="ko-KR" b="1" dirty="0">
+                <a:solidFill>
+                  <a:srgbClr val="0070C0"/>
+                </a:solidFill>
+              </a:rPr>
+              <a:t>[</a:t>
+            </a:r>
+            <a:r>
+              <a:rPr lang="en-US" altLang="ko-KR" b="1" dirty="0" err="1">
+                <a:solidFill>
+                  <a:srgbClr val="0070C0"/>
+                </a:solidFill>
+              </a:rPr>
+              <a:t>i</a:t>
+            </a:r>
+            <a:r>
+              <a:rPr lang="en-US" altLang="ko-KR" b="1" dirty="0">
+                <a:solidFill>
+                  <a:srgbClr val="0070C0"/>
+                </a:solidFill>
+              </a:rPr>
+              <a:t>];</a:t>
+            </a:r>
+            <a:endParaRPr lang="nn-NO" altLang="ko-KR" b="1" dirty="0" smtClean="0">
+              <a:solidFill>
+                <a:srgbClr val="0070C0"/>
+              </a:solidFill>
+            </a:endParaRPr>
+          </a:p>
+          <a:p>
+            <a:pPr lvl="6"/>
+            <a:r>
+              <a:rPr lang="nn-NO" altLang="ko-KR" dirty="0"/>
+              <a:t>for (int i = 0; i &lt; nSize; i</a:t>
+            </a:r>
+            <a:r>
+              <a:rPr lang="nn-NO" altLang="ko-KR" dirty="0" smtClean="0"/>
+              <a:t>++) </a:t>
+            </a:r>
+            <a:r>
+              <a:rPr lang="en-US" altLang="ko-KR" i="1" dirty="0"/>
+              <a:t>glVertex3f</a:t>
+            </a:r>
+            <a:r>
+              <a:rPr lang="en-US" altLang="ko-KR" dirty="0"/>
+              <a:t>(</a:t>
+            </a:r>
+            <a:r>
+              <a:rPr lang="en-US" altLang="ko-KR" dirty="0" err="1"/>
+              <a:t>tri.x</a:t>
+            </a:r>
+            <a:r>
+              <a:rPr lang="en-US" altLang="ko-KR" dirty="0"/>
+              <a:t>[k], </a:t>
+            </a:r>
+            <a:r>
+              <a:rPr lang="en-US" altLang="ko-KR" dirty="0" err="1"/>
+              <a:t>tri.y</a:t>
+            </a:r>
+            <a:r>
+              <a:rPr lang="en-US" altLang="ko-KR" dirty="0"/>
+              <a:t>[k], </a:t>
+            </a:r>
+            <a:r>
+              <a:rPr lang="en-US" altLang="ko-KR" dirty="0" err="1"/>
+              <a:t>tri.z</a:t>
+            </a:r>
+            <a:r>
+              <a:rPr lang="en-US" altLang="ko-KR" dirty="0"/>
+              <a:t>[k</a:t>
+            </a:r>
+            <a:r>
+              <a:rPr lang="en-US" altLang="ko-KR" dirty="0" smtClean="0"/>
+              <a:t>]);</a:t>
+            </a:r>
+          </a:p>
+          <a:p>
+            <a:pPr lvl="5"/>
+            <a:r>
+              <a:rPr lang="en-US" altLang="ko-KR" i="1" dirty="0" err="1"/>
+              <a:t>glBindTexture</a:t>
+            </a:r>
+            <a:r>
+              <a:rPr lang="en-US" altLang="ko-KR" dirty="0"/>
+              <a:t>(</a:t>
+            </a:r>
+            <a:r>
+              <a:rPr lang="en-US" altLang="ko-KR" i="1" dirty="0"/>
+              <a:t>GL_TEXTURE_2D</a:t>
+            </a:r>
+            <a:r>
+              <a:rPr lang="en-US" altLang="ko-KR" dirty="0"/>
+              <a:t>, 0);</a:t>
+            </a:r>
+            <a:endParaRPr lang="nn-NO" altLang="ko-KR" dirty="0" smtClean="0"/>
+          </a:p>
+          <a:p>
+            <a:pPr lvl="5"/>
+            <a:endParaRPr lang="en-US" altLang="ko-KR" dirty="0" smtClean="0"/>
+          </a:p>
+          <a:p>
+            <a:pPr lvl="5"/>
+            <a:endParaRPr lang="ko-KR" altLang="en-US" dirty="0"/>
           </a:p>
         </p:txBody>
       </p:sp>
     </p:spTree>
     <p:extLst>
       <p:ext uri="{BB962C8B-B14F-4D97-AF65-F5344CB8AC3E}">
-        <p14:creationId xmlns:p14="http://schemas.microsoft.com/office/powerpoint/2010/main" val="2608368481"/>
+        <p14:creationId xmlns:p14="http://schemas.microsoft.com/office/powerpoint/2010/main" val="462860450"/>
       </p:ext>
     </p:extLst>
   </p:cSld>
@@ -23841,7 +27960,7 @@
 </p:sld>
 </file>
 
-<file path=ppt/slides/slide69.xml><?xml version="1.0" encoding="utf-8"?>
+<file path=ppt/slides/slide78.xml><?xml version="1.0" encoding="utf-8"?>
 <p:sld xmlns:a="http://schemas.openxmlformats.org/drawingml/2006/main" xmlns:r="http://schemas.openxmlformats.org/officeDocument/2006/relationships" xmlns:p="http://schemas.openxmlformats.org/presentationml/2006/main">
   <p:cSld>
     <p:spTree>
@@ -23875,11 +27994,11 @@
           <a:p>
             <a:r>
               <a:rPr lang="en-US" altLang="ko-KR" dirty="0" smtClean="0"/>
-              <a:t>3D Rendering </a:t>
+              <a:t>OpenGL Event </a:t>
             </a:r>
             <a:r>
               <a:rPr lang="ko-KR" altLang="en-US" dirty="0" smtClean="0"/>
-              <a:t>순서</a:t>
+              <a:t>처리</a:t>
             </a:r>
             <a:endParaRPr lang="ko-KR" altLang="en-US" dirty="0"/>
           </a:p>
@@ -23898,617 +28017,97 @@
         <p:spPr/>
         <p:txBody>
           <a:bodyPr>
-            <a:normAutofit fontScale="25000" lnSpcReduction="20000"/>
+            <a:normAutofit fontScale="77500" lnSpcReduction="20000"/>
           </a:bodyPr>
           <a:lstStyle/>
           <a:p>
-            <a:pPr lvl="1"/>
-            <a:r>
-              <a:rPr lang="en-US" altLang="ko-KR" dirty="0" err="1"/>
-              <a:t>ExtractInfo</a:t>
+            <a:r>
+              <a:rPr lang="en-US" altLang="ko-KR" dirty="0" err="1"/>
+              <a:t>m_pView</a:t>
+            </a:r>
+            <a:r>
+              <a:rPr lang="en-US" altLang="ko-KR" dirty="0"/>
+              <a:t> = new </a:t>
+            </a:r>
+            <a:r>
+              <a:rPr lang="en-US" altLang="ko-KR" dirty="0" err="1"/>
+              <a:t>COpenGLViewEx</a:t>
+            </a:r>
+            <a:r>
+              <a:rPr lang="en-US" altLang="ko-KR" dirty="0"/>
+              <a:t>();</a:t>
+            </a:r>
+            <a:endParaRPr lang="en-US" altLang="ko-KR" dirty="0" smtClean="0"/>
+          </a:p>
+          <a:p>
+            <a:pPr lvl="1"/>
+            <a:r>
+              <a:rPr lang="en-US" altLang="ko-KR" dirty="0" smtClean="0"/>
+              <a:t>void </a:t>
+            </a:r>
+            <a:r>
+              <a:rPr lang="en-US" altLang="ko-KR" dirty="0" err="1"/>
+              <a:t>COpenGLView</a:t>
+            </a:r>
+            <a:r>
+              <a:rPr lang="en-US" altLang="ko-KR" dirty="0"/>
+              <a:t>::</a:t>
+            </a:r>
+            <a:r>
+              <a:rPr lang="en-US" altLang="ko-KR" dirty="0" err="1"/>
+              <a:t>GLRenderScene</a:t>
             </a:r>
             <a:r>
               <a:rPr lang="en-US" altLang="ko-KR" dirty="0"/>
               <a:t>(</a:t>
             </a:r>
             <a:r>
-              <a:rPr lang="en-US" altLang="ko-KR" dirty="0" err="1"/>
-              <a:t>sPath</a:t>
-            </a:r>
-            <a:r>
-              <a:rPr lang="en-US" altLang="ko-KR" dirty="0"/>
-              <a:t>)</a:t>
-            </a:r>
-            <a:endParaRPr lang="en-US" altLang="ko-KR" dirty="0" smtClean="0"/>
-          </a:p>
-          <a:p>
-            <a:pPr lvl="1"/>
-            <a:r>
-              <a:rPr lang="en-US" altLang="ko-KR" dirty="0" smtClean="0"/>
-              <a:t>Display3D()</a:t>
-            </a:r>
+              <a:rPr lang="en-US" altLang="ko-KR" i="1" dirty="0"/>
+              <a:t>UINT</a:t>
+            </a:r>
+            <a:r>
+              <a:rPr lang="en-US" altLang="ko-KR" dirty="0"/>
+              <a:t> </a:t>
+            </a:r>
+            <a:r>
+              <a:rPr lang="en-US" altLang="ko-KR" dirty="0" err="1" smtClean="0"/>
+              <a:t>nAction</a:t>
+            </a:r>
+            <a:r>
+              <a:rPr lang="en-US" altLang="ko-KR" dirty="0" smtClean="0"/>
+              <a:t>=0, </a:t>
+            </a:r>
+            <a:r>
+              <a:rPr lang="en-US" altLang="ko-KR" dirty="0" err="1"/>
+              <a:t>int</a:t>
+            </a:r>
+            <a:r>
+              <a:rPr lang="en-US" altLang="ko-KR" dirty="0"/>
+              <a:t> </a:t>
+            </a:r>
+            <a:r>
+              <a:rPr lang="en-US" altLang="ko-KR" dirty="0" err="1" smtClean="0"/>
+              <a:t>nKey</a:t>
+            </a:r>
+            <a:r>
+              <a:rPr lang="en-US" altLang="ko-KR" dirty="0" smtClean="0"/>
+              <a:t>=0)</a:t>
+            </a:r>
+            <a:endParaRPr lang="en-US" altLang="ko-KR" b="1" dirty="0" smtClean="0"/>
           </a:p>
           <a:p>
             <a:pPr lvl="2"/>
             <a:r>
-              <a:rPr lang="en-US" altLang="ko-KR" i="1" dirty="0"/>
-              <a:t>cv</a:t>
-            </a:r>
-            <a:r>
-              <a:rPr lang="en-US" altLang="ko-KR" dirty="0"/>
-              <a:t>::</a:t>
-            </a:r>
-            <a:r>
-              <a:rPr lang="en-US" altLang="ko-KR" i="1" dirty="0"/>
-              <a:t>Mat</a:t>
-            </a:r>
-            <a:r>
-              <a:rPr lang="en-US" altLang="ko-KR" dirty="0"/>
-              <a:t> </a:t>
-            </a:r>
-            <a:r>
-              <a:rPr lang="en-US" altLang="ko-KR" dirty="0" err="1"/>
-              <a:t>dst</a:t>
-            </a:r>
-            <a:r>
-              <a:rPr lang="en-US" altLang="ko-KR" dirty="0"/>
-              <a:t> = </a:t>
-            </a:r>
-            <a:r>
-              <a:rPr lang="en-US" altLang="ko-KR" dirty="0" err="1"/>
-              <a:t>m_cMatching.ApplyConvertImageAuto</a:t>
-            </a:r>
-            <a:r>
-              <a:rPr lang="en-US" altLang="ko-KR" dirty="0"/>
-              <a:t>(</a:t>
-            </a:r>
-            <a:r>
-              <a:rPr lang="en-US" altLang="ko-KR" dirty="0" err="1"/>
-              <a:t>matModelIMG</a:t>
-            </a:r>
-            <a:r>
-              <a:rPr lang="en-US" altLang="ko-KR" dirty="0" smtClean="0"/>
-              <a:t>);</a:t>
-            </a:r>
-          </a:p>
-          <a:p>
-            <a:pPr lvl="2"/>
-            <a:r>
-              <a:rPr lang="en-US" altLang="ko-KR" dirty="0" err="1"/>
-              <a:t>m_cMatching.GetMinMax</a:t>
-            </a:r>
-            <a:r>
-              <a:rPr lang="en-US" altLang="ko-KR" dirty="0"/>
-              <a:t>(</a:t>
-            </a:r>
-            <a:r>
-              <a:rPr lang="en-US" altLang="ko-KR" dirty="0" err="1"/>
-              <a:t>m_fMin</a:t>
-            </a:r>
-            <a:r>
-              <a:rPr lang="en-US" altLang="ko-KR" dirty="0"/>
-              <a:t>, </a:t>
-            </a:r>
-            <a:r>
-              <a:rPr lang="en-US" altLang="ko-KR" dirty="0" err="1"/>
-              <a:t>m_fMax</a:t>
-            </a:r>
-            <a:r>
-              <a:rPr lang="en-US" altLang="ko-KR" dirty="0" smtClean="0"/>
-              <a:t>);</a:t>
-            </a:r>
-          </a:p>
-          <a:p>
-            <a:pPr lvl="2"/>
-            <a:r>
-              <a:rPr lang="en-US" altLang="ko-KR" i="1" dirty="0" err="1"/>
-              <a:t>applyColorMap</a:t>
-            </a:r>
-            <a:r>
-              <a:rPr lang="en-US" altLang="ko-KR" dirty="0"/>
-              <a:t>(</a:t>
-            </a:r>
-            <a:r>
-              <a:rPr lang="en-US" altLang="ko-KR" dirty="0" err="1"/>
-              <a:t>dst</a:t>
-            </a:r>
-            <a:r>
-              <a:rPr lang="en-US" altLang="ko-KR" dirty="0"/>
-              <a:t>, dst2, </a:t>
-            </a:r>
-            <a:r>
-              <a:rPr lang="en-US" altLang="ko-KR" i="1" dirty="0"/>
-              <a:t>cv</a:t>
-            </a:r>
-            <a:r>
-              <a:rPr lang="en-US" altLang="ko-KR" dirty="0"/>
-              <a:t>::</a:t>
-            </a:r>
-            <a:r>
-              <a:rPr lang="en-US" altLang="ko-KR" i="1" dirty="0"/>
-              <a:t>COLORMAP_RAINBOW</a:t>
-            </a:r>
-            <a:r>
-              <a:rPr lang="en-US" altLang="ko-KR" dirty="0" smtClean="0"/>
-              <a:t>);</a:t>
-            </a:r>
-          </a:p>
-          <a:p>
-            <a:pPr lvl="2"/>
-            <a:r>
-              <a:rPr lang="en-US" altLang="ko-KR" dirty="0" err="1"/>
-              <a:t>m_DefectColor</a:t>
-            </a:r>
-            <a:r>
-              <a:rPr lang="en-US" altLang="ko-KR" dirty="0"/>
-              <a:t> = dst2</a:t>
-            </a:r>
-            <a:r>
-              <a:rPr lang="en-US" altLang="ko-KR" dirty="0" smtClean="0"/>
-              <a:t>;</a:t>
-            </a:r>
-          </a:p>
-          <a:p>
-            <a:pPr lvl="2"/>
-            <a:r>
-              <a:rPr lang="en-US" altLang="ko-KR" i="1" dirty="0"/>
-              <a:t>cv</a:t>
-            </a:r>
-            <a:r>
-              <a:rPr lang="en-US" altLang="ko-KR" dirty="0"/>
-              <a:t>::</a:t>
-            </a:r>
-            <a:r>
-              <a:rPr lang="en-US" altLang="ko-KR" i="1" dirty="0"/>
-              <a:t>resize</a:t>
-            </a:r>
-            <a:r>
-              <a:rPr lang="en-US" altLang="ko-KR" dirty="0"/>
-              <a:t>(dst2, </a:t>
-            </a:r>
-            <a:r>
-              <a:rPr lang="en-US" altLang="ko-KR" dirty="0" err="1"/>
-              <a:t>m_Image</a:t>
-            </a:r>
-            <a:r>
-              <a:rPr lang="en-US" altLang="ko-KR" dirty="0"/>
-              <a:t>, </a:t>
-            </a:r>
-            <a:r>
-              <a:rPr lang="en-US" altLang="ko-KR" i="1" dirty="0"/>
-              <a:t>cv</a:t>
-            </a:r>
-            <a:r>
-              <a:rPr lang="en-US" altLang="ko-KR" dirty="0"/>
-              <a:t>::</a:t>
-            </a:r>
-            <a:r>
-              <a:rPr lang="en-US" altLang="ko-KR" i="1" dirty="0"/>
-              <a:t>Size</a:t>
-            </a:r>
-            <a:r>
-              <a:rPr lang="en-US" altLang="ko-KR" dirty="0"/>
-              <a:t>(</a:t>
-            </a:r>
-            <a:r>
-              <a:rPr lang="en-US" altLang="ko-KR" dirty="0" err="1"/>
-              <a:t>rectResult.</a:t>
-            </a:r>
-            <a:r>
-              <a:rPr lang="en-US" altLang="ko-KR" i="1" dirty="0" err="1"/>
-              <a:t>Width</a:t>
-            </a:r>
-            <a:r>
-              <a:rPr lang="en-US" altLang="ko-KR" dirty="0"/>
-              <a:t>(), </a:t>
-            </a:r>
-            <a:r>
-              <a:rPr lang="en-US" altLang="ko-KR" dirty="0" err="1"/>
-              <a:t>rectResult.</a:t>
-            </a:r>
-            <a:r>
-              <a:rPr lang="en-US" altLang="ko-KR" i="1" dirty="0" err="1"/>
-              <a:t>Height</a:t>
-            </a:r>
-            <a:r>
-              <a:rPr lang="en-US" altLang="ko-KR" dirty="0"/>
-              <a:t>()));</a:t>
-            </a:r>
-          </a:p>
-          <a:p>
-            <a:pPr lvl="2"/>
-            <a:r>
-              <a:rPr lang="en-US" altLang="ko-KR" dirty="0" err="1"/>
-              <a:t>DrawMat</a:t>
-            </a:r>
-            <a:r>
-              <a:rPr lang="en-US" altLang="ko-KR" dirty="0"/>
-              <a:t>(</a:t>
-            </a:r>
-            <a:r>
-              <a:rPr lang="en-US" altLang="ko-KR" dirty="0" err="1"/>
-              <a:t>pDCResult</a:t>
-            </a:r>
-            <a:r>
-              <a:rPr lang="en-US" altLang="ko-KR" dirty="0"/>
-              <a:t>-&gt;</a:t>
-            </a:r>
-            <a:r>
-              <a:rPr lang="en-US" altLang="ko-KR" i="1" dirty="0" err="1"/>
-              <a:t>m_hDC</a:t>
-            </a:r>
-            <a:r>
-              <a:rPr lang="en-US" altLang="ko-KR" dirty="0"/>
-              <a:t>, </a:t>
-            </a:r>
-            <a:r>
-              <a:rPr lang="en-US" altLang="ko-KR" dirty="0" err="1"/>
-              <a:t>m_Image</a:t>
-            </a:r>
-            <a:r>
-              <a:rPr lang="en-US" altLang="ko-KR" dirty="0" smtClean="0"/>
-              <a:t>);</a:t>
-            </a:r>
-          </a:p>
-          <a:p>
-            <a:pPr lvl="3"/>
-            <a:r>
-              <a:rPr lang="en-US" altLang="ko-KR" dirty="0"/>
-              <a:t>::</a:t>
-            </a:r>
-            <a:r>
-              <a:rPr lang="en-US" altLang="ko-KR" i="1" dirty="0" err="1"/>
-              <a:t>SetDIBitsToDevice</a:t>
-            </a:r>
-            <a:r>
-              <a:rPr lang="en-US" altLang="ko-KR" dirty="0"/>
-              <a:t>(</a:t>
-            </a:r>
-            <a:r>
-              <a:rPr lang="en-US" altLang="ko-KR" dirty="0" err="1"/>
-              <a:t>hDC</a:t>
-            </a:r>
-            <a:r>
-              <a:rPr lang="en-US" altLang="ko-KR" dirty="0" smtClean="0"/>
-              <a:t>, .., </a:t>
-            </a:r>
-            <a:r>
-              <a:rPr lang="en-US" altLang="ko-KR" dirty="0" err="1"/>
-              <a:t>img.</a:t>
-            </a:r>
-            <a:r>
-              <a:rPr lang="en-US" altLang="ko-KR" i="1" dirty="0" err="1"/>
-              <a:t>data</a:t>
-            </a:r>
-            <a:r>
-              <a:rPr lang="en-US" altLang="ko-KR" dirty="0" smtClean="0"/>
-              <a:t>, ..);</a:t>
-            </a:r>
-          </a:p>
-          <a:p>
-            <a:pPr lvl="2"/>
-            <a:r>
-              <a:rPr lang="en-US" altLang="ko-KR" dirty="0" smtClean="0"/>
-              <a:t>OnUpdate3DModel(</a:t>
-            </a:r>
-            <a:r>
-              <a:rPr lang="en-US" altLang="ko-KR" i="1" dirty="0" smtClean="0"/>
-              <a:t>WPARAM</a:t>
-            </a:r>
-            <a:r>
-              <a:rPr lang="en-US" altLang="ko-KR" dirty="0" smtClean="0"/>
-              <a:t> </a:t>
-            </a:r>
-            <a:r>
-              <a:rPr lang="en-US" altLang="ko-KR" dirty="0" err="1"/>
-              <a:t>wParam</a:t>
-            </a:r>
-            <a:r>
-              <a:rPr lang="en-US" altLang="ko-KR" dirty="0"/>
-              <a:t>, </a:t>
-            </a:r>
-            <a:r>
-              <a:rPr lang="en-US" altLang="ko-KR" i="1" dirty="0"/>
-              <a:t>LPARAM</a:t>
-            </a:r>
-            <a:r>
-              <a:rPr lang="en-US" altLang="ko-KR" dirty="0"/>
-              <a:t> </a:t>
-            </a:r>
-            <a:r>
-              <a:rPr lang="en-US" altLang="ko-KR" dirty="0" err="1"/>
-              <a:t>lParam</a:t>
-            </a:r>
-            <a:r>
-              <a:rPr lang="en-US" altLang="ko-KR" dirty="0" smtClean="0"/>
-              <a:t>)</a:t>
-            </a:r>
-          </a:p>
-          <a:p>
-            <a:pPr lvl="3"/>
-            <a:r>
-              <a:rPr lang="en-US" altLang="ko-KR" dirty="0" err="1"/>
-              <a:t>m_Model.m_ZMap</a:t>
-            </a:r>
-            <a:r>
-              <a:rPr lang="en-US" altLang="ko-KR" dirty="0"/>
-              <a:t> = </a:t>
-            </a:r>
-            <a:r>
-              <a:rPr lang="en-US" altLang="ko-KR" dirty="0" err="1"/>
-              <a:t>m_matrixZ.</a:t>
-            </a:r>
-            <a:r>
-              <a:rPr lang="en-US" altLang="ko-KR" i="1" dirty="0" err="1"/>
-              <a:t>clone</a:t>
-            </a:r>
-            <a:r>
-              <a:rPr lang="en-US" altLang="ko-KR" dirty="0"/>
-              <a:t>();</a:t>
-            </a:r>
-            <a:endParaRPr lang="en-US" altLang="ko-KR" dirty="0" smtClean="0"/>
-          </a:p>
-          <a:p>
-            <a:pPr lvl="3"/>
-            <a:r>
-              <a:rPr lang="en-US" altLang="ko-KR" dirty="0" err="1"/>
-              <a:t>m_Model.MakeModel</a:t>
-            </a:r>
-            <a:r>
-              <a:rPr lang="en-US" altLang="ko-KR" dirty="0" smtClean="0"/>
-              <a:t>();</a:t>
-            </a:r>
-          </a:p>
-          <a:p>
-            <a:pPr lvl="4"/>
-            <a:r>
-              <a:rPr lang="es-ES" altLang="ko-KR" dirty="0"/>
-              <a:t>for (y = 0; y &lt; m_ZMap.</a:t>
-            </a:r>
-            <a:r>
-              <a:rPr lang="es-ES" altLang="ko-KR" i="1" dirty="0"/>
-              <a:t>rows</a:t>
-            </a:r>
-            <a:r>
-              <a:rPr lang="es-ES" altLang="ko-KR" dirty="0"/>
-              <a:t> - 1; y</a:t>
-            </a:r>
-            <a:r>
-              <a:rPr lang="es-ES" altLang="ko-KR" dirty="0" smtClean="0"/>
-              <a:t>++)</a:t>
-            </a:r>
-          </a:p>
-          <a:p>
-            <a:pPr lvl="5"/>
-            <a:r>
-              <a:rPr lang="en-US" altLang="ko-KR" dirty="0"/>
-              <a:t>for (x = 0; x &lt; </a:t>
-            </a:r>
-            <a:r>
-              <a:rPr lang="en-US" altLang="ko-KR" dirty="0" err="1"/>
-              <a:t>m_ZMap.</a:t>
-            </a:r>
-            <a:r>
-              <a:rPr lang="en-US" altLang="ko-KR" i="1" dirty="0" err="1"/>
-              <a:t>cols</a:t>
-            </a:r>
-            <a:r>
-              <a:rPr lang="en-US" altLang="ko-KR" dirty="0"/>
-              <a:t> - 1; x</a:t>
-            </a:r>
-            <a:r>
-              <a:rPr lang="en-US" altLang="ko-KR" dirty="0" smtClean="0"/>
-              <a:t>++)	</a:t>
-            </a:r>
-            <a:r>
-              <a:rPr lang="en-US" altLang="ko-KR" b="1" dirty="0" err="1">
-                <a:solidFill>
-                  <a:srgbClr val="0070C0"/>
-                </a:solidFill>
-              </a:rPr>
-              <a:t>m_triangles.</a:t>
-            </a:r>
-            <a:r>
-              <a:rPr lang="en-US" altLang="ko-KR" b="1" i="1" dirty="0" err="1">
-                <a:solidFill>
-                  <a:srgbClr val="0070C0"/>
-                </a:solidFill>
-              </a:rPr>
-              <a:t>push_back</a:t>
-            </a:r>
-            <a:r>
-              <a:rPr lang="en-US" altLang="ko-KR" b="1" dirty="0">
-                <a:solidFill>
-                  <a:srgbClr val="0070C0"/>
-                </a:solidFill>
-              </a:rPr>
-              <a:t>(tri</a:t>
-            </a:r>
-            <a:r>
-              <a:rPr lang="en-US" altLang="ko-KR" b="1" dirty="0" smtClean="0">
-                <a:solidFill>
-                  <a:srgbClr val="0070C0"/>
-                </a:solidFill>
-              </a:rPr>
-              <a:t>);</a:t>
-            </a:r>
-            <a:endParaRPr lang="en-US" altLang="ko-KR" dirty="0" smtClean="0"/>
-          </a:p>
-          <a:p>
-            <a:pPr lvl="4"/>
-            <a:r>
-              <a:rPr lang="en-US" altLang="ko-KR" dirty="0" err="1"/>
-              <a:t>LoadTexture</a:t>
-            </a:r>
-            <a:r>
-              <a:rPr lang="en-US" altLang="ko-KR" dirty="0"/>
-              <a:t>(</a:t>
-            </a:r>
-            <a:r>
-              <a:rPr lang="en-US" altLang="ko-KR" dirty="0" err="1"/>
-              <a:t>m_ColorImg</a:t>
-            </a:r>
-            <a:r>
-              <a:rPr lang="en-US" altLang="ko-KR" dirty="0" smtClean="0"/>
-              <a:t>);</a:t>
-            </a:r>
-          </a:p>
-          <a:p>
-            <a:pPr lvl="5"/>
-            <a:r>
-              <a:rPr lang="en-US" altLang="ko-KR" dirty="0" err="1"/>
-              <a:t>m_bTextureLoaded</a:t>
-            </a:r>
-            <a:r>
-              <a:rPr lang="en-US" altLang="ko-KR" dirty="0"/>
-              <a:t> = 1</a:t>
-            </a:r>
-            <a:r>
-              <a:rPr lang="en-US" altLang="ko-KR" dirty="0" smtClean="0"/>
-              <a:t>;</a:t>
-            </a:r>
-          </a:p>
-          <a:p>
-            <a:pPr lvl="3"/>
-            <a:r>
-              <a:rPr lang="en-US" altLang="ko-KR" dirty="0" err="1"/>
-              <a:t>yScale</a:t>
-            </a:r>
-            <a:r>
-              <a:rPr lang="en-US" altLang="ko-KR" dirty="0"/>
-              <a:t> = 1000.0 / (double)S3DData-&gt;</a:t>
-            </a:r>
-            <a:r>
-              <a:rPr lang="en-US" altLang="ko-KR" dirty="0" err="1"/>
-              <a:t>m_matDepthMap.</a:t>
-            </a:r>
-            <a:r>
-              <a:rPr lang="en-US" altLang="ko-KR" i="1" dirty="0" err="1"/>
-              <a:t>rows</a:t>
-            </a:r>
-            <a:r>
-              <a:rPr lang="en-US" altLang="ko-KR" dirty="0" smtClean="0"/>
-              <a:t>;</a:t>
-            </a:r>
-          </a:p>
-          <a:p>
-            <a:pPr lvl="3"/>
-            <a:r>
-              <a:rPr lang="en-US" altLang="ko-KR" dirty="0" err="1"/>
-              <a:t>xScale</a:t>
-            </a:r>
-            <a:r>
-              <a:rPr lang="en-US" altLang="ko-KR" dirty="0"/>
-              <a:t> = 1000.0 / (double)S3DData-&gt;</a:t>
-            </a:r>
-            <a:r>
-              <a:rPr lang="en-US" altLang="ko-KR" dirty="0" err="1"/>
-              <a:t>m_matDepthMap.</a:t>
-            </a:r>
-            <a:r>
-              <a:rPr lang="en-US" altLang="ko-KR" i="1" dirty="0" err="1"/>
-              <a:t>cols</a:t>
-            </a:r>
-            <a:r>
-              <a:rPr lang="en-US" altLang="ko-KR" dirty="0"/>
-              <a:t>;</a:t>
-            </a:r>
-            <a:endParaRPr lang="en-US" altLang="ko-KR" dirty="0" smtClean="0"/>
-          </a:p>
-          <a:p>
-            <a:pPr lvl="3"/>
-            <a:r>
-              <a:rPr lang="en-US" altLang="ko-KR" dirty="0" err="1" smtClean="0"/>
-              <a:t>m_Model.ApplyScaleAndOffset</a:t>
-            </a:r>
-            <a:r>
-              <a:rPr lang="en-US" altLang="ko-KR" dirty="0" smtClean="0"/>
-              <a:t>(0</a:t>
-            </a:r>
-            <a:r>
-              <a:rPr lang="en-US" altLang="ko-KR" dirty="0"/>
-              <a:t>, 0, 0, </a:t>
-            </a:r>
-            <a:r>
-              <a:rPr lang="en-US" altLang="ko-KR" dirty="0" err="1"/>
-              <a:t>xScale</a:t>
-            </a:r>
-            <a:r>
-              <a:rPr lang="en-US" altLang="ko-KR" dirty="0"/>
-              <a:t>, </a:t>
-            </a:r>
-            <a:r>
-              <a:rPr lang="en-US" altLang="ko-KR" dirty="0" err="1"/>
-              <a:t>yScale</a:t>
-            </a:r>
-            <a:r>
-              <a:rPr lang="en-US" altLang="ko-KR" dirty="0"/>
-              <a:t>, 5000</a:t>
-            </a:r>
-            <a:r>
-              <a:rPr lang="en-US" altLang="ko-KR" dirty="0" smtClean="0"/>
-              <a:t>);</a:t>
-            </a:r>
-          </a:p>
-          <a:p>
-            <a:pPr lvl="3"/>
-            <a:r>
-              <a:rPr lang="en-US" altLang="ko-KR" dirty="0" smtClean="0"/>
-              <a:t>((</a:t>
-            </a:r>
-            <a:r>
-              <a:rPr lang="en-US" altLang="ko-KR" dirty="0" err="1"/>
-              <a:t>COpenGLViewEx</a:t>
-            </a:r>
-            <a:r>
-              <a:rPr lang="en-US" altLang="ko-KR" dirty="0" smtClean="0"/>
-              <a:t>*)</a:t>
-            </a:r>
-            <a:r>
-              <a:rPr lang="en-US" altLang="ko-KR" dirty="0" err="1" smtClean="0"/>
-              <a:t>m_pView</a:t>
-            </a:r>
-            <a:r>
-              <a:rPr lang="en-US" altLang="ko-KR" dirty="0" smtClean="0"/>
-              <a:t>)-&gt;</a:t>
-            </a:r>
-            <a:r>
-              <a:rPr lang="en-US" altLang="ko-KR" dirty="0"/>
-              <a:t>Refresh</a:t>
-            </a:r>
-            <a:r>
-              <a:rPr lang="en-US" altLang="ko-KR" dirty="0" smtClean="0"/>
-              <a:t>();</a:t>
-            </a:r>
-          </a:p>
-          <a:p>
-            <a:pPr lvl="4"/>
-            <a:r>
-              <a:rPr lang="en-US" altLang="ko-KR" b="1" dirty="0" err="1">
-                <a:solidFill>
-                  <a:srgbClr val="0070C0"/>
-                </a:solidFill>
-              </a:rPr>
-              <a:t>GLRenderScene</a:t>
+              <a:rPr lang="en-US" altLang="ko-KR" b="1" dirty="0" err="1" smtClean="0"/>
+              <a:t>m_pParentWnd</a:t>
+            </a:r>
+            <a:r>
+              <a:rPr lang="en-US" altLang="ko-KR" b="1" dirty="0" smtClean="0"/>
+              <a:t>-</a:t>
             </a:r>
             <a:r>
               <a:rPr lang="en-US" altLang="ko-KR" b="1" dirty="0"/>
-              <a:t>(WM_FIT_TO_SCREEN</a:t>
-            </a:r>
-            <a:r>
-              <a:rPr lang="en-US" altLang="ko-KR" b="1" dirty="0" smtClean="0"/>
-              <a:t>);</a:t>
-            </a:r>
-          </a:p>
-          <a:p>
-            <a:pPr lvl="5"/>
-            <a:r>
-              <a:rPr lang="en-US" altLang="ko-KR" b="1" dirty="0" err="1"/>
-              <a:t>m_pParentWnd</a:t>
-            </a:r>
-            <a:r>
-              <a:rPr lang="en-US" altLang="ko-KR" b="1" dirty="0"/>
-              <a:t>-&gt;</a:t>
+              <a:t>&gt;</a:t>
             </a:r>
             <a:r>
               <a:rPr lang="en-US" altLang="ko-KR" b="1" i="1" dirty="0" err="1"/>
@@ -24550,360 +28149,542 @@
           <a:p>
             <a:pPr lvl="3"/>
             <a:r>
-              <a:rPr lang="en-US" altLang="ko-KR" b="1" dirty="0" err="1">
-                <a:solidFill>
-                  <a:srgbClr val="00B0F0"/>
-                </a:solidFill>
-              </a:rPr>
-              <a:t>OnGLRender</a:t>
-            </a:r>
-            <a:r>
-              <a:rPr lang="en-US" altLang="ko-KR" b="1" dirty="0"/>
-              <a:t>(</a:t>
-            </a:r>
-            <a:r>
-              <a:rPr lang="en-US" altLang="ko-KR" b="1" i="1" dirty="0"/>
-              <a:t>WPARAM</a:t>
+              <a:rPr lang="en-US" altLang="ko-KR" b="1" dirty="0" err="1"/>
+              <a:t>m_nHandleID</a:t>
             </a:r>
             <a:r>
               <a:rPr lang="en-US" altLang="ko-KR" b="1" dirty="0"/>
               <a:t> </a:t>
             </a:r>
             <a:r>
-              <a:rPr lang="en-US" altLang="ko-KR" b="1" dirty="0" err="1"/>
+              <a:rPr lang="en-US" altLang="ko-KR" b="1" dirty="0" smtClean="0"/>
+              <a:t>: </a:t>
+            </a:r>
+            <a:r>
+              <a:rPr lang="en-US" altLang="ko-KR" dirty="0" smtClean="0"/>
+              <a:t>IDC_STATIC_VIEW</a:t>
+            </a:r>
+          </a:p>
+          <a:p>
+            <a:pPr lvl="3"/>
+            <a:r>
+              <a:rPr lang="en-US" altLang="ko-KR" b="1" dirty="0" err="1" smtClean="0"/>
+              <a:t>nAction</a:t>
+            </a:r>
+            <a:r>
+              <a:rPr lang="en-US" altLang="ko-KR" b="1" dirty="0" smtClean="0"/>
+              <a:t> : </a:t>
+            </a:r>
+          </a:p>
+          <a:p>
+            <a:pPr lvl="4"/>
+            <a:r>
+              <a:rPr lang="en-US" altLang="ko-KR" dirty="0" smtClean="0"/>
+              <a:t>WM_MOUSEWHEEL, WM_PAINT, WM_FIT_TO_SCREEN, </a:t>
+            </a:r>
+          </a:p>
+          <a:p>
+            <a:pPr lvl="4"/>
+            <a:r>
+              <a:rPr lang="en-US" altLang="ko-KR" dirty="0"/>
+              <a:t>WM_LBUTTONDOWN, </a:t>
+            </a:r>
+            <a:r>
+              <a:rPr lang="en-US" altLang="ko-KR" dirty="0" smtClean="0"/>
+              <a:t>WM_MOUSEMOVE, WM_LBUTTONUP,</a:t>
+            </a:r>
+          </a:p>
+          <a:p>
+            <a:pPr lvl="4"/>
+            <a:r>
+              <a:rPr lang="en-US" altLang="ko-KR" dirty="0" smtClean="0"/>
+              <a:t>WM_MBUTTONDOWN, WM_MBUTTONUP, </a:t>
+            </a:r>
+          </a:p>
+          <a:p>
+            <a:pPr lvl="4"/>
+            <a:r>
+              <a:rPr lang="en-US" altLang="ko-KR" dirty="0" smtClean="0"/>
+              <a:t>WM_RBUTTONDOWN</a:t>
+            </a:r>
+            <a:r>
+              <a:rPr lang="en-US" altLang="ko-KR" dirty="0"/>
+              <a:t>, </a:t>
+            </a:r>
+            <a:r>
+              <a:rPr lang="en-US" altLang="ko-KR" dirty="0" smtClean="0"/>
+              <a:t>WM_RBUTTONUP</a:t>
+            </a:r>
+            <a:endParaRPr lang="en-US" altLang="ko-KR" i="1" dirty="0" smtClean="0"/>
+          </a:p>
+          <a:p>
+            <a:pPr lvl="2"/>
+            <a:r>
+              <a:rPr lang="en-US" altLang="ko-KR" i="1" dirty="0" smtClean="0"/>
+              <a:t>LRESULT</a:t>
+            </a:r>
+            <a:r>
+              <a:rPr lang="en-US" altLang="ko-KR" dirty="0" smtClean="0"/>
+              <a:t> </a:t>
+            </a:r>
+            <a:r>
+              <a:rPr lang="en-US" altLang="ko-KR" dirty="0"/>
+              <a:t>CDlg3DViewer::</a:t>
+            </a:r>
+            <a:r>
+              <a:rPr lang="en-US" altLang="ko-KR" dirty="0" err="1"/>
+              <a:t>OnGLRender</a:t>
+            </a:r>
+            <a:r>
+              <a:rPr lang="en-US" altLang="ko-KR" dirty="0"/>
+              <a:t>(</a:t>
+            </a:r>
+            <a:r>
+              <a:rPr lang="en-US" altLang="ko-KR" i="1" dirty="0"/>
+              <a:t>WPARAM</a:t>
+            </a:r>
+            <a:r>
+              <a:rPr lang="en-US" altLang="ko-KR" dirty="0"/>
+              <a:t> </a:t>
+            </a:r>
+            <a:r>
+              <a:rPr lang="en-US" altLang="ko-KR" dirty="0" err="1"/>
               <a:t>wParam</a:t>
             </a:r>
             <a:r>
-              <a:rPr lang="en-US" altLang="ko-KR" b="1" dirty="0"/>
+              <a:rPr lang="en-US" altLang="ko-KR" dirty="0"/>
               <a:t>, </a:t>
             </a:r>
             <a:r>
-              <a:rPr lang="en-US" altLang="ko-KR" b="1" i="1" dirty="0"/>
+              <a:rPr lang="en-US" altLang="ko-KR" i="1" dirty="0"/>
               <a:t>LPARAM</a:t>
             </a:r>
             <a:r>
-              <a:rPr lang="en-US" altLang="ko-KR" b="1" dirty="0"/>
+              <a:rPr lang="en-US" altLang="ko-KR" dirty="0"/>
               <a:t> </a:t>
             </a:r>
             <a:r>
-              <a:rPr lang="en-US" altLang="ko-KR" b="1" dirty="0" err="1"/>
+              <a:rPr lang="en-US" altLang="ko-KR" dirty="0" err="1"/>
               <a:t>lParam</a:t>
             </a:r>
             <a:r>
-              <a:rPr lang="en-US" altLang="ko-KR" b="1" dirty="0" smtClean="0"/>
+              <a:rPr lang="en-US" altLang="ko-KR" dirty="0" smtClean="0"/>
               <a:t>)</a:t>
             </a:r>
           </a:p>
           <a:p>
+            <a:pPr lvl="3"/>
+            <a:r>
+              <a:rPr lang="en-US" altLang="ko-KR" sz="1400" dirty="0"/>
+              <a:t>if (</a:t>
+            </a:r>
+            <a:r>
+              <a:rPr lang="en-US" altLang="ko-KR" sz="1400" dirty="0" err="1"/>
+              <a:t>lParam</a:t>
+            </a:r>
+            <a:r>
+              <a:rPr lang="en-US" altLang="ko-KR" sz="1400" dirty="0"/>
+              <a:t> == </a:t>
+            </a:r>
+            <a:r>
+              <a:rPr lang="en-US" altLang="ko-KR" sz="1400" i="1" dirty="0"/>
+              <a:t>WM_LBUTTONDOWN</a:t>
+            </a:r>
+            <a:r>
+              <a:rPr lang="en-US" altLang="ko-KR" sz="1400" dirty="0" smtClean="0"/>
+              <a:t>)	</a:t>
+            </a:r>
+            <a:r>
+              <a:rPr lang="en-US" altLang="ko-KR" sz="1400" dirty="0"/>
+              <a:t> _</a:t>
+            </a:r>
+            <a:r>
+              <a:rPr lang="en-US" altLang="ko-KR" sz="1400" dirty="0" err="1"/>
+              <a:t>mouseDownPoint</a:t>
+            </a:r>
+            <a:r>
+              <a:rPr lang="en-US" altLang="ko-KR" sz="1400" dirty="0"/>
+              <a:t> = </a:t>
+            </a:r>
+            <a:r>
+              <a:rPr lang="en-US" altLang="ko-KR" sz="1400" dirty="0" err="1"/>
+              <a:t>m_pView</a:t>
+            </a:r>
+            <a:r>
+              <a:rPr lang="en-US" altLang="ko-KR" sz="1400" dirty="0"/>
+              <a:t>-&gt;</a:t>
+            </a:r>
+            <a:r>
+              <a:rPr lang="en-US" altLang="ko-KR" sz="1400" dirty="0" err="1"/>
+              <a:t>m_ptCurPos</a:t>
+            </a:r>
+            <a:r>
+              <a:rPr lang="en-US" altLang="ko-KR" sz="1400" dirty="0" smtClean="0"/>
+              <a:t>;</a:t>
+            </a:r>
+          </a:p>
+          <a:p>
+            <a:pPr lvl="3"/>
+            <a:r>
+              <a:rPr lang="en-US" altLang="ko-KR" sz="1400" dirty="0"/>
+              <a:t>else if (</a:t>
+            </a:r>
+            <a:r>
+              <a:rPr lang="en-US" altLang="ko-KR" sz="1400" dirty="0" err="1"/>
+              <a:t>lParam</a:t>
+            </a:r>
+            <a:r>
+              <a:rPr lang="en-US" altLang="ko-KR" sz="1400" dirty="0"/>
+              <a:t> == </a:t>
+            </a:r>
+            <a:r>
+              <a:rPr lang="en-US" altLang="ko-KR" sz="1400" i="1" dirty="0"/>
+              <a:t>WM_LBUTTONUP</a:t>
+            </a:r>
+            <a:r>
+              <a:rPr lang="en-US" altLang="ko-KR" sz="1400" dirty="0" smtClean="0"/>
+              <a:t>)</a:t>
+            </a:r>
+            <a:r>
+              <a:rPr lang="en-US" altLang="ko-KR" sz="1400" dirty="0"/>
+              <a:t> </a:t>
+            </a:r>
+            <a:r>
+              <a:rPr lang="en-US" altLang="ko-KR" sz="1400" dirty="0" smtClean="0"/>
+              <a:t>_</a:t>
+            </a:r>
+            <a:r>
+              <a:rPr lang="en-US" altLang="ko-KR" sz="1400" dirty="0" err="1"/>
+              <a:t>mouseDownPoint</a:t>
+            </a:r>
+            <a:r>
+              <a:rPr lang="en-US" altLang="ko-KR" sz="1400" dirty="0"/>
+              <a:t> = </a:t>
+            </a:r>
+            <a:r>
+              <a:rPr lang="en-US" altLang="ko-KR" sz="1400" i="1" dirty="0" err="1"/>
+              <a:t>CPoint</a:t>
+            </a:r>
+            <a:r>
+              <a:rPr lang="en-US" altLang="ko-KR" sz="1400" dirty="0"/>
+              <a:t>(0, 0</a:t>
+            </a:r>
+            <a:r>
+              <a:rPr lang="en-US" altLang="ko-KR" sz="1400" dirty="0" smtClean="0"/>
+              <a:t>);</a:t>
+            </a:r>
+          </a:p>
+          <a:p>
+            <a:pPr lvl="3"/>
+            <a:r>
+              <a:rPr lang="en-US" altLang="ko-KR" sz="1400" dirty="0"/>
+              <a:t>else if (</a:t>
+            </a:r>
+            <a:r>
+              <a:rPr lang="en-US" altLang="ko-KR" sz="1400" dirty="0" err="1"/>
+              <a:t>lParam</a:t>
+            </a:r>
+            <a:r>
+              <a:rPr lang="en-US" altLang="ko-KR" sz="1400" dirty="0"/>
+              <a:t> == </a:t>
+            </a:r>
+            <a:r>
+              <a:rPr lang="en-US" altLang="ko-KR" sz="1400" i="1" dirty="0"/>
+              <a:t>WM_RBUTTONDOWN</a:t>
+            </a:r>
+            <a:r>
+              <a:rPr lang="en-US" altLang="ko-KR" sz="1400" dirty="0" smtClean="0"/>
+              <a:t>) </a:t>
+            </a:r>
+            <a:r>
+              <a:rPr lang="en-US" altLang="ko-KR" sz="1400" dirty="0"/>
+              <a:t>_</a:t>
+            </a:r>
+            <a:r>
+              <a:rPr lang="en-US" altLang="ko-KR" sz="1400" dirty="0" err="1"/>
+              <a:t>mouseDownPoint</a:t>
+            </a:r>
+            <a:r>
+              <a:rPr lang="en-US" altLang="ko-KR" sz="1400" dirty="0"/>
+              <a:t> = </a:t>
+            </a:r>
+            <a:r>
+              <a:rPr lang="en-US" altLang="ko-KR" sz="1400" dirty="0" err="1"/>
+              <a:t>m_pView</a:t>
+            </a:r>
+            <a:r>
+              <a:rPr lang="en-US" altLang="ko-KR" sz="1400" dirty="0"/>
+              <a:t>-&gt;</a:t>
+            </a:r>
+            <a:r>
+              <a:rPr lang="en-US" altLang="ko-KR" sz="1400" dirty="0" err="1"/>
+              <a:t>m_ptCurPos</a:t>
+            </a:r>
+            <a:r>
+              <a:rPr lang="en-US" altLang="ko-KR" sz="1400" dirty="0" smtClean="0"/>
+              <a:t>;</a:t>
+            </a:r>
+          </a:p>
+          <a:p>
+            <a:pPr lvl="3"/>
+            <a:r>
+              <a:rPr lang="en-US" altLang="ko-KR" sz="1400" dirty="0"/>
+              <a:t>else if (</a:t>
+            </a:r>
+            <a:r>
+              <a:rPr lang="en-US" altLang="ko-KR" sz="1400" dirty="0" err="1"/>
+              <a:t>lParam</a:t>
+            </a:r>
+            <a:r>
+              <a:rPr lang="en-US" altLang="ko-KR" sz="1400" dirty="0"/>
+              <a:t> == </a:t>
+            </a:r>
+            <a:r>
+              <a:rPr lang="en-US" altLang="ko-KR" sz="1400" i="1" dirty="0"/>
+              <a:t>WM_RBUTTONUP</a:t>
+            </a:r>
+            <a:r>
+              <a:rPr lang="en-US" altLang="ko-KR" sz="1400" dirty="0" smtClean="0"/>
+              <a:t>) </a:t>
+            </a:r>
+            <a:r>
+              <a:rPr lang="en-US" altLang="ko-KR" sz="1400" dirty="0"/>
+              <a:t>_</a:t>
+            </a:r>
+            <a:r>
+              <a:rPr lang="en-US" altLang="ko-KR" sz="1400" dirty="0" err="1"/>
+              <a:t>mouseDownPoint</a:t>
+            </a:r>
+            <a:r>
+              <a:rPr lang="en-US" altLang="ko-KR" sz="1400" dirty="0"/>
+              <a:t> = </a:t>
+            </a:r>
+            <a:r>
+              <a:rPr lang="en-US" altLang="ko-KR" sz="1400" i="1" dirty="0" err="1"/>
+              <a:t>CPoint</a:t>
+            </a:r>
+            <a:r>
+              <a:rPr lang="en-US" altLang="ko-KR" sz="1400" dirty="0"/>
+              <a:t>(0, 0</a:t>
+            </a:r>
+            <a:r>
+              <a:rPr lang="en-US" altLang="ko-KR" sz="1400" dirty="0" smtClean="0"/>
+              <a:t>);</a:t>
+            </a:r>
+          </a:p>
+          <a:p>
+            <a:pPr lvl="3"/>
+            <a:r>
+              <a:rPr lang="en-US" altLang="ko-KR" sz="1400" dirty="0"/>
+              <a:t>else if (</a:t>
+            </a:r>
+            <a:r>
+              <a:rPr lang="en-US" altLang="ko-KR" sz="1400" dirty="0" err="1"/>
+              <a:t>lParam</a:t>
+            </a:r>
+            <a:r>
+              <a:rPr lang="en-US" altLang="ko-KR" sz="1400" dirty="0"/>
+              <a:t> == </a:t>
+            </a:r>
+            <a:r>
+              <a:rPr lang="en-US" altLang="ko-KR" sz="1400" i="1" dirty="0"/>
+              <a:t>WM_MOUSEHWHEEL</a:t>
+            </a:r>
+            <a:r>
+              <a:rPr lang="en-US" altLang="ko-KR" sz="1400" dirty="0" smtClean="0"/>
+              <a:t>) </a:t>
+            </a:r>
+            <a:r>
+              <a:rPr lang="en-US" altLang="ko-KR" sz="1400" dirty="0" err="1"/>
+              <a:t>m_pView</a:t>
+            </a:r>
+            <a:r>
+              <a:rPr lang="en-US" altLang="ko-KR" sz="1400" dirty="0"/>
+              <a:t>-&gt;</a:t>
+            </a:r>
+            <a:r>
+              <a:rPr lang="en-US" altLang="ko-KR" sz="1400" dirty="0" err="1"/>
+              <a:t>ZoomIn</a:t>
+            </a:r>
+            <a:r>
+              <a:rPr lang="en-US" altLang="ko-KR" sz="1400" dirty="0"/>
+              <a:t>(1.1</a:t>
+            </a:r>
+            <a:r>
+              <a:rPr lang="en-US" altLang="ko-KR" sz="1400" dirty="0" smtClean="0"/>
+              <a:t>); </a:t>
+            </a:r>
+            <a:r>
+              <a:rPr lang="en-US" altLang="ko-KR" sz="1400" dirty="0" err="1"/>
+              <a:t>m_pView</a:t>
+            </a:r>
+            <a:r>
+              <a:rPr lang="en-US" altLang="ko-KR" sz="1400" dirty="0"/>
+              <a:t>-&gt;</a:t>
+            </a:r>
+            <a:r>
+              <a:rPr lang="en-US" altLang="ko-KR" sz="1400" dirty="0" err="1"/>
+              <a:t>ZoomOut</a:t>
+            </a:r>
+            <a:r>
+              <a:rPr lang="en-US" altLang="ko-KR" sz="1400" dirty="0"/>
+              <a:t>(1.1</a:t>
+            </a:r>
+            <a:r>
+              <a:rPr lang="en-US" altLang="ko-KR" sz="1400" dirty="0" smtClean="0"/>
+              <a:t>);</a:t>
+            </a:r>
+          </a:p>
+          <a:p>
+            <a:pPr lvl="3"/>
+            <a:r>
+              <a:rPr lang="en-US" altLang="ko-KR" sz="1400" dirty="0"/>
+              <a:t>else if (</a:t>
+            </a:r>
+            <a:r>
+              <a:rPr lang="en-US" altLang="ko-KR" sz="1400" dirty="0" err="1"/>
+              <a:t>lParam</a:t>
+            </a:r>
+            <a:r>
+              <a:rPr lang="en-US" altLang="ko-KR" sz="1400" dirty="0"/>
+              <a:t> == </a:t>
+            </a:r>
+            <a:r>
+              <a:rPr lang="en-US" altLang="ko-KR" sz="1400" i="1" dirty="0"/>
+              <a:t>WM_MOUSEMOVE</a:t>
+            </a:r>
+            <a:r>
+              <a:rPr lang="en-US" altLang="ko-KR" sz="1400" dirty="0" smtClean="0"/>
+              <a:t>) </a:t>
+            </a:r>
+          </a:p>
+          <a:p>
             <a:pPr lvl="4"/>
             <a:r>
-              <a:rPr lang="en-US" altLang="ko-KR" i="1" dirty="0" err="1"/>
-              <a:t>glRotated</a:t>
-            </a:r>
-            <a:r>
-              <a:rPr lang="en-US" altLang="ko-KR" dirty="0"/>
-              <a:t>(_</a:t>
-            </a:r>
-            <a:r>
-              <a:rPr lang="en-US" altLang="ko-KR" dirty="0" err="1"/>
-              <a:t>angleVer</a:t>
-            </a:r>
-            <a:r>
-              <a:rPr lang="en-US" altLang="ko-KR" dirty="0"/>
-              <a:t>, 1, 0, 0); </a:t>
-            </a:r>
-            <a:r>
-              <a:rPr lang="en-US" altLang="ko-KR" i="1" dirty="0" err="1" smtClean="0"/>
-              <a:t>glRotated</a:t>
-            </a:r>
-            <a:r>
-              <a:rPr lang="en-US" altLang="ko-KR" dirty="0"/>
-              <a:t>(_</a:t>
-            </a:r>
-            <a:r>
-              <a:rPr lang="en-US" altLang="ko-KR" dirty="0" err="1"/>
-              <a:t>angleHor</a:t>
-            </a:r>
-            <a:r>
-              <a:rPr lang="en-US" altLang="ko-KR" dirty="0"/>
-              <a:t>, 0, 0, 1); </a:t>
-            </a:r>
-            <a:r>
-              <a:rPr lang="en-US" altLang="ko-KR" dirty="0" smtClean="0"/>
-              <a:t> </a:t>
-            </a:r>
-            <a:r>
-              <a:rPr lang="en-US" altLang="ko-KR" i="1" dirty="0" err="1" smtClean="0"/>
-              <a:t>glTranslatef</a:t>
-            </a:r>
-            <a:r>
-              <a:rPr lang="en-US" altLang="ko-KR" dirty="0"/>
-              <a:t>(-600, -200, 100</a:t>
-            </a:r>
-            <a:r>
-              <a:rPr lang="en-US" altLang="ko-KR" dirty="0" smtClean="0"/>
-              <a:t>);</a:t>
-            </a:r>
+              <a:rPr lang="en-US" altLang="ko-KR" sz="1400" dirty="0"/>
+              <a:t>if (_</a:t>
+            </a:r>
+            <a:r>
+              <a:rPr lang="en-US" altLang="ko-KR" sz="1400" dirty="0" err="1"/>
+              <a:t>mouseButton</a:t>
+            </a:r>
+            <a:r>
+              <a:rPr lang="en-US" altLang="ko-KR" sz="1400" dirty="0"/>
+              <a:t> == 1</a:t>
+            </a:r>
+            <a:r>
+              <a:rPr lang="en-US" altLang="ko-KR" sz="1400" dirty="0" smtClean="0"/>
+              <a:t>) Rotate		// </a:t>
+            </a:r>
+            <a:r>
+              <a:rPr lang="en-US" altLang="ko-KR" sz="1400" dirty="0" err="1"/>
+              <a:t>lParam</a:t>
+            </a:r>
+            <a:r>
+              <a:rPr lang="en-US" altLang="ko-KR" sz="1400" dirty="0"/>
+              <a:t> == </a:t>
+            </a:r>
+            <a:r>
+              <a:rPr lang="en-US" altLang="ko-KR" sz="1400" i="1" dirty="0"/>
+              <a:t>WM_LBUTTONDOWN</a:t>
+            </a:r>
+            <a:endParaRPr lang="en-US" altLang="ko-KR" sz="1400" dirty="0" smtClean="0"/>
           </a:p>
           <a:p>
             <a:pPr lvl="4"/>
             <a:r>
-              <a:rPr lang="en-US" altLang="ko-KR" dirty="0" err="1"/>
-              <a:t>m_draw.DrawAxisXYZ</a:t>
-            </a:r>
-            <a:r>
-              <a:rPr lang="en-US" altLang="ko-KR" dirty="0"/>
-              <a:t>(0, 0, 0, 150, 5</a:t>
-            </a:r>
-            <a:r>
-              <a:rPr lang="en-US" altLang="ko-KR" dirty="0" smtClean="0"/>
-              <a:t>);</a:t>
-            </a:r>
+              <a:rPr lang="en-US" altLang="ko-KR" sz="1400" dirty="0" smtClean="0"/>
+              <a:t>else </a:t>
+            </a:r>
+            <a:r>
+              <a:rPr lang="en-US" altLang="ko-KR" sz="1400" dirty="0"/>
+              <a:t>if (_</a:t>
+            </a:r>
+            <a:r>
+              <a:rPr lang="en-US" altLang="ko-KR" sz="1400" dirty="0" err="1"/>
+              <a:t>mouseButton</a:t>
+            </a:r>
+            <a:r>
+              <a:rPr lang="en-US" altLang="ko-KR" sz="1400" dirty="0"/>
+              <a:t> == 2</a:t>
+            </a:r>
+            <a:r>
+              <a:rPr lang="en-US" altLang="ko-KR" sz="1400" dirty="0" smtClean="0"/>
+              <a:t>) </a:t>
+            </a:r>
+            <a:r>
+              <a:rPr lang="en-US" altLang="ko-KR" sz="1400" dirty="0" err="1" smtClean="0"/>
+              <a:t>Transiant</a:t>
+            </a:r>
+            <a:r>
+              <a:rPr lang="en-US" altLang="ko-KR" sz="1400" dirty="0" smtClean="0"/>
+              <a:t>	// </a:t>
+            </a:r>
+            <a:r>
+              <a:rPr lang="en-US" altLang="ko-KR" sz="1400" dirty="0" err="1"/>
+              <a:t>lParam</a:t>
+            </a:r>
+            <a:r>
+              <a:rPr lang="en-US" altLang="ko-KR" sz="1400" dirty="0"/>
+              <a:t> == </a:t>
+            </a:r>
+            <a:r>
+              <a:rPr lang="en-US" altLang="ko-KR" sz="1400" i="1" dirty="0"/>
+              <a:t>WM_RBUTTONDOWN</a:t>
+            </a:r>
+            <a:endParaRPr lang="en-US" altLang="ko-KR" sz="1400" dirty="0" smtClean="0"/>
           </a:p>
           <a:p>
             <a:pPr lvl="4"/>
             <a:r>
-              <a:rPr lang="en-US" altLang="ko-KR" dirty="0" err="1" smtClean="0"/>
-              <a:t>m_draw.DrawGrid</a:t>
-            </a:r>
-            <a:r>
-              <a:rPr lang="en-US" altLang="ko-KR" dirty="0" smtClean="0"/>
-              <a:t>(10</a:t>
-            </a:r>
-            <a:r>
-              <a:rPr lang="en-US" altLang="ko-KR" dirty="0"/>
-              <a:t>, 10, 100, 100, 0, 0, 5, 5, CdPoint3D(0, 0, 0), G_GRID_TEXT, RGB_RED</a:t>
-            </a:r>
-            <a:r>
-              <a:rPr lang="en-US" altLang="ko-KR" dirty="0" smtClean="0"/>
-              <a:t>);</a:t>
+              <a:rPr lang="en-US" altLang="ko-KR" sz="1400" dirty="0"/>
+              <a:t>else if (_</a:t>
+            </a:r>
+            <a:r>
+              <a:rPr lang="en-US" altLang="ko-KR" sz="1400" dirty="0" err="1"/>
+              <a:t>mouseButton</a:t>
+            </a:r>
+            <a:r>
+              <a:rPr lang="en-US" altLang="ko-KR" sz="1400" dirty="0"/>
+              <a:t> == 3</a:t>
+            </a:r>
+            <a:r>
+              <a:rPr lang="en-US" altLang="ko-KR" sz="1400" dirty="0" smtClean="0"/>
+              <a:t>) ?</a:t>
             </a:r>
           </a:p>
           <a:p>
             <a:pPr lvl="4"/>
             <a:r>
-              <a:rPr lang="en-US" altLang="ko-KR" dirty="0"/>
-              <a:t>if (</a:t>
-            </a:r>
-            <a:r>
-              <a:rPr lang="en-US" altLang="ko-KR" dirty="0" err="1"/>
-              <a:t>m_Model.m_bMeshCreated</a:t>
-            </a:r>
-            <a:r>
-              <a:rPr lang="en-US" altLang="ko-KR" dirty="0" smtClean="0"/>
-              <a:t>) </a:t>
-            </a:r>
-            <a:r>
-              <a:rPr lang="en-US" altLang="ko-KR" dirty="0" err="1"/>
-              <a:t>m_Model.Draw</a:t>
-            </a:r>
-            <a:r>
-              <a:rPr lang="en-US" altLang="ko-KR" dirty="0"/>
-              <a:t>(TEX_LUT</a:t>
-            </a:r>
-            <a:r>
-              <a:rPr lang="en-US" altLang="ko-KR" dirty="0" smtClean="0"/>
-              <a:t>);</a:t>
-            </a:r>
-          </a:p>
-          <a:p>
-            <a:pPr lvl="5"/>
-            <a:r>
-              <a:rPr lang="en-US" altLang="ko-KR" dirty="0" err="1"/>
-              <a:t>int</a:t>
-            </a:r>
-            <a:r>
-              <a:rPr lang="en-US" altLang="ko-KR" dirty="0"/>
-              <a:t> </a:t>
-            </a:r>
-            <a:r>
-              <a:rPr lang="en-US" altLang="ko-KR" dirty="0" err="1"/>
-              <a:t>nSize</a:t>
-            </a:r>
-            <a:r>
-              <a:rPr lang="en-US" altLang="ko-KR" dirty="0"/>
+              <a:rPr lang="en-US" altLang="ko-KR" sz="1400" dirty="0"/>
+              <a:t>_</a:t>
+            </a:r>
+            <a:r>
+              <a:rPr lang="en-US" altLang="ko-KR" sz="1400" dirty="0" err="1"/>
+              <a:t>mouseDownPoint</a:t>
+            </a:r>
+            <a:r>
+              <a:rPr lang="en-US" altLang="ko-KR" sz="1400" dirty="0"/>
               <a:t> = </a:t>
             </a:r>
             <a:r>
-              <a:rPr lang="en-US" altLang="ko-KR" dirty="0" err="1"/>
-              <a:t>m_triangles.</a:t>
-            </a:r>
-            <a:r>
-              <a:rPr lang="en-US" altLang="ko-KR" i="1" dirty="0" err="1"/>
-              <a:t>size</a:t>
-            </a:r>
-            <a:r>
-              <a:rPr lang="en-US" altLang="ko-KR" dirty="0" smtClean="0"/>
-              <a:t>();</a:t>
-            </a:r>
-          </a:p>
-          <a:p>
-            <a:pPr lvl="5"/>
-            <a:r>
-              <a:rPr lang="en-US" altLang="ko-KR" i="1" dirty="0" err="1"/>
-              <a:t>glBindTexture</a:t>
-            </a:r>
-            <a:r>
-              <a:rPr lang="en-US" altLang="ko-KR" dirty="0"/>
-              <a:t>(</a:t>
-            </a:r>
-            <a:r>
-              <a:rPr lang="en-US" altLang="ko-KR" i="1" dirty="0"/>
-              <a:t>GL_TEXTURE_2D</a:t>
-            </a:r>
-            <a:r>
-              <a:rPr lang="en-US" altLang="ko-KR" dirty="0"/>
-              <a:t>, </a:t>
-            </a:r>
-            <a:r>
-              <a:rPr lang="en-US" altLang="ko-KR" dirty="0" err="1"/>
-              <a:t>m_Texture</a:t>
-            </a:r>
-            <a:r>
-              <a:rPr lang="en-US" altLang="ko-KR" dirty="0" smtClean="0"/>
-              <a:t>);</a:t>
-            </a:r>
-          </a:p>
-          <a:p>
-            <a:pPr lvl="5"/>
-            <a:r>
-              <a:rPr lang="nn-NO" altLang="ko-KR" dirty="0"/>
-              <a:t>for (int i = 0; i &lt; nSize; i</a:t>
-            </a:r>
-            <a:r>
-              <a:rPr lang="nn-NO" altLang="ko-KR" dirty="0" smtClean="0"/>
-              <a:t>++)</a:t>
-            </a:r>
-          </a:p>
-          <a:p>
-            <a:pPr lvl="6"/>
-            <a:r>
-              <a:rPr lang="en-US" altLang="ko-KR" b="1" dirty="0" err="1">
-                <a:solidFill>
-                  <a:srgbClr val="0070C0"/>
-                </a:solidFill>
-              </a:rPr>
-              <a:t>stTagTriangles</a:t>
-            </a:r>
-            <a:r>
-              <a:rPr lang="en-US" altLang="ko-KR" b="1" dirty="0">
-                <a:solidFill>
-                  <a:srgbClr val="0070C0"/>
-                </a:solidFill>
-              </a:rPr>
-              <a:t> tri = </a:t>
-            </a:r>
-            <a:r>
-              <a:rPr lang="en-US" altLang="ko-KR" b="1" dirty="0" err="1">
-                <a:solidFill>
-                  <a:srgbClr val="0070C0"/>
-                </a:solidFill>
-              </a:rPr>
-              <a:t>m_triangles</a:t>
-            </a:r>
-            <a:r>
-              <a:rPr lang="en-US" altLang="ko-KR" b="1" dirty="0">
-                <a:solidFill>
-                  <a:srgbClr val="0070C0"/>
-                </a:solidFill>
-              </a:rPr>
-              <a:t>[</a:t>
-            </a:r>
-            <a:r>
-              <a:rPr lang="en-US" altLang="ko-KR" b="1" dirty="0" err="1">
-                <a:solidFill>
-                  <a:srgbClr val="0070C0"/>
-                </a:solidFill>
-              </a:rPr>
-              <a:t>i</a:t>
-            </a:r>
-            <a:r>
-              <a:rPr lang="en-US" altLang="ko-KR" b="1" dirty="0">
-                <a:solidFill>
-                  <a:srgbClr val="0070C0"/>
-                </a:solidFill>
-              </a:rPr>
-              <a:t>];</a:t>
-            </a:r>
-            <a:endParaRPr lang="nn-NO" altLang="ko-KR" b="1" dirty="0" smtClean="0">
-              <a:solidFill>
-                <a:srgbClr val="0070C0"/>
-              </a:solidFill>
-            </a:endParaRPr>
-          </a:p>
-          <a:p>
-            <a:pPr lvl="6"/>
-            <a:r>
-              <a:rPr lang="nn-NO" altLang="ko-KR" dirty="0"/>
-              <a:t>for (int i = 0; i &lt; nSize; i</a:t>
-            </a:r>
-            <a:r>
-              <a:rPr lang="nn-NO" altLang="ko-KR" dirty="0" smtClean="0"/>
-              <a:t>++) </a:t>
-            </a:r>
-            <a:r>
-              <a:rPr lang="en-US" altLang="ko-KR" i="1" dirty="0"/>
-              <a:t>glVertex3f</a:t>
-            </a:r>
-            <a:r>
-              <a:rPr lang="en-US" altLang="ko-KR" dirty="0"/>
-              <a:t>(</a:t>
-            </a:r>
-            <a:r>
-              <a:rPr lang="en-US" altLang="ko-KR" dirty="0" err="1"/>
-              <a:t>tri.x</a:t>
-            </a:r>
-            <a:r>
-              <a:rPr lang="en-US" altLang="ko-KR" dirty="0"/>
-              <a:t>[k], </a:t>
-            </a:r>
-            <a:r>
-              <a:rPr lang="en-US" altLang="ko-KR" dirty="0" err="1"/>
-              <a:t>tri.y</a:t>
-            </a:r>
-            <a:r>
-              <a:rPr lang="en-US" altLang="ko-KR" dirty="0"/>
-              <a:t>[k], </a:t>
-            </a:r>
-            <a:r>
-              <a:rPr lang="en-US" altLang="ko-KR" dirty="0" err="1"/>
-              <a:t>tri.z</a:t>
-            </a:r>
-            <a:r>
-              <a:rPr lang="en-US" altLang="ko-KR" dirty="0"/>
-              <a:t>[k</a:t>
-            </a:r>
-            <a:r>
-              <a:rPr lang="en-US" altLang="ko-KR" dirty="0" smtClean="0"/>
-              <a:t>]);</a:t>
-            </a:r>
-          </a:p>
-          <a:p>
-            <a:pPr lvl="5"/>
-            <a:r>
-              <a:rPr lang="en-US" altLang="ko-KR" i="1" dirty="0" err="1"/>
-              <a:t>glBindTexture</a:t>
-            </a:r>
-            <a:r>
-              <a:rPr lang="en-US" altLang="ko-KR" dirty="0"/>
-              <a:t>(</a:t>
-            </a:r>
-            <a:r>
-              <a:rPr lang="en-US" altLang="ko-KR" i="1" dirty="0"/>
-              <a:t>GL_TEXTURE_2D</a:t>
-            </a:r>
-            <a:r>
-              <a:rPr lang="en-US" altLang="ko-KR" dirty="0"/>
-              <a:t>, 0);</a:t>
-            </a:r>
-            <a:endParaRPr lang="nn-NO" altLang="ko-KR" dirty="0" smtClean="0"/>
-          </a:p>
-          <a:p>
-            <a:pPr lvl="5"/>
-            <a:endParaRPr lang="en-US" altLang="ko-KR" dirty="0" smtClean="0"/>
-          </a:p>
-          <a:p>
-            <a:pPr lvl="5"/>
+              <a:rPr lang="en-US" altLang="ko-KR" sz="1400" dirty="0" err="1"/>
+              <a:t>m_pView</a:t>
+            </a:r>
+            <a:r>
+              <a:rPr lang="en-US" altLang="ko-KR" sz="1400" dirty="0"/>
+              <a:t>-&gt;</a:t>
+            </a:r>
+            <a:r>
+              <a:rPr lang="en-US" altLang="ko-KR" sz="1400" dirty="0" err="1"/>
+              <a:t>m_ptCurPos</a:t>
+            </a:r>
+            <a:r>
+              <a:rPr lang="en-US" altLang="ko-KR" sz="1400" dirty="0"/>
+              <a:t>;</a:t>
+            </a:r>
+          </a:p>
+          <a:p>
             <a:endParaRPr lang="ko-KR" altLang="en-US" dirty="0"/>
           </a:p>
         </p:txBody>
@@ -24911,7 +28692,7 @@
     </p:spTree>
     <p:extLst>
       <p:ext uri="{BB962C8B-B14F-4D97-AF65-F5344CB8AC3E}">
-        <p14:creationId xmlns:p14="http://schemas.microsoft.com/office/powerpoint/2010/main" val="462860450"/>
+        <p14:creationId xmlns:p14="http://schemas.microsoft.com/office/powerpoint/2010/main" val="2485708467"/>
       </p:ext>
     </p:extLst>
   </p:cSld>
@@ -24921,7 +28702,7 @@
 </p:sld>
 </file>
 
-<file path=ppt/slides/slide7.xml><?xml version="1.0" encoding="utf-8"?>
+<file path=ppt/slides/slide79.xml><?xml version="1.0" encoding="utf-8"?>
 <p:sld xmlns:a="http://schemas.openxmlformats.org/drawingml/2006/main" xmlns:r="http://schemas.openxmlformats.org/officeDocument/2006/relationships" xmlns:p="http://schemas.openxmlformats.org/presentationml/2006/main">
   <p:cSld>
     <p:spTree>
@@ -24945,7 +28726,7 @@
             <a:spLocks noGrp="1"/>
           </p:cNvSpPr>
           <p:nvPr>
-            <p:ph type="title"/>
+            <p:ph type="ctrTitle"/>
           </p:nvPr>
         </p:nvSpPr>
         <p:spPr/>
@@ -24954,16 +28735,16 @@
           <a:lstStyle/>
           <a:p>
             <a:r>
-              <a:rPr lang="en-US" altLang="ko-KR" b="1" dirty="0" err="1"/>
-              <a:t>MxClient</a:t>
-            </a:r>
-            <a:r>
-              <a:rPr lang="en-US" altLang="ko-KR" b="1" dirty="0"/>
-              <a:t> Class (Class : </a:t>
-            </a:r>
-            <a:r>
-              <a:rPr lang="en-US" altLang="ko-KR" b="1" dirty="0" smtClean="0"/>
-              <a:t>1)</a:t>
+              <a:rPr lang="en-US" altLang="ko-KR" dirty="0" err="1" smtClean="0"/>
+              <a:t>Zygo</a:t>
+            </a:r>
+            <a:r>
+              <a:rPr lang="en-US" altLang="ko-KR" dirty="0" smtClean="0"/>
+              <a:t> </a:t>
+            </a:r>
+            <a:r>
+              <a:rPr lang="en-US" altLang="ko-KR" dirty="0" err="1" smtClean="0"/>
+              <a:t>Mx</a:t>
             </a:r>
             <a:endParaRPr lang="ko-KR" altLang="en-US" dirty="0"/>
           </a:p>
@@ -24971,1197 +28752,40 @@
       </p:sp>
       <p:sp>
         <p:nvSpPr>
-          <p:cNvPr id="3" name="내용 개체 틀 2"/>
+          <p:cNvPr id="3" name="부제목 2"/>
           <p:cNvSpPr>
             <a:spLocks noGrp="1"/>
           </p:cNvSpPr>
           <p:nvPr>
-            <p:ph idx="1"/>
+            <p:ph type="subTitle" idx="1"/>
           </p:nvPr>
         </p:nvSpPr>
         <p:spPr/>
         <p:txBody>
-          <a:bodyPr>
-            <a:normAutofit fontScale="77500" lnSpcReduction="20000"/>
-          </a:bodyPr>
-          <a:lstStyle/>
-          <a:p>
-            <a:r>
-              <a:rPr lang="en-US" altLang="ko-KR" b="1" dirty="0"/>
-              <a:t>Service Class Members	 (Group : </a:t>
-            </a:r>
-            <a:r>
-              <a:rPr lang="en-US" altLang="ko-KR" b="1" dirty="0" smtClean="0"/>
-              <a:t>4)</a:t>
-            </a:r>
-            <a:endParaRPr lang="ko-KR" altLang="en-US" dirty="0"/>
-          </a:p>
-          <a:p>
-            <a:pPr lvl="1"/>
-            <a:r>
-              <a:rPr lang="en-US" altLang="ko-KR" dirty="0"/>
-              <a:t>public </a:t>
-            </a:r>
-            <a:r>
-              <a:rPr lang="en-US" altLang="ko-KR" dirty="0" err="1"/>
-              <a:t>MxService</a:t>
-            </a:r>
-            <a:r>
-              <a:rPr lang="en-US" altLang="ko-KR" dirty="0"/>
-              <a:t> </a:t>
-            </a:r>
-            <a:r>
-              <a:rPr lang="en-US" altLang="ko-KR" dirty="0" err="1"/>
-              <a:t>Mx</a:t>
-            </a:r>
-            <a:r>
-              <a:rPr lang="en-US" altLang="ko-KR" dirty="0"/>
-              <a:t>;	 (Item : 1)</a:t>
+          <a:bodyPr/>
+          <a:lstStyle/>
+          <a:p>
+            <a:r>
+              <a:rPr lang="en-US" altLang="ko-KR" dirty="0" smtClean="0"/>
+              <a:t>2026.03.11</a:t>
+            </a:r>
+          </a:p>
+          <a:p>
+            <a:endParaRPr lang="en-US" altLang="ko-KR" dirty="0"/>
+          </a:p>
+          <a:p>
+            <a:r>
+              <a:rPr lang="ko-KR" altLang="en-US" dirty="0" smtClean="0"/>
+              <a:t>신  용  대</a:t>
             </a:r>
             <a:endParaRPr lang="en-US" altLang="ko-KR" dirty="0" smtClean="0"/>
-          </a:p>
-          <a:p>
-            <a:pPr lvl="2"/>
-            <a:r>
-              <a:rPr lang="en-US" altLang="ko-KR" dirty="0"/>
-              <a:t>The </a:t>
-            </a:r>
-            <a:r>
-              <a:rPr lang="en-US" altLang="ko-KR" dirty="0" err="1"/>
-              <a:t>MxService</a:t>
-            </a:r>
-            <a:r>
-              <a:rPr lang="en-US" altLang="ko-KR" dirty="0"/>
-              <a:t> instance associated with this client</a:t>
-            </a:r>
-            <a:endParaRPr lang="en-US" altLang="ko-KR" dirty="0" smtClean="0"/>
-          </a:p>
-          <a:p>
-            <a:pPr lvl="1"/>
-            <a:r>
-              <a:rPr lang="en-US" altLang="ko-KR" dirty="0"/>
-              <a:t>public </a:t>
-            </a:r>
-            <a:r>
-              <a:rPr lang="en-US" altLang="ko-KR" dirty="0" err="1"/>
-              <a:t>InstrumentService</a:t>
-            </a:r>
-            <a:r>
-              <a:rPr lang="en-US" altLang="ko-KR" dirty="0"/>
-              <a:t> Instrument</a:t>
-            </a:r>
-            <a:r>
-              <a:rPr lang="en-US" altLang="ko-KR" dirty="0" smtClean="0"/>
-              <a:t>;	(</a:t>
-            </a:r>
-            <a:r>
-              <a:rPr lang="en-US" altLang="ko-KR" dirty="0"/>
-              <a:t>Item : </a:t>
-            </a:r>
-            <a:r>
-              <a:rPr lang="en-US" altLang="ko-KR" dirty="0" smtClean="0"/>
-              <a:t>2)</a:t>
-            </a:r>
-          </a:p>
-          <a:p>
-            <a:pPr lvl="2"/>
-            <a:r>
-              <a:rPr lang="en-US" altLang="ko-KR" dirty="0"/>
-              <a:t>The </a:t>
-            </a:r>
-            <a:r>
-              <a:rPr lang="en-US" altLang="ko-KR" dirty="0" err="1"/>
-              <a:t>InstrumentService</a:t>
-            </a:r>
-            <a:r>
-              <a:rPr lang="en-US" altLang="ko-KR" dirty="0"/>
-              <a:t> instance associated with this client</a:t>
-            </a:r>
-            <a:endParaRPr lang="en-US" altLang="ko-KR" dirty="0" smtClean="0"/>
-          </a:p>
-          <a:p>
-            <a:pPr lvl="1"/>
-            <a:r>
-              <a:rPr lang="en-US" altLang="ko-KR" dirty="0"/>
-              <a:t>public </a:t>
-            </a:r>
-            <a:r>
-              <a:rPr lang="en-US" altLang="ko-KR" dirty="0" err="1"/>
-              <a:t>MasksService</a:t>
-            </a:r>
-            <a:r>
-              <a:rPr lang="en-US" altLang="ko-KR" dirty="0"/>
-              <a:t> Masks;	</a:t>
-            </a:r>
-            <a:r>
-              <a:rPr lang="en-US" altLang="ko-KR" dirty="0" smtClean="0"/>
-              <a:t>(</a:t>
-            </a:r>
-            <a:r>
-              <a:rPr lang="en-US" altLang="ko-KR" dirty="0"/>
-              <a:t>Item : </a:t>
-            </a:r>
-            <a:r>
-              <a:rPr lang="en-US" altLang="ko-KR" dirty="0" smtClean="0"/>
-              <a:t>3)</a:t>
-            </a:r>
-          </a:p>
-          <a:p>
-            <a:pPr lvl="2"/>
-            <a:r>
-              <a:rPr lang="en-US" altLang="ko-KR" dirty="0"/>
-              <a:t>The </a:t>
-            </a:r>
-            <a:r>
-              <a:rPr lang="en-US" altLang="ko-KR" dirty="0" err="1"/>
-              <a:t>MasksService</a:t>
-            </a:r>
-            <a:r>
-              <a:rPr lang="en-US" altLang="ko-KR" dirty="0"/>
-              <a:t> instance associated with this client</a:t>
-            </a:r>
-            <a:endParaRPr lang="en-US" altLang="ko-KR" dirty="0" smtClean="0"/>
-          </a:p>
-          <a:p>
-            <a:pPr lvl="1"/>
-            <a:r>
-              <a:rPr lang="en-US" altLang="ko-KR" dirty="0"/>
-              <a:t>public </a:t>
-            </a:r>
-            <a:r>
-              <a:rPr lang="en-US" altLang="ko-KR" dirty="0" err="1"/>
-              <a:t>MotionService</a:t>
-            </a:r>
-            <a:r>
-              <a:rPr lang="en-US" altLang="ko-KR" dirty="0"/>
-              <a:t> Motion; </a:t>
-            </a:r>
-            <a:r>
-              <a:rPr lang="en-US" altLang="ko-KR" dirty="0" smtClean="0"/>
-              <a:t>	(</a:t>
-            </a:r>
-            <a:r>
-              <a:rPr lang="en-US" altLang="ko-KR" dirty="0"/>
-              <a:t>Item : </a:t>
-            </a:r>
-            <a:r>
-              <a:rPr lang="en-US" altLang="ko-KR" dirty="0" smtClean="0"/>
-              <a:t>4)</a:t>
-            </a:r>
-          </a:p>
-          <a:p>
-            <a:pPr lvl="2"/>
-            <a:r>
-              <a:rPr lang="en-US" altLang="ko-KR" dirty="0"/>
-              <a:t>The </a:t>
-            </a:r>
-            <a:r>
-              <a:rPr lang="en-US" altLang="ko-KR" dirty="0" err="1"/>
-              <a:t>MotionService</a:t>
-            </a:r>
-            <a:r>
-              <a:rPr lang="en-US" altLang="ko-KR" dirty="0"/>
-              <a:t> instance associated with this client</a:t>
-            </a:r>
-            <a:endParaRPr lang="en-US" altLang="ko-KR" dirty="0" smtClean="0"/>
-          </a:p>
-          <a:p>
-            <a:pPr lvl="1"/>
-            <a:r>
-              <a:rPr lang="en-US" altLang="ko-KR" dirty="0"/>
-              <a:t>public </a:t>
-            </a:r>
-            <a:r>
-              <a:rPr lang="en-US" altLang="ko-KR" dirty="0" err="1"/>
-              <a:t>PatternService</a:t>
-            </a:r>
-            <a:r>
-              <a:rPr lang="en-US" altLang="ko-KR" dirty="0"/>
-              <a:t> Pattern; </a:t>
-            </a:r>
-            <a:r>
-              <a:rPr lang="en-US" altLang="ko-KR" dirty="0" smtClean="0"/>
-              <a:t>	(</a:t>
-            </a:r>
-            <a:r>
-              <a:rPr lang="en-US" altLang="ko-KR" dirty="0"/>
-              <a:t>Item : </a:t>
-            </a:r>
-            <a:r>
-              <a:rPr lang="en-US" altLang="ko-KR" dirty="0" smtClean="0"/>
-              <a:t>5)</a:t>
-            </a:r>
-          </a:p>
-          <a:p>
-            <a:pPr lvl="2"/>
-            <a:r>
-              <a:rPr lang="en-US" altLang="ko-KR" dirty="0"/>
-              <a:t>The </a:t>
-            </a:r>
-            <a:r>
-              <a:rPr lang="en-US" altLang="ko-KR" dirty="0" err="1"/>
-              <a:t>PatternService</a:t>
-            </a:r>
-            <a:r>
-              <a:rPr lang="en-US" altLang="ko-KR" dirty="0"/>
-              <a:t> instance associated with this client</a:t>
-            </a:r>
-            <a:endParaRPr lang="en-US" altLang="ko-KR" dirty="0" smtClean="0"/>
-          </a:p>
-          <a:p>
-            <a:pPr lvl="1"/>
-            <a:r>
-              <a:rPr lang="en-US" altLang="ko-KR" dirty="0"/>
-              <a:t>public </a:t>
-            </a:r>
-            <a:r>
-              <a:rPr lang="en-US" altLang="ko-KR" dirty="0" err="1"/>
-              <a:t>RecipeService</a:t>
-            </a:r>
-            <a:r>
-              <a:rPr lang="en-US" altLang="ko-KR" dirty="0"/>
-              <a:t> Recipe; </a:t>
-            </a:r>
-            <a:r>
-              <a:rPr lang="en-US" altLang="ko-KR" dirty="0" smtClean="0"/>
-              <a:t>	(</a:t>
-            </a:r>
-            <a:r>
-              <a:rPr lang="en-US" altLang="ko-KR" dirty="0"/>
-              <a:t>Item : </a:t>
-            </a:r>
-            <a:r>
-              <a:rPr lang="en-US" altLang="ko-KR" dirty="0" smtClean="0"/>
-              <a:t>6)</a:t>
-            </a:r>
-          </a:p>
-          <a:p>
-            <a:pPr lvl="2"/>
-            <a:r>
-              <a:rPr lang="en-US" altLang="ko-KR" dirty="0"/>
-              <a:t>The </a:t>
-            </a:r>
-            <a:r>
-              <a:rPr lang="en-US" altLang="ko-KR" dirty="0" err="1"/>
-              <a:t>RecipeService</a:t>
-            </a:r>
-            <a:r>
-              <a:rPr lang="en-US" altLang="ko-KR" dirty="0"/>
-              <a:t> instance associated with this </a:t>
-            </a:r>
-            <a:r>
-              <a:rPr lang="en-US" altLang="ko-KR" dirty="0" smtClean="0"/>
-              <a:t>client</a:t>
-            </a:r>
-          </a:p>
-          <a:p>
-            <a:pPr lvl="1"/>
-            <a:r>
-              <a:rPr lang="en-US" altLang="ko-KR" dirty="0"/>
-              <a:t>public </a:t>
-            </a:r>
-            <a:r>
-              <a:rPr lang="en-US" altLang="ko-KR" dirty="0" err="1"/>
-              <a:t>SystemCommandsService</a:t>
-            </a:r>
-            <a:r>
-              <a:rPr lang="en-US" altLang="ko-KR" dirty="0"/>
-              <a:t> </a:t>
-            </a:r>
-            <a:r>
-              <a:rPr lang="en-US" altLang="ko-KR" dirty="0" err="1"/>
-              <a:t>SystemCommands</a:t>
-            </a:r>
-            <a:r>
-              <a:rPr lang="en-US" altLang="ko-KR" dirty="0"/>
-              <a:t>; </a:t>
-            </a:r>
-            <a:r>
-              <a:rPr lang="en-US" altLang="ko-KR" dirty="0" smtClean="0"/>
-              <a:t>	(</a:t>
-            </a:r>
-            <a:r>
-              <a:rPr lang="en-US" altLang="ko-KR" dirty="0"/>
-              <a:t>Item : </a:t>
-            </a:r>
-            <a:r>
-              <a:rPr lang="en-US" altLang="ko-KR" dirty="0" smtClean="0"/>
-              <a:t>7)</a:t>
-            </a:r>
-          </a:p>
-          <a:p>
-            <a:pPr lvl="2"/>
-            <a:r>
-              <a:rPr lang="en-US" altLang="ko-KR" dirty="0"/>
-              <a:t>The </a:t>
-            </a:r>
-            <a:r>
-              <a:rPr lang="en-US" altLang="ko-KR" dirty="0" err="1"/>
-              <a:t>SystemCommandsService</a:t>
-            </a:r>
-            <a:r>
-              <a:rPr lang="en-US" altLang="ko-KR" dirty="0"/>
-              <a:t> instance associated with this </a:t>
-            </a:r>
-            <a:r>
-              <a:rPr lang="en-US" altLang="ko-KR" dirty="0" smtClean="0"/>
-              <a:t>client</a:t>
-            </a:r>
-          </a:p>
-          <a:p>
-            <a:pPr lvl="1"/>
-            <a:r>
-              <a:rPr lang="en-US" altLang="ko-KR" dirty="0"/>
-              <a:t>public </a:t>
-            </a:r>
-            <a:r>
-              <a:rPr lang="en-US" altLang="ko-KR" dirty="0" err="1"/>
-              <a:t>UserInterfaceService</a:t>
-            </a:r>
-            <a:r>
-              <a:rPr lang="en-US" altLang="ko-KR" dirty="0"/>
-              <a:t> </a:t>
-            </a:r>
-            <a:r>
-              <a:rPr lang="en-US" altLang="ko-KR" dirty="0" err="1"/>
-              <a:t>UserInterface</a:t>
-            </a:r>
-            <a:r>
-              <a:rPr lang="en-US" altLang="ko-KR" dirty="0"/>
-              <a:t>; </a:t>
-            </a:r>
-            <a:r>
-              <a:rPr lang="en-US" altLang="ko-KR" dirty="0" smtClean="0"/>
-              <a:t>	(</a:t>
-            </a:r>
-            <a:r>
-              <a:rPr lang="en-US" altLang="ko-KR" dirty="0"/>
-              <a:t>Item : </a:t>
-            </a:r>
-            <a:r>
-              <a:rPr lang="en-US" altLang="ko-KR" dirty="0" smtClean="0"/>
-              <a:t>8)</a:t>
-            </a:r>
-          </a:p>
-          <a:p>
-            <a:pPr lvl="2"/>
-            <a:r>
-              <a:rPr lang="en-US" altLang="ko-KR" dirty="0"/>
-              <a:t>The </a:t>
-            </a:r>
-            <a:r>
-              <a:rPr lang="en-US" altLang="ko-KR" dirty="0" err="1"/>
-              <a:t>UserInterfaceService</a:t>
-            </a:r>
-            <a:r>
-              <a:rPr lang="en-US" altLang="ko-KR" dirty="0"/>
-              <a:t> instance associated with this client</a:t>
-            </a:r>
-            <a:endParaRPr lang="ko-KR" altLang="en-US" dirty="0"/>
-          </a:p>
-        </p:txBody>
-      </p:sp>
-      <p:sp>
-        <p:nvSpPr>
-          <p:cNvPr id="5" name="실행 단추: 돌아가기 4">
-            <a:hlinkClick r:id="rId2" action="ppaction://hlinksldjump" highlightClick="1"/>
-          </p:cNvPr>
-          <p:cNvSpPr/>
-          <p:nvPr/>
-        </p:nvSpPr>
-        <p:spPr>
-          <a:xfrm>
-            <a:off x="10310192" y="5272502"/>
-            <a:ext cx="1043608" cy="904461"/>
-          </a:xfrm>
-          <a:prstGeom prst="actionButtonReturn">
-            <a:avLst/>
-          </a:prstGeom>
-          <a:noFill/>
-          <a:ln w="19050">
-            <a:solidFill>
-              <a:schemeClr val="tx1"/>
-            </a:solidFill>
-          </a:ln>
-        </p:spPr>
-        <p:style>
-          <a:lnRef idx="2">
-            <a:schemeClr val="accent1">
-              <a:shade val="50000"/>
-            </a:schemeClr>
-          </a:lnRef>
-          <a:fillRef idx="1">
-            <a:schemeClr val="accent1"/>
-          </a:fillRef>
-          <a:effectRef idx="0">
-            <a:schemeClr val="accent1"/>
-          </a:effectRef>
-          <a:fontRef idx="minor">
-            <a:schemeClr val="lt1"/>
-          </a:fontRef>
-        </p:style>
-        <p:txBody>
-          <a:bodyPr rtlCol="0" anchor="ctr"/>
-          <a:lstStyle/>
-          <a:p>
-            <a:pPr algn="ctr"/>
-            <a:endParaRPr lang="ko-KR" altLang="en-US"/>
           </a:p>
         </p:txBody>
       </p:sp>
     </p:spTree>
     <p:extLst>
       <p:ext uri="{BB962C8B-B14F-4D97-AF65-F5344CB8AC3E}">
-        <p14:creationId xmlns:p14="http://schemas.microsoft.com/office/powerpoint/2010/main" val="1847982588"/>
-      </p:ext>
-    </p:extLst>
-  </p:cSld>
-  <p:clrMapOvr>
-    <a:masterClrMapping/>
-  </p:clrMapOvr>
-  <p:timing>
-    <p:tnLst>
-      <p:par>
-        <p:cTn id="1" dur="indefinite" restart="never" nodeType="tmRoot"/>
-      </p:par>
-    </p:tnLst>
-  </p:timing>
-</p:sld>
-</file>
-
-<file path=ppt/slides/slide70.xml><?xml version="1.0" encoding="utf-8"?>
-<p:sld xmlns:a="http://schemas.openxmlformats.org/drawingml/2006/main" xmlns:r="http://schemas.openxmlformats.org/officeDocument/2006/relationships" xmlns:p="http://schemas.openxmlformats.org/presentationml/2006/main">
-  <p:cSld>
-    <p:spTree>
-      <p:nvGrpSpPr>
-        <p:cNvPr id="1" name=""/>
-        <p:cNvGrpSpPr/>
-        <p:nvPr/>
-      </p:nvGrpSpPr>
-      <p:grpSpPr>
-        <a:xfrm>
-          <a:off x="0" y="0"/>
-          <a:ext cx="0" cy="0"/>
-          <a:chOff x="0" y="0"/>
-          <a:chExt cx="0" cy="0"/>
-        </a:xfrm>
-      </p:grpSpPr>
-      <p:sp>
-        <p:nvSpPr>
-          <p:cNvPr id="2" name="제목 1"/>
-          <p:cNvSpPr>
-            <a:spLocks noGrp="1"/>
-          </p:cNvSpPr>
-          <p:nvPr>
-            <p:ph type="title"/>
-          </p:nvPr>
-        </p:nvSpPr>
-        <p:spPr/>
-        <p:txBody>
-          <a:bodyPr/>
-          <a:lstStyle/>
-          <a:p>
-            <a:r>
-              <a:rPr lang="en-US" altLang="ko-KR" dirty="0" smtClean="0"/>
-              <a:t>OpenGL Event </a:t>
-            </a:r>
-            <a:r>
-              <a:rPr lang="ko-KR" altLang="en-US" dirty="0" smtClean="0"/>
-              <a:t>처리</a:t>
-            </a:r>
-            <a:endParaRPr lang="ko-KR" altLang="en-US" dirty="0"/>
-          </a:p>
-        </p:txBody>
-      </p:sp>
-      <p:sp>
-        <p:nvSpPr>
-          <p:cNvPr id="3" name="내용 개체 틀 2"/>
-          <p:cNvSpPr>
-            <a:spLocks noGrp="1"/>
-          </p:cNvSpPr>
-          <p:nvPr>
-            <p:ph idx="1"/>
-          </p:nvPr>
-        </p:nvSpPr>
-        <p:spPr/>
-        <p:txBody>
-          <a:bodyPr>
-            <a:normAutofit fontScale="77500" lnSpcReduction="20000"/>
-          </a:bodyPr>
-          <a:lstStyle/>
-          <a:p>
-            <a:r>
-              <a:rPr lang="en-US" altLang="ko-KR" dirty="0" err="1"/>
-              <a:t>m_pView</a:t>
-            </a:r>
-            <a:r>
-              <a:rPr lang="en-US" altLang="ko-KR" dirty="0"/>
-              <a:t> = new </a:t>
-            </a:r>
-            <a:r>
-              <a:rPr lang="en-US" altLang="ko-KR" dirty="0" err="1"/>
-              <a:t>COpenGLViewEx</a:t>
-            </a:r>
-            <a:r>
-              <a:rPr lang="en-US" altLang="ko-KR" dirty="0"/>
-              <a:t>();</a:t>
-            </a:r>
-            <a:endParaRPr lang="en-US" altLang="ko-KR" dirty="0" smtClean="0"/>
-          </a:p>
-          <a:p>
-            <a:pPr lvl="1"/>
-            <a:r>
-              <a:rPr lang="en-US" altLang="ko-KR" dirty="0" smtClean="0"/>
-              <a:t>void </a:t>
-            </a:r>
-            <a:r>
-              <a:rPr lang="en-US" altLang="ko-KR" dirty="0" err="1"/>
-              <a:t>COpenGLView</a:t>
-            </a:r>
-            <a:r>
-              <a:rPr lang="en-US" altLang="ko-KR" dirty="0"/>
-              <a:t>::</a:t>
-            </a:r>
-            <a:r>
-              <a:rPr lang="en-US" altLang="ko-KR" dirty="0" err="1"/>
-              <a:t>GLRenderScene</a:t>
-            </a:r>
-            <a:r>
-              <a:rPr lang="en-US" altLang="ko-KR" dirty="0"/>
-              <a:t>(</a:t>
-            </a:r>
-            <a:r>
-              <a:rPr lang="en-US" altLang="ko-KR" i="1" dirty="0"/>
-              <a:t>UINT</a:t>
-            </a:r>
-            <a:r>
-              <a:rPr lang="en-US" altLang="ko-KR" dirty="0"/>
-              <a:t> </a:t>
-            </a:r>
-            <a:r>
-              <a:rPr lang="en-US" altLang="ko-KR" dirty="0" err="1" smtClean="0"/>
-              <a:t>nAction</a:t>
-            </a:r>
-            <a:r>
-              <a:rPr lang="en-US" altLang="ko-KR" dirty="0" smtClean="0"/>
-              <a:t>=0, </a:t>
-            </a:r>
-            <a:r>
-              <a:rPr lang="en-US" altLang="ko-KR" dirty="0" err="1"/>
-              <a:t>int</a:t>
-            </a:r>
-            <a:r>
-              <a:rPr lang="en-US" altLang="ko-KR" dirty="0"/>
-              <a:t> </a:t>
-            </a:r>
-            <a:r>
-              <a:rPr lang="en-US" altLang="ko-KR" dirty="0" err="1" smtClean="0"/>
-              <a:t>nKey</a:t>
-            </a:r>
-            <a:r>
-              <a:rPr lang="en-US" altLang="ko-KR" dirty="0" smtClean="0"/>
-              <a:t>=0)</a:t>
-            </a:r>
-            <a:endParaRPr lang="en-US" altLang="ko-KR" b="1" dirty="0" smtClean="0"/>
-          </a:p>
-          <a:p>
-            <a:pPr lvl="2"/>
-            <a:r>
-              <a:rPr lang="en-US" altLang="ko-KR" b="1" dirty="0" err="1" smtClean="0"/>
-              <a:t>m_pParentWnd</a:t>
-            </a:r>
-            <a:r>
-              <a:rPr lang="en-US" altLang="ko-KR" b="1" dirty="0" smtClean="0"/>
-              <a:t>-</a:t>
-            </a:r>
-            <a:r>
-              <a:rPr lang="en-US" altLang="ko-KR" b="1" dirty="0"/>
-              <a:t>&gt;</a:t>
-            </a:r>
-            <a:r>
-              <a:rPr lang="en-US" altLang="ko-KR" b="1" i="1" dirty="0" err="1"/>
-              <a:t>SendMessage</a:t>
-            </a:r>
-            <a:r>
-              <a:rPr lang="en-US" altLang="ko-KR" b="1" dirty="0"/>
-              <a:t>(</a:t>
-            </a:r>
-            <a:r>
-              <a:rPr lang="en-US" altLang="ko-KR" b="1" dirty="0">
-                <a:solidFill>
-                  <a:srgbClr val="00B0F0"/>
-                </a:solidFill>
-              </a:rPr>
-              <a:t>WM_USER_RENDER</a:t>
-            </a:r>
-            <a:r>
-              <a:rPr lang="en-US" altLang="ko-KR" b="1" dirty="0"/>
-              <a:t>, </a:t>
-            </a:r>
-            <a:r>
-              <a:rPr lang="en-US" altLang="ko-KR" b="1" dirty="0" err="1"/>
-              <a:t>m_nHandleID</a:t>
-            </a:r>
-            <a:r>
-              <a:rPr lang="en-US" altLang="ko-KR" b="1" dirty="0"/>
-              <a:t>, </a:t>
-            </a:r>
-            <a:r>
-              <a:rPr lang="en-US" altLang="ko-KR" b="1" dirty="0" err="1"/>
-              <a:t>nAction</a:t>
-            </a:r>
-            <a:r>
-              <a:rPr lang="en-US" altLang="ko-KR" b="1" dirty="0" smtClean="0"/>
-              <a:t>);</a:t>
-            </a:r>
-          </a:p>
-          <a:p>
-            <a:pPr lvl="3"/>
-            <a:r>
-              <a:rPr lang="en-US" altLang="ko-KR" b="1" dirty="0" err="1"/>
-              <a:t>m_nHandleID</a:t>
-            </a:r>
-            <a:r>
-              <a:rPr lang="en-US" altLang="ko-KR" b="1" dirty="0"/>
-              <a:t> </a:t>
-            </a:r>
-            <a:r>
-              <a:rPr lang="en-US" altLang="ko-KR" b="1" dirty="0" smtClean="0"/>
-              <a:t>: </a:t>
-            </a:r>
-            <a:r>
-              <a:rPr lang="en-US" altLang="ko-KR" dirty="0" smtClean="0"/>
-              <a:t>IDC_STATIC_VIEW</a:t>
-            </a:r>
-          </a:p>
-          <a:p>
-            <a:pPr lvl="3"/>
-            <a:r>
-              <a:rPr lang="en-US" altLang="ko-KR" b="1" dirty="0" err="1" smtClean="0"/>
-              <a:t>nAction</a:t>
-            </a:r>
-            <a:r>
-              <a:rPr lang="en-US" altLang="ko-KR" b="1" dirty="0" smtClean="0"/>
-              <a:t> : </a:t>
-            </a:r>
-          </a:p>
-          <a:p>
-            <a:pPr lvl="4"/>
-            <a:r>
-              <a:rPr lang="en-US" altLang="ko-KR" dirty="0" smtClean="0"/>
-              <a:t>WM_MOUSEWHEEL, WM_PAINT, WM_FIT_TO_SCREEN, </a:t>
-            </a:r>
-          </a:p>
-          <a:p>
-            <a:pPr lvl="4"/>
-            <a:r>
-              <a:rPr lang="en-US" altLang="ko-KR" dirty="0"/>
-              <a:t>WM_LBUTTONDOWN, </a:t>
-            </a:r>
-            <a:r>
-              <a:rPr lang="en-US" altLang="ko-KR" dirty="0" smtClean="0"/>
-              <a:t>WM_MOUSEMOVE, WM_LBUTTONUP,</a:t>
-            </a:r>
-          </a:p>
-          <a:p>
-            <a:pPr lvl="4"/>
-            <a:r>
-              <a:rPr lang="en-US" altLang="ko-KR" dirty="0" smtClean="0"/>
-              <a:t>WM_MBUTTONDOWN, WM_MBUTTONUP, </a:t>
-            </a:r>
-          </a:p>
-          <a:p>
-            <a:pPr lvl="4"/>
-            <a:r>
-              <a:rPr lang="en-US" altLang="ko-KR" dirty="0" smtClean="0"/>
-              <a:t>WM_RBUTTONDOWN</a:t>
-            </a:r>
-            <a:r>
-              <a:rPr lang="en-US" altLang="ko-KR" dirty="0"/>
-              <a:t>, </a:t>
-            </a:r>
-            <a:r>
-              <a:rPr lang="en-US" altLang="ko-KR" dirty="0" smtClean="0"/>
-              <a:t>WM_RBUTTONUP</a:t>
-            </a:r>
-            <a:endParaRPr lang="en-US" altLang="ko-KR" i="1" dirty="0" smtClean="0"/>
-          </a:p>
-          <a:p>
-            <a:pPr lvl="2"/>
-            <a:r>
-              <a:rPr lang="en-US" altLang="ko-KR" i="1" dirty="0" smtClean="0"/>
-              <a:t>LRESULT</a:t>
-            </a:r>
-            <a:r>
-              <a:rPr lang="en-US" altLang="ko-KR" dirty="0" smtClean="0"/>
-              <a:t> </a:t>
-            </a:r>
-            <a:r>
-              <a:rPr lang="en-US" altLang="ko-KR" dirty="0"/>
-              <a:t>CDlg3DViewer::</a:t>
-            </a:r>
-            <a:r>
-              <a:rPr lang="en-US" altLang="ko-KR" dirty="0" err="1"/>
-              <a:t>OnGLRender</a:t>
-            </a:r>
-            <a:r>
-              <a:rPr lang="en-US" altLang="ko-KR" dirty="0"/>
-              <a:t>(</a:t>
-            </a:r>
-            <a:r>
-              <a:rPr lang="en-US" altLang="ko-KR" i="1" dirty="0"/>
-              <a:t>WPARAM</a:t>
-            </a:r>
-            <a:r>
-              <a:rPr lang="en-US" altLang="ko-KR" dirty="0"/>
-              <a:t> </a:t>
-            </a:r>
-            <a:r>
-              <a:rPr lang="en-US" altLang="ko-KR" dirty="0" err="1"/>
-              <a:t>wParam</a:t>
-            </a:r>
-            <a:r>
-              <a:rPr lang="en-US" altLang="ko-KR" dirty="0"/>
-              <a:t>, </a:t>
-            </a:r>
-            <a:r>
-              <a:rPr lang="en-US" altLang="ko-KR" i="1" dirty="0"/>
-              <a:t>LPARAM</a:t>
-            </a:r>
-            <a:r>
-              <a:rPr lang="en-US" altLang="ko-KR" dirty="0"/>
-              <a:t> </a:t>
-            </a:r>
-            <a:r>
-              <a:rPr lang="en-US" altLang="ko-KR" dirty="0" err="1"/>
-              <a:t>lParam</a:t>
-            </a:r>
-            <a:r>
-              <a:rPr lang="en-US" altLang="ko-KR" dirty="0" smtClean="0"/>
-              <a:t>)</a:t>
-            </a:r>
-          </a:p>
-          <a:p>
-            <a:pPr lvl="3"/>
-            <a:r>
-              <a:rPr lang="en-US" altLang="ko-KR" sz="1400" dirty="0"/>
-              <a:t>if (</a:t>
-            </a:r>
-            <a:r>
-              <a:rPr lang="en-US" altLang="ko-KR" sz="1400" dirty="0" err="1"/>
-              <a:t>lParam</a:t>
-            </a:r>
-            <a:r>
-              <a:rPr lang="en-US" altLang="ko-KR" sz="1400" dirty="0"/>
-              <a:t> == </a:t>
-            </a:r>
-            <a:r>
-              <a:rPr lang="en-US" altLang="ko-KR" sz="1400" i="1" dirty="0"/>
-              <a:t>WM_LBUTTONDOWN</a:t>
-            </a:r>
-            <a:r>
-              <a:rPr lang="en-US" altLang="ko-KR" sz="1400" dirty="0" smtClean="0"/>
-              <a:t>)	</a:t>
-            </a:r>
-            <a:r>
-              <a:rPr lang="en-US" altLang="ko-KR" sz="1400" dirty="0"/>
-              <a:t> _</a:t>
-            </a:r>
-            <a:r>
-              <a:rPr lang="en-US" altLang="ko-KR" sz="1400" dirty="0" err="1"/>
-              <a:t>mouseDownPoint</a:t>
-            </a:r>
-            <a:r>
-              <a:rPr lang="en-US" altLang="ko-KR" sz="1400" dirty="0"/>
-              <a:t> = </a:t>
-            </a:r>
-            <a:r>
-              <a:rPr lang="en-US" altLang="ko-KR" sz="1400" dirty="0" err="1"/>
-              <a:t>m_pView</a:t>
-            </a:r>
-            <a:r>
-              <a:rPr lang="en-US" altLang="ko-KR" sz="1400" dirty="0"/>
-              <a:t>-&gt;</a:t>
-            </a:r>
-            <a:r>
-              <a:rPr lang="en-US" altLang="ko-KR" sz="1400" dirty="0" err="1"/>
-              <a:t>m_ptCurPos</a:t>
-            </a:r>
-            <a:r>
-              <a:rPr lang="en-US" altLang="ko-KR" sz="1400" dirty="0" smtClean="0"/>
-              <a:t>;</a:t>
-            </a:r>
-          </a:p>
-          <a:p>
-            <a:pPr lvl="3"/>
-            <a:r>
-              <a:rPr lang="en-US" altLang="ko-KR" sz="1400" dirty="0"/>
-              <a:t>else if (</a:t>
-            </a:r>
-            <a:r>
-              <a:rPr lang="en-US" altLang="ko-KR" sz="1400" dirty="0" err="1"/>
-              <a:t>lParam</a:t>
-            </a:r>
-            <a:r>
-              <a:rPr lang="en-US" altLang="ko-KR" sz="1400" dirty="0"/>
-              <a:t> == </a:t>
-            </a:r>
-            <a:r>
-              <a:rPr lang="en-US" altLang="ko-KR" sz="1400" i="1" dirty="0"/>
-              <a:t>WM_LBUTTONUP</a:t>
-            </a:r>
-            <a:r>
-              <a:rPr lang="en-US" altLang="ko-KR" sz="1400" dirty="0" smtClean="0"/>
-              <a:t>)</a:t>
-            </a:r>
-            <a:r>
-              <a:rPr lang="en-US" altLang="ko-KR" sz="1400" dirty="0"/>
-              <a:t> </a:t>
-            </a:r>
-            <a:r>
-              <a:rPr lang="en-US" altLang="ko-KR" sz="1400" dirty="0" smtClean="0"/>
-              <a:t>_</a:t>
-            </a:r>
-            <a:r>
-              <a:rPr lang="en-US" altLang="ko-KR" sz="1400" dirty="0" err="1"/>
-              <a:t>mouseDownPoint</a:t>
-            </a:r>
-            <a:r>
-              <a:rPr lang="en-US" altLang="ko-KR" sz="1400" dirty="0"/>
-              <a:t> = </a:t>
-            </a:r>
-            <a:r>
-              <a:rPr lang="en-US" altLang="ko-KR" sz="1400" i="1" dirty="0" err="1"/>
-              <a:t>CPoint</a:t>
-            </a:r>
-            <a:r>
-              <a:rPr lang="en-US" altLang="ko-KR" sz="1400" dirty="0"/>
-              <a:t>(0, 0</a:t>
-            </a:r>
-            <a:r>
-              <a:rPr lang="en-US" altLang="ko-KR" sz="1400" dirty="0" smtClean="0"/>
-              <a:t>);</a:t>
-            </a:r>
-          </a:p>
-          <a:p>
-            <a:pPr lvl="3"/>
-            <a:r>
-              <a:rPr lang="en-US" altLang="ko-KR" sz="1400" dirty="0"/>
-              <a:t>else if (</a:t>
-            </a:r>
-            <a:r>
-              <a:rPr lang="en-US" altLang="ko-KR" sz="1400" dirty="0" err="1"/>
-              <a:t>lParam</a:t>
-            </a:r>
-            <a:r>
-              <a:rPr lang="en-US" altLang="ko-KR" sz="1400" dirty="0"/>
-              <a:t> == </a:t>
-            </a:r>
-            <a:r>
-              <a:rPr lang="en-US" altLang="ko-KR" sz="1400" i="1" dirty="0"/>
-              <a:t>WM_RBUTTONDOWN</a:t>
-            </a:r>
-            <a:r>
-              <a:rPr lang="en-US" altLang="ko-KR" sz="1400" dirty="0" smtClean="0"/>
-              <a:t>) </a:t>
-            </a:r>
-            <a:r>
-              <a:rPr lang="en-US" altLang="ko-KR" sz="1400" dirty="0"/>
-              <a:t>_</a:t>
-            </a:r>
-            <a:r>
-              <a:rPr lang="en-US" altLang="ko-KR" sz="1400" dirty="0" err="1"/>
-              <a:t>mouseDownPoint</a:t>
-            </a:r>
-            <a:r>
-              <a:rPr lang="en-US" altLang="ko-KR" sz="1400" dirty="0"/>
-              <a:t> = </a:t>
-            </a:r>
-            <a:r>
-              <a:rPr lang="en-US" altLang="ko-KR" sz="1400" dirty="0" err="1"/>
-              <a:t>m_pView</a:t>
-            </a:r>
-            <a:r>
-              <a:rPr lang="en-US" altLang="ko-KR" sz="1400" dirty="0"/>
-              <a:t>-&gt;</a:t>
-            </a:r>
-            <a:r>
-              <a:rPr lang="en-US" altLang="ko-KR" sz="1400" dirty="0" err="1"/>
-              <a:t>m_ptCurPos</a:t>
-            </a:r>
-            <a:r>
-              <a:rPr lang="en-US" altLang="ko-KR" sz="1400" dirty="0" smtClean="0"/>
-              <a:t>;</a:t>
-            </a:r>
-          </a:p>
-          <a:p>
-            <a:pPr lvl="3"/>
-            <a:r>
-              <a:rPr lang="en-US" altLang="ko-KR" sz="1400" dirty="0"/>
-              <a:t>else if (</a:t>
-            </a:r>
-            <a:r>
-              <a:rPr lang="en-US" altLang="ko-KR" sz="1400" dirty="0" err="1"/>
-              <a:t>lParam</a:t>
-            </a:r>
-            <a:r>
-              <a:rPr lang="en-US" altLang="ko-KR" sz="1400" dirty="0"/>
-              <a:t> == </a:t>
-            </a:r>
-            <a:r>
-              <a:rPr lang="en-US" altLang="ko-KR" sz="1400" i="1" dirty="0"/>
-              <a:t>WM_RBUTTONUP</a:t>
-            </a:r>
-            <a:r>
-              <a:rPr lang="en-US" altLang="ko-KR" sz="1400" dirty="0" smtClean="0"/>
-              <a:t>) </a:t>
-            </a:r>
-            <a:r>
-              <a:rPr lang="en-US" altLang="ko-KR" sz="1400" dirty="0"/>
-              <a:t>_</a:t>
-            </a:r>
-            <a:r>
-              <a:rPr lang="en-US" altLang="ko-KR" sz="1400" dirty="0" err="1"/>
-              <a:t>mouseDownPoint</a:t>
-            </a:r>
-            <a:r>
-              <a:rPr lang="en-US" altLang="ko-KR" sz="1400" dirty="0"/>
-              <a:t> = </a:t>
-            </a:r>
-            <a:r>
-              <a:rPr lang="en-US" altLang="ko-KR" sz="1400" i="1" dirty="0" err="1"/>
-              <a:t>CPoint</a:t>
-            </a:r>
-            <a:r>
-              <a:rPr lang="en-US" altLang="ko-KR" sz="1400" dirty="0"/>
-              <a:t>(0, 0</a:t>
-            </a:r>
-            <a:r>
-              <a:rPr lang="en-US" altLang="ko-KR" sz="1400" dirty="0" smtClean="0"/>
-              <a:t>);</a:t>
-            </a:r>
-          </a:p>
-          <a:p>
-            <a:pPr lvl="3"/>
-            <a:r>
-              <a:rPr lang="en-US" altLang="ko-KR" sz="1400" dirty="0"/>
-              <a:t>else if (</a:t>
-            </a:r>
-            <a:r>
-              <a:rPr lang="en-US" altLang="ko-KR" sz="1400" dirty="0" err="1"/>
-              <a:t>lParam</a:t>
-            </a:r>
-            <a:r>
-              <a:rPr lang="en-US" altLang="ko-KR" sz="1400" dirty="0"/>
-              <a:t> == </a:t>
-            </a:r>
-            <a:r>
-              <a:rPr lang="en-US" altLang="ko-KR" sz="1400" i="1" dirty="0"/>
-              <a:t>WM_MOUSEHWHEEL</a:t>
-            </a:r>
-            <a:r>
-              <a:rPr lang="en-US" altLang="ko-KR" sz="1400" dirty="0" smtClean="0"/>
-              <a:t>) </a:t>
-            </a:r>
-            <a:r>
-              <a:rPr lang="en-US" altLang="ko-KR" sz="1400" dirty="0" err="1"/>
-              <a:t>m_pView</a:t>
-            </a:r>
-            <a:r>
-              <a:rPr lang="en-US" altLang="ko-KR" sz="1400" dirty="0"/>
-              <a:t>-&gt;</a:t>
-            </a:r>
-            <a:r>
-              <a:rPr lang="en-US" altLang="ko-KR" sz="1400" dirty="0" err="1"/>
-              <a:t>ZoomIn</a:t>
-            </a:r>
-            <a:r>
-              <a:rPr lang="en-US" altLang="ko-KR" sz="1400" dirty="0"/>
-              <a:t>(1.1</a:t>
-            </a:r>
-            <a:r>
-              <a:rPr lang="en-US" altLang="ko-KR" sz="1400" dirty="0" smtClean="0"/>
-              <a:t>); </a:t>
-            </a:r>
-            <a:r>
-              <a:rPr lang="en-US" altLang="ko-KR" sz="1400" dirty="0" err="1"/>
-              <a:t>m_pView</a:t>
-            </a:r>
-            <a:r>
-              <a:rPr lang="en-US" altLang="ko-KR" sz="1400" dirty="0"/>
-              <a:t>-&gt;</a:t>
-            </a:r>
-            <a:r>
-              <a:rPr lang="en-US" altLang="ko-KR" sz="1400" dirty="0" err="1"/>
-              <a:t>ZoomOut</a:t>
-            </a:r>
-            <a:r>
-              <a:rPr lang="en-US" altLang="ko-KR" sz="1400" dirty="0"/>
-              <a:t>(1.1</a:t>
-            </a:r>
-            <a:r>
-              <a:rPr lang="en-US" altLang="ko-KR" sz="1400" dirty="0" smtClean="0"/>
-              <a:t>);</a:t>
-            </a:r>
-          </a:p>
-          <a:p>
-            <a:pPr lvl="3"/>
-            <a:r>
-              <a:rPr lang="en-US" altLang="ko-KR" sz="1400" dirty="0"/>
-              <a:t>else if (</a:t>
-            </a:r>
-            <a:r>
-              <a:rPr lang="en-US" altLang="ko-KR" sz="1400" dirty="0" err="1"/>
-              <a:t>lParam</a:t>
-            </a:r>
-            <a:r>
-              <a:rPr lang="en-US" altLang="ko-KR" sz="1400" dirty="0"/>
-              <a:t> == </a:t>
-            </a:r>
-            <a:r>
-              <a:rPr lang="en-US" altLang="ko-KR" sz="1400" i="1" dirty="0"/>
-              <a:t>WM_MOUSEMOVE</a:t>
-            </a:r>
-            <a:r>
-              <a:rPr lang="en-US" altLang="ko-KR" sz="1400" dirty="0" smtClean="0"/>
-              <a:t>) </a:t>
-            </a:r>
-          </a:p>
-          <a:p>
-            <a:pPr lvl="4"/>
-            <a:r>
-              <a:rPr lang="en-US" altLang="ko-KR" sz="1400" dirty="0"/>
-              <a:t>if (_</a:t>
-            </a:r>
-            <a:r>
-              <a:rPr lang="en-US" altLang="ko-KR" sz="1400" dirty="0" err="1"/>
-              <a:t>mouseButton</a:t>
-            </a:r>
-            <a:r>
-              <a:rPr lang="en-US" altLang="ko-KR" sz="1400" dirty="0"/>
-              <a:t> == 1</a:t>
-            </a:r>
-            <a:r>
-              <a:rPr lang="en-US" altLang="ko-KR" sz="1400" dirty="0" smtClean="0"/>
-              <a:t>) Rotate		// </a:t>
-            </a:r>
-            <a:r>
-              <a:rPr lang="en-US" altLang="ko-KR" sz="1400" dirty="0" err="1"/>
-              <a:t>lParam</a:t>
-            </a:r>
-            <a:r>
-              <a:rPr lang="en-US" altLang="ko-KR" sz="1400" dirty="0"/>
-              <a:t> == </a:t>
-            </a:r>
-            <a:r>
-              <a:rPr lang="en-US" altLang="ko-KR" sz="1400" i="1" dirty="0"/>
-              <a:t>WM_LBUTTONDOWN</a:t>
-            </a:r>
-            <a:endParaRPr lang="en-US" altLang="ko-KR" sz="1400" dirty="0" smtClean="0"/>
-          </a:p>
-          <a:p>
-            <a:pPr lvl="4"/>
-            <a:r>
-              <a:rPr lang="en-US" altLang="ko-KR" sz="1400" dirty="0" smtClean="0"/>
-              <a:t>else </a:t>
-            </a:r>
-            <a:r>
-              <a:rPr lang="en-US" altLang="ko-KR" sz="1400" dirty="0"/>
-              <a:t>if (_</a:t>
-            </a:r>
-            <a:r>
-              <a:rPr lang="en-US" altLang="ko-KR" sz="1400" dirty="0" err="1"/>
-              <a:t>mouseButton</a:t>
-            </a:r>
-            <a:r>
-              <a:rPr lang="en-US" altLang="ko-KR" sz="1400" dirty="0"/>
-              <a:t> == 2</a:t>
-            </a:r>
-            <a:r>
-              <a:rPr lang="en-US" altLang="ko-KR" sz="1400" dirty="0" smtClean="0"/>
-              <a:t>) </a:t>
-            </a:r>
-            <a:r>
-              <a:rPr lang="en-US" altLang="ko-KR" sz="1400" dirty="0" err="1" smtClean="0"/>
-              <a:t>Transiant</a:t>
-            </a:r>
-            <a:r>
-              <a:rPr lang="en-US" altLang="ko-KR" sz="1400" dirty="0" smtClean="0"/>
-              <a:t>	// </a:t>
-            </a:r>
-            <a:r>
-              <a:rPr lang="en-US" altLang="ko-KR" sz="1400" dirty="0" err="1"/>
-              <a:t>lParam</a:t>
-            </a:r>
-            <a:r>
-              <a:rPr lang="en-US" altLang="ko-KR" sz="1400" dirty="0"/>
-              <a:t> == </a:t>
-            </a:r>
-            <a:r>
-              <a:rPr lang="en-US" altLang="ko-KR" sz="1400" i="1" dirty="0"/>
-              <a:t>WM_RBUTTONDOWN</a:t>
-            </a:r>
-            <a:endParaRPr lang="en-US" altLang="ko-KR" sz="1400" dirty="0" smtClean="0"/>
-          </a:p>
-          <a:p>
-            <a:pPr lvl="4"/>
-            <a:r>
-              <a:rPr lang="en-US" altLang="ko-KR" sz="1400" dirty="0"/>
-              <a:t>else if (_</a:t>
-            </a:r>
-            <a:r>
-              <a:rPr lang="en-US" altLang="ko-KR" sz="1400" dirty="0" err="1"/>
-              <a:t>mouseButton</a:t>
-            </a:r>
-            <a:r>
-              <a:rPr lang="en-US" altLang="ko-KR" sz="1400" dirty="0"/>
-              <a:t> == 3</a:t>
-            </a:r>
-            <a:r>
-              <a:rPr lang="en-US" altLang="ko-KR" sz="1400" dirty="0" smtClean="0"/>
-              <a:t>) ?</a:t>
-            </a:r>
-          </a:p>
-          <a:p>
-            <a:pPr lvl="4"/>
-            <a:r>
-              <a:rPr lang="en-US" altLang="ko-KR" sz="1400" dirty="0"/>
-              <a:t>_</a:t>
-            </a:r>
-            <a:r>
-              <a:rPr lang="en-US" altLang="ko-KR" sz="1400" dirty="0" err="1"/>
-              <a:t>mouseDownPoint</a:t>
-            </a:r>
-            <a:r>
-              <a:rPr lang="en-US" altLang="ko-KR" sz="1400" dirty="0"/>
-              <a:t> = </a:t>
-            </a:r>
-            <a:r>
-              <a:rPr lang="en-US" altLang="ko-KR" sz="1400" dirty="0" err="1"/>
-              <a:t>m_pView</a:t>
-            </a:r>
-            <a:r>
-              <a:rPr lang="en-US" altLang="ko-KR" sz="1400" dirty="0"/>
-              <a:t>-&gt;</a:t>
-            </a:r>
-            <a:r>
-              <a:rPr lang="en-US" altLang="ko-KR" sz="1400" dirty="0" err="1"/>
-              <a:t>m_ptCurPos</a:t>
-            </a:r>
-            <a:r>
-              <a:rPr lang="en-US" altLang="ko-KR" sz="1400" dirty="0"/>
-              <a:t>;</a:t>
-            </a:r>
-          </a:p>
-          <a:p>
-            <a:endParaRPr lang="ko-KR" altLang="en-US" dirty="0"/>
-          </a:p>
-        </p:txBody>
-      </p:sp>
-    </p:spTree>
-    <p:extLst>
-      <p:ext uri="{BB962C8B-B14F-4D97-AF65-F5344CB8AC3E}">
-        <p14:creationId xmlns:p14="http://schemas.microsoft.com/office/powerpoint/2010/main" val="2485708467"/>
+        <p14:creationId xmlns:p14="http://schemas.microsoft.com/office/powerpoint/2010/main" val="3926140275"/>
       </p:ext>
     </p:extLst>
   </p:cSld>
@@ -26435,6 +29059,153 @@
       </p:par>
     </p:tnLst>
   </p:timing>
+</p:sld>
+</file>
+
+<file path=ppt/slides/slide80.xml><?xml version="1.0" encoding="utf-8"?>
+<p:sld xmlns:a="http://schemas.openxmlformats.org/drawingml/2006/main" xmlns:r="http://schemas.openxmlformats.org/officeDocument/2006/relationships" xmlns:p="http://schemas.openxmlformats.org/presentationml/2006/main">
+  <p:cSld>
+    <p:spTree>
+      <p:nvGrpSpPr>
+        <p:cNvPr id="1" name=""/>
+        <p:cNvGrpSpPr/>
+        <p:nvPr/>
+      </p:nvGrpSpPr>
+      <p:grpSpPr>
+        <a:xfrm>
+          <a:off x="0" y="0"/>
+          <a:ext cx="0" cy="0"/>
+          <a:chOff x="0" y="0"/>
+          <a:chExt cx="0" cy="0"/>
+        </a:xfrm>
+      </p:grpSpPr>
+      <p:sp>
+        <p:nvSpPr>
+          <p:cNvPr id="2" name="제목 1"/>
+          <p:cNvSpPr>
+            <a:spLocks noGrp="1"/>
+          </p:cNvSpPr>
+          <p:nvPr>
+            <p:ph type="title"/>
+          </p:nvPr>
+        </p:nvSpPr>
+        <p:spPr/>
+        <p:txBody>
+          <a:bodyPr/>
+          <a:lstStyle/>
+          <a:p>
+            <a:r>
+              <a:rPr lang="en-US" altLang="ko-KR" b="1" dirty="0"/>
+              <a:t>User Interface</a:t>
+            </a:r>
+            <a:endParaRPr lang="ko-KR" altLang="en-US" dirty="0"/>
+          </a:p>
+        </p:txBody>
+      </p:sp>
+      <p:pic>
+        <p:nvPicPr>
+          <p:cNvPr id="4" name="내용 개체 틀 3"/>
+          <p:cNvPicPr>
+            <a:picLocks noGrp="1" noChangeAspect="1"/>
+          </p:cNvPicPr>
+          <p:nvPr>
+            <p:ph idx="1"/>
+          </p:nvPr>
+        </p:nvPicPr>
+        <p:blipFill>
+          <a:blip r:embed="rId2"/>
+          <a:stretch>
+            <a:fillRect/>
+          </a:stretch>
+        </p:blipFill>
+        <p:spPr>
+          <a:xfrm>
+            <a:off x="2723433" y="1825625"/>
+            <a:ext cx="6745133" cy="4351338"/>
+          </a:xfrm>
+          <a:prstGeom prst="rect">
+            <a:avLst/>
+          </a:prstGeom>
+        </p:spPr>
+      </p:pic>
+    </p:spTree>
+    <p:extLst>
+      <p:ext uri="{BB962C8B-B14F-4D97-AF65-F5344CB8AC3E}">
+        <p14:creationId xmlns:p14="http://schemas.microsoft.com/office/powerpoint/2010/main" val="2095601729"/>
+      </p:ext>
+    </p:extLst>
+  </p:cSld>
+  <p:clrMapOvr>
+    <a:masterClrMapping/>
+  </p:clrMapOvr>
+</p:sld>
+</file>
+
+<file path=ppt/slides/slide81.xml><?xml version="1.0" encoding="utf-8"?>
+<p:sld xmlns:a="http://schemas.openxmlformats.org/drawingml/2006/main" xmlns:r="http://schemas.openxmlformats.org/officeDocument/2006/relationships" xmlns:p="http://schemas.openxmlformats.org/presentationml/2006/main">
+  <p:cSld>
+    <p:spTree>
+      <p:nvGrpSpPr>
+        <p:cNvPr id="1" name=""/>
+        <p:cNvGrpSpPr/>
+        <p:nvPr/>
+      </p:nvGrpSpPr>
+      <p:grpSpPr>
+        <a:xfrm>
+          <a:off x="0" y="0"/>
+          <a:ext cx="0" cy="0"/>
+          <a:chOff x="0" y="0"/>
+          <a:chExt cx="0" cy="0"/>
+        </a:xfrm>
+      </p:grpSpPr>
+      <p:sp>
+        <p:nvSpPr>
+          <p:cNvPr id="2" name="제목 1"/>
+          <p:cNvSpPr>
+            <a:spLocks noGrp="1"/>
+          </p:cNvSpPr>
+          <p:nvPr>
+            <p:ph type="title"/>
+          </p:nvPr>
+        </p:nvSpPr>
+        <p:spPr/>
+        <p:txBody>
+          <a:bodyPr/>
+          <a:lstStyle/>
+          <a:p>
+            <a:endParaRPr lang="ko-KR" altLang="en-US"/>
+          </a:p>
+        </p:txBody>
+      </p:sp>
+      <p:sp>
+        <p:nvSpPr>
+          <p:cNvPr id="3" name="내용 개체 틀 2"/>
+          <p:cNvSpPr>
+            <a:spLocks noGrp="1"/>
+          </p:cNvSpPr>
+          <p:nvPr>
+            <p:ph idx="1"/>
+          </p:nvPr>
+        </p:nvSpPr>
+        <p:spPr/>
+        <p:txBody>
+          <a:bodyPr/>
+          <a:lstStyle/>
+          <a:p>
+            <a:endParaRPr lang="ko-KR" altLang="en-US"/>
+          </a:p>
+        </p:txBody>
+      </p:sp>
+    </p:spTree>
+    <p:extLst>
+      <p:ext uri="{BB962C8B-B14F-4D97-AF65-F5344CB8AC3E}">
+        <p14:creationId xmlns:p14="http://schemas.microsoft.com/office/powerpoint/2010/main" val="1365516302"/>
+      </p:ext>
+    </p:extLst>
+  </p:cSld>
+  <p:clrMapOvr>
+    <a:masterClrMapping/>
+  </p:clrMapOvr>
 </p:sld>
 </file>
 

--- a/Zygo Software개발.pptx
+++ b/Zygo Software개발.pptx
@@ -81,11 +81,12 @@
     <p:sldId id="336" r:id="rId75"/>
     <p:sldId id="323" r:id="rId76"/>
     <p:sldId id="321" r:id="rId77"/>
-    <p:sldId id="324" r:id="rId78"/>
-    <p:sldId id="325" r:id="rId79"/>
-    <p:sldId id="326" r:id="rId80"/>
-    <p:sldId id="327" r:id="rId81"/>
-    <p:sldId id="328" r:id="rId82"/>
+    <p:sldId id="337" r:id="rId78"/>
+    <p:sldId id="324" r:id="rId79"/>
+    <p:sldId id="325" r:id="rId80"/>
+    <p:sldId id="326" r:id="rId81"/>
+    <p:sldId id="327" r:id="rId82"/>
+    <p:sldId id="328" r:id="rId83"/>
   </p:sldIdLst>
   <p:sldSz cx="12192000" cy="6858000"/>
   <p:notesSz cx="6797675" cy="9874250"/>
@@ -323,7 +324,7 @@
           <a:p>
             <a:fld id="{5E2EC1FB-DDCB-48DE-AA18-776941098B20}" type="datetimeFigureOut">
               <a:rPr lang="ko-KR" altLang="en-US" smtClean="0"/>
-              <a:t>2026-03-13</a:t>
+              <a:t>2026-03-30</a:t>
             </a:fld>
             <a:endParaRPr lang="ko-KR" altLang="en-US"/>
           </a:p>
@@ -493,7 +494,7 @@
           <a:p>
             <a:fld id="{5E2EC1FB-DDCB-48DE-AA18-776941098B20}" type="datetimeFigureOut">
               <a:rPr lang="ko-KR" altLang="en-US" smtClean="0"/>
-              <a:t>2026-03-13</a:t>
+              <a:t>2026-03-30</a:t>
             </a:fld>
             <a:endParaRPr lang="ko-KR" altLang="en-US"/>
           </a:p>
@@ -673,7 +674,7 @@
           <a:p>
             <a:fld id="{5E2EC1FB-DDCB-48DE-AA18-776941098B20}" type="datetimeFigureOut">
               <a:rPr lang="ko-KR" altLang="en-US" smtClean="0"/>
-              <a:t>2026-03-13</a:t>
+              <a:t>2026-03-30</a:t>
             </a:fld>
             <a:endParaRPr lang="ko-KR" altLang="en-US"/>
           </a:p>
@@ -843,7 +844,7 @@
           <a:p>
             <a:fld id="{5E2EC1FB-DDCB-48DE-AA18-776941098B20}" type="datetimeFigureOut">
               <a:rPr lang="ko-KR" altLang="en-US" smtClean="0"/>
-              <a:t>2026-03-13</a:t>
+              <a:t>2026-03-30</a:t>
             </a:fld>
             <a:endParaRPr lang="ko-KR" altLang="en-US"/>
           </a:p>
@@ -1089,7 +1090,7 @@
           <a:p>
             <a:fld id="{5E2EC1FB-DDCB-48DE-AA18-776941098B20}" type="datetimeFigureOut">
               <a:rPr lang="ko-KR" altLang="en-US" smtClean="0"/>
-              <a:t>2026-03-13</a:t>
+              <a:t>2026-03-30</a:t>
             </a:fld>
             <a:endParaRPr lang="ko-KR" altLang="en-US"/>
           </a:p>
@@ -1321,7 +1322,7 @@
           <a:p>
             <a:fld id="{5E2EC1FB-DDCB-48DE-AA18-776941098B20}" type="datetimeFigureOut">
               <a:rPr lang="ko-KR" altLang="en-US" smtClean="0"/>
-              <a:t>2026-03-13</a:t>
+              <a:t>2026-03-30</a:t>
             </a:fld>
             <a:endParaRPr lang="ko-KR" altLang="en-US"/>
           </a:p>
@@ -1688,7 +1689,7 @@
           <a:p>
             <a:fld id="{5E2EC1FB-DDCB-48DE-AA18-776941098B20}" type="datetimeFigureOut">
               <a:rPr lang="ko-KR" altLang="en-US" smtClean="0"/>
-              <a:t>2026-03-13</a:t>
+              <a:t>2026-03-30</a:t>
             </a:fld>
             <a:endParaRPr lang="ko-KR" altLang="en-US"/>
           </a:p>
@@ -1806,7 +1807,7 @@
           <a:p>
             <a:fld id="{5E2EC1FB-DDCB-48DE-AA18-776941098B20}" type="datetimeFigureOut">
               <a:rPr lang="ko-KR" altLang="en-US" smtClean="0"/>
-              <a:t>2026-03-13</a:t>
+              <a:t>2026-03-30</a:t>
             </a:fld>
             <a:endParaRPr lang="ko-KR" altLang="en-US"/>
           </a:p>
@@ -1901,7 +1902,7 @@
           <a:p>
             <a:fld id="{5E2EC1FB-DDCB-48DE-AA18-776941098B20}" type="datetimeFigureOut">
               <a:rPr lang="ko-KR" altLang="en-US" smtClean="0"/>
-              <a:t>2026-03-13</a:t>
+              <a:t>2026-03-30</a:t>
             </a:fld>
             <a:endParaRPr lang="ko-KR" altLang="en-US"/>
           </a:p>
@@ -2178,7 +2179,7 @@
           <a:p>
             <a:fld id="{5E2EC1FB-DDCB-48DE-AA18-776941098B20}" type="datetimeFigureOut">
               <a:rPr lang="ko-KR" altLang="en-US" smtClean="0"/>
-              <a:t>2026-03-13</a:t>
+              <a:t>2026-03-30</a:t>
             </a:fld>
             <a:endParaRPr lang="ko-KR" altLang="en-US"/>
           </a:p>
@@ -2431,7 +2432,7 @@
           <a:p>
             <a:fld id="{5E2EC1FB-DDCB-48DE-AA18-776941098B20}" type="datetimeFigureOut">
               <a:rPr lang="ko-KR" altLang="en-US" smtClean="0"/>
-              <a:t>2026-03-13</a:t>
+              <a:t>2026-03-30</a:t>
             </a:fld>
             <a:endParaRPr lang="ko-KR" altLang="en-US"/>
           </a:p>
@@ -2644,7 +2645,7 @@
           <a:p>
             <a:fld id="{5E2EC1FB-DDCB-48DE-AA18-776941098B20}" type="datetimeFigureOut">
               <a:rPr lang="ko-KR" altLang="en-US" smtClean="0"/>
-              <a:t>2026-03-13</a:t>
+              <a:t>2026-03-30</a:t>
             </a:fld>
             <a:endParaRPr lang="ko-KR" altLang="en-US"/>
           </a:p>
@@ -23728,11 +23729,7 @@
             </a:r>
             <a:r>
               <a:rPr lang="en-US" altLang="ko-KR" dirty="0" smtClean="0"/>
-              <a:t>, </a:t>
-            </a:r>
-            <a:r>
-              <a:rPr lang="en-US" altLang="ko-KR" dirty="0" smtClean="0"/>
-              <a:t>Time-Stamp   </a:t>
+              <a:t>, Time-Stamp   </a:t>
             </a:r>
             <a:endParaRPr lang="en-US" altLang="ko-KR" dirty="0"/>
           </a:p>
@@ -26914,11 +26911,11 @@
           <a:p>
             <a:r>
               <a:rPr lang="en-US" altLang="ko-KR" dirty="0" smtClean="0"/>
-              <a:t>3D Rendering </a:t>
+              <a:t>VS2015 </a:t>
             </a:r>
             <a:r>
               <a:rPr lang="ko-KR" altLang="en-US" dirty="0" smtClean="0"/>
-              <a:t>순서</a:t>
+              <a:t>개발환경 추가 설정</a:t>
             </a:r>
             <a:endParaRPr lang="ko-KR" altLang="en-US" dirty="0"/>
           </a:p>
@@ -26937,1020 +26934,159 @@
         <p:spPr/>
         <p:txBody>
           <a:bodyPr>
-            <a:normAutofit fontScale="25000" lnSpcReduction="20000"/>
+            <a:normAutofit fontScale="32500" lnSpcReduction="20000"/>
           </a:bodyPr>
           <a:lstStyle/>
           <a:p>
-            <a:pPr lvl="1"/>
-            <a:r>
-              <a:rPr lang="en-US" altLang="ko-KR" dirty="0" err="1"/>
-              <a:t>ExtractInfo</a:t>
-            </a:r>
-            <a:r>
-              <a:rPr lang="en-US" altLang="ko-KR" dirty="0"/>
-              <a:t>(</a:t>
-            </a:r>
-            <a:r>
-              <a:rPr lang="en-US" altLang="ko-KR" dirty="0" err="1"/>
-              <a:t>sPath</a:t>
-            </a:r>
-            <a:r>
-              <a:rPr lang="en-US" altLang="ko-KR" dirty="0"/>
-              <a:t>)</a:t>
-            </a:r>
-            <a:endParaRPr lang="en-US" altLang="ko-KR" dirty="0" smtClean="0"/>
-          </a:p>
-          <a:p>
-            <a:pPr lvl="1"/>
-            <a:r>
-              <a:rPr lang="en-US" altLang="ko-KR" dirty="0" smtClean="0"/>
-              <a:t>Display3D()</a:t>
-            </a:r>
-          </a:p>
-          <a:p>
-            <a:pPr lvl="2"/>
-            <a:r>
-              <a:rPr lang="en-US" altLang="ko-KR" i="1" dirty="0"/>
-              <a:t>cv</a:t>
-            </a:r>
-            <a:r>
-              <a:rPr lang="en-US" altLang="ko-KR" dirty="0"/>
-              <a:t>::</a:t>
-            </a:r>
-            <a:r>
-              <a:rPr lang="en-US" altLang="ko-KR" i="1" dirty="0"/>
-              <a:t>Mat</a:t>
-            </a:r>
-            <a:r>
-              <a:rPr lang="en-US" altLang="ko-KR" dirty="0"/>
-              <a:t> </a:t>
-            </a:r>
-            <a:r>
-              <a:rPr lang="en-US" altLang="ko-KR" dirty="0" err="1"/>
-              <a:t>dst</a:t>
-            </a:r>
-            <a:r>
-              <a:rPr lang="en-US" altLang="ko-KR" dirty="0"/>
-              <a:t> = </a:t>
-            </a:r>
-            <a:r>
-              <a:rPr lang="en-US" altLang="ko-KR" dirty="0" err="1"/>
-              <a:t>m_cMatching.ApplyConvertImageAuto</a:t>
-            </a:r>
-            <a:r>
-              <a:rPr lang="en-US" altLang="ko-KR" dirty="0"/>
-              <a:t>(</a:t>
-            </a:r>
-            <a:r>
-              <a:rPr lang="en-US" altLang="ko-KR" dirty="0" err="1"/>
-              <a:t>matModelIMG</a:t>
-            </a:r>
-            <a:r>
-              <a:rPr lang="en-US" altLang="ko-KR" dirty="0" smtClean="0"/>
-              <a:t>);</a:t>
-            </a:r>
-          </a:p>
-          <a:p>
-            <a:pPr lvl="2"/>
-            <a:r>
-              <a:rPr lang="en-US" altLang="ko-KR" dirty="0" err="1"/>
-              <a:t>m_cMatching.GetMinMax</a:t>
-            </a:r>
-            <a:r>
-              <a:rPr lang="en-US" altLang="ko-KR" dirty="0"/>
-              <a:t>(</a:t>
-            </a:r>
-            <a:r>
-              <a:rPr lang="en-US" altLang="ko-KR" dirty="0" err="1"/>
-              <a:t>m_fMin</a:t>
-            </a:r>
-            <a:r>
-              <a:rPr lang="en-US" altLang="ko-KR" dirty="0"/>
-              <a:t>, </a:t>
-            </a:r>
-            <a:r>
-              <a:rPr lang="en-US" altLang="ko-KR" dirty="0" err="1"/>
-              <a:t>m_fMax</a:t>
-            </a:r>
-            <a:r>
-              <a:rPr lang="en-US" altLang="ko-KR" dirty="0" smtClean="0"/>
-              <a:t>);</a:t>
-            </a:r>
-          </a:p>
-          <a:p>
-            <a:pPr lvl="2"/>
-            <a:r>
-              <a:rPr lang="en-US" altLang="ko-KR" i="1" dirty="0" err="1"/>
-              <a:t>applyColorMap</a:t>
-            </a:r>
-            <a:r>
-              <a:rPr lang="en-US" altLang="ko-KR" dirty="0"/>
-              <a:t>(</a:t>
-            </a:r>
-            <a:r>
-              <a:rPr lang="en-US" altLang="ko-KR" dirty="0" err="1"/>
-              <a:t>dst</a:t>
-            </a:r>
-            <a:r>
-              <a:rPr lang="en-US" altLang="ko-KR" dirty="0"/>
-              <a:t>, dst2, </a:t>
-            </a:r>
-            <a:r>
-              <a:rPr lang="en-US" altLang="ko-KR" i="1" dirty="0"/>
-              <a:t>cv</a:t>
-            </a:r>
-            <a:r>
-              <a:rPr lang="en-US" altLang="ko-KR" dirty="0"/>
-              <a:t>::</a:t>
-            </a:r>
-            <a:r>
-              <a:rPr lang="en-US" altLang="ko-KR" i="1" dirty="0"/>
-              <a:t>COLORMAP_RAINBOW</a:t>
-            </a:r>
-            <a:r>
-              <a:rPr lang="en-US" altLang="ko-KR" dirty="0" smtClean="0"/>
-              <a:t>);</a:t>
-            </a:r>
-          </a:p>
-          <a:p>
-            <a:pPr lvl="2"/>
-            <a:r>
-              <a:rPr lang="en-US" altLang="ko-KR" dirty="0" err="1"/>
-              <a:t>m_DefectColor</a:t>
-            </a:r>
-            <a:r>
-              <a:rPr lang="en-US" altLang="ko-KR" dirty="0"/>
-              <a:t> = dst2</a:t>
-            </a:r>
-            <a:r>
-              <a:rPr lang="en-US" altLang="ko-KR" dirty="0" smtClean="0"/>
-              <a:t>;</a:t>
-            </a:r>
-          </a:p>
-          <a:p>
-            <a:pPr lvl="2"/>
-            <a:r>
-              <a:rPr lang="en-US" altLang="ko-KR" i="1" dirty="0"/>
-              <a:t>cv</a:t>
-            </a:r>
-            <a:r>
-              <a:rPr lang="en-US" altLang="ko-KR" dirty="0"/>
-              <a:t>::</a:t>
-            </a:r>
-            <a:r>
-              <a:rPr lang="en-US" altLang="ko-KR" i="1" dirty="0"/>
-              <a:t>resize</a:t>
-            </a:r>
-            <a:r>
-              <a:rPr lang="en-US" altLang="ko-KR" dirty="0"/>
-              <a:t>(dst2, </a:t>
-            </a:r>
-            <a:r>
-              <a:rPr lang="en-US" altLang="ko-KR" dirty="0" err="1"/>
-              <a:t>m_Image</a:t>
-            </a:r>
-            <a:r>
-              <a:rPr lang="en-US" altLang="ko-KR" dirty="0"/>
-              <a:t>, </a:t>
-            </a:r>
-            <a:r>
-              <a:rPr lang="en-US" altLang="ko-KR" i="1" dirty="0"/>
-              <a:t>cv</a:t>
-            </a:r>
-            <a:r>
-              <a:rPr lang="en-US" altLang="ko-KR" dirty="0"/>
-              <a:t>::</a:t>
-            </a:r>
-            <a:r>
-              <a:rPr lang="en-US" altLang="ko-KR" i="1" dirty="0"/>
-              <a:t>Size</a:t>
-            </a:r>
-            <a:r>
-              <a:rPr lang="en-US" altLang="ko-KR" dirty="0"/>
-              <a:t>(</a:t>
-            </a:r>
-            <a:r>
-              <a:rPr lang="en-US" altLang="ko-KR" dirty="0" err="1"/>
-              <a:t>rectResult.</a:t>
-            </a:r>
-            <a:r>
-              <a:rPr lang="en-US" altLang="ko-KR" i="1" dirty="0" err="1"/>
-              <a:t>Width</a:t>
-            </a:r>
-            <a:r>
-              <a:rPr lang="en-US" altLang="ko-KR" dirty="0"/>
-              <a:t>(), </a:t>
-            </a:r>
-            <a:r>
-              <a:rPr lang="en-US" altLang="ko-KR" dirty="0" err="1"/>
-              <a:t>rectResult.</a:t>
-            </a:r>
-            <a:r>
-              <a:rPr lang="en-US" altLang="ko-KR" i="1" dirty="0" err="1"/>
-              <a:t>Height</a:t>
-            </a:r>
-            <a:r>
-              <a:rPr lang="en-US" altLang="ko-KR" dirty="0"/>
-              <a:t>()));</a:t>
-            </a:r>
-          </a:p>
-          <a:p>
-            <a:pPr lvl="2"/>
-            <a:r>
-              <a:rPr lang="en-US" altLang="ko-KR" dirty="0" err="1"/>
-              <a:t>DrawMat</a:t>
-            </a:r>
-            <a:r>
-              <a:rPr lang="en-US" altLang="ko-KR" dirty="0"/>
-              <a:t>(</a:t>
-            </a:r>
-            <a:r>
-              <a:rPr lang="en-US" altLang="ko-KR" dirty="0" err="1"/>
-              <a:t>pDCResult</a:t>
-            </a:r>
-            <a:r>
-              <a:rPr lang="en-US" altLang="ko-KR" dirty="0"/>
-              <a:t>-&gt;</a:t>
-            </a:r>
-            <a:r>
-              <a:rPr lang="en-US" altLang="ko-KR" i="1" dirty="0" err="1"/>
-              <a:t>m_hDC</a:t>
-            </a:r>
-            <a:r>
-              <a:rPr lang="en-US" altLang="ko-KR" dirty="0"/>
-              <a:t>, </a:t>
-            </a:r>
-            <a:r>
-              <a:rPr lang="en-US" altLang="ko-KR" dirty="0" err="1"/>
-              <a:t>m_Image</a:t>
-            </a:r>
-            <a:r>
-              <a:rPr lang="en-US" altLang="ko-KR" dirty="0" smtClean="0"/>
-              <a:t>);</a:t>
-            </a:r>
-          </a:p>
-          <a:p>
-            <a:pPr lvl="3"/>
-            <a:r>
-              <a:rPr lang="en-US" altLang="ko-KR" dirty="0"/>
-              <a:t>::</a:t>
-            </a:r>
-            <a:r>
-              <a:rPr lang="en-US" altLang="ko-KR" i="1" dirty="0" err="1"/>
-              <a:t>SetDIBitsToDevice</a:t>
-            </a:r>
-            <a:r>
-              <a:rPr lang="en-US" altLang="ko-KR" dirty="0"/>
-              <a:t>(</a:t>
-            </a:r>
-            <a:r>
-              <a:rPr lang="en-US" altLang="ko-KR" dirty="0" err="1"/>
-              <a:t>hDC</a:t>
-            </a:r>
-            <a:r>
-              <a:rPr lang="en-US" altLang="ko-KR" dirty="0" smtClean="0"/>
-              <a:t>, .., </a:t>
-            </a:r>
-            <a:r>
-              <a:rPr lang="en-US" altLang="ko-KR" dirty="0" err="1"/>
-              <a:t>img.</a:t>
-            </a:r>
-            <a:r>
-              <a:rPr lang="en-US" altLang="ko-KR" i="1" dirty="0" err="1"/>
-              <a:t>data</a:t>
-            </a:r>
-            <a:r>
-              <a:rPr lang="en-US" altLang="ko-KR" dirty="0" smtClean="0"/>
-              <a:t>, ..);</a:t>
-            </a:r>
-          </a:p>
-          <a:p>
-            <a:pPr lvl="2"/>
-            <a:r>
-              <a:rPr lang="en-US" altLang="ko-KR" dirty="0" smtClean="0"/>
-              <a:t>OnUpdate3DModel(</a:t>
-            </a:r>
-            <a:r>
-              <a:rPr lang="en-US" altLang="ko-KR" i="1" dirty="0" smtClean="0"/>
-              <a:t>WPARAM</a:t>
-            </a:r>
-            <a:r>
-              <a:rPr lang="en-US" altLang="ko-KR" dirty="0" smtClean="0"/>
-              <a:t> </a:t>
-            </a:r>
-            <a:r>
-              <a:rPr lang="en-US" altLang="ko-KR" dirty="0" err="1"/>
-              <a:t>wParam</a:t>
-            </a:r>
-            <a:r>
-              <a:rPr lang="en-US" altLang="ko-KR" dirty="0"/>
-              <a:t>, </a:t>
-            </a:r>
-            <a:r>
-              <a:rPr lang="en-US" altLang="ko-KR" i="1" dirty="0"/>
-              <a:t>LPARAM</a:t>
-            </a:r>
-            <a:r>
-              <a:rPr lang="en-US" altLang="ko-KR" dirty="0"/>
-              <a:t> </a:t>
-            </a:r>
-            <a:r>
-              <a:rPr lang="en-US" altLang="ko-KR" dirty="0" err="1"/>
-              <a:t>lParam</a:t>
-            </a:r>
-            <a:r>
-              <a:rPr lang="en-US" altLang="ko-KR" dirty="0" smtClean="0"/>
-              <a:t>)</a:t>
-            </a:r>
-          </a:p>
-          <a:p>
-            <a:pPr lvl="3"/>
-            <a:r>
-              <a:rPr lang="en-US" altLang="ko-KR" dirty="0" err="1"/>
-              <a:t>m_Model.m_ZMap</a:t>
-            </a:r>
-            <a:r>
-              <a:rPr lang="en-US" altLang="ko-KR" dirty="0"/>
-              <a:t> = </a:t>
-            </a:r>
-            <a:r>
-              <a:rPr lang="en-US" altLang="ko-KR" dirty="0" err="1"/>
-              <a:t>m_matrixZ.</a:t>
-            </a:r>
-            <a:r>
-              <a:rPr lang="en-US" altLang="ko-KR" i="1" dirty="0" err="1"/>
-              <a:t>clone</a:t>
-            </a:r>
-            <a:r>
-              <a:rPr lang="en-US" altLang="ko-KR" dirty="0"/>
-              <a:t>();</a:t>
-            </a:r>
-            <a:endParaRPr lang="en-US" altLang="ko-KR" dirty="0" smtClean="0"/>
-          </a:p>
-          <a:p>
-            <a:pPr lvl="3"/>
-            <a:r>
-              <a:rPr lang="en-US" altLang="ko-KR" dirty="0" err="1"/>
-              <a:t>m_Model.MakeModel</a:t>
-            </a:r>
-            <a:r>
-              <a:rPr lang="en-US" altLang="ko-KR" dirty="0" smtClean="0"/>
-              <a:t>();</a:t>
-            </a:r>
-          </a:p>
-          <a:p>
-            <a:pPr lvl="4"/>
-            <a:r>
-              <a:rPr lang="es-ES" altLang="ko-KR" dirty="0"/>
-              <a:t>for (y = 0; y &lt; m_ZMap.</a:t>
-            </a:r>
-            <a:r>
-              <a:rPr lang="es-ES" altLang="ko-KR" i="1" dirty="0"/>
-              <a:t>rows</a:t>
-            </a:r>
-            <a:r>
-              <a:rPr lang="es-ES" altLang="ko-KR" dirty="0"/>
-              <a:t> - 1; y</a:t>
-            </a:r>
-            <a:r>
-              <a:rPr lang="es-ES" altLang="ko-KR" dirty="0" smtClean="0"/>
-              <a:t>++)</a:t>
-            </a:r>
-          </a:p>
-          <a:p>
-            <a:pPr lvl="5"/>
-            <a:r>
-              <a:rPr lang="en-US" altLang="ko-KR" dirty="0"/>
-              <a:t>for (x = 0; x &lt; </a:t>
-            </a:r>
-            <a:r>
-              <a:rPr lang="en-US" altLang="ko-KR" dirty="0" err="1"/>
-              <a:t>m_ZMap.</a:t>
-            </a:r>
-            <a:r>
-              <a:rPr lang="en-US" altLang="ko-KR" i="1" dirty="0" err="1"/>
-              <a:t>cols</a:t>
-            </a:r>
-            <a:r>
-              <a:rPr lang="en-US" altLang="ko-KR" dirty="0"/>
-              <a:t> - 1; x</a:t>
-            </a:r>
-            <a:r>
-              <a:rPr lang="en-US" altLang="ko-KR" dirty="0" smtClean="0"/>
-              <a:t>++)	</a:t>
-            </a:r>
-            <a:r>
-              <a:rPr lang="en-US" altLang="ko-KR" b="1" dirty="0" err="1">
-                <a:solidFill>
-                  <a:srgbClr val="0070C0"/>
-                </a:solidFill>
-              </a:rPr>
-              <a:t>m_triangles.</a:t>
-            </a:r>
-            <a:r>
-              <a:rPr lang="en-US" altLang="ko-KR" b="1" i="1" dirty="0" err="1">
-                <a:solidFill>
-                  <a:srgbClr val="0070C0"/>
-                </a:solidFill>
-              </a:rPr>
-              <a:t>push_back</a:t>
-            </a:r>
-            <a:r>
-              <a:rPr lang="en-US" altLang="ko-KR" b="1" dirty="0">
-                <a:solidFill>
-                  <a:srgbClr val="0070C0"/>
-                </a:solidFill>
-              </a:rPr>
-              <a:t>(tri</a:t>
-            </a:r>
-            <a:r>
-              <a:rPr lang="en-US" altLang="ko-KR" b="1" dirty="0" smtClean="0">
-                <a:solidFill>
-                  <a:srgbClr val="0070C0"/>
-                </a:solidFill>
-              </a:rPr>
-              <a:t>);</a:t>
-            </a:r>
-            <a:endParaRPr lang="en-US" altLang="ko-KR" dirty="0" smtClean="0"/>
-          </a:p>
-          <a:p>
-            <a:pPr lvl="4"/>
-            <a:r>
-              <a:rPr lang="en-US" altLang="ko-KR" dirty="0" err="1"/>
-              <a:t>LoadTexture</a:t>
-            </a:r>
-            <a:r>
-              <a:rPr lang="en-US" altLang="ko-KR" dirty="0"/>
-              <a:t>(</a:t>
-            </a:r>
-            <a:r>
-              <a:rPr lang="en-US" altLang="ko-KR" dirty="0" err="1"/>
-              <a:t>m_ColorImg</a:t>
-            </a:r>
-            <a:r>
-              <a:rPr lang="en-US" altLang="ko-KR" dirty="0" smtClean="0"/>
-              <a:t>);</a:t>
-            </a:r>
-          </a:p>
-          <a:p>
-            <a:pPr lvl="5"/>
-            <a:r>
-              <a:rPr lang="en-US" altLang="ko-KR" dirty="0" err="1"/>
-              <a:t>m_bTextureLoaded</a:t>
-            </a:r>
-            <a:r>
-              <a:rPr lang="en-US" altLang="ko-KR" dirty="0"/>
-              <a:t> = 1</a:t>
-            </a:r>
-            <a:r>
-              <a:rPr lang="en-US" altLang="ko-KR" dirty="0" smtClean="0"/>
-              <a:t>;</a:t>
-            </a:r>
-          </a:p>
-          <a:p>
-            <a:pPr lvl="3"/>
-            <a:r>
-              <a:rPr lang="en-US" altLang="ko-KR" dirty="0" err="1"/>
-              <a:t>yScale</a:t>
-            </a:r>
-            <a:r>
-              <a:rPr lang="en-US" altLang="ko-KR" dirty="0"/>
-              <a:t> = 1000.0 / (double)S3DData-&gt;</a:t>
-            </a:r>
-            <a:r>
-              <a:rPr lang="en-US" altLang="ko-KR" dirty="0" err="1"/>
-              <a:t>m_matDepthMap.</a:t>
-            </a:r>
-            <a:r>
-              <a:rPr lang="en-US" altLang="ko-KR" i="1" dirty="0" err="1"/>
-              <a:t>rows</a:t>
-            </a:r>
-            <a:r>
-              <a:rPr lang="en-US" altLang="ko-KR" dirty="0" smtClean="0"/>
-              <a:t>;</a:t>
-            </a:r>
-          </a:p>
-          <a:p>
-            <a:pPr lvl="3"/>
-            <a:r>
-              <a:rPr lang="en-US" altLang="ko-KR" dirty="0" err="1"/>
-              <a:t>xScale</a:t>
-            </a:r>
-            <a:r>
-              <a:rPr lang="en-US" altLang="ko-KR" dirty="0"/>
-              <a:t> = 1000.0 / (double)S3DData-&gt;</a:t>
-            </a:r>
-            <a:r>
-              <a:rPr lang="en-US" altLang="ko-KR" dirty="0" err="1"/>
-              <a:t>m_matDepthMap.</a:t>
-            </a:r>
-            <a:r>
-              <a:rPr lang="en-US" altLang="ko-KR" i="1" dirty="0" err="1"/>
-              <a:t>cols</a:t>
-            </a:r>
-            <a:r>
-              <a:rPr lang="en-US" altLang="ko-KR" dirty="0"/>
-              <a:t>;</a:t>
-            </a:r>
-            <a:endParaRPr lang="en-US" altLang="ko-KR" dirty="0" smtClean="0"/>
-          </a:p>
-          <a:p>
-            <a:pPr lvl="3"/>
-            <a:r>
-              <a:rPr lang="en-US" altLang="ko-KR" dirty="0" err="1" smtClean="0"/>
-              <a:t>m_Model.ApplyScaleAndOffset</a:t>
-            </a:r>
-            <a:r>
-              <a:rPr lang="en-US" altLang="ko-KR" dirty="0" smtClean="0"/>
-              <a:t>(0</a:t>
-            </a:r>
-            <a:r>
-              <a:rPr lang="en-US" altLang="ko-KR" dirty="0"/>
-              <a:t>, 0, 0, </a:t>
-            </a:r>
-            <a:r>
-              <a:rPr lang="en-US" altLang="ko-KR" dirty="0" err="1"/>
-              <a:t>xScale</a:t>
-            </a:r>
-            <a:r>
-              <a:rPr lang="en-US" altLang="ko-KR" dirty="0"/>
-              <a:t>, </a:t>
-            </a:r>
-            <a:r>
-              <a:rPr lang="en-US" altLang="ko-KR" dirty="0" err="1"/>
-              <a:t>yScale</a:t>
-            </a:r>
-            <a:r>
-              <a:rPr lang="en-US" altLang="ko-KR" dirty="0"/>
-              <a:t>, 5000</a:t>
-            </a:r>
-            <a:r>
-              <a:rPr lang="en-US" altLang="ko-KR" dirty="0" smtClean="0"/>
-              <a:t>);</a:t>
-            </a:r>
-          </a:p>
-          <a:p>
-            <a:pPr lvl="3"/>
-            <a:r>
-              <a:rPr lang="en-US" altLang="ko-KR" dirty="0" smtClean="0"/>
-              <a:t>((</a:t>
-            </a:r>
-            <a:r>
-              <a:rPr lang="en-US" altLang="ko-KR" dirty="0" err="1"/>
-              <a:t>COpenGLViewEx</a:t>
-            </a:r>
-            <a:r>
-              <a:rPr lang="en-US" altLang="ko-KR" dirty="0" smtClean="0"/>
-              <a:t>*)</a:t>
-            </a:r>
-            <a:r>
-              <a:rPr lang="en-US" altLang="ko-KR" dirty="0" err="1" smtClean="0"/>
-              <a:t>m_pView</a:t>
-            </a:r>
-            <a:r>
-              <a:rPr lang="en-US" altLang="ko-KR" dirty="0" smtClean="0"/>
-              <a:t>)-&gt;</a:t>
-            </a:r>
-            <a:r>
-              <a:rPr lang="en-US" altLang="ko-KR" dirty="0"/>
-              <a:t>Refresh</a:t>
-            </a:r>
-            <a:r>
-              <a:rPr lang="en-US" altLang="ko-KR" dirty="0" smtClean="0"/>
-              <a:t>();</a:t>
-            </a:r>
-          </a:p>
-          <a:p>
-            <a:pPr lvl="4"/>
-            <a:r>
-              <a:rPr lang="en-US" altLang="ko-KR" b="1" dirty="0" err="1">
-                <a:solidFill>
-                  <a:srgbClr val="0070C0"/>
-                </a:solidFill>
-              </a:rPr>
-              <a:t>GLRenderScene</a:t>
-            </a:r>
-            <a:r>
-              <a:rPr lang="en-US" altLang="ko-KR" b="1" dirty="0"/>
-              <a:t>(WM_FIT_TO_SCREEN</a:t>
-            </a:r>
-            <a:r>
-              <a:rPr lang="en-US" altLang="ko-KR" b="1" dirty="0" smtClean="0"/>
-              <a:t>);</a:t>
-            </a:r>
-          </a:p>
-          <a:p>
-            <a:pPr lvl="5"/>
-            <a:r>
-              <a:rPr lang="en-US" altLang="ko-KR" b="1" dirty="0" err="1"/>
-              <a:t>m_pParentWnd</a:t>
-            </a:r>
-            <a:r>
-              <a:rPr lang="en-US" altLang="ko-KR" b="1" dirty="0"/>
-              <a:t>-&gt;</a:t>
-            </a:r>
-            <a:r>
-              <a:rPr lang="en-US" altLang="ko-KR" b="1" i="1" dirty="0" err="1"/>
-              <a:t>SendMessage</a:t>
-            </a:r>
-            <a:r>
-              <a:rPr lang="en-US" altLang="ko-KR" b="1" dirty="0"/>
-              <a:t>(</a:t>
-            </a:r>
-            <a:r>
-              <a:rPr lang="en-US" altLang="ko-KR" b="1" dirty="0">
-                <a:solidFill>
-                  <a:srgbClr val="00B0F0"/>
-                </a:solidFill>
-              </a:rPr>
-              <a:t>WM_USER_RENDER</a:t>
-            </a:r>
-            <a:r>
-              <a:rPr lang="en-US" altLang="ko-KR" b="1" dirty="0"/>
-              <a:t>, </a:t>
-            </a:r>
-            <a:r>
-              <a:rPr lang="en-US" altLang="ko-KR" b="1" dirty="0" err="1"/>
-              <a:t>m_nHandleID</a:t>
-            </a:r>
-            <a:r>
-              <a:rPr lang="en-US" altLang="ko-KR" b="1" dirty="0"/>
-              <a:t>, </a:t>
-            </a:r>
-            <a:r>
-              <a:rPr lang="en-US" altLang="ko-KR" b="1" dirty="0" err="1"/>
-              <a:t>nAction</a:t>
-            </a:r>
-            <a:r>
-              <a:rPr lang="en-US" altLang="ko-KR" b="1" dirty="0" smtClean="0"/>
-              <a:t>);</a:t>
-            </a:r>
-          </a:p>
-          <a:p>
-            <a:pPr lvl="3"/>
-            <a:r>
-              <a:rPr lang="en-US" altLang="ko-KR" b="1" dirty="0" err="1">
-                <a:solidFill>
-                  <a:srgbClr val="00B0F0"/>
-                </a:solidFill>
-              </a:rPr>
-              <a:t>OnGLRender</a:t>
-            </a:r>
-            <a:r>
-              <a:rPr lang="en-US" altLang="ko-KR" b="1" dirty="0"/>
-              <a:t>(</a:t>
-            </a:r>
-            <a:r>
-              <a:rPr lang="en-US" altLang="ko-KR" b="1" i="1" dirty="0"/>
-              <a:t>WPARAM</a:t>
-            </a:r>
-            <a:r>
-              <a:rPr lang="en-US" altLang="ko-KR" b="1" dirty="0"/>
-              <a:t> </a:t>
-            </a:r>
-            <a:r>
-              <a:rPr lang="en-US" altLang="ko-KR" b="1" dirty="0" err="1"/>
-              <a:t>wParam</a:t>
-            </a:r>
-            <a:r>
-              <a:rPr lang="en-US" altLang="ko-KR" b="1" dirty="0"/>
-              <a:t>, </a:t>
-            </a:r>
-            <a:r>
-              <a:rPr lang="en-US" altLang="ko-KR" b="1" i="1" dirty="0"/>
-              <a:t>LPARAM</a:t>
-            </a:r>
-            <a:r>
-              <a:rPr lang="en-US" altLang="ko-KR" b="1" dirty="0"/>
-              <a:t> </a:t>
-            </a:r>
-            <a:r>
-              <a:rPr lang="en-US" altLang="ko-KR" b="1" dirty="0" err="1"/>
-              <a:t>lParam</a:t>
-            </a:r>
-            <a:r>
-              <a:rPr lang="en-US" altLang="ko-KR" b="1" dirty="0" smtClean="0"/>
-              <a:t>)</a:t>
-            </a:r>
-          </a:p>
-          <a:p>
-            <a:pPr lvl="4"/>
-            <a:r>
-              <a:rPr lang="en-US" altLang="ko-KR" i="1" dirty="0" err="1"/>
-              <a:t>glRotated</a:t>
-            </a:r>
-            <a:r>
-              <a:rPr lang="en-US" altLang="ko-KR" dirty="0"/>
-              <a:t>(_</a:t>
-            </a:r>
-            <a:r>
-              <a:rPr lang="en-US" altLang="ko-KR" dirty="0" err="1"/>
-              <a:t>angleVer</a:t>
-            </a:r>
-            <a:r>
-              <a:rPr lang="en-US" altLang="ko-KR" dirty="0"/>
-              <a:t>, 1, 0, 0); </a:t>
-            </a:r>
-            <a:r>
-              <a:rPr lang="en-US" altLang="ko-KR" i="1" dirty="0" err="1" smtClean="0"/>
-              <a:t>glRotated</a:t>
-            </a:r>
-            <a:r>
-              <a:rPr lang="en-US" altLang="ko-KR" dirty="0"/>
-              <a:t>(_</a:t>
-            </a:r>
-            <a:r>
-              <a:rPr lang="en-US" altLang="ko-KR" dirty="0" err="1"/>
-              <a:t>angleHor</a:t>
-            </a:r>
-            <a:r>
-              <a:rPr lang="en-US" altLang="ko-KR" dirty="0"/>
-              <a:t>, 0, 0, 1); </a:t>
-            </a:r>
-            <a:r>
-              <a:rPr lang="en-US" altLang="ko-KR" dirty="0" smtClean="0"/>
-              <a:t> </a:t>
-            </a:r>
-            <a:r>
-              <a:rPr lang="en-US" altLang="ko-KR" i="1" dirty="0" err="1" smtClean="0"/>
-              <a:t>glTranslatef</a:t>
-            </a:r>
-            <a:r>
-              <a:rPr lang="en-US" altLang="ko-KR" dirty="0"/>
-              <a:t>(-600, -200, 100</a:t>
-            </a:r>
-            <a:r>
-              <a:rPr lang="en-US" altLang="ko-KR" dirty="0" smtClean="0"/>
-              <a:t>);</a:t>
-            </a:r>
-          </a:p>
-          <a:p>
-            <a:pPr lvl="4"/>
-            <a:r>
-              <a:rPr lang="en-US" altLang="ko-KR" dirty="0" err="1"/>
-              <a:t>m_draw.DrawAxisXYZ</a:t>
-            </a:r>
-            <a:r>
-              <a:rPr lang="en-US" altLang="ko-KR" dirty="0"/>
-              <a:t>(0, 0, 0, 150, 5</a:t>
-            </a:r>
-            <a:r>
-              <a:rPr lang="en-US" altLang="ko-KR" dirty="0" smtClean="0"/>
-              <a:t>);</a:t>
-            </a:r>
-          </a:p>
-          <a:p>
-            <a:pPr lvl="4"/>
-            <a:r>
-              <a:rPr lang="en-US" altLang="ko-KR" dirty="0" err="1" smtClean="0"/>
-              <a:t>m_draw.DrawGrid</a:t>
-            </a:r>
-            <a:r>
-              <a:rPr lang="en-US" altLang="ko-KR" dirty="0" smtClean="0"/>
-              <a:t>(10</a:t>
-            </a:r>
-            <a:r>
-              <a:rPr lang="en-US" altLang="ko-KR" dirty="0"/>
-              <a:t>, 10, 100, 100, 0, 0, 5, 5, CdPoint3D(0, 0, 0), G_GRID_TEXT, RGB_RED</a:t>
-            </a:r>
-            <a:r>
-              <a:rPr lang="en-US" altLang="ko-KR" dirty="0" smtClean="0"/>
-              <a:t>);</a:t>
-            </a:r>
-          </a:p>
-          <a:p>
-            <a:pPr lvl="4"/>
-            <a:r>
-              <a:rPr lang="en-US" altLang="ko-KR" dirty="0"/>
-              <a:t>if (</a:t>
-            </a:r>
-            <a:r>
-              <a:rPr lang="en-US" altLang="ko-KR" dirty="0" err="1"/>
-              <a:t>m_Model.m_bMeshCreated</a:t>
-            </a:r>
-            <a:r>
-              <a:rPr lang="en-US" altLang="ko-KR" dirty="0" smtClean="0"/>
-              <a:t>) </a:t>
-            </a:r>
-            <a:r>
-              <a:rPr lang="en-US" altLang="ko-KR" dirty="0" err="1"/>
-              <a:t>m_Model.Draw</a:t>
-            </a:r>
-            <a:r>
-              <a:rPr lang="en-US" altLang="ko-KR" dirty="0"/>
-              <a:t>(TEX_LUT</a:t>
-            </a:r>
-            <a:r>
-              <a:rPr lang="en-US" altLang="ko-KR" dirty="0" smtClean="0"/>
-              <a:t>);</a:t>
-            </a:r>
-          </a:p>
-          <a:p>
-            <a:pPr lvl="5"/>
-            <a:r>
-              <a:rPr lang="en-US" altLang="ko-KR" dirty="0" err="1"/>
-              <a:t>int</a:t>
-            </a:r>
-            <a:r>
-              <a:rPr lang="en-US" altLang="ko-KR" dirty="0"/>
-              <a:t> </a:t>
-            </a:r>
-            <a:r>
-              <a:rPr lang="en-US" altLang="ko-KR" dirty="0" err="1"/>
-              <a:t>nSize</a:t>
-            </a:r>
-            <a:r>
-              <a:rPr lang="en-US" altLang="ko-KR" dirty="0"/>
-              <a:t> = </a:t>
-            </a:r>
-            <a:r>
-              <a:rPr lang="en-US" altLang="ko-KR" dirty="0" err="1"/>
-              <a:t>m_triangles.</a:t>
-            </a:r>
-            <a:r>
-              <a:rPr lang="en-US" altLang="ko-KR" i="1" dirty="0" err="1"/>
-              <a:t>size</a:t>
-            </a:r>
-            <a:r>
-              <a:rPr lang="en-US" altLang="ko-KR" dirty="0" smtClean="0"/>
-              <a:t>();</a:t>
-            </a:r>
-          </a:p>
-          <a:p>
-            <a:pPr lvl="5"/>
-            <a:r>
-              <a:rPr lang="en-US" altLang="ko-KR" i="1" dirty="0" err="1"/>
-              <a:t>glBindTexture</a:t>
-            </a:r>
-            <a:r>
-              <a:rPr lang="en-US" altLang="ko-KR" dirty="0"/>
-              <a:t>(</a:t>
-            </a:r>
-            <a:r>
-              <a:rPr lang="en-US" altLang="ko-KR" i="1" dirty="0"/>
-              <a:t>GL_TEXTURE_2D</a:t>
-            </a:r>
-            <a:r>
-              <a:rPr lang="en-US" altLang="ko-KR" dirty="0"/>
-              <a:t>, </a:t>
-            </a:r>
-            <a:r>
-              <a:rPr lang="en-US" altLang="ko-KR" dirty="0" err="1"/>
-              <a:t>m_Texture</a:t>
-            </a:r>
-            <a:r>
-              <a:rPr lang="en-US" altLang="ko-KR" dirty="0" smtClean="0"/>
-              <a:t>);</a:t>
-            </a:r>
-          </a:p>
-          <a:p>
-            <a:pPr lvl="5"/>
-            <a:r>
-              <a:rPr lang="nn-NO" altLang="ko-KR" dirty="0"/>
-              <a:t>for (int i = 0; i &lt; nSize; i</a:t>
-            </a:r>
-            <a:r>
-              <a:rPr lang="nn-NO" altLang="ko-KR" dirty="0" smtClean="0"/>
-              <a:t>++)</a:t>
-            </a:r>
-          </a:p>
-          <a:p>
-            <a:pPr lvl="6"/>
-            <a:r>
-              <a:rPr lang="en-US" altLang="ko-KR" b="1" dirty="0" err="1">
-                <a:solidFill>
-                  <a:srgbClr val="0070C0"/>
-                </a:solidFill>
-              </a:rPr>
-              <a:t>stTagTriangles</a:t>
-            </a:r>
-            <a:r>
-              <a:rPr lang="en-US" altLang="ko-KR" b="1" dirty="0">
-                <a:solidFill>
-                  <a:srgbClr val="0070C0"/>
-                </a:solidFill>
-              </a:rPr>
-              <a:t> tri = </a:t>
-            </a:r>
-            <a:r>
-              <a:rPr lang="en-US" altLang="ko-KR" b="1" dirty="0" err="1">
-                <a:solidFill>
-                  <a:srgbClr val="0070C0"/>
-                </a:solidFill>
-              </a:rPr>
-              <a:t>m_triangles</a:t>
-            </a:r>
-            <a:r>
-              <a:rPr lang="en-US" altLang="ko-KR" b="1" dirty="0">
-                <a:solidFill>
-                  <a:srgbClr val="0070C0"/>
-                </a:solidFill>
-              </a:rPr>
-              <a:t>[</a:t>
-            </a:r>
-            <a:r>
-              <a:rPr lang="en-US" altLang="ko-KR" b="1" dirty="0" err="1">
-                <a:solidFill>
-                  <a:srgbClr val="0070C0"/>
-                </a:solidFill>
-              </a:rPr>
-              <a:t>i</a:t>
-            </a:r>
-            <a:r>
-              <a:rPr lang="en-US" altLang="ko-KR" b="1" dirty="0">
-                <a:solidFill>
-                  <a:srgbClr val="0070C0"/>
-                </a:solidFill>
-              </a:rPr>
-              <a:t>];</a:t>
-            </a:r>
-            <a:endParaRPr lang="nn-NO" altLang="ko-KR" b="1" dirty="0" smtClean="0">
-              <a:solidFill>
-                <a:srgbClr val="0070C0"/>
-              </a:solidFill>
-            </a:endParaRPr>
-          </a:p>
-          <a:p>
-            <a:pPr lvl="6"/>
-            <a:r>
-              <a:rPr lang="nn-NO" altLang="ko-KR" dirty="0"/>
-              <a:t>for (int i = 0; i &lt; nSize; i</a:t>
-            </a:r>
-            <a:r>
-              <a:rPr lang="nn-NO" altLang="ko-KR" dirty="0" smtClean="0"/>
-              <a:t>++) </a:t>
-            </a:r>
-            <a:r>
-              <a:rPr lang="en-US" altLang="ko-KR" i="1" dirty="0"/>
-              <a:t>glVertex3f</a:t>
-            </a:r>
-            <a:r>
-              <a:rPr lang="en-US" altLang="ko-KR" dirty="0"/>
-              <a:t>(</a:t>
-            </a:r>
-            <a:r>
-              <a:rPr lang="en-US" altLang="ko-KR" dirty="0" err="1"/>
-              <a:t>tri.x</a:t>
-            </a:r>
-            <a:r>
-              <a:rPr lang="en-US" altLang="ko-KR" dirty="0"/>
-              <a:t>[k], </a:t>
-            </a:r>
-            <a:r>
-              <a:rPr lang="en-US" altLang="ko-KR" dirty="0" err="1"/>
-              <a:t>tri.y</a:t>
-            </a:r>
-            <a:r>
-              <a:rPr lang="en-US" altLang="ko-KR" dirty="0"/>
-              <a:t>[k], </a:t>
-            </a:r>
-            <a:r>
-              <a:rPr lang="en-US" altLang="ko-KR" dirty="0" err="1"/>
-              <a:t>tri.z</a:t>
-            </a:r>
-            <a:r>
-              <a:rPr lang="en-US" altLang="ko-KR" dirty="0"/>
-              <a:t>[k</a:t>
-            </a:r>
-            <a:r>
-              <a:rPr lang="en-US" altLang="ko-KR" dirty="0" smtClean="0"/>
-              <a:t>]);</a:t>
-            </a:r>
-          </a:p>
-          <a:p>
-            <a:pPr lvl="5"/>
-            <a:r>
-              <a:rPr lang="en-US" altLang="ko-KR" i="1" dirty="0" err="1"/>
-              <a:t>glBindTexture</a:t>
-            </a:r>
-            <a:r>
-              <a:rPr lang="en-US" altLang="ko-KR" dirty="0"/>
-              <a:t>(</a:t>
-            </a:r>
-            <a:r>
-              <a:rPr lang="en-US" altLang="ko-KR" i="1" dirty="0"/>
-              <a:t>GL_TEXTURE_2D</a:t>
-            </a:r>
-            <a:r>
-              <a:rPr lang="en-US" altLang="ko-KR" dirty="0"/>
-              <a:t>, 0);</a:t>
-            </a:r>
-            <a:endParaRPr lang="nn-NO" altLang="ko-KR" dirty="0" smtClean="0"/>
-          </a:p>
-          <a:p>
-            <a:pPr lvl="5"/>
-            <a:endParaRPr lang="en-US" altLang="ko-KR" dirty="0" smtClean="0"/>
-          </a:p>
-          <a:p>
-            <a:pPr lvl="5"/>
-            <a:endParaRPr lang="ko-KR" altLang="en-US" dirty="0"/>
+            <a:r>
+              <a:rPr lang="ko-KR" altLang="en-US" dirty="0"/>
+              <a:t>실행 가능 디렉터리</a:t>
+            </a:r>
+          </a:p>
+          <a:p>
+            <a:pPr lvl="1"/>
+            <a:r>
+              <a:rPr lang="en-US" altLang="ko-KR" dirty="0"/>
+              <a:t>C:\hdf5\hdf5-1.14.6\build\bin\Debug</a:t>
+            </a:r>
+          </a:p>
+          <a:p>
+            <a:pPr lvl="1"/>
+            <a:r>
+              <a:rPr lang="en-US" altLang="ko-KR" dirty="0"/>
+              <a:t>C:\hdf5\hdf5-1.14.6\build\bin\Release</a:t>
+            </a:r>
+          </a:p>
+          <a:p>
+            <a:endParaRPr lang="en-US" altLang="ko-KR" dirty="0"/>
+          </a:p>
+          <a:p>
+            <a:r>
+              <a:rPr lang="ko-KR" altLang="en-US" dirty="0"/>
+              <a:t>포함 디렉터리</a:t>
+            </a:r>
+          </a:p>
+          <a:p>
+            <a:pPr lvl="1"/>
+            <a:r>
+              <a:rPr lang="en-US" altLang="ko-KR" dirty="0"/>
+              <a:t>C:\hdf5\hdf5-1.14.6\src</a:t>
+            </a:r>
+          </a:p>
+          <a:p>
+            <a:pPr lvl="1"/>
+            <a:r>
+              <a:rPr lang="en-US" altLang="ko-KR" dirty="0"/>
+              <a:t>C:\hdf5\hdf5-1.14.6\build\src</a:t>
+            </a:r>
+          </a:p>
+          <a:p>
+            <a:pPr lvl="1"/>
+            <a:r>
+              <a:rPr lang="en-US" altLang="ko-KR" dirty="0"/>
+              <a:t>C:\hdf5\hdf5-1.14.6\src\cpp\src</a:t>
+            </a:r>
+          </a:p>
+          <a:p>
+            <a:pPr lvl="1"/>
+            <a:r>
+              <a:rPr lang="en-US" altLang="ko-KR" dirty="0"/>
+              <a:t>C:\hdf5\hdf5-1.14.6\src\H5FDsubfiling</a:t>
+            </a:r>
+          </a:p>
+          <a:p>
+            <a:endParaRPr lang="en-US" altLang="ko-KR" dirty="0"/>
+          </a:p>
+          <a:p>
+            <a:r>
+              <a:rPr lang="ko-KR" altLang="en-US" dirty="0" err="1"/>
+              <a:t>전처리기</a:t>
+            </a:r>
+            <a:r>
+              <a:rPr lang="ko-KR" altLang="en-US" dirty="0"/>
+              <a:t> 정의</a:t>
+            </a:r>
+          </a:p>
+          <a:p>
+            <a:pPr lvl="1"/>
+            <a:r>
+              <a:rPr lang="en-US" altLang="ko-KR" dirty="0"/>
+              <a:t>_AFXDLL</a:t>
+            </a:r>
+          </a:p>
+          <a:p>
+            <a:pPr lvl="1"/>
+            <a:r>
+              <a:rPr lang="en-US" altLang="ko-KR" dirty="0"/>
+              <a:t>H5_BUILT_AS_DYNAMIC_LIB</a:t>
+            </a:r>
+          </a:p>
+          <a:p>
+            <a:endParaRPr lang="en-US" altLang="ko-KR" dirty="0"/>
+          </a:p>
+          <a:p>
+            <a:r>
+              <a:rPr lang="ko-KR" altLang="en-US" dirty="0"/>
+              <a:t>라이브러리 디렉터리</a:t>
+            </a:r>
+          </a:p>
+          <a:p>
+            <a:pPr lvl="1"/>
+            <a:r>
+              <a:rPr lang="en-US" altLang="ko-KR" dirty="0"/>
+              <a:t>C:\hdf5\hdf5-1.14.6\build\bin\Debug</a:t>
+            </a:r>
+          </a:p>
+          <a:p>
+            <a:pPr lvl="1"/>
+            <a:r>
+              <a:rPr lang="en-US" altLang="ko-KR" dirty="0"/>
+              <a:t>C:\hdf5\hdf5-1.14.6\build\bin\Release</a:t>
+            </a:r>
+          </a:p>
+          <a:p>
+            <a:endParaRPr lang="en-US" altLang="ko-KR" dirty="0"/>
+          </a:p>
+          <a:p>
+            <a:r>
+              <a:rPr lang="ko-KR" altLang="en-US" dirty="0"/>
+              <a:t>추가 종속성</a:t>
+            </a:r>
+          </a:p>
+          <a:p>
+            <a:pPr lvl="1"/>
+            <a:r>
+              <a:rPr lang="en-US" altLang="ko-KR" dirty="0"/>
+              <a:t>hdf5_D.lib</a:t>
+            </a:r>
+          </a:p>
+          <a:p>
+            <a:pPr lvl="1"/>
+            <a:r>
+              <a:rPr lang="en-US" altLang="ko-KR" dirty="0"/>
+              <a:t>hdf5_cpp_D.lib</a:t>
+            </a:r>
+          </a:p>
+          <a:p>
+            <a:pPr lvl="1"/>
+            <a:r>
+              <a:rPr lang="en-US" altLang="ko-KR" dirty="0"/>
+              <a:t>hdf5.lib</a:t>
+            </a:r>
+          </a:p>
+          <a:p>
+            <a:pPr lvl="1"/>
+            <a:r>
+              <a:rPr lang="en-US" altLang="ko-KR" dirty="0"/>
+              <a:t>hdf5_cpp.lib</a:t>
+            </a:r>
           </a:p>
         </p:txBody>
       </p:sp>
     </p:spTree>
     <p:extLst>
       <p:ext uri="{BB962C8B-B14F-4D97-AF65-F5344CB8AC3E}">
-        <p14:creationId xmlns:p14="http://schemas.microsoft.com/office/powerpoint/2010/main" val="462860450"/>
+        <p14:creationId xmlns:p14="http://schemas.microsoft.com/office/powerpoint/2010/main" val="1148891371"/>
       </p:ext>
     </p:extLst>
   </p:cSld>
@@ -27994,11 +27130,11 @@
           <a:p>
             <a:r>
               <a:rPr lang="en-US" altLang="ko-KR" dirty="0" smtClean="0"/>
-              <a:t>OpenGL Event </a:t>
+              <a:t>3D Rendering </a:t>
             </a:r>
             <a:r>
               <a:rPr lang="ko-KR" altLang="en-US" dirty="0" smtClean="0"/>
-              <a:t>처리</a:t>
+              <a:t>순서</a:t>
             </a:r>
             <a:endParaRPr lang="ko-KR" altLang="en-US" dirty="0"/>
           </a:p>
@@ -28017,97 +27153,617 @@
         <p:spPr/>
         <p:txBody>
           <a:bodyPr>
-            <a:normAutofit fontScale="77500" lnSpcReduction="20000"/>
+            <a:normAutofit fontScale="25000" lnSpcReduction="20000"/>
           </a:bodyPr>
           <a:lstStyle/>
           <a:p>
-            <a:r>
-              <a:rPr lang="en-US" altLang="ko-KR" dirty="0" err="1"/>
+            <a:pPr lvl="1"/>
+            <a:r>
+              <a:rPr lang="en-US" altLang="ko-KR" dirty="0" err="1"/>
+              <a:t>ExtractInfo</a:t>
+            </a:r>
+            <a:r>
+              <a:rPr lang="en-US" altLang="ko-KR" dirty="0"/>
+              <a:t>(</a:t>
+            </a:r>
+            <a:r>
+              <a:rPr lang="en-US" altLang="ko-KR" dirty="0" err="1"/>
+              <a:t>sPath</a:t>
+            </a:r>
+            <a:r>
+              <a:rPr lang="en-US" altLang="ko-KR" dirty="0"/>
+              <a:t>)</a:t>
+            </a:r>
+            <a:endParaRPr lang="en-US" altLang="ko-KR" dirty="0" smtClean="0"/>
+          </a:p>
+          <a:p>
+            <a:pPr lvl="1"/>
+            <a:r>
+              <a:rPr lang="en-US" altLang="ko-KR" dirty="0" smtClean="0"/>
+              <a:t>Display3D()</a:t>
+            </a:r>
+          </a:p>
+          <a:p>
+            <a:pPr lvl="2"/>
+            <a:r>
+              <a:rPr lang="en-US" altLang="ko-KR" i="1" dirty="0"/>
+              <a:t>cv</a:t>
+            </a:r>
+            <a:r>
+              <a:rPr lang="en-US" altLang="ko-KR" dirty="0"/>
+              <a:t>::</a:t>
+            </a:r>
+            <a:r>
+              <a:rPr lang="en-US" altLang="ko-KR" i="1" dirty="0"/>
+              <a:t>Mat</a:t>
+            </a:r>
+            <a:r>
+              <a:rPr lang="en-US" altLang="ko-KR" dirty="0"/>
+              <a:t> </a:t>
+            </a:r>
+            <a:r>
+              <a:rPr lang="en-US" altLang="ko-KR" dirty="0" err="1"/>
+              <a:t>dst</a:t>
+            </a:r>
+            <a:r>
+              <a:rPr lang="en-US" altLang="ko-KR" dirty="0"/>
+              <a:t> = </a:t>
+            </a:r>
+            <a:r>
+              <a:rPr lang="en-US" altLang="ko-KR" dirty="0" err="1"/>
+              <a:t>m_cMatching.ApplyConvertImageAuto</a:t>
+            </a:r>
+            <a:r>
+              <a:rPr lang="en-US" altLang="ko-KR" dirty="0"/>
+              <a:t>(</a:t>
+            </a:r>
+            <a:r>
+              <a:rPr lang="en-US" altLang="ko-KR" dirty="0" err="1"/>
+              <a:t>matModelIMG</a:t>
+            </a:r>
+            <a:r>
+              <a:rPr lang="en-US" altLang="ko-KR" dirty="0" smtClean="0"/>
+              <a:t>);</a:t>
+            </a:r>
+          </a:p>
+          <a:p>
+            <a:pPr lvl="2"/>
+            <a:r>
+              <a:rPr lang="en-US" altLang="ko-KR" dirty="0" err="1"/>
+              <a:t>m_cMatching.GetMinMax</a:t>
+            </a:r>
+            <a:r>
+              <a:rPr lang="en-US" altLang="ko-KR" dirty="0"/>
+              <a:t>(</a:t>
+            </a:r>
+            <a:r>
+              <a:rPr lang="en-US" altLang="ko-KR" dirty="0" err="1"/>
+              <a:t>m_fMin</a:t>
+            </a:r>
+            <a:r>
+              <a:rPr lang="en-US" altLang="ko-KR" dirty="0"/>
+              <a:t>, </a:t>
+            </a:r>
+            <a:r>
+              <a:rPr lang="en-US" altLang="ko-KR" dirty="0" err="1"/>
+              <a:t>m_fMax</a:t>
+            </a:r>
+            <a:r>
+              <a:rPr lang="en-US" altLang="ko-KR" dirty="0" smtClean="0"/>
+              <a:t>);</a:t>
+            </a:r>
+          </a:p>
+          <a:p>
+            <a:pPr lvl="2"/>
+            <a:r>
+              <a:rPr lang="en-US" altLang="ko-KR" i="1" dirty="0" err="1"/>
+              <a:t>applyColorMap</a:t>
+            </a:r>
+            <a:r>
+              <a:rPr lang="en-US" altLang="ko-KR" dirty="0"/>
+              <a:t>(</a:t>
+            </a:r>
+            <a:r>
+              <a:rPr lang="en-US" altLang="ko-KR" dirty="0" err="1"/>
+              <a:t>dst</a:t>
+            </a:r>
+            <a:r>
+              <a:rPr lang="en-US" altLang="ko-KR" dirty="0"/>
+              <a:t>, dst2, </a:t>
+            </a:r>
+            <a:r>
+              <a:rPr lang="en-US" altLang="ko-KR" i="1" dirty="0"/>
+              <a:t>cv</a:t>
+            </a:r>
+            <a:r>
+              <a:rPr lang="en-US" altLang="ko-KR" dirty="0"/>
+              <a:t>::</a:t>
+            </a:r>
+            <a:r>
+              <a:rPr lang="en-US" altLang="ko-KR" i="1" dirty="0"/>
+              <a:t>COLORMAP_RAINBOW</a:t>
+            </a:r>
+            <a:r>
+              <a:rPr lang="en-US" altLang="ko-KR" dirty="0" smtClean="0"/>
+              <a:t>);</a:t>
+            </a:r>
+          </a:p>
+          <a:p>
+            <a:pPr lvl="2"/>
+            <a:r>
+              <a:rPr lang="en-US" altLang="ko-KR" dirty="0" err="1"/>
+              <a:t>m_DefectColor</a:t>
+            </a:r>
+            <a:r>
+              <a:rPr lang="en-US" altLang="ko-KR" dirty="0"/>
+              <a:t> = dst2</a:t>
+            </a:r>
+            <a:r>
+              <a:rPr lang="en-US" altLang="ko-KR" dirty="0" smtClean="0"/>
+              <a:t>;</a:t>
+            </a:r>
+          </a:p>
+          <a:p>
+            <a:pPr lvl="2"/>
+            <a:r>
+              <a:rPr lang="en-US" altLang="ko-KR" i="1" dirty="0"/>
+              <a:t>cv</a:t>
+            </a:r>
+            <a:r>
+              <a:rPr lang="en-US" altLang="ko-KR" dirty="0"/>
+              <a:t>::</a:t>
+            </a:r>
+            <a:r>
+              <a:rPr lang="en-US" altLang="ko-KR" i="1" dirty="0"/>
+              <a:t>resize</a:t>
+            </a:r>
+            <a:r>
+              <a:rPr lang="en-US" altLang="ko-KR" dirty="0"/>
+              <a:t>(dst2, </a:t>
+            </a:r>
+            <a:r>
+              <a:rPr lang="en-US" altLang="ko-KR" dirty="0" err="1"/>
+              <a:t>m_Image</a:t>
+            </a:r>
+            <a:r>
+              <a:rPr lang="en-US" altLang="ko-KR" dirty="0"/>
+              <a:t>, </a:t>
+            </a:r>
+            <a:r>
+              <a:rPr lang="en-US" altLang="ko-KR" i="1" dirty="0"/>
+              <a:t>cv</a:t>
+            </a:r>
+            <a:r>
+              <a:rPr lang="en-US" altLang="ko-KR" dirty="0"/>
+              <a:t>::</a:t>
+            </a:r>
+            <a:r>
+              <a:rPr lang="en-US" altLang="ko-KR" i="1" dirty="0"/>
+              <a:t>Size</a:t>
+            </a:r>
+            <a:r>
+              <a:rPr lang="en-US" altLang="ko-KR" dirty="0"/>
+              <a:t>(</a:t>
+            </a:r>
+            <a:r>
+              <a:rPr lang="en-US" altLang="ko-KR" dirty="0" err="1"/>
+              <a:t>rectResult.</a:t>
+            </a:r>
+            <a:r>
+              <a:rPr lang="en-US" altLang="ko-KR" i="1" dirty="0" err="1"/>
+              <a:t>Width</a:t>
+            </a:r>
+            <a:r>
+              <a:rPr lang="en-US" altLang="ko-KR" dirty="0"/>
+              <a:t>(), </a:t>
+            </a:r>
+            <a:r>
+              <a:rPr lang="en-US" altLang="ko-KR" dirty="0" err="1"/>
+              <a:t>rectResult.</a:t>
+            </a:r>
+            <a:r>
+              <a:rPr lang="en-US" altLang="ko-KR" i="1" dirty="0" err="1"/>
+              <a:t>Height</a:t>
+            </a:r>
+            <a:r>
+              <a:rPr lang="en-US" altLang="ko-KR" dirty="0"/>
+              <a:t>()));</a:t>
+            </a:r>
+          </a:p>
+          <a:p>
+            <a:pPr lvl="2"/>
+            <a:r>
+              <a:rPr lang="en-US" altLang="ko-KR" dirty="0" err="1"/>
+              <a:t>DrawMat</a:t>
+            </a:r>
+            <a:r>
+              <a:rPr lang="en-US" altLang="ko-KR" dirty="0"/>
+              <a:t>(</a:t>
+            </a:r>
+            <a:r>
+              <a:rPr lang="en-US" altLang="ko-KR" dirty="0" err="1"/>
+              <a:t>pDCResult</a:t>
+            </a:r>
+            <a:r>
+              <a:rPr lang="en-US" altLang="ko-KR" dirty="0"/>
+              <a:t>-&gt;</a:t>
+            </a:r>
+            <a:r>
+              <a:rPr lang="en-US" altLang="ko-KR" i="1" dirty="0" err="1"/>
+              <a:t>m_hDC</a:t>
+            </a:r>
+            <a:r>
+              <a:rPr lang="en-US" altLang="ko-KR" dirty="0"/>
+              <a:t>, </a:t>
+            </a:r>
+            <a:r>
+              <a:rPr lang="en-US" altLang="ko-KR" dirty="0" err="1"/>
+              <a:t>m_Image</a:t>
+            </a:r>
+            <a:r>
+              <a:rPr lang="en-US" altLang="ko-KR" dirty="0" smtClean="0"/>
+              <a:t>);</a:t>
+            </a:r>
+          </a:p>
+          <a:p>
+            <a:pPr lvl="3"/>
+            <a:r>
+              <a:rPr lang="en-US" altLang="ko-KR" dirty="0"/>
+              <a:t>::</a:t>
+            </a:r>
+            <a:r>
+              <a:rPr lang="en-US" altLang="ko-KR" i="1" dirty="0" err="1"/>
+              <a:t>SetDIBitsToDevice</a:t>
+            </a:r>
+            <a:r>
+              <a:rPr lang="en-US" altLang="ko-KR" dirty="0"/>
+              <a:t>(</a:t>
+            </a:r>
+            <a:r>
+              <a:rPr lang="en-US" altLang="ko-KR" dirty="0" err="1"/>
+              <a:t>hDC</a:t>
+            </a:r>
+            <a:r>
+              <a:rPr lang="en-US" altLang="ko-KR" dirty="0" smtClean="0"/>
+              <a:t>, .., </a:t>
+            </a:r>
+            <a:r>
+              <a:rPr lang="en-US" altLang="ko-KR" dirty="0" err="1"/>
+              <a:t>img.</a:t>
+            </a:r>
+            <a:r>
+              <a:rPr lang="en-US" altLang="ko-KR" i="1" dirty="0" err="1"/>
+              <a:t>data</a:t>
+            </a:r>
+            <a:r>
+              <a:rPr lang="en-US" altLang="ko-KR" dirty="0" smtClean="0"/>
+              <a:t>, ..);</a:t>
+            </a:r>
+          </a:p>
+          <a:p>
+            <a:pPr lvl="2"/>
+            <a:r>
+              <a:rPr lang="en-US" altLang="ko-KR" dirty="0" smtClean="0"/>
+              <a:t>OnUpdate3DModel(</a:t>
+            </a:r>
+            <a:r>
+              <a:rPr lang="en-US" altLang="ko-KR" i="1" dirty="0" smtClean="0"/>
+              <a:t>WPARAM</a:t>
+            </a:r>
+            <a:r>
+              <a:rPr lang="en-US" altLang="ko-KR" dirty="0" smtClean="0"/>
+              <a:t> </a:t>
+            </a:r>
+            <a:r>
+              <a:rPr lang="en-US" altLang="ko-KR" dirty="0" err="1"/>
+              <a:t>wParam</a:t>
+            </a:r>
+            <a:r>
+              <a:rPr lang="en-US" altLang="ko-KR" dirty="0"/>
+              <a:t>, </a:t>
+            </a:r>
+            <a:r>
+              <a:rPr lang="en-US" altLang="ko-KR" i="1" dirty="0"/>
+              <a:t>LPARAM</a:t>
+            </a:r>
+            <a:r>
+              <a:rPr lang="en-US" altLang="ko-KR" dirty="0"/>
+              <a:t> </a:t>
+            </a:r>
+            <a:r>
+              <a:rPr lang="en-US" altLang="ko-KR" dirty="0" err="1"/>
+              <a:t>lParam</a:t>
+            </a:r>
+            <a:r>
+              <a:rPr lang="en-US" altLang="ko-KR" dirty="0" smtClean="0"/>
+              <a:t>)</a:t>
+            </a:r>
+          </a:p>
+          <a:p>
+            <a:pPr lvl="3"/>
+            <a:r>
+              <a:rPr lang="en-US" altLang="ko-KR" dirty="0" err="1"/>
+              <a:t>m_Model.m_ZMap</a:t>
+            </a:r>
+            <a:r>
+              <a:rPr lang="en-US" altLang="ko-KR" dirty="0"/>
+              <a:t> = </a:t>
+            </a:r>
+            <a:r>
+              <a:rPr lang="en-US" altLang="ko-KR" dirty="0" err="1"/>
+              <a:t>m_matrixZ.</a:t>
+            </a:r>
+            <a:r>
+              <a:rPr lang="en-US" altLang="ko-KR" i="1" dirty="0" err="1"/>
+              <a:t>clone</a:t>
+            </a:r>
+            <a:r>
+              <a:rPr lang="en-US" altLang="ko-KR" dirty="0"/>
+              <a:t>();</a:t>
+            </a:r>
+            <a:endParaRPr lang="en-US" altLang="ko-KR" dirty="0" smtClean="0"/>
+          </a:p>
+          <a:p>
+            <a:pPr lvl="3"/>
+            <a:r>
+              <a:rPr lang="en-US" altLang="ko-KR" dirty="0" err="1"/>
+              <a:t>m_Model.MakeModel</a:t>
+            </a:r>
+            <a:r>
+              <a:rPr lang="en-US" altLang="ko-KR" dirty="0" smtClean="0"/>
+              <a:t>();</a:t>
+            </a:r>
+          </a:p>
+          <a:p>
+            <a:pPr lvl="4"/>
+            <a:r>
+              <a:rPr lang="es-ES" altLang="ko-KR" dirty="0"/>
+              <a:t>for (y = 0; y &lt; m_ZMap.</a:t>
+            </a:r>
+            <a:r>
+              <a:rPr lang="es-ES" altLang="ko-KR" i="1" dirty="0"/>
+              <a:t>rows</a:t>
+            </a:r>
+            <a:r>
+              <a:rPr lang="es-ES" altLang="ko-KR" dirty="0"/>
+              <a:t> - 1; y</a:t>
+            </a:r>
+            <a:r>
+              <a:rPr lang="es-ES" altLang="ko-KR" dirty="0" smtClean="0"/>
+              <a:t>++)</a:t>
+            </a:r>
+          </a:p>
+          <a:p>
+            <a:pPr lvl="5"/>
+            <a:r>
+              <a:rPr lang="en-US" altLang="ko-KR" dirty="0"/>
+              <a:t>for (x = 0; x &lt; </a:t>
+            </a:r>
+            <a:r>
+              <a:rPr lang="en-US" altLang="ko-KR" dirty="0" err="1"/>
+              <a:t>m_ZMap.</a:t>
+            </a:r>
+            <a:r>
+              <a:rPr lang="en-US" altLang="ko-KR" i="1" dirty="0" err="1"/>
+              <a:t>cols</a:t>
+            </a:r>
+            <a:r>
+              <a:rPr lang="en-US" altLang="ko-KR" dirty="0"/>
+              <a:t> - 1; x</a:t>
+            </a:r>
+            <a:r>
+              <a:rPr lang="en-US" altLang="ko-KR" dirty="0" smtClean="0"/>
+              <a:t>++)	</a:t>
+            </a:r>
+            <a:r>
+              <a:rPr lang="en-US" altLang="ko-KR" b="1" dirty="0" err="1">
+                <a:solidFill>
+                  <a:srgbClr val="0070C0"/>
+                </a:solidFill>
+              </a:rPr>
+              <a:t>m_triangles.</a:t>
+            </a:r>
+            <a:r>
+              <a:rPr lang="en-US" altLang="ko-KR" b="1" i="1" dirty="0" err="1">
+                <a:solidFill>
+                  <a:srgbClr val="0070C0"/>
+                </a:solidFill>
+              </a:rPr>
+              <a:t>push_back</a:t>
+            </a:r>
+            <a:r>
+              <a:rPr lang="en-US" altLang="ko-KR" b="1" dirty="0">
+                <a:solidFill>
+                  <a:srgbClr val="0070C0"/>
+                </a:solidFill>
+              </a:rPr>
+              <a:t>(tri</a:t>
+            </a:r>
+            <a:r>
+              <a:rPr lang="en-US" altLang="ko-KR" b="1" dirty="0" smtClean="0">
+                <a:solidFill>
+                  <a:srgbClr val="0070C0"/>
+                </a:solidFill>
+              </a:rPr>
+              <a:t>);</a:t>
+            </a:r>
+            <a:endParaRPr lang="en-US" altLang="ko-KR" dirty="0" smtClean="0"/>
+          </a:p>
+          <a:p>
+            <a:pPr lvl="4"/>
+            <a:r>
+              <a:rPr lang="en-US" altLang="ko-KR" dirty="0" err="1"/>
+              <a:t>LoadTexture</a:t>
+            </a:r>
+            <a:r>
+              <a:rPr lang="en-US" altLang="ko-KR" dirty="0"/>
+              <a:t>(</a:t>
+            </a:r>
+            <a:r>
+              <a:rPr lang="en-US" altLang="ko-KR" dirty="0" err="1"/>
+              <a:t>m_ColorImg</a:t>
+            </a:r>
+            <a:r>
+              <a:rPr lang="en-US" altLang="ko-KR" dirty="0" smtClean="0"/>
+              <a:t>);</a:t>
+            </a:r>
+          </a:p>
+          <a:p>
+            <a:pPr lvl="5"/>
+            <a:r>
+              <a:rPr lang="en-US" altLang="ko-KR" dirty="0" err="1"/>
+              <a:t>m_bTextureLoaded</a:t>
+            </a:r>
+            <a:r>
+              <a:rPr lang="en-US" altLang="ko-KR" dirty="0"/>
+              <a:t> = 1</a:t>
+            </a:r>
+            <a:r>
+              <a:rPr lang="en-US" altLang="ko-KR" dirty="0" smtClean="0"/>
+              <a:t>;</a:t>
+            </a:r>
+          </a:p>
+          <a:p>
+            <a:pPr lvl="3"/>
+            <a:r>
+              <a:rPr lang="en-US" altLang="ko-KR" dirty="0" err="1"/>
+              <a:t>yScale</a:t>
+            </a:r>
+            <a:r>
+              <a:rPr lang="en-US" altLang="ko-KR" dirty="0"/>
+              <a:t> = 1000.0 / (double)S3DData-&gt;</a:t>
+            </a:r>
+            <a:r>
+              <a:rPr lang="en-US" altLang="ko-KR" dirty="0" err="1"/>
+              <a:t>m_matDepthMap.</a:t>
+            </a:r>
+            <a:r>
+              <a:rPr lang="en-US" altLang="ko-KR" i="1" dirty="0" err="1"/>
+              <a:t>rows</a:t>
+            </a:r>
+            <a:r>
+              <a:rPr lang="en-US" altLang="ko-KR" dirty="0" smtClean="0"/>
+              <a:t>;</a:t>
+            </a:r>
+          </a:p>
+          <a:p>
+            <a:pPr lvl="3"/>
+            <a:r>
+              <a:rPr lang="en-US" altLang="ko-KR" dirty="0" err="1"/>
+              <a:t>xScale</a:t>
+            </a:r>
+            <a:r>
+              <a:rPr lang="en-US" altLang="ko-KR" dirty="0"/>
+              <a:t> = 1000.0 / (double)S3DData-&gt;</a:t>
+            </a:r>
+            <a:r>
+              <a:rPr lang="en-US" altLang="ko-KR" dirty="0" err="1"/>
+              <a:t>m_matDepthMap.</a:t>
+            </a:r>
+            <a:r>
+              <a:rPr lang="en-US" altLang="ko-KR" i="1" dirty="0" err="1"/>
+              <a:t>cols</a:t>
+            </a:r>
+            <a:r>
+              <a:rPr lang="en-US" altLang="ko-KR" dirty="0"/>
+              <a:t>;</a:t>
+            </a:r>
+            <a:endParaRPr lang="en-US" altLang="ko-KR" dirty="0" smtClean="0"/>
+          </a:p>
+          <a:p>
+            <a:pPr lvl="3"/>
+            <a:r>
+              <a:rPr lang="en-US" altLang="ko-KR" dirty="0" err="1" smtClean="0"/>
+              <a:t>m_Model.ApplyScaleAndOffset</a:t>
+            </a:r>
+            <a:r>
+              <a:rPr lang="en-US" altLang="ko-KR" dirty="0" smtClean="0"/>
+              <a:t>(0</a:t>
+            </a:r>
+            <a:r>
+              <a:rPr lang="en-US" altLang="ko-KR" dirty="0"/>
+              <a:t>, 0, 0, </a:t>
+            </a:r>
+            <a:r>
+              <a:rPr lang="en-US" altLang="ko-KR" dirty="0" err="1"/>
+              <a:t>xScale</a:t>
+            </a:r>
+            <a:r>
+              <a:rPr lang="en-US" altLang="ko-KR" dirty="0"/>
+              <a:t>, </a:t>
+            </a:r>
+            <a:r>
+              <a:rPr lang="en-US" altLang="ko-KR" dirty="0" err="1"/>
+              <a:t>yScale</a:t>
+            </a:r>
+            <a:r>
+              <a:rPr lang="en-US" altLang="ko-KR" dirty="0"/>
+              <a:t>, 5000</a:t>
+            </a:r>
+            <a:r>
+              <a:rPr lang="en-US" altLang="ko-KR" dirty="0" smtClean="0"/>
+              <a:t>);</a:t>
+            </a:r>
+          </a:p>
+          <a:p>
+            <a:pPr lvl="3"/>
+            <a:r>
+              <a:rPr lang="en-US" altLang="ko-KR" dirty="0" smtClean="0"/>
+              <a:t>((</a:t>
+            </a:r>
+            <a:r>
+              <a:rPr lang="en-US" altLang="ko-KR" dirty="0" err="1"/>
+              <a:t>COpenGLViewEx</a:t>
+            </a:r>
+            <a:r>
+              <a:rPr lang="en-US" altLang="ko-KR" dirty="0" smtClean="0"/>
+              <a:t>*)</a:t>
+            </a:r>
+            <a:r>
+              <a:rPr lang="en-US" altLang="ko-KR" dirty="0" err="1" smtClean="0"/>
               <a:t>m_pView</a:t>
             </a:r>
             <a:r>
-              <a:rPr lang="en-US" altLang="ko-KR" dirty="0"/>
-              <a:t> = new </a:t>
-            </a:r>
-            <a:r>
-              <a:rPr lang="en-US" altLang="ko-KR" dirty="0" err="1"/>
-              <a:t>COpenGLViewEx</a:t>
-            </a:r>
-            <a:r>
-              <a:rPr lang="en-US" altLang="ko-KR" dirty="0"/>
+              <a:rPr lang="en-US" altLang="ko-KR" dirty="0" smtClean="0"/>
+              <a:t>)-&gt;</a:t>
+            </a:r>
+            <a:r>
+              <a:rPr lang="en-US" altLang="ko-KR" dirty="0"/>
+              <a:t>Refresh</a:t>
+            </a:r>
+            <a:r>
+              <a:rPr lang="en-US" altLang="ko-KR" dirty="0" smtClean="0"/>
               <a:t>();</a:t>
             </a:r>
-            <a:endParaRPr lang="en-US" altLang="ko-KR" dirty="0" smtClean="0"/>
-          </a:p>
-          <a:p>
-            <a:pPr lvl="1"/>
-            <a:r>
-              <a:rPr lang="en-US" altLang="ko-KR" dirty="0" smtClean="0"/>
-              <a:t>void </a:t>
-            </a:r>
-            <a:r>
-              <a:rPr lang="en-US" altLang="ko-KR" dirty="0" err="1"/>
-              <a:t>COpenGLView</a:t>
-            </a:r>
-            <a:r>
-              <a:rPr lang="en-US" altLang="ko-KR" dirty="0"/>
-              <a:t>::</a:t>
-            </a:r>
-            <a:r>
-              <a:rPr lang="en-US" altLang="ko-KR" dirty="0" err="1"/>
+          </a:p>
+          <a:p>
+            <a:pPr lvl="4"/>
+            <a:r>
+              <a:rPr lang="en-US" altLang="ko-KR" b="1" dirty="0" err="1">
+                <a:solidFill>
+                  <a:srgbClr val="0070C0"/>
+                </a:solidFill>
+              </a:rPr>
               <a:t>GLRenderScene</a:t>
             </a:r>
             <a:r>
-              <a:rPr lang="en-US" altLang="ko-KR" dirty="0"/>
-              <a:t>(</a:t>
-            </a:r>
-            <a:r>
-              <a:rPr lang="en-US" altLang="ko-KR" i="1" dirty="0"/>
-              <a:t>UINT</a:t>
-            </a:r>
-            <a:r>
-              <a:rPr lang="en-US" altLang="ko-KR" dirty="0"/>
-              <a:t> </a:t>
-            </a:r>
-            <a:r>
-              <a:rPr lang="en-US" altLang="ko-KR" dirty="0" err="1" smtClean="0"/>
-              <a:t>nAction</a:t>
-            </a:r>
-            <a:r>
-              <a:rPr lang="en-US" altLang="ko-KR" dirty="0" smtClean="0"/>
-              <a:t>=0, </a:t>
-            </a:r>
-            <a:r>
-              <a:rPr lang="en-US" altLang="ko-KR" dirty="0" err="1"/>
-              <a:t>int</a:t>
-            </a:r>
-            <a:r>
-              <a:rPr lang="en-US" altLang="ko-KR" dirty="0"/>
-              <a:t> </a:t>
-            </a:r>
-            <a:r>
-              <a:rPr lang="en-US" altLang="ko-KR" dirty="0" err="1" smtClean="0"/>
-              <a:t>nKey</a:t>
-            </a:r>
-            <a:r>
-              <a:rPr lang="en-US" altLang="ko-KR" dirty="0" smtClean="0"/>
-              <a:t>=0)</a:t>
-            </a:r>
-            <a:endParaRPr lang="en-US" altLang="ko-KR" b="1" dirty="0" smtClean="0"/>
-          </a:p>
-          <a:p>
-            <a:pPr lvl="2"/>
-            <a:r>
-              <a:rPr lang="en-US" altLang="ko-KR" b="1" dirty="0" err="1" smtClean="0"/>
+              <a:rPr lang="en-US" altLang="ko-KR" b="1" dirty="0"/>
+              <a:t>(WM_FIT_TO_SCREEN</a:t>
+            </a:r>
+            <a:r>
+              <a:rPr lang="en-US" altLang="ko-KR" b="1" dirty="0" smtClean="0"/>
+              <a:t>);</a:t>
+            </a:r>
+          </a:p>
+          <a:p>
+            <a:pPr lvl="5"/>
+            <a:r>
+              <a:rPr lang="en-US" altLang="ko-KR" b="1" dirty="0" err="1"/>
               <a:t>m_pParentWnd</a:t>
             </a:r>
             <a:r>
-              <a:rPr lang="en-US" altLang="ko-KR" b="1" dirty="0" smtClean="0"/>
-              <a:t>-</a:t>
-            </a:r>
-            <a:r>
               <a:rPr lang="en-US" altLang="ko-KR" b="1" dirty="0"/>
-              <a:t>&gt;</a:t>
+              <a:t>-&gt;</a:t>
             </a:r>
             <a:r>
               <a:rPr lang="en-US" altLang="ko-KR" b="1" i="1" dirty="0" err="1"/>
@@ -28149,542 +27805,360 @@
           <a:p>
             <a:pPr lvl="3"/>
             <a:r>
-              <a:rPr lang="en-US" altLang="ko-KR" b="1" dirty="0" err="1"/>
-              <a:t>m_nHandleID</a:t>
+              <a:rPr lang="en-US" altLang="ko-KR" b="1" dirty="0" err="1">
+                <a:solidFill>
+                  <a:srgbClr val="00B0F0"/>
+                </a:solidFill>
+              </a:rPr>
+              <a:t>OnGLRender</a:t>
+            </a:r>
+            <a:r>
+              <a:rPr lang="en-US" altLang="ko-KR" b="1" dirty="0"/>
+              <a:t>(</a:t>
+            </a:r>
+            <a:r>
+              <a:rPr lang="en-US" altLang="ko-KR" b="1" i="1" dirty="0"/>
+              <a:t>WPARAM</a:t>
             </a:r>
             <a:r>
               <a:rPr lang="en-US" altLang="ko-KR" b="1" dirty="0"/>
               <a:t> </a:t>
             </a:r>
             <a:r>
+              <a:rPr lang="en-US" altLang="ko-KR" b="1" dirty="0" err="1"/>
+              <a:t>wParam</a:t>
+            </a:r>
+            <a:r>
+              <a:rPr lang="en-US" altLang="ko-KR" b="1" dirty="0"/>
+              <a:t>, </a:t>
+            </a:r>
+            <a:r>
+              <a:rPr lang="en-US" altLang="ko-KR" b="1" i="1" dirty="0"/>
+              <a:t>LPARAM</a:t>
+            </a:r>
+            <a:r>
+              <a:rPr lang="en-US" altLang="ko-KR" b="1" dirty="0"/>
+              <a:t> </a:t>
+            </a:r>
+            <a:r>
+              <a:rPr lang="en-US" altLang="ko-KR" b="1" dirty="0" err="1"/>
+              <a:t>lParam</a:t>
+            </a:r>
+            <a:r>
               <a:rPr lang="en-US" altLang="ko-KR" b="1" dirty="0" smtClean="0"/>
-              <a:t>: </a:t>
-            </a:r>
-            <a:r>
-              <a:rPr lang="en-US" altLang="ko-KR" dirty="0" smtClean="0"/>
-              <a:t>IDC_STATIC_VIEW</a:t>
-            </a:r>
-          </a:p>
-          <a:p>
-            <a:pPr lvl="3"/>
-            <a:r>
-              <a:rPr lang="en-US" altLang="ko-KR" b="1" dirty="0" err="1" smtClean="0"/>
-              <a:t>nAction</a:t>
-            </a:r>
-            <a:r>
-              <a:rPr lang="en-US" altLang="ko-KR" b="1" dirty="0" smtClean="0"/>
-              <a:t> : </a:t>
+              <a:t>)</a:t>
             </a:r>
           </a:p>
           <a:p>
             <a:pPr lvl="4"/>
             <a:r>
-              <a:rPr lang="en-US" altLang="ko-KR" dirty="0" smtClean="0"/>
-              <a:t>WM_MOUSEWHEEL, WM_PAINT, WM_FIT_TO_SCREEN, </a:t>
+              <a:rPr lang="en-US" altLang="ko-KR" i="1" dirty="0" err="1"/>
+              <a:t>glRotated</a:t>
+            </a:r>
+            <a:r>
+              <a:rPr lang="en-US" altLang="ko-KR" dirty="0"/>
+              <a:t>(_</a:t>
+            </a:r>
+            <a:r>
+              <a:rPr lang="en-US" altLang="ko-KR" dirty="0" err="1"/>
+              <a:t>angleVer</a:t>
+            </a:r>
+            <a:r>
+              <a:rPr lang="en-US" altLang="ko-KR" dirty="0"/>
+              <a:t>, 1, 0, 0); </a:t>
+            </a:r>
+            <a:r>
+              <a:rPr lang="en-US" altLang="ko-KR" i="1" dirty="0" err="1" smtClean="0"/>
+              <a:t>glRotated</a:t>
+            </a:r>
+            <a:r>
+              <a:rPr lang="en-US" altLang="ko-KR" dirty="0"/>
+              <a:t>(_</a:t>
+            </a:r>
+            <a:r>
+              <a:rPr lang="en-US" altLang="ko-KR" dirty="0" err="1"/>
+              <a:t>angleHor</a:t>
+            </a:r>
+            <a:r>
+              <a:rPr lang="en-US" altLang="ko-KR" dirty="0"/>
+              <a:t>, 0, 0, 1); </a:t>
+            </a:r>
+            <a:r>
+              <a:rPr lang="en-US" altLang="ko-KR" dirty="0" smtClean="0"/>
+              <a:t> </a:t>
+            </a:r>
+            <a:r>
+              <a:rPr lang="en-US" altLang="ko-KR" i="1" dirty="0" err="1" smtClean="0"/>
+              <a:t>glTranslatef</a:t>
+            </a:r>
+            <a:r>
+              <a:rPr lang="en-US" altLang="ko-KR" dirty="0"/>
+              <a:t>(-600, -200, 100</a:t>
+            </a:r>
+            <a:r>
+              <a:rPr lang="en-US" altLang="ko-KR" dirty="0" smtClean="0"/>
+              <a:t>);</a:t>
             </a:r>
           </a:p>
           <a:p>
             <a:pPr lvl="4"/>
             <a:r>
-              <a:rPr lang="en-US" altLang="ko-KR" dirty="0"/>
-              <a:t>WM_LBUTTONDOWN, </a:t>
-            </a:r>
-            <a:r>
-              <a:rPr lang="en-US" altLang="ko-KR" dirty="0" smtClean="0"/>
-              <a:t>WM_MOUSEMOVE, WM_LBUTTONUP,</a:t>
+              <a:rPr lang="en-US" altLang="ko-KR" dirty="0" err="1"/>
+              <a:t>m_draw.DrawAxisXYZ</a:t>
+            </a:r>
+            <a:r>
+              <a:rPr lang="en-US" altLang="ko-KR" dirty="0"/>
+              <a:t>(0, 0, 0, 150, 5</a:t>
+            </a:r>
+            <a:r>
+              <a:rPr lang="en-US" altLang="ko-KR" dirty="0" smtClean="0"/>
+              <a:t>);</a:t>
             </a:r>
           </a:p>
           <a:p>
             <a:pPr lvl="4"/>
             <a:r>
-              <a:rPr lang="en-US" altLang="ko-KR" dirty="0" smtClean="0"/>
-              <a:t>WM_MBUTTONDOWN, WM_MBUTTONUP, </a:t>
+              <a:rPr lang="en-US" altLang="ko-KR" dirty="0" err="1" smtClean="0"/>
+              <a:t>m_draw.DrawGrid</a:t>
+            </a:r>
+            <a:r>
+              <a:rPr lang="en-US" altLang="ko-KR" dirty="0" smtClean="0"/>
+              <a:t>(10</a:t>
+            </a:r>
+            <a:r>
+              <a:rPr lang="en-US" altLang="ko-KR" dirty="0"/>
+              <a:t>, 10, 100, 100, 0, 0, 5, 5, CdPoint3D(0, 0, 0), G_GRID_TEXT, RGB_RED</a:t>
+            </a:r>
+            <a:r>
+              <a:rPr lang="en-US" altLang="ko-KR" dirty="0" smtClean="0"/>
+              <a:t>);</a:t>
             </a:r>
           </a:p>
           <a:p>
             <a:pPr lvl="4"/>
             <a:r>
-              <a:rPr lang="en-US" altLang="ko-KR" dirty="0" smtClean="0"/>
-              <a:t>WM_RBUTTONDOWN</a:t>
+              <a:rPr lang="en-US" altLang="ko-KR" dirty="0"/>
+              <a:t>if (</a:t>
+            </a:r>
+            <a:r>
+              <a:rPr lang="en-US" altLang="ko-KR" dirty="0" err="1"/>
+              <a:t>m_Model.m_bMeshCreated</a:t>
+            </a:r>
+            <a:r>
+              <a:rPr lang="en-US" altLang="ko-KR" dirty="0" smtClean="0"/>
+              <a:t>) </a:t>
+            </a:r>
+            <a:r>
+              <a:rPr lang="en-US" altLang="ko-KR" dirty="0" err="1"/>
+              <a:t>m_Model.Draw</a:t>
+            </a:r>
+            <a:r>
+              <a:rPr lang="en-US" altLang="ko-KR" dirty="0"/>
+              <a:t>(TEX_LUT</a:t>
+            </a:r>
+            <a:r>
+              <a:rPr lang="en-US" altLang="ko-KR" dirty="0" smtClean="0"/>
+              <a:t>);</a:t>
+            </a:r>
+          </a:p>
+          <a:p>
+            <a:pPr lvl="5"/>
+            <a:r>
+              <a:rPr lang="en-US" altLang="ko-KR" dirty="0" err="1"/>
+              <a:t>int</a:t>
+            </a:r>
+            <a:r>
+              <a:rPr lang="en-US" altLang="ko-KR" dirty="0"/>
+              <a:t> </a:t>
+            </a:r>
+            <a:r>
+              <a:rPr lang="en-US" altLang="ko-KR" dirty="0" err="1"/>
+              <a:t>nSize</a:t>
+            </a:r>
+            <a:r>
+              <a:rPr lang="en-US" altLang="ko-KR" dirty="0"/>
+              <a:t> = </a:t>
+            </a:r>
+            <a:r>
+              <a:rPr lang="en-US" altLang="ko-KR" dirty="0" err="1"/>
+              <a:t>m_triangles.</a:t>
+            </a:r>
+            <a:r>
+              <a:rPr lang="en-US" altLang="ko-KR" i="1" dirty="0" err="1"/>
+              <a:t>size</a:t>
+            </a:r>
+            <a:r>
+              <a:rPr lang="en-US" altLang="ko-KR" dirty="0" smtClean="0"/>
+              <a:t>();</a:t>
+            </a:r>
+          </a:p>
+          <a:p>
+            <a:pPr lvl="5"/>
+            <a:r>
+              <a:rPr lang="en-US" altLang="ko-KR" i="1" dirty="0" err="1"/>
+              <a:t>glBindTexture</a:t>
+            </a:r>
+            <a:r>
+              <a:rPr lang="en-US" altLang="ko-KR" dirty="0"/>
+              <a:t>(</a:t>
+            </a:r>
+            <a:r>
+              <a:rPr lang="en-US" altLang="ko-KR" i="1" dirty="0"/>
+              <a:t>GL_TEXTURE_2D</a:t>
             </a:r>
             <a:r>
               <a:rPr lang="en-US" altLang="ko-KR" dirty="0"/>
               <a:t>, </a:t>
             </a:r>
             <a:r>
-              <a:rPr lang="en-US" altLang="ko-KR" dirty="0" smtClean="0"/>
-              <a:t>WM_RBUTTONUP</a:t>
-            </a:r>
-            <a:endParaRPr lang="en-US" altLang="ko-KR" i="1" dirty="0" smtClean="0"/>
-          </a:p>
-          <a:p>
-            <a:pPr lvl="2"/>
-            <a:r>
-              <a:rPr lang="en-US" altLang="ko-KR" i="1" dirty="0" smtClean="0"/>
-              <a:t>LRESULT</a:t>
-            </a:r>
-            <a:r>
-              <a:rPr lang="en-US" altLang="ko-KR" dirty="0" smtClean="0"/>
-              <a:t> </a:t>
-            </a:r>
-            <a:r>
-              <a:rPr lang="en-US" altLang="ko-KR" dirty="0"/>
-              <a:t>CDlg3DViewer::</a:t>
-            </a:r>
-            <a:r>
-              <a:rPr lang="en-US" altLang="ko-KR" dirty="0" err="1"/>
-              <a:t>OnGLRender</a:t>
+              <a:rPr lang="en-US" altLang="ko-KR" dirty="0" err="1"/>
+              <a:t>m_Texture</a:t>
+            </a:r>
+            <a:r>
+              <a:rPr lang="en-US" altLang="ko-KR" dirty="0" smtClean="0"/>
+              <a:t>);</a:t>
+            </a:r>
+          </a:p>
+          <a:p>
+            <a:pPr lvl="5"/>
+            <a:r>
+              <a:rPr lang="nn-NO" altLang="ko-KR" dirty="0"/>
+              <a:t>for (int i = 0; i &lt; nSize; i</a:t>
+            </a:r>
+            <a:r>
+              <a:rPr lang="nn-NO" altLang="ko-KR" dirty="0" smtClean="0"/>
+              <a:t>++)</a:t>
+            </a:r>
+          </a:p>
+          <a:p>
+            <a:pPr lvl="6"/>
+            <a:r>
+              <a:rPr lang="en-US" altLang="ko-KR" b="1" dirty="0" err="1">
+                <a:solidFill>
+                  <a:srgbClr val="0070C0"/>
+                </a:solidFill>
+              </a:rPr>
+              <a:t>stTagTriangles</a:t>
+            </a:r>
+            <a:r>
+              <a:rPr lang="en-US" altLang="ko-KR" b="1" dirty="0">
+                <a:solidFill>
+                  <a:srgbClr val="0070C0"/>
+                </a:solidFill>
+              </a:rPr>
+              <a:t> tri = </a:t>
+            </a:r>
+            <a:r>
+              <a:rPr lang="en-US" altLang="ko-KR" b="1" dirty="0" err="1">
+                <a:solidFill>
+                  <a:srgbClr val="0070C0"/>
+                </a:solidFill>
+              </a:rPr>
+              <a:t>m_triangles</a:t>
+            </a:r>
+            <a:r>
+              <a:rPr lang="en-US" altLang="ko-KR" b="1" dirty="0">
+                <a:solidFill>
+                  <a:srgbClr val="0070C0"/>
+                </a:solidFill>
+              </a:rPr>
+              <a:t>[</a:t>
+            </a:r>
+            <a:r>
+              <a:rPr lang="en-US" altLang="ko-KR" b="1" dirty="0" err="1">
+                <a:solidFill>
+                  <a:srgbClr val="0070C0"/>
+                </a:solidFill>
+              </a:rPr>
+              <a:t>i</a:t>
+            </a:r>
+            <a:r>
+              <a:rPr lang="en-US" altLang="ko-KR" b="1" dirty="0">
+                <a:solidFill>
+                  <a:srgbClr val="0070C0"/>
+                </a:solidFill>
+              </a:rPr>
+              <a:t>];</a:t>
+            </a:r>
+            <a:endParaRPr lang="nn-NO" altLang="ko-KR" b="1" dirty="0" smtClean="0">
+              <a:solidFill>
+                <a:srgbClr val="0070C0"/>
+              </a:solidFill>
+            </a:endParaRPr>
+          </a:p>
+          <a:p>
+            <a:pPr lvl="6"/>
+            <a:r>
+              <a:rPr lang="nn-NO" altLang="ko-KR" dirty="0"/>
+              <a:t>for (int i = 0; i &lt; nSize; i</a:t>
+            </a:r>
+            <a:r>
+              <a:rPr lang="nn-NO" altLang="ko-KR" dirty="0" smtClean="0"/>
+              <a:t>++) </a:t>
+            </a:r>
+            <a:r>
+              <a:rPr lang="en-US" altLang="ko-KR" i="1" dirty="0"/>
+              <a:t>glVertex3f</a:t>
             </a:r>
             <a:r>
               <a:rPr lang="en-US" altLang="ko-KR" dirty="0"/>
               <a:t>(</a:t>
             </a:r>
             <a:r>
+              <a:rPr lang="en-US" altLang="ko-KR" dirty="0" err="1"/>
+              <a:t>tri.x</a:t>
+            </a:r>
+            <a:r>
+              <a:rPr lang="en-US" altLang="ko-KR" dirty="0"/>
+              <a:t>[k], </a:t>
+            </a:r>
+            <a:r>
+              <a:rPr lang="en-US" altLang="ko-KR" dirty="0" err="1"/>
+              <a:t>tri.y</a:t>
+            </a:r>
+            <a:r>
+              <a:rPr lang="en-US" altLang="ko-KR" dirty="0"/>
+              <a:t>[k], </a:t>
+            </a:r>
+            <a:r>
+              <a:rPr lang="en-US" altLang="ko-KR" dirty="0" err="1"/>
+              <a:t>tri.z</a:t>
+            </a:r>
+            <a:r>
+              <a:rPr lang="en-US" altLang="ko-KR" dirty="0"/>
+              <a:t>[k</a:t>
+            </a:r>
+            <a:r>
+              <a:rPr lang="en-US" altLang="ko-KR" dirty="0" smtClean="0"/>
+              <a:t>]);</a:t>
+            </a:r>
+          </a:p>
+          <a:p>
+            <a:pPr lvl="5"/>
+            <a:r>
+              <a:rPr lang="en-US" altLang="ko-KR" i="1" dirty="0" err="1"/>
+              <a:t>glBindTexture</a:t>
+            </a:r>
+            <a:r>
+              <a:rPr lang="en-US" altLang="ko-KR" dirty="0"/>
+              <a:t>(</a:t>
+            </a:r>
+            <a:r>
               <a:rPr lang="en-US" altLang="ko-KR" i="1" dirty="0"/>
-              <a:t>WPARAM</a:t>
-            </a:r>
-            <a:r>
-              <a:rPr lang="en-US" altLang="ko-KR" dirty="0"/>
-              <a:t> </a:t>
-            </a:r>
-            <a:r>
-              <a:rPr lang="en-US" altLang="ko-KR" dirty="0" err="1"/>
-              <a:t>wParam</a:t>
-            </a:r>
-            <a:r>
-              <a:rPr lang="en-US" altLang="ko-KR" dirty="0"/>
-              <a:t>, </a:t>
-            </a:r>
-            <a:r>
-              <a:rPr lang="en-US" altLang="ko-KR" i="1" dirty="0"/>
-              <a:t>LPARAM</a:t>
-            </a:r>
-            <a:r>
-              <a:rPr lang="en-US" altLang="ko-KR" dirty="0"/>
-              <a:t> </a:t>
-            </a:r>
-            <a:r>
-              <a:rPr lang="en-US" altLang="ko-KR" dirty="0" err="1"/>
-              <a:t>lParam</a:t>
-            </a:r>
-            <a:r>
-              <a:rPr lang="en-US" altLang="ko-KR" dirty="0" smtClean="0"/>
-              <a:t>)</a:t>
-            </a:r>
-          </a:p>
-          <a:p>
-            <a:pPr lvl="3"/>
-            <a:r>
-              <a:rPr lang="en-US" altLang="ko-KR" sz="1400" dirty="0"/>
-              <a:t>if (</a:t>
-            </a:r>
-            <a:r>
-              <a:rPr lang="en-US" altLang="ko-KR" sz="1400" dirty="0" err="1"/>
-              <a:t>lParam</a:t>
-            </a:r>
-            <a:r>
-              <a:rPr lang="en-US" altLang="ko-KR" sz="1400" dirty="0"/>
-              <a:t> == </a:t>
-            </a:r>
-            <a:r>
-              <a:rPr lang="en-US" altLang="ko-KR" sz="1400" i="1" dirty="0"/>
-              <a:t>WM_LBUTTONDOWN</a:t>
-            </a:r>
-            <a:r>
-              <a:rPr lang="en-US" altLang="ko-KR" sz="1400" dirty="0" smtClean="0"/>
-              <a:t>)	</a:t>
-            </a:r>
-            <a:r>
-              <a:rPr lang="en-US" altLang="ko-KR" sz="1400" dirty="0"/>
-              <a:t> _</a:t>
-            </a:r>
-            <a:r>
-              <a:rPr lang="en-US" altLang="ko-KR" sz="1400" dirty="0" err="1"/>
-              <a:t>mouseDownPoint</a:t>
-            </a:r>
-            <a:r>
-              <a:rPr lang="en-US" altLang="ko-KR" sz="1400" dirty="0"/>
-              <a:t> = </a:t>
-            </a:r>
-            <a:r>
-              <a:rPr lang="en-US" altLang="ko-KR" sz="1400" dirty="0" err="1"/>
-              <a:t>m_pView</a:t>
-            </a:r>
-            <a:r>
-              <a:rPr lang="en-US" altLang="ko-KR" sz="1400" dirty="0"/>
-              <a:t>-&gt;</a:t>
-            </a:r>
-            <a:r>
-              <a:rPr lang="en-US" altLang="ko-KR" sz="1400" dirty="0" err="1"/>
-              <a:t>m_ptCurPos</a:t>
-            </a:r>
-            <a:r>
-              <a:rPr lang="en-US" altLang="ko-KR" sz="1400" dirty="0" smtClean="0"/>
-              <a:t>;</a:t>
-            </a:r>
-          </a:p>
-          <a:p>
-            <a:pPr lvl="3"/>
-            <a:r>
-              <a:rPr lang="en-US" altLang="ko-KR" sz="1400" dirty="0"/>
-              <a:t>else if (</a:t>
-            </a:r>
-            <a:r>
-              <a:rPr lang="en-US" altLang="ko-KR" sz="1400" dirty="0" err="1"/>
-              <a:t>lParam</a:t>
-            </a:r>
-            <a:r>
-              <a:rPr lang="en-US" altLang="ko-KR" sz="1400" dirty="0"/>
-              <a:t> == </a:t>
-            </a:r>
-            <a:r>
-              <a:rPr lang="en-US" altLang="ko-KR" sz="1400" i="1" dirty="0"/>
-              <a:t>WM_LBUTTONUP</a:t>
-            </a:r>
-            <a:r>
-              <a:rPr lang="en-US" altLang="ko-KR" sz="1400" dirty="0" smtClean="0"/>
-              <a:t>)</a:t>
-            </a:r>
-            <a:r>
-              <a:rPr lang="en-US" altLang="ko-KR" sz="1400" dirty="0"/>
-              <a:t> </a:t>
-            </a:r>
-            <a:r>
-              <a:rPr lang="en-US" altLang="ko-KR" sz="1400" dirty="0" smtClean="0"/>
-              <a:t>_</a:t>
-            </a:r>
-            <a:r>
-              <a:rPr lang="en-US" altLang="ko-KR" sz="1400" dirty="0" err="1"/>
-              <a:t>mouseDownPoint</a:t>
-            </a:r>
-            <a:r>
-              <a:rPr lang="en-US" altLang="ko-KR" sz="1400" dirty="0"/>
-              <a:t> = </a:t>
-            </a:r>
-            <a:r>
-              <a:rPr lang="en-US" altLang="ko-KR" sz="1400" i="1" dirty="0" err="1"/>
-              <a:t>CPoint</a:t>
-            </a:r>
-            <a:r>
-              <a:rPr lang="en-US" altLang="ko-KR" sz="1400" dirty="0"/>
-              <a:t>(0, 0</a:t>
-            </a:r>
-            <a:r>
-              <a:rPr lang="en-US" altLang="ko-KR" sz="1400" dirty="0" smtClean="0"/>
-              <a:t>);</a:t>
-            </a:r>
-          </a:p>
-          <a:p>
-            <a:pPr lvl="3"/>
-            <a:r>
-              <a:rPr lang="en-US" altLang="ko-KR" sz="1400" dirty="0"/>
-              <a:t>else if (</a:t>
-            </a:r>
-            <a:r>
-              <a:rPr lang="en-US" altLang="ko-KR" sz="1400" dirty="0" err="1"/>
-              <a:t>lParam</a:t>
-            </a:r>
-            <a:r>
-              <a:rPr lang="en-US" altLang="ko-KR" sz="1400" dirty="0"/>
-              <a:t> == </a:t>
-            </a:r>
-            <a:r>
-              <a:rPr lang="en-US" altLang="ko-KR" sz="1400" i="1" dirty="0"/>
-              <a:t>WM_RBUTTONDOWN</a:t>
-            </a:r>
-            <a:r>
-              <a:rPr lang="en-US" altLang="ko-KR" sz="1400" dirty="0" smtClean="0"/>
-              <a:t>) </a:t>
-            </a:r>
-            <a:r>
-              <a:rPr lang="en-US" altLang="ko-KR" sz="1400" dirty="0"/>
-              <a:t>_</a:t>
-            </a:r>
-            <a:r>
-              <a:rPr lang="en-US" altLang="ko-KR" sz="1400" dirty="0" err="1"/>
-              <a:t>mouseDownPoint</a:t>
-            </a:r>
-            <a:r>
-              <a:rPr lang="en-US" altLang="ko-KR" sz="1400" dirty="0"/>
-              <a:t> = </a:t>
-            </a:r>
-            <a:r>
-              <a:rPr lang="en-US" altLang="ko-KR" sz="1400" dirty="0" err="1"/>
-              <a:t>m_pView</a:t>
-            </a:r>
-            <a:r>
-              <a:rPr lang="en-US" altLang="ko-KR" sz="1400" dirty="0"/>
-              <a:t>-&gt;</a:t>
-            </a:r>
-            <a:r>
-              <a:rPr lang="en-US" altLang="ko-KR" sz="1400" dirty="0" err="1"/>
-              <a:t>m_ptCurPos</a:t>
-            </a:r>
-            <a:r>
-              <a:rPr lang="en-US" altLang="ko-KR" sz="1400" dirty="0" smtClean="0"/>
-              <a:t>;</a:t>
-            </a:r>
-          </a:p>
-          <a:p>
-            <a:pPr lvl="3"/>
-            <a:r>
-              <a:rPr lang="en-US" altLang="ko-KR" sz="1400" dirty="0"/>
-              <a:t>else if (</a:t>
-            </a:r>
-            <a:r>
-              <a:rPr lang="en-US" altLang="ko-KR" sz="1400" dirty="0" err="1"/>
-              <a:t>lParam</a:t>
-            </a:r>
-            <a:r>
-              <a:rPr lang="en-US" altLang="ko-KR" sz="1400" dirty="0"/>
-              <a:t> == </a:t>
-            </a:r>
-            <a:r>
-              <a:rPr lang="en-US" altLang="ko-KR" sz="1400" i="1" dirty="0"/>
-              <a:t>WM_RBUTTONUP</a:t>
-            </a:r>
-            <a:r>
-              <a:rPr lang="en-US" altLang="ko-KR" sz="1400" dirty="0" smtClean="0"/>
-              <a:t>) </a:t>
-            </a:r>
-            <a:r>
-              <a:rPr lang="en-US" altLang="ko-KR" sz="1400" dirty="0"/>
-              <a:t>_</a:t>
-            </a:r>
-            <a:r>
-              <a:rPr lang="en-US" altLang="ko-KR" sz="1400" dirty="0" err="1"/>
-              <a:t>mouseDownPoint</a:t>
-            </a:r>
-            <a:r>
-              <a:rPr lang="en-US" altLang="ko-KR" sz="1400" dirty="0"/>
-              <a:t> = </a:t>
-            </a:r>
-            <a:r>
-              <a:rPr lang="en-US" altLang="ko-KR" sz="1400" i="1" dirty="0" err="1"/>
-              <a:t>CPoint</a:t>
-            </a:r>
-            <a:r>
-              <a:rPr lang="en-US" altLang="ko-KR" sz="1400" dirty="0"/>
-              <a:t>(0, 0</a:t>
-            </a:r>
-            <a:r>
-              <a:rPr lang="en-US" altLang="ko-KR" sz="1400" dirty="0" smtClean="0"/>
-              <a:t>);</a:t>
-            </a:r>
-          </a:p>
-          <a:p>
-            <a:pPr lvl="3"/>
-            <a:r>
-              <a:rPr lang="en-US" altLang="ko-KR" sz="1400" dirty="0"/>
-              <a:t>else if (</a:t>
-            </a:r>
-            <a:r>
-              <a:rPr lang="en-US" altLang="ko-KR" sz="1400" dirty="0" err="1"/>
-              <a:t>lParam</a:t>
-            </a:r>
-            <a:r>
-              <a:rPr lang="en-US" altLang="ko-KR" sz="1400" dirty="0"/>
-              <a:t> == </a:t>
-            </a:r>
-            <a:r>
-              <a:rPr lang="en-US" altLang="ko-KR" sz="1400" i="1" dirty="0"/>
-              <a:t>WM_MOUSEHWHEEL</a:t>
-            </a:r>
-            <a:r>
-              <a:rPr lang="en-US" altLang="ko-KR" sz="1400" dirty="0" smtClean="0"/>
-              <a:t>) </a:t>
-            </a:r>
-            <a:r>
-              <a:rPr lang="en-US" altLang="ko-KR" sz="1400" dirty="0" err="1"/>
-              <a:t>m_pView</a:t>
-            </a:r>
-            <a:r>
-              <a:rPr lang="en-US" altLang="ko-KR" sz="1400" dirty="0"/>
-              <a:t>-&gt;</a:t>
-            </a:r>
-            <a:r>
-              <a:rPr lang="en-US" altLang="ko-KR" sz="1400" dirty="0" err="1"/>
-              <a:t>ZoomIn</a:t>
-            </a:r>
-            <a:r>
-              <a:rPr lang="en-US" altLang="ko-KR" sz="1400" dirty="0"/>
-              <a:t>(1.1</a:t>
-            </a:r>
-            <a:r>
-              <a:rPr lang="en-US" altLang="ko-KR" sz="1400" dirty="0" smtClean="0"/>
-              <a:t>); </a:t>
-            </a:r>
-            <a:r>
-              <a:rPr lang="en-US" altLang="ko-KR" sz="1400" dirty="0" err="1"/>
-              <a:t>m_pView</a:t>
-            </a:r>
-            <a:r>
-              <a:rPr lang="en-US" altLang="ko-KR" sz="1400" dirty="0"/>
-              <a:t>-&gt;</a:t>
-            </a:r>
-            <a:r>
-              <a:rPr lang="en-US" altLang="ko-KR" sz="1400" dirty="0" err="1"/>
-              <a:t>ZoomOut</a:t>
-            </a:r>
-            <a:r>
-              <a:rPr lang="en-US" altLang="ko-KR" sz="1400" dirty="0"/>
-              <a:t>(1.1</a:t>
-            </a:r>
-            <a:r>
-              <a:rPr lang="en-US" altLang="ko-KR" sz="1400" dirty="0" smtClean="0"/>
-              <a:t>);</a:t>
-            </a:r>
-          </a:p>
-          <a:p>
-            <a:pPr lvl="3"/>
-            <a:r>
-              <a:rPr lang="en-US" altLang="ko-KR" sz="1400" dirty="0"/>
-              <a:t>else if (</a:t>
-            </a:r>
-            <a:r>
-              <a:rPr lang="en-US" altLang="ko-KR" sz="1400" dirty="0" err="1"/>
-              <a:t>lParam</a:t>
-            </a:r>
-            <a:r>
-              <a:rPr lang="en-US" altLang="ko-KR" sz="1400" dirty="0"/>
-              <a:t> == </a:t>
-            </a:r>
-            <a:r>
-              <a:rPr lang="en-US" altLang="ko-KR" sz="1400" i="1" dirty="0"/>
-              <a:t>WM_MOUSEMOVE</a:t>
-            </a:r>
-            <a:r>
-              <a:rPr lang="en-US" altLang="ko-KR" sz="1400" dirty="0" smtClean="0"/>
-              <a:t>) </a:t>
-            </a:r>
-          </a:p>
-          <a:p>
-            <a:pPr lvl="4"/>
-            <a:r>
-              <a:rPr lang="en-US" altLang="ko-KR" sz="1400" dirty="0"/>
-              <a:t>if (_</a:t>
-            </a:r>
-            <a:r>
-              <a:rPr lang="en-US" altLang="ko-KR" sz="1400" dirty="0" err="1"/>
-              <a:t>mouseButton</a:t>
-            </a:r>
-            <a:r>
-              <a:rPr lang="en-US" altLang="ko-KR" sz="1400" dirty="0"/>
-              <a:t> == 1</a:t>
-            </a:r>
-            <a:r>
-              <a:rPr lang="en-US" altLang="ko-KR" sz="1400" dirty="0" smtClean="0"/>
-              <a:t>) Rotate		// </a:t>
-            </a:r>
-            <a:r>
-              <a:rPr lang="en-US" altLang="ko-KR" sz="1400" dirty="0" err="1"/>
-              <a:t>lParam</a:t>
-            </a:r>
-            <a:r>
-              <a:rPr lang="en-US" altLang="ko-KR" sz="1400" dirty="0"/>
-              <a:t> == </a:t>
-            </a:r>
-            <a:r>
-              <a:rPr lang="en-US" altLang="ko-KR" sz="1400" i="1" dirty="0"/>
-              <a:t>WM_LBUTTONDOWN</a:t>
-            </a:r>
-            <a:endParaRPr lang="en-US" altLang="ko-KR" sz="1400" dirty="0" smtClean="0"/>
-          </a:p>
-          <a:p>
-            <a:pPr lvl="4"/>
-            <a:r>
-              <a:rPr lang="en-US" altLang="ko-KR" sz="1400" dirty="0" smtClean="0"/>
-              <a:t>else </a:t>
-            </a:r>
-            <a:r>
-              <a:rPr lang="en-US" altLang="ko-KR" sz="1400" dirty="0"/>
-              <a:t>if (_</a:t>
-            </a:r>
-            <a:r>
-              <a:rPr lang="en-US" altLang="ko-KR" sz="1400" dirty="0" err="1"/>
-              <a:t>mouseButton</a:t>
-            </a:r>
-            <a:r>
-              <a:rPr lang="en-US" altLang="ko-KR" sz="1400" dirty="0"/>
-              <a:t> == 2</a:t>
-            </a:r>
-            <a:r>
-              <a:rPr lang="en-US" altLang="ko-KR" sz="1400" dirty="0" smtClean="0"/>
-              <a:t>) </a:t>
-            </a:r>
-            <a:r>
-              <a:rPr lang="en-US" altLang="ko-KR" sz="1400" dirty="0" err="1" smtClean="0"/>
-              <a:t>Transiant</a:t>
-            </a:r>
-            <a:r>
-              <a:rPr lang="en-US" altLang="ko-KR" sz="1400" dirty="0" smtClean="0"/>
-              <a:t>	// </a:t>
-            </a:r>
-            <a:r>
-              <a:rPr lang="en-US" altLang="ko-KR" sz="1400" dirty="0" err="1"/>
-              <a:t>lParam</a:t>
-            </a:r>
-            <a:r>
-              <a:rPr lang="en-US" altLang="ko-KR" sz="1400" dirty="0"/>
-              <a:t> == </a:t>
-            </a:r>
-            <a:r>
-              <a:rPr lang="en-US" altLang="ko-KR" sz="1400" i="1" dirty="0"/>
-              <a:t>WM_RBUTTONDOWN</a:t>
-            </a:r>
-            <a:endParaRPr lang="en-US" altLang="ko-KR" sz="1400" dirty="0" smtClean="0"/>
-          </a:p>
-          <a:p>
-            <a:pPr lvl="4"/>
-            <a:r>
-              <a:rPr lang="en-US" altLang="ko-KR" sz="1400" dirty="0"/>
-              <a:t>else if (_</a:t>
-            </a:r>
-            <a:r>
-              <a:rPr lang="en-US" altLang="ko-KR" sz="1400" dirty="0" err="1"/>
-              <a:t>mouseButton</a:t>
-            </a:r>
-            <a:r>
-              <a:rPr lang="en-US" altLang="ko-KR" sz="1400" dirty="0"/>
-              <a:t> == 3</a:t>
-            </a:r>
-            <a:r>
-              <a:rPr lang="en-US" altLang="ko-KR" sz="1400" dirty="0" smtClean="0"/>
-              <a:t>) ?</a:t>
-            </a:r>
-          </a:p>
-          <a:p>
-            <a:pPr lvl="4"/>
-            <a:r>
-              <a:rPr lang="en-US" altLang="ko-KR" sz="1400" dirty="0"/>
-              <a:t>_</a:t>
-            </a:r>
-            <a:r>
-              <a:rPr lang="en-US" altLang="ko-KR" sz="1400" dirty="0" err="1"/>
-              <a:t>mouseDownPoint</a:t>
-            </a:r>
-            <a:r>
-              <a:rPr lang="en-US" altLang="ko-KR" sz="1400" dirty="0"/>
-              <a:t> = </a:t>
-            </a:r>
-            <a:r>
-              <a:rPr lang="en-US" altLang="ko-KR" sz="1400" dirty="0" err="1"/>
-              <a:t>m_pView</a:t>
-            </a:r>
-            <a:r>
-              <a:rPr lang="en-US" altLang="ko-KR" sz="1400" dirty="0"/>
-              <a:t>-&gt;</a:t>
-            </a:r>
-            <a:r>
-              <a:rPr lang="en-US" altLang="ko-KR" sz="1400" dirty="0" err="1"/>
-              <a:t>m_ptCurPos</a:t>
-            </a:r>
-            <a:r>
-              <a:rPr lang="en-US" altLang="ko-KR" sz="1400" dirty="0"/>
-              <a:t>;</a:t>
-            </a:r>
-          </a:p>
-          <a:p>
+              <a:t>GL_TEXTURE_2D</a:t>
+            </a:r>
+            <a:r>
+              <a:rPr lang="en-US" altLang="ko-KR" dirty="0"/>
+              <a:t>, 0);</a:t>
+            </a:r>
+            <a:endParaRPr lang="nn-NO" altLang="ko-KR" dirty="0" smtClean="0"/>
+          </a:p>
+          <a:p>
+            <a:pPr lvl="5"/>
+            <a:endParaRPr lang="en-US" altLang="ko-KR" dirty="0" smtClean="0"/>
+          </a:p>
+          <a:p>
+            <a:pPr lvl="5"/>
             <a:endParaRPr lang="ko-KR" altLang="en-US" dirty="0"/>
           </a:p>
         </p:txBody>
@@ -28692,7 +28166,7 @@
     </p:spTree>
     <p:extLst>
       <p:ext uri="{BB962C8B-B14F-4D97-AF65-F5344CB8AC3E}">
-        <p14:creationId xmlns:p14="http://schemas.microsoft.com/office/powerpoint/2010/main" val="2485708467"/>
+        <p14:creationId xmlns:p14="http://schemas.microsoft.com/office/powerpoint/2010/main" val="462860450"/>
       </p:ext>
     </p:extLst>
   </p:cSld>
@@ -28726,7 +28200,7 @@
             <a:spLocks noGrp="1"/>
           </p:cNvSpPr>
           <p:nvPr>
-            <p:ph type="ctrTitle"/>
+            <p:ph type="title"/>
           </p:nvPr>
         </p:nvSpPr>
         <p:spPr/>
@@ -28735,16 +28209,12 @@
           <a:lstStyle/>
           <a:p>
             <a:r>
-              <a:rPr lang="en-US" altLang="ko-KR" dirty="0" err="1" smtClean="0"/>
-              <a:t>Zygo</a:t>
-            </a:r>
-            <a:r>
-              <a:rPr lang="en-US" altLang="ko-KR" dirty="0" smtClean="0"/>
-              <a:t> </a:t>
-            </a:r>
-            <a:r>
-              <a:rPr lang="en-US" altLang="ko-KR" dirty="0" err="1" smtClean="0"/>
-              <a:t>Mx</a:t>
+              <a:rPr lang="en-US" altLang="ko-KR" dirty="0" smtClean="0"/>
+              <a:t>OpenGL Event </a:t>
+            </a:r>
+            <a:r>
+              <a:rPr lang="ko-KR" altLang="en-US" dirty="0" smtClean="0"/>
+              <a:t>처리</a:t>
             </a:r>
             <a:endParaRPr lang="ko-KR" altLang="en-US" dirty="0"/>
           </a:p>
@@ -28752,40 +28222,693 @@
       </p:sp>
       <p:sp>
         <p:nvSpPr>
-          <p:cNvPr id="3" name="부제목 2"/>
+          <p:cNvPr id="3" name="내용 개체 틀 2"/>
           <p:cNvSpPr>
             <a:spLocks noGrp="1"/>
           </p:cNvSpPr>
           <p:nvPr>
-            <p:ph type="subTitle" idx="1"/>
+            <p:ph idx="1"/>
           </p:nvPr>
         </p:nvSpPr>
         <p:spPr/>
         <p:txBody>
-          <a:bodyPr/>
-          <a:lstStyle/>
-          <a:p>
-            <a:r>
-              <a:rPr lang="en-US" altLang="ko-KR" dirty="0" smtClean="0"/>
-              <a:t>2026.03.11</a:t>
-            </a:r>
-          </a:p>
-          <a:p>
-            <a:endParaRPr lang="en-US" altLang="ko-KR" dirty="0"/>
-          </a:p>
-          <a:p>
-            <a:r>
-              <a:rPr lang="ko-KR" altLang="en-US" dirty="0" smtClean="0"/>
-              <a:t>신  용  대</a:t>
+          <a:bodyPr>
+            <a:normAutofit fontScale="77500" lnSpcReduction="20000"/>
+          </a:bodyPr>
+          <a:lstStyle/>
+          <a:p>
+            <a:r>
+              <a:rPr lang="en-US" altLang="ko-KR" dirty="0" err="1"/>
+              <a:t>m_pView</a:t>
+            </a:r>
+            <a:r>
+              <a:rPr lang="en-US" altLang="ko-KR" dirty="0"/>
+              <a:t> = new </a:t>
+            </a:r>
+            <a:r>
+              <a:rPr lang="en-US" altLang="ko-KR" dirty="0" err="1"/>
+              <a:t>COpenGLViewEx</a:t>
+            </a:r>
+            <a:r>
+              <a:rPr lang="en-US" altLang="ko-KR" dirty="0"/>
+              <a:t>();</a:t>
             </a:r>
             <a:endParaRPr lang="en-US" altLang="ko-KR" dirty="0" smtClean="0"/>
+          </a:p>
+          <a:p>
+            <a:pPr lvl="1"/>
+            <a:r>
+              <a:rPr lang="en-US" altLang="ko-KR" dirty="0" smtClean="0"/>
+              <a:t>void </a:t>
+            </a:r>
+            <a:r>
+              <a:rPr lang="en-US" altLang="ko-KR" dirty="0" err="1"/>
+              <a:t>COpenGLView</a:t>
+            </a:r>
+            <a:r>
+              <a:rPr lang="en-US" altLang="ko-KR" dirty="0"/>
+              <a:t>::</a:t>
+            </a:r>
+            <a:r>
+              <a:rPr lang="en-US" altLang="ko-KR" dirty="0" err="1"/>
+              <a:t>GLRenderScene</a:t>
+            </a:r>
+            <a:r>
+              <a:rPr lang="en-US" altLang="ko-KR" dirty="0"/>
+              <a:t>(</a:t>
+            </a:r>
+            <a:r>
+              <a:rPr lang="en-US" altLang="ko-KR" i="1" dirty="0"/>
+              <a:t>UINT</a:t>
+            </a:r>
+            <a:r>
+              <a:rPr lang="en-US" altLang="ko-KR" dirty="0"/>
+              <a:t> </a:t>
+            </a:r>
+            <a:r>
+              <a:rPr lang="en-US" altLang="ko-KR" dirty="0" err="1" smtClean="0"/>
+              <a:t>nAction</a:t>
+            </a:r>
+            <a:r>
+              <a:rPr lang="en-US" altLang="ko-KR" dirty="0" smtClean="0"/>
+              <a:t>=0, </a:t>
+            </a:r>
+            <a:r>
+              <a:rPr lang="en-US" altLang="ko-KR" dirty="0" err="1"/>
+              <a:t>int</a:t>
+            </a:r>
+            <a:r>
+              <a:rPr lang="en-US" altLang="ko-KR" dirty="0"/>
+              <a:t> </a:t>
+            </a:r>
+            <a:r>
+              <a:rPr lang="en-US" altLang="ko-KR" dirty="0" err="1" smtClean="0"/>
+              <a:t>nKey</a:t>
+            </a:r>
+            <a:r>
+              <a:rPr lang="en-US" altLang="ko-KR" dirty="0" smtClean="0"/>
+              <a:t>=0)</a:t>
+            </a:r>
+            <a:endParaRPr lang="en-US" altLang="ko-KR" b="1" dirty="0" smtClean="0"/>
+          </a:p>
+          <a:p>
+            <a:pPr lvl="2"/>
+            <a:r>
+              <a:rPr lang="en-US" altLang="ko-KR" b="1" dirty="0" err="1" smtClean="0"/>
+              <a:t>m_pParentWnd</a:t>
+            </a:r>
+            <a:r>
+              <a:rPr lang="en-US" altLang="ko-KR" b="1" dirty="0" smtClean="0"/>
+              <a:t>-</a:t>
+            </a:r>
+            <a:r>
+              <a:rPr lang="en-US" altLang="ko-KR" b="1" dirty="0"/>
+              <a:t>&gt;</a:t>
+            </a:r>
+            <a:r>
+              <a:rPr lang="en-US" altLang="ko-KR" b="1" i="1" dirty="0" err="1"/>
+              <a:t>SendMessage</a:t>
+            </a:r>
+            <a:r>
+              <a:rPr lang="en-US" altLang="ko-KR" b="1" dirty="0"/>
+              <a:t>(</a:t>
+            </a:r>
+            <a:r>
+              <a:rPr lang="en-US" altLang="ko-KR" b="1" dirty="0">
+                <a:solidFill>
+                  <a:srgbClr val="00B0F0"/>
+                </a:solidFill>
+              </a:rPr>
+              <a:t>WM_USER_RENDER</a:t>
+            </a:r>
+            <a:r>
+              <a:rPr lang="en-US" altLang="ko-KR" b="1" dirty="0"/>
+              <a:t>, </a:t>
+            </a:r>
+            <a:r>
+              <a:rPr lang="en-US" altLang="ko-KR" b="1" dirty="0" err="1"/>
+              <a:t>m_nHandleID</a:t>
+            </a:r>
+            <a:r>
+              <a:rPr lang="en-US" altLang="ko-KR" b="1" dirty="0"/>
+              <a:t>, </a:t>
+            </a:r>
+            <a:r>
+              <a:rPr lang="en-US" altLang="ko-KR" b="1" dirty="0" err="1"/>
+              <a:t>nAction</a:t>
+            </a:r>
+            <a:r>
+              <a:rPr lang="en-US" altLang="ko-KR" b="1" dirty="0" smtClean="0"/>
+              <a:t>);</a:t>
+            </a:r>
+          </a:p>
+          <a:p>
+            <a:pPr lvl="3"/>
+            <a:r>
+              <a:rPr lang="en-US" altLang="ko-KR" b="1" dirty="0" err="1"/>
+              <a:t>m_nHandleID</a:t>
+            </a:r>
+            <a:r>
+              <a:rPr lang="en-US" altLang="ko-KR" b="1" dirty="0"/>
+              <a:t> </a:t>
+            </a:r>
+            <a:r>
+              <a:rPr lang="en-US" altLang="ko-KR" b="1" dirty="0" smtClean="0"/>
+              <a:t>: </a:t>
+            </a:r>
+            <a:r>
+              <a:rPr lang="en-US" altLang="ko-KR" dirty="0" smtClean="0"/>
+              <a:t>IDC_STATIC_VIEW</a:t>
+            </a:r>
+          </a:p>
+          <a:p>
+            <a:pPr lvl="3"/>
+            <a:r>
+              <a:rPr lang="en-US" altLang="ko-KR" b="1" dirty="0" err="1" smtClean="0"/>
+              <a:t>nAction</a:t>
+            </a:r>
+            <a:r>
+              <a:rPr lang="en-US" altLang="ko-KR" b="1" dirty="0" smtClean="0"/>
+              <a:t> : </a:t>
+            </a:r>
+          </a:p>
+          <a:p>
+            <a:pPr lvl="4"/>
+            <a:r>
+              <a:rPr lang="en-US" altLang="ko-KR" dirty="0" smtClean="0"/>
+              <a:t>WM_MOUSEWHEEL, WM_PAINT, WM_FIT_TO_SCREEN, </a:t>
+            </a:r>
+          </a:p>
+          <a:p>
+            <a:pPr lvl="4"/>
+            <a:r>
+              <a:rPr lang="en-US" altLang="ko-KR" dirty="0"/>
+              <a:t>WM_LBUTTONDOWN, </a:t>
+            </a:r>
+            <a:r>
+              <a:rPr lang="en-US" altLang="ko-KR" dirty="0" smtClean="0"/>
+              <a:t>WM_MOUSEMOVE, WM_LBUTTONUP,</a:t>
+            </a:r>
+          </a:p>
+          <a:p>
+            <a:pPr lvl="4"/>
+            <a:r>
+              <a:rPr lang="en-US" altLang="ko-KR" dirty="0" smtClean="0"/>
+              <a:t>WM_MBUTTONDOWN, WM_MBUTTONUP, </a:t>
+            </a:r>
+          </a:p>
+          <a:p>
+            <a:pPr lvl="4"/>
+            <a:r>
+              <a:rPr lang="en-US" altLang="ko-KR" dirty="0" smtClean="0"/>
+              <a:t>WM_RBUTTONDOWN</a:t>
+            </a:r>
+            <a:r>
+              <a:rPr lang="en-US" altLang="ko-KR" dirty="0"/>
+              <a:t>, </a:t>
+            </a:r>
+            <a:r>
+              <a:rPr lang="en-US" altLang="ko-KR" dirty="0" smtClean="0"/>
+              <a:t>WM_RBUTTONUP</a:t>
+            </a:r>
+            <a:endParaRPr lang="en-US" altLang="ko-KR" i="1" dirty="0" smtClean="0"/>
+          </a:p>
+          <a:p>
+            <a:pPr lvl="2"/>
+            <a:r>
+              <a:rPr lang="en-US" altLang="ko-KR" i="1" dirty="0" smtClean="0"/>
+              <a:t>LRESULT</a:t>
+            </a:r>
+            <a:r>
+              <a:rPr lang="en-US" altLang="ko-KR" dirty="0" smtClean="0"/>
+              <a:t> </a:t>
+            </a:r>
+            <a:r>
+              <a:rPr lang="en-US" altLang="ko-KR" dirty="0"/>
+              <a:t>CDlg3DViewer::</a:t>
+            </a:r>
+            <a:r>
+              <a:rPr lang="en-US" altLang="ko-KR" dirty="0" err="1"/>
+              <a:t>OnGLRender</a:t>
+            </a:r>
+            <a:r>
+              <a:rPr lang="en-US" altLang="ko-KR" dirty="0"/>
+              <a:t>(</a:t>
+            </a:r>
+            <a:r>
+              <a:rPr lang="en-US" altLang="ko-KR" i="1" dirty="0"/>
+              <a:t>WPARAM</a:t>
+            </a:r>
+            <a:r>
+              <a:rPr lang="en-US" altLang="ko-KR" dirty="0"/>
+              <a:t> </a:t>
+            </a:r>
+            <a:r>
+              <a:rPr lang="en-US" altLang="ko-KR" dirty="0" err="1"/>
+              <a:t>wParam</a:t>
+            </a:r>
+            <a:r>
+              <a:rPr lang="en-US" altLang="ko-KR" dirty="0"/>
+              <a:t>, </a:t>
+            </a:r>
+            <a:r>
+              <a:rPr lang="en-US" altLang="ko-KR" i="1" dirty="0"/>
+              <a:t>LPARAM</a:t>
+            </a:r>
+            <a:r>
+              <a:rPr lang="en-US" altLang="ko-KR" dirty="0"/>
+              <a:t> </a:t>
+            </a:r>
+            <a:r>
+              <a:rPr lang="en-US" altLang="ko-KR" dirty="0" err="1"/>
+              <a:t>lParam</a:t>
+            </a:r>
+            <a:r>
+              <a:rPr lang="en-US" altLang="ko-KR" dirty="0" smtClean="0"/>
+              <a:t>)</a:t>
+            </a:r>
+          </a:p>
+          <a:p>
+            <a:pPr lvl="3"/>
+            <a:r>
+              <a:rPr lang="en-US" altLang="ko-KR" sz="1400" dirty="0"/>
+              <a:t>if (</a:t>
+            </a:r>
+            <a:r>
+              <a:rPr lang="en-US" altLang="ko-KR" sz="1400" dirty="0" err="1"/>
+              <a:t>lParam</a:t>
+            </a:r>
+            <a:r>
+              <a:rPr lang="en-US" altLang="ko-KR" sz="1400" dirty="0"/>
+              <a:t> == </a:t>
+            </a:r>
+            <a:r>
+              <a:rPr lang="en-US" altLang="ko-KR" sz="1400" i="1" dirty="0"/>
+              <a:t>WM_LBUTTONDOWN</a:t>
+            </a:r>
+            <a:r>
+              <a:rPr lang="en-US" altLang="ko-KR" sz="1400" dirty="0" smtClean="0"/>
+              <a:t>)	</a:t>
+            </a:r>
+            <a:r>
+              <a:rPr lang="en-US" altLang="ko-KR" sz="1400" dirty="0"/>
+              <a:t> _</a:t>
+            </a:r>
+            <a:r>
+              <a:rPr lang="en-US" altLang="ko-KR" sz="1400" dirty="0" err="1"/>
+              <a:t>mouseDownPoint</a:t>
+            </a:r>
+            <a:r>
+              <a:rPr lang="en-US" altLang="ko-KR" sz="1400" dirty="0"/>
+              <a:t> = </a:t>
+            </a:r>
+            <a:r>
+              <a:rPr lang="en-US" altLang="ko-KR" sz="1400" dirty="0" err="1"/>
+              <a:t>m_pView</a:t>
+            </a:r>
+            <a:r>
+              <a:rPr lang="en-US" altLang="ko-KR" sz="1400" dirty="0"/>
+              <a:t>-&gt;</a:t>
+            </a:r>
+            <a:r>
+              <a:rPr lang="en-US" altLang="ko-KR" sz="1400" dirty="0" err="1"/>
+              <a:t>m_ptCurPos</a:t>
+            </a:r>
+            <a:r>
+              <a:rPr lang="en-US" altLang="ko-KR" sz="1400" dirty="0" smtClean="0"/>
+              <a:t>;</a:t>
+            </a:r>
+          </a:p>
+          <a:p>
+            <a:pPr lvl="3"/>
+            <a:r>
+              <a:rPr lang="en-US" altLang="ko-KR" sz="1400" dirty="0"/>
+              <a:t>else if (</a:t>
+            </a:r>
+            <a:r>
+              <a:rPr lang="en-US" altLang="ko-KR" sz="1400" dirty="0" err="1"/>
+              <a:t>lParam</a:t>
+            </a:r>
+            <a:r>
+              <a:rPr lang="en-US" altLang="ko-KR" sz="1400" dirty="0"/>
+              <a:t> == </a:t>
+            </a:r>
+            <a:r>
+              <a:rPr lang="en-US" altLang="ko-KR" sz="1400" i="1" dirty="0"/>
+              <a:t>WM_LBUTTONUP</a:t>
+            </a:r>
+            <a:r>
+              <a:rPr lang="en-US" altLang="ko-KR" sz="1400" dirty="0" smtClean="0"/>
+              <a:t>)</a:t>
+            </a:r>
+            <a:r>
+              <a:rPr lang="en-US" altLang="ko-KR" sz="1400" dirty="0"/>
+              <a:t> </a:t>
+            </a:r>
+            <a:r>
+              <a:rPr lang="en-US" altLang="ko-KR" sz="1400" dirty="0" smtClean="0"/>
+              <a:t>_</a:t>
+            </a:r>
+            <a:r>
+              <a:rPr lang="en-US" altLang="ko-KR" sz="1400" dirty="0" err="1"/>
+              <a:t>mouseDownPoint</a:t>
+            </a:r>
+            <a:r>
+              <a:rPr lang="en-US" altLang="ko-KR" sz="1400" dirty="0"/>
+              <a:t> = </a:t>
+            </a:r>
+            <a:r>
+              <a:rPr lang="en-US" altLang="ko-KR" sz="1400" i="1" dirty="0" err="1"/>
+              <a:t>CPoint</a:t>
+            </a:r>
+            <a:r>
+              <a:rPr lang="en-US" altLang="ko-KR" sz="1400" dirty="0"/>
+              <a:t>(0, 0</a:t>
+            </a:r>
+            <a:r>
+              <a:rPr lang="en-US" altLang="ko-KR" sz="1400" dirty="0" smtClean="0"/>
+              <a:t>);</a:t>
+            </a:r>
+          </a:p>
+          <a:p>
+            <a:pPr lvl="3"/>
+            <a:r>
+              <a:rPr lang="en-US" altLang="ko-KR" sz="1400" dirty="0"/>
+              <a:t>else if (</a:t>
+            </a:r>
+            <a:r>
+              <a:rPr lang="en-US" altLang="ko-KR" sz="1400" dirty="0" err="1"/>
+              <a:t>lParam</a:t>
+            </a:r>
+            <a:r>
+              <a:rPr lang="en-US" altLang="ko-KR" sz="1400" dirty="0"/>
+              <a:t> == </a:t>
+            </a:r>
+            <a:r>
+              <a:rPr lang="en-US" altLang="ko-KR" sz="1400" i="1" dirty="0"/>
+              <a:t>WM_RBUTTONDOWN</a:t>
+            </a:r>
+            <a:r>
+              <a:rPr lang="en-US" altLang="ko-KR" sz="1400" dirty="0" smtClean="0"/>
+              <a:t>) </a:t>
+            </a:r>
+            <a:r>
+              <a:rPr lang="en-US" altLang="ko-KR" sz="1400" dirty="0"/>
+              <a:t>_</a:t>
+            </a:r>
+            <a:r>
+              <a:rPr lang="en-US" altLang="ko-KR" sz="1400" dirty="0" err="1"/>
+              <a:t>mouseDownPoint</a:t>
+            </a:r>
+            <a:r>
+              <a:rPr lang="en-US" altLang="ko-KR" sz="1400" dirty="0"/>
+              <a:t> = </a:t>
+            </a:r>
+            <a:r>
+              <a:rPr lang="en-US" altLang="ko-KR" sz="1400" dirty="0" err="1"/>
+              <a:t>m_pView</a:t>
+            </a:r>
+            <a:r>
+              <a:rPr lang="en-US" altLang="ko-KR" sz="1400" dirty="0"/>
+              <a:t>-&gt;</a:t>
+            </a:r>
+            <a:r>
+              <a:rPr lang="en-US" altLang="ko-KR" sz="1400" dirty="0" err="1"/>
+              <a:t>m_ptCurPos</a:t>
+            </a:r>
+            <a:r>
+              <a:rPr lang="en-US" altLang="ko-KR" sz="1400" dirty="0" smtClean="0"/>
+              <a:t>;</a:t>
+            </a:r>
+          </a:p>
+          <a:p>
+            <a:pPr lvl="3"/>
+            <a:r>
+              <a:rPr lang="en-US" altLang="ko-KR" sz="1400" dirty="0"/>
+              <a:t>else if (</a:t>
+            </a:r>
+            <a:r>
+              <a:rPr lang="en-US" altLang="ko-KR" sz="1400" dirty="0" err="1"/>
+              <a:t>lParam</a:t>
+            </a:r>
+            <a:r>
+              <a:rPr lang="en-US" altLang="ko-KR" sz="1400" dirty="0"/>
+              <a:t> == </a:t>
+            </a:r>
+            <a:r>
+              <a:rPr lang="en-US" altLang="ko-KR" sz="1400" i="1" dirty="0"/>
+              <a:t>WM_RBUTTONUP</a:t>
+            </a:r>
+            <a:r>
+              <a:rPr lang="en-US" altLang="ko-KR" sz="1400" dirty="0" smtClean="0"/>
+              <a:t>) </a:t>
+            </a:r>
+            <a:r>
+              <a:rPr lang="en-US" altLang="ko-KR" sz="1400" dirty="0"/>
+              <a:t>_</a:t>
+            </a:r>
+            <a:r>
+              <a:rPr lang="en-US" altLang="ko-KR" sz="1400" dirty="0" err="1"/>
+              <a:t>mouseDownPoint</a:t>
+            </a:r>
+            <a:r>
+              <a:rPr lang="en-US" altLang="ko-KR" sz="1400" dirty="0"/>
+              <a:t> = </a:t>
+            </a:r>
+            <a:r>
+              <a:rPr lang="en-US" altLang="ko-KR" sz="1400" i="1" dirty="0" err="1"/>
+              <a:t>CPoint</a:t>
+            </a:r>
+            <a:r>
+              <a:rPr lang="en-US" altLang="ko-KR" sz="1400" dirty="0"/>
+              <a:t>(0, 0</a:t>
+            </a:r>
+            <a:r>
+              <a:rPr lang="en-US" altLang="ko-KR" sz="1400" dirty="0" smtClean="0"/>
+              <a:t>);</a:t>
+            </a:r>
+          </a:p>
+          <a:p>
+            <a:pPr lvl="3"/>
+            <a:r>
+              <a:rPr lang="en-US" altLang="ko-KR" sz="1400" dirty="0"/>
+              <a:t>else if (</a:t>
+            </a:r>
+            <a:r>
+              <a:rPr lang="en-US" altLang="ko-KR" sz="1400" dirty="0" err="1"/>
+              <a:t>lParam</a:t>
+            </a:r>
+            <a:r>
+              <a:rPr lang="en-US" altLang="ko-KR" sz="1400" dirty="0"/>
+              <a:t> == </a:t>
+            </a:r>
+            <a:r>
+              <a:rPr lang="en-US" altLang="ko-KR" sz="1400" i="1" dirty="0"/>
+              <a:t>WM_MOUSEHWHEEL</a:t>
+            </a:r>
+            <a:r>
+              <a:rPr lang="en-US" altLang="ko-KR" sz="1400" dirty="0" smtClean="0"/>
+              <a:t>) </a:t>
+            </a:r>
+            <a:r>
+              <a:rPr lang="en-US" altLang="ko-KR" sz="1400" dirty="0" err="1"/>
+              <a:t>m_pView</a:t>
+            </a:r>
+            <a:r>
+              <a:rPr lang="en-US" altLang="ko-KR" sz="1400" dirty="0"/>
+              <a:t>-&gt;</a:t>
+            </a:r>
+            <a:r>
+              <a:rPr lang="en-US" altLang="ko-KR" sz="1400" dirty="0" err="1"/>
+              <a:t>ZoomIn</a:t>
+            </a:r>
+            <a:r>
+              <a:rPr lang="en-US" altLang="ko-KR" sz="1400" dirty="0"/>
+              <a:t>(1.1</a:t>
+            </a:r>
+            <a:r>
+              <a:rPr lang="en-US" altLang="ko-KR" sz="1400" dirty="0" smtClean="0"/>
+              <a:t>); </a:t>
+            </a:r>
+            <a:r>
+              <a:rPr lang="en-US" altLang="ko-KR" sz="1400" dirty="0" err="1"/>
+              <a:t>m_pView</a:t>
+            </a:r>
+            <a:r>
+              <a:rPr lang="en-US" altLang="ko-KR" sz="1400" dirty="0"/>
+              <a:t>-&gt;</a:t>
+            </a:r>
+            <a:r>
+              <a:rPr lang="en-US" altLang="ko-KR" sz="1400" dirty="0" err="1"/>
+              <a:t>ZoomOut</a:t>
+            </a:r>
+            <a:r>
+              <a:rPr lang="en-US" altLang="ko-KR" sz="1400" dirty="0"/>
+              <a:t>(1.1</a:t>
+            </a:r>
+            <a:r>
+              <a:rPr lang="en-US" altLang="ko-KR" sz="1400" dirty="0" smtClean="0"/>
+              <a:t>);</a:t>
+            </a:r>
+          </a:p>
+          <a:p>
+            <a:pPr lvl="3"/>
+            <a:r>
+              <a:rPr lang="en-US" altLang="ko-KR" sz="1400" dirty="0"/>
+              <a:t>else if (</a:t>
+            </a:r>
+            <a:r>
+              <a:rPr lang="en-US" altLang="ko-KR" sz="1400" dirty="0" err="1"/>
+              <a:t>lParam</a:t>
+            </a:r>
+            <a:r>
+              <a:rPr lang="en-US" altLang="ko-KR" sz="1400" dirty="0"/>
+              <a:t> == </a:t>
+            </a:r>
+            <a:r>
+              <a:rPr lang="en-US" altLang="ko-KR" sz="1400" i="1" dirty="0"/>
+              <a:t>WM_MOUSEMOVE</a:t>
+            </a:r>
+            <a:r>
+              <a:rPr lang="en-US" altLang="ko-KR" sz="1400" dirty="0" smtClean="0"/>
+              <a:t>) </a:t>
+            </a:r>
+          </a:p>
+          <a:p>
+            <a:pPr lvl="4"/>
+            <a:r>
+              <a:rPr lang="en-US" altLang="ko-KR" sz="1400" dirty="0"/>
+              <a:t>if (_</a:t>
+            </a:r>
+            <a:r>
+              <a:rPr lang="en-US" altLang="ko-KR" sz="1400" dirty="0" err="1"/>
+              <a:t>mouseButton</a:t>
+            </a:r>
+            <a:r>
+              <a:rPr lang="en-US" altLang="ko-KR" sz="1400" dirty="0"/>
+              <a:t> == 1</a:t>
+            </a:r>
+            <a:r>
+              <a:rPr lang="en-US" altLang="ko-KR" sz="1400" dirty="0" smtClean="0"/>
+              <a:t>) Rotate		// </a:t>
+            </a:r>
+            <a:r>
+              <a:rPr lang="en-US" altLang="ko-KR" sz="1400" dirty="0" err="1"/>
+              <a:t>lParam</a:t>
+            </a:r>
+            <a:r>
+              <a:rPr lang="en-US" altLang="ko-KR" sz="1400" dirty="0"/>
+              <a:t> == </a:t>
+            </a:r>
+            <a:r>
+              <a:rPr lang="en-US" altLang="ko-KR" sz="1400" i="1" dirty="0"/>
+              <a:t>WM_LBUTTONDOWN</a:t>
+            </a:r>
+            <a:endParaRPr lang="en-US" altLang="ko-KR" sz="1400" dirty="0" smtClean="0"/>
+          </a:p>
+          <a:p>
+            <a:pPr lvl="4"/>
+            <a:r>
+              <a:rPr lang="en-US" altLang="ko-KR" sz="1400" dirty="0" smtClean="0"/>
+              <a:t>else </a:t>
+            </a:r>
+            <a:r>
+              <a:rPr lang="en-US" altLang="ko-KR" sz="1400" dirty="0"/>
+              <a:t>if (_</a:t>
+            </a:r>
+            <a:r>
+              <a:rPr lang="en-US" altLang="ko-KR" sz="1400" dirty="0" err="1"/>
+              <a:t>mouseButton</a:t>
+            </a:r>
+            <a:r>
+              <a:rPr lang="en-US" altLang="ko-KR" sz="1400" dirty="0"/>
+              <a:t> == 2</a:t>
+            </a:r>
+            <a:r>
+              <a:rPr lang="en-US" altLang="ko-KR" sz="1400" dirty="0" smtClean="0"/>
+              <a:t>) </a:t>
+            </a:r>
+            <a:r>
+              <a:rPr lang="en-US" altLang="ko-KR" sz="1400" dirty="0" err="1" smtClean="0"/>
+              <a:t>Transiant</a:t>
+            </a:r>
+            <a:r>
+              <a:rPr lang="en-US" altLang="ko-KR" sz="1400" dirty="0" smtClean="0"/>
+              <a:t>	// </a:t>
+            </a:r>
+            <a:r>
+              <a:rPr lang="en-US" altLang="ko-KR" sz="1400" dirty="0" err="1"/>
+              <a:t>lParam</a:t>
+            </a:r>
+            <a:r>
+              <a:rPr lang="en-US" altLang="ko-KR" sz="1400" dirty="0"/>
+              <a:t> == </a:t>
+            </a:r>
+            <a:r>
+              <a:rPr lang="en-US" altLang="ko-KR" sz="1400" i="1" dirty="0"/>
+              <a:t>WM_RBUTTONDOWN</a:t>
+            </a:r>
+            <a:endParaRPr lang="en-US" altLang="ko-KR" sz="1400" dirty="0" smtClean="0"/>
+          </a:p>
+          <a:p>
+            <a:pPr lvl="4"/>
+            <a:r>
+              <a:rPr lang="en-US" altLang="ko-KR" sz="1400" dirty="0"/>
+              <a:t>else if (_</a:t>
+            </a:r>
+            <a:r>
+              <a:rPr lang="en-US" altLang="ko-KR" sz="1400" dirty="0" err="1"/>
+              <a:t>mouseButton</a:t>
+            </a:r>
+            <a:r>
+              <a:rPr lang="en-US" altLang="ko-KR" sz="1400" dirty="0"/>
+              <a:t> == 3</a:t>
+            </a:r>
+            <a:r>
+              <a:rPr lang="en-US" altLang="ko-KR" sz="1400" dirty="0" smtClean="0"/>
+              <a:t>) ?</a:t>
+            </a:r>
+          </a:p>
+          <a:p>
+            <a:pPr lvl="4"/>
+            <a:r>
+              <a:rPr lang="en-US" altLang="ko-KR" sz="1400" dirty="0"/>
+              <a:t>_</a:t>
+            </a:r>
+            <a:r>
+              <a:rPr lang="en-US" altLang="ko-KR" sz="1400" dirty="0" err="1"/>
+              <a:t>mouseDownPoint</a:t>
+            </a:r>
+            <a:r>
+              <a:rPr lang="en-US" altLang="ko-KR" sz="1400" dirty="0"/>
+              <a:t> = </a:t>
+            </a:r>
+            <a:r>
+              <a:rPr lang="en-US" altLang="ko-KR" sz="1400" dirty="0" err="1"/>
+              <a:t>m_pView</a:t>
+            </a:r>
+            <a:r>
+              <a:rPr lang="en-US" altLang="ko-KR" sz="1400" dirty="0"/>
+              <a:t>-&gt;</a:t>
+            </a:r>
+            <a:r>
+              <a:rPr lang="en-US" altLang="ko-KR" sz="1400" dirty="0" err="1"/>
+              <a:t>m_ptCurPos</a:t>
+            </a:r>
+            <a:r>
+              <a:rPr lang="en-US" altLang="ko-KR" sz="1400" dirty="0"/>
+              <a:t>;</a:t>
+            </a:r>
+          </a:p>
+          <a:p>
+            <a:endParaRPr lang="ko-KR" altLang="en-US" dirty="0"/>
           </a:p>
         </p:txBody>
       </p:sp>
     </p:spTree>
     <p:extLst>
       <p:ext uri="{BB962C8B-B14F-4D97-AF65-F5344CB8AC3E}">
-        <p14:creationId xmlns:p14="http://schemas.microsoft.com/office/powerpoint/2010/main" val="3926140275"/>
+        <p14:creationId xmlns:p14="http://schemas.microsoft.com/office/powerpoint/2010/main" val="2485708467"/>
       </p:ext>
     </p:extLst>
   </p:cSld>
@@ -29063,6 +29186,99 @@
 </file>
 
 <file path=ppt/slides/slide80.xml><?xml version="1.0" encoding="utf-8"?>
+<p:sld xmlns:a="http://schemas.openxmlformats.org/drawingml/2006/main" xmlns:r="http://schemas.openxmlformats.org/officeDocument/2006/relationships" xmlns:p="http://schemas.openxmlformats.org/presentationml/2006/main">
+  <p:cSld>
+    <p:spTree>
+      <p:nvGrpSpPr>
+        <p:cNvPr id="1" name=""/>
+        <p:cNvGrpSpPr/>
+        <p:nvPr/>
+      </p:nvGrpSpPr>
+      <p:grpSpPr>
+        <a:xfrm>
+          <a:off x="0" y="0"/>
+          <a:ext cx="0" cy="0"/>
+          <a:chOff x="0" y="0"/>
+          <a:chExt cx="0" cy="0"/>
+        </a:xfrm>
+      </p:grpSpPr>
+      <p:sp>
+        <p:nvSpPr>
+          <p:cNvPr id="2" name="제목 1"/>
+          <p:cNvSpPr>
+            <a:spLocks noGrp="1"/>
+          </p:cNvSpPr>
+          <p:nvPr>
+            <p:ph type="ctrTitle"/>
+          </p:nvPr>
+        </p:nvSpPr>
+        <p:spPr/>
+        <p:txBody>
+          <a:bodyPr/>
+          <a:lstStyle/>
+          <a:p>
+            <a:r>
+              <a:rPr lang="en-US" altLang="ko-KR" dirty="0" err="1" smtClean="0"/>
+              <a:t>Zygo</a:t>
+            </a:r>
+            <a:r>
+              <a:rPr lang="en-US" altLang="ko-KR" dirty="0" smtClean="0"/>
+              <a:t> </a:t>
+            </a:r>
+            <a:r>
+              <a:rPr lang="en-US" altLang="ko-KR" dirty="0" err="1" smtClean="0"/>
+              <a:t>Mx</a:t>
+            </a:r>
+            <a:endParaRPr lang="ko-KR" altLang="en-US" dirty="0"/>
+          </a:p>
+        </p:txBody>
+      </p:sp>
+      <p:sp>
+        <p:nvSpPr>
+          <p:cNvPr id="3" name="부제목 2"/>
+          <p:cNvSpPr>
+            <a:spLocks noGrp="1"/>
+          </p:cNvSpPr>
+          <p:nvPr>
+            <p:ph type="subTitle" idx="1"/>
+          </p:nvPr>
+        </p:nvSpPr>
+        <p:spPr/>
+        <p:txBody>
+          <a:bodyPr/>
+          <a:lstStyle/>
+          <a:p>
+            <a:r>
+              <a:rPr lang="en-US" altLang="ko-KR" dirty="0" smtClean="0"/>
+              <a:t>2026.03.11</a:t>
+            </a:r>
+          </a:p>
+          <a:p>
+            <a:endParaRPr lang="en-US" altLang="ko-KR" dirty="0"/>
+          </a:p>
+          <a:p>
+            <a:r>
+              <a:rPr lang="ko-KR" altLang="en-US" dirty="0" smtClean="0"/>
+              <a:t>신  용  대</a:t>
+            </a:r>
+            <a:endParaRPr lang="en-US" altLang="ko-KR" dirty="0" smtClean="0"/>
+          </a:p>
+        </p:txBody>
+      </p:sp>
+    </p:spTree>
+    <p:extLst>
+      <p:ext uri="{BB962C8B-B14F-4D97-AF65-F5344CB8AC3E}">
+        <p14:creationId xmlns:p14="http://schemas.microsoft.com/office/powerpoint/2010/main" val="3926140275"/>
+      </p:ext>
+    </p:extLst>
+  </p:cSld>
+  <p:clrMapOvr>
+    <a:masterClrMapping/>
+  </p:clrMapOvr>
+</p:sld>
+</file>
+
+<file path=ppt/slides/slide81.xml><?xml version="1.0" encoding="utf-8"?>
 <p:sld xmlns:a="http://schemas.openxmlformats.org/drawingml/2006/main" xmlns:r="http://schemas.openxmlformats.org/officeDocument/2006/relationships" xmlns:p="http://schemas.openxmlformats.org/presentationml/2006/main">
   <p:cSld>
     <p:spTree>
@@ -29141,7 +29357,7 @@
 </p:sld>
 </file>
 
-<file path=ppt/slides/slide81.xml><?xml version="1.0" encoding="utf-8"?>
+<file path=ppt/slides/slide82.xml><?xml version="1.0" encoding="utf-8"?>
 <p:sld xmlns:a="http://schemas.openxmlformats.org/drawingml/2006/main" xmlns:r="http://schemas.openxmlformats.org/officeDocument/2006/relationships" xmlns:p="http://schemas.openxmlformats.org/presentationml/2006/main">
   <p:cSld>
     <p:spTree>
